--- a/Secondo Semestre/principi_prog_parallela/Codici/Progetto/Simulazione della Diffusione del Calore 2D.pptx
+++ b/Secondo Semestre/principi_prog_parallela/Codici/Progetto/Simulazione della Diffusione del Calore 2D.pptx
@@ -5,7 +5,7 @@
     <p:sldMasterId id="2147483648" r:id="rId1"/>
   </p:sldMasterIdLst>
   <p:notesMasterIdLst>
-    <p:notesMasterId r:id="rId17"/>
+    <p:notesMasterId r:id="rId19"/>
   </p:notesMasterIdLst>
   <p:sldIdLst>
     <p:sldId id="256" r:id="rId2"/>
@@ -23,6 +23,8 @@
     <p:sldId id="269" r:id="rId14"/>
     <p:sldId id="270" r:id="rId15"/>
     <p:sldId id="271" r:id="rId16"/>
+    <p:sldId id="273" r:id="rId17"/>
+    <p:sldId id="274" r:id="rId18"/>
   </p:sldIdLst>
   <p:sldSz cx="12192000" cy="6858000"/>
   <p:notesSz cx="6858000" cy="9144000"/>
@@ -696,7 +698,12 @@
             <p:ph type="sldImg"/>
           </p:nvPr>
         </p:nvSpPr>
-        <p:spPr/>
+        <p:spPr>
+          <a:xfrm>
+            <a:off x="685800" y="1143000"/>
+            <a:ext cx="5486400" cy="3086100"/>
+          </a:xfrm>
+        </p:spPr>
       </p:sp>
       <p:sp>
         <p:nvSpPr>
@@ -827,7 +834,12 @@
             <p:ph type="sldImg"/>
           </p:nvPr>
         </p:nvSpPr>
-        <p:spPr/>
+        <p:spPr>
+          <a:xfrm>
+            <a:off x="685800" y="1143000"/>
+            <a:ext cx="5486400" cy="3086100"/>
+          </a:xfrm>
+        </p:spPr>
       </p:sp>
       <p:sp>
         <p:nvSpPr>
@@ -1096,6 +1108,96 @@
     <p:extLst>
       <p:ext uri="{BB962C8B-B14F-4D97-AF65-F5344CB8AC3E}">
         <p14:creationId xmlns:p14="http://schemas.microsoft.com/office/powerpoint/2010/main" val="2154486741"/>
+      </p:ext>
+    </p:extLst>
+  </p:cSld>
+  <p:clrMapOvr>
+    <a:masterClrMapping/>
+  </p:clrMapOvr>
+</p:notes>
+</file>
+
+<file path=ppt/notesSlides/notesSlide5.xml><?xml version="1.0" encoding="utf-8"?>
+<p:notes xmlns:a="http://schemas.openxmlformats.org/drawingml/2006/main" xmlns:r="http://schemas.openxmlformats.org/officeDocument/2006/relationships" xmlns:p="http://schemas.openxmlformats.org/presentationml/2006/main">
+  <p:cSld>
+    <p:spTree>
+      <p:nvGrpSpPr>
+        <p:cNvPr id="1" name=""/>
+        <p:cNvGrpSpPr/>
+        <p:nvPr/>
+      </p:nvGrpSpPr>
+      <p:grpSpPr>
+        <a:xfrm>
+          <a:off x="0" y="0"/>
+          <a:ext cx="0" cy="0"/>
+          <a:chOff x="0" y="0"/>
+          <a:chExt cx="0" cy="0"/>
+        </a:xfrm>
+      </p:grpSpPr>
+      <p:sp>
+        <p:nvSpPr>
+          <p:cNvPr id="2" name="Segnaposto immagine diapositiva 1"/>
+          <p:cNvSpPr>
+            <a:spLocks noGrp="1" noRot="1" noChangeAspect="1"/>
+          </p:cNvSpPr>
+          <p:nvPr>
+            <p:ph type="sldImg"/>
+          </p:nvPr>
+        </p:nvSpPr>
+        <p:spPr>
+          <a:xfrm>
+            <a:off x="685800" y="1143000"/>
+            <a:ext cx="5486400" cy="3086100"/>
+          </a:xfrm>
+        </p:spPr>
+      </p:sp>
+      <p:sp>
+        <p:nvSpPr>
+          <p:cNvPr id="3" name="Segnaposto note 2"/>
+          <p:cNvSpPr>
+            <a:spLocks noGrp="1"/>
+          </p:cNvSpPr>
+          <p:nvPr>
+            <p:ph type="body" idx="1"/>
+          </p:nvPr>
+        </p:nvSpPr>
+        <p:spPr/>
+        <p:txBody>
+          <a:bodyPr/>
+          <a:lstStyle/>
+          <a:p>
+            <a:endParaRPr lang="it-IT" dirty="0"/>
+          </a:p>
+        </p:txBody>
+      </p:sp>
+      <p:sp>
+        <p:nvSpPr>
+          <p:cNvPr id="4" name="Segnaposto numero diapositiva 3"/>
+          <p:cNvSpPr>
+            <a:spLocks noGrp="1"/>
+          </p:cNvSpPr>
+          <p:nvPr>
+            <p:ph type="sldNum" sz="quarter" idx="5"/>
+          </p:nvPr>
+        </p:nvSpPr>
+        <p:spPr/>
+        <p:txBody>
+          <a:bodyPr/>
+          <a:lstStyle/>
+          <a:p>
+            <a:pPr lvl="0"/>
+            <a:fld id="{DF8E85A9-1D11-4CA2-93D1-7F51BDFAA9B0}" type="slidenum">
+              <a:rPr lang="it-IT" smtClean="0"/>
+              <a:t>17</a:t>
+            </a:fld>
+            <a:endParaRPr lang="it-IT"/>
+          </a:p>
+        </p:txBody>
+      </p:sp>
+    </p:spTree>
+    <p:extLst>
+      <p:ext uri="{BB962C8B-B14F-4D97-AF65-F5344CB8AC3E}">
+        <p14:creationId xmlns:p14="http://schemas.microsoft.com/office/powerpoint/2010/main" val="4033813584"/>
       </p:ext>
     </p:extLst>
   </p:cSld>
@@ -5476,12 +5578,7 @@
             <p:ph type="title"/>
           </p:nvPr>
         </p:nvSpPr>
-        <p:spPr>
-          <a:xfrm>
-            <a:off x="640080" y="1371600"/>
-            <a:ext cx="3859398" cy="1451719"/>
-          </a:xfrm>
-        </p:spPr>
+        <p:spPr/>
         <p:txBody>
           <a:bodyPr wrap="square" anchor="t">
             <a:normAutofit/>
@@ -5491,6 +5588,36 @@
             <a:r>
               <a:rPr lang="it-IT" dirty="0"/>
               <a:t>MPI – Calcolo</a:t>
+            </a:r>
+          </a:p>
+        </p:txBody>
+      </p:sp>
+      <p:sp>
+        <p:nvSpPr>
+          <p:cNvPr id="3" name="Segnaposto contenuto 2">
+            <a:extLst>
+              <a:ext uri="{FF2B5EF4-FFF2-40B4-BE49-F238E27FC236}">
+                <a16:creationId xmlns:a16="http://schemas.microsoft.com/office/drawing/2014/main" id="{08BD9FCC-B365-05EA-BD18-8662E0C3EDA8}"/>
+              </a:ext>
+            </a:extLst>
+          </p:cNvPr>
+          <p:cNvSpPr>
+            <a:spLocks noGrp="1"/>
+          </p:cNvSpPr>
+          <p:nvPr>
+            <p:ph type="body" idx="2"/>
+          </p:nvPr>
+        </p:nvSpPr>
+        <p:spPr/>
+        <p:txBody>
+          <a:bodyPr wrap="square" anchor="t">
+            <a:normAutofit/>
+          </a:bodyPr>
+          <a:lstStyle/>
+          <a:p>
+            <a:r>
+              <a:rPr lang="it-IT" dirty="0"/>
+              <a:t>Il calcolo interno in questa versione viene fatto senza utilizzo di ulteriori Thread, lavorando esclusivamente in sequenziale. Tutte le righe vengono calcolate normalmente meno che la prima e l’ultima che verranno calcolate successivamente dopo che si è certi che si è ricevuto l’Halo dai vicini. </a:t>
             </a:r>
           </a:p>
         </p:txBody>
@@ -5526,41 +5653,6 @@
           <a:noFill/>
         </p:spPr>
       </p:pic>
-      <p:sp>
-        <p:nvSpPr>
-          <p:cNvPr id="3" name="Segnaposto contenuto 2">
-            <a:extLst>
-              <a:ext uri="{FF2B5EF4-FFF2-40B4-BE49-F238E27FC236}">
-                <a16:creationId xmlns:a16="http://schemas.microsoft.com/office/drawing/2014/main" id="{08BD9FCC-B365-05EA-BD18-8662E0C3EDA8}"/>
-              </a:ext>
-            </a:extLst>
-          </p:cNvPr>
-          <p:cNvSpPr>
-            <a:spLocks noGrp="1"/>
-          </p:cNvSpPr>
-          <p:nvPr>
-            <p:ph type="body" idx="2"/>
-          </p:nvPr>
-        </p:nvSpPr>
-        <p:spPr>
-          <a:xfrm>
-            <a:off x="640080" y="2972165"/>
-            <a:ext cx="3859398" cy="3226826"/>
-          </a:xfrm>
-        </p:spPr>
-        <p:txBody>
-          <a:bodyPr wrap="square" anchor="t">
-            <a:normAutofit/>
-          </a:bodyPr>
-          <a:lstStyle/>
-          <a:p>
-            <a:r>
-              <a:rPr lang="it-IT" dirty="0"/>
-              <a:t>Il calcolo interno in questa versione viene fatto senza utilizzo di ulteriori Thread, lavorando esclusivamente in sequenziale. Tutte le righe vengono calcolate normalmente meno che la prima e l’ultima che verranno calcolate successivamente dopo che si è certi che si è ricevuto l’Halo dai vicini. </a:t>
-            </a:r>
-          </a:p>
-        </p:txBody>
-      </p:sp>
     </p:spTree>
     <p:extLst>
       <p:ext uri="{BB962C8B-B14F-4D97-AF65-F5344CB8AC3E}">
@@ -5752,12 +5844,7 @@
             <p:ph type="title"/>
           </p:nvPr>
         </p:nvSpPr>
-        <p:spPr>
-          <a:xfrm>
-            <a:off x="640080" y="1371600"/>
-            <a:ext cx="3859398" cy="1451719"/>
-          </a:xfrm>
-        </p:spPr>
+        <p:spPr/>
         <p:txBody>
           <a:bodyPr wrap="square" anchor="t">
             <a:normAutofit/>
@@ -5935,12 +6022,7 @@
             <p:ph type="title"/>
           </p:nvPr>
         </p:nvSpPr>
-        <p:spPr>
-          <a:xfrm>
-            <a:off x="640080" y="1371600"/>
-            <a:ext cx="3859398" cy="1451719"/>
-          </a:xfrm>
-        </p:spPr>
+        <p:spPr/>
         <p:txBody>
           <a:bodyPr wrap="square" anchor="t">
             <a:normAutofit/>
@@ -5984,8 +6066,8 @@
         </p:blipFill>
         <p:spPr>
           <a:xfrm>
-            <a:off x="4957432" y="2972165"/>
-            <a:ext cx="6594488" cy="2357529"/>
+            <a:off x="4937125" y="2432904"/>
+            <a:ext cx="6594475" cy="2362080"/>
           </a:xfrm>
           <a:prstGeom prst="rect">
             <a:avLst/>
@@ -6012,12 +6094,7 @@
             <p:ph type="body" idx="2"/>
           </p:nvPr>
         </p:nvSpPr>
-        <p:spPr>
-          <a:xfrm>
-            <a:off x="640080" y="2972165"/>
-            <a:ext cx="3859398" cy="3226826"/>
-          </a:xfrm>
-        </p:spPr>
+        <p:spPr/>
         <p:txBody>
           <a:bodyPr wrap="square" anchor="t">
             <a:normAutofit/>
@@ -6099,12 +6176,7 @@
             <p:ph type="title"/>
           </p:nvPr>
         </p:nvSpPr>
-        <p:spPr>
-          <a:xfrm>
-            <a:off x="640080" y="1371600"/>
-            <a:ext cx="3859398" cy="1451719"/>
-          </a:xfrm>
-        </p:spPr>
+        <p:spPr/>
         <p:txBody>
           <a:bodyPr wrap="square" anchor="t">
             <a:normAutofit/>
@@ -6123,6 +6195,93 @@
               <a:rPr lang="it-IT" noProof="0" dirty="0"/>
               <a:t> - Calcolo</a:t>
             </a:r>
+          </a:p>
+        </p:txBody>
+      </p:sp>
+      <p:sp>
+        <p:nvSpPr>
+          <p:cNvPr id="11" name="Text Placeholder 3">
+            <a:extLst>
+              <a:ext uri="{FF2B5EF4-FFF2-40B4-BE49-F238E27FC236}">
+                <a16:creationId xmlns:a16="http://schemas.microsoft.com/office/drawing/2014/main" id="{EA25794F-11FF-B974-5911-B0DB7F93EA5C}"/>
+              </a:ext>
+            </a:extLst>
+          </p:cNvPr>
+          <p:cNvSpPr>
+            <a:spLocks noGrp="1"/>
+          </p:cNvSpPr>
+          <p:nvPr>
+            <p:ph type="body" idx="2"/>
+          </p:nvPr>
+        </p:nvSpPr>
+        <p:spPr/>
+        <p:txBody>
+          <a:bodyPr wrap="square" anchor="t">
+            <a:normAutofit/>
+          </a:bodyPr>
+          <a:lstStyle/>
+          <a:p>
+            <a:r>
+              <a:rPr lang="it-IT" dirty="0"/>
+              <a:t>Il calcolo interno è parallelizzato tramite </a:t>
+            </a:r>
+            <a:r>
+              <a:rPr lang="it-IT" dirty="0" err="1"/>
+              <a:t>OpenMP</a:t>
+            </a:r>
+            <a:r>
+              <a:rPr lang="it-IT" dirty="0"/>
+              <a:t> </a:t>
+            </a:r>
+            <a:r>
+              <a:rPr lang="it-IT" b="1" dirty="0"/>
+              <a:t>(#pragma </a:t>
+            </a:r>
+            <a:r>
+              <a:rPr lang="it-IT" b="1" dirty="0" err="1"/>
+              <a:t>omp</a:t>
+            </a:r>
+            <a:r>
+              <a:rPr lang="it-IT" b="1" dirty="0"/>
+              <a:t> </a:t>
+            </a:r>
+            <a:r>
+              <a:rPr lang="it-IT" b="1" dirty="0" err="1"/>
+              <a:t>parallel</a:t>
+            </a:r>
+            <a:r>
+              <a:rPr lang="it-IT" b="1" dirty="0"/>
+              <a:t> for</a:t>
+            </a:r>
+            <a:r>
+              <a:rPr lang="it-IT" dirty="0"/>
+              <a:t>). Per evitare </a:t>
+            </a:r>
+            <a:r>
+              <a:rPr lang="it-IT" i="1" dirty="0"/>
+              <a:t>data race</a:t>
+            </a:r>
+            <a:r>
+              <a:rPr lang="it-IT" dirty="0"/>
+              <a:t> sulla variabile globale </a:t>
+            </a:r>
+            <a:r>
+              <a:rPr lang="it-IT" b="1" dirty="0"/>
+              <a:t>differenza</a:t>
+            </a:r>
+            <a:r>
+              <a:rPr lang="it-IT" dirty="0"/>
+              <a:t> – che causerebbe la perdita di aggiornamenti e corromperebbe la verifica di convergenza – è obbligatorio proteggere l'accumulo con la clausola </a:t>
+            </a:r>
+            <a:r>
+              <a:rPr lang="it-IT" b="1" dirty="0" err="1"/>
+              <a:t>reduction</a:t>
+            </a:r>
+            <a:r>
+              <a:rPr lang="it-IT" b="1" dirty="0"/>
+              <a:t>(+:differenza).</a:t>
+            </a:r>
+            <a:endParaRPr lang="it-IT" b="1" noProof="0" dirty="0"/>
           </a:p>
         </p:txBody>
       </p:sp>
@@ -6158,102 +6317,588 @@
           <a:noFill/>
         </p:spPr>
       </p:pic>
-      <p:sp>
-        <p:nvSpPr>
-          <p:cNvPr id="11" name="Text Placeholder 3">
-            <a:extLst>
-              <a:ext uri="{FF2B5EF4-FFF2-40B4-BE49-F238E27FC236}">
-                <a16:creationId xmlns:a16="http://schemas.microsoft.com/office/drawing/2014/main" id="{EA25794F-11FF-B974-5911-B0DB7F93EA5C}"/>
-              </a:ext>
-            </a:extLst>
-          </p:cNvPr>
-          <p:cNvSpPr>
-            <a:spLocks noGrp="1"/>
-          </p:cNvSpPr>
-          <p:nvPr>
-            <p:ph type="body" idx="2"/>
-          </p:nvPr>
-        </p:nvSpPr>
-        <p:spPr>
-          <a:xfrm>
-            <a:off x="640080" y="2972165"/>
-            <a:ext cx="3859398" cy="3226826"/>
-          </a:xfrm>
-        </p:spPr>
-        <p:txBody>
-          <a:bodyPr wrap="square" anchor="t">
-            <a:normAutofit/>
-          </a:bodyPr>
-          <a:lstStyle/>
-          <a:p>
-            <a:r>
-              <a:rPr lang="it-IT" dirty="0"/>
-              <a:t>Il calcolo interno è parallelizzato tramite </a:t>
-            </a:r>
-            <a:r>
-              <a:rPr lang="it-IT" dirty="0" err="1"/>
-              <a:t>OpenMP</a:t>
-            </a:r>
-            <a:r>
-              <a:rPr lang="it-IT" dirty="0"/>
-              <a:t> </a:t>
-            </a:r>
-            <a:r>
-              <a:rPr lang="it-IT" b="1" dirty="0"/>
-              <a:t>(#pragma </a:t>
-            </a:r>
-            <a:r>
-              <a:rPr lang="it-IT" b="1" dirty="0" err="1"/>
-              <a:t>omp</a:t>
-            </a:r>
-            <a:r>
-              <a:rPr lang="it-IT" b="1" dirty="0"/>
-              <a:t> </a:t>
-            </a:r>
-            <a:r>
-              <a:rPr lang="it-IT" b="1" dirty="0" err="1"/>
-              <a:t>parallel</a:t>
-            </a:r>
-            <a:r>
-              <a:rPr lang="it-IT" b="1" dirty="0"/>
-              <a:t> for</a:t>
-            </a:r>
-            <a:r>
-              <a:rPr lang="it-IT" dirty="0"/>
-              <a:t>). Per evitare </a:t>
-            </a:r>
-            <a:r>
-              <a:rPr lang="it-IT" i="1" dirty="0"/>
-              <a:t>data race</a:t>
-            </a:r>
-            <a:r>
-              <a:rPr lang="it-IT" dirty="0"/>
-              <a:t> sulla variabile globale </a:t>
-            </a:r>
-            <a:r>
-              <a:rPr lang="it-IT" b="1" dirty="0"/>
-              <a:t>differenza</a:t>
-            </a:r>
-            <a:r>
-              <a:rPr lang="it-IT" dirty="0"/>
-              <a:t> – che causerebbe la perdita di aggiornamenti e corromperebbe la verifica di convergenza – è obbligatorio proteggere l'accumulo con la clausola </a:t>
-            </a:r>
-            <a:r>
-              <a:rPr lang="it-IT" b="1" dirty="0" err="1"/>
-              <a:t>reduction</a:t>
-            </a:r>
-            <a:r>
-              <a:rPr lang="it-IT" b="1" dirty="0"/>
-              <a:t>(+:differenza).</a:t>
-            </a:r>
-            <a:endParaRPr lang="it-IT" b="1" noProof="0" dirty="0"/>
-          </a:p>
-        </p:txBody>
-      </p:sp>
     </p:spTree>
     <p:extLst>
       <p:ext uri="{BB962C8B-B14F-4D97-AF65-F5344CB8AC3E}">
         <p14:creationId xmlns:p14="http://schemas.microsoft.com/office/powerpoint/2010/main" val="149752981"/>
+      </p:ext>
+    </p:extLst>
+  </p:cSld>
+  <p:clrMapOvr>
+    <a:masterClrMapping/>
+  </p:clrMapOvr>
+</p:sld>
+</file>
+
+<file path=ppt/slides/slide16.xml><?xml version="1.0" encoding="utf-8"?>
+<p:sld xmlns:a="http://schemas.openxmlformats.org/drawingml/2006/main" xmlns:r="http://schemas.openxmlformats.org/officeDocument/2006/relationships" xmlns:p="http://schemas.openxmlformats.org/presentationml/2006/main">
+  <p:cSld>
+    <p:spTree>
+      <p:nvGrpSpPr>
+        <p:cNvPr id="1" name=""/>
+        <p:cNvGrpSpPr/>
+        <p:nvPr/>
+      </p:nvGrpSpPr>
+      <p:grpSpPr>
+        <a:xfrm>
+          <a:off x="0" y="0"/>
+          <a:ext cx="0" cy="0"/>
+          <a:chOff x="0" y="0"/>
+          <a:chExt cx="0" cy="0"/>
+        </a:xfrm>
+      </p:grpSpPr>
+      <p:sp>
+        <p:nvSpPr>
+          <p:cNvPr id="2" name="Titolo 1">
+            <a:extLst>
+              <a:ext uri="{FF2B5EF4-FFF2-40B4-BE49-F238E27FC236}">
+                <a16:creationId xmlns:a16="http://schemas.microsoft.com/office/drawing/2014/main" id="{6A7F418F-3F28-F809-A674-0DDACB1CE464}"/>
+              </a:ext>
+            </a:extLst>
+          </p:cNvPr>
+          <p:cNvSpPr>
+            <a:spLocks noGrp="1"/>
+          </p:cNvSpPr>
+          <p:nvPr>
+            <p:ph type="ctrTitle"/>
+          </p:nvPr>
+        </p:nvSpPr>
+        <p:spPr/>
+        <p:txBody>
+          <a:bodyPr/>
+          <a:lstStyle/>
+          <a:p>
+            <a:r>
+              <a:rPr lang="it-IT" dirty="0"/>
+              <a:t>Analisi delle prestazioni</a:t>
+            </a:r>
+          </a:p>
+        </p:txBody>
+      </p:sp>
+      <p:sp>
+        <p:nvSpPr>
+          <p:cNvPr id="6" name="Sottotitolo 5">
+            <a:extLst>
+              <a:ext uri="{FF2B5EF4-FFF2-40B4-BE49-F238E27FC236}">
+                <a16:creationId xmlns:a16="http://schemas.microsoft.com/office/drawing/2014/main" id="{81EF2F74-1DFB-984C-38F7-F786F9D492B3}"/>
+              </a:ext>
+            </a:extLst>
+          </p:cNvPr>
+          <p:cNvSpPr>
+            <a:spLocks noGrp="1"/>
+          </p:cNvSpPr>
+          <p:nvPr>
+            <p:ph type="subTitle" idx="1"/>
+          </p:nvPr>
+        </p:nvSpPr>
+        <p:spPr>
+          <a:xfrm>
+            <a:off x="640080" y="3137074"/>
+            <a:ext cx="4474845" cy="2196926"/>
+          </a:xfrm>
+        </p:spPr>
+        <p:txBody>
+          <a:bodyPr>
+            <a:normAutofit/>
+          </a:bodyPr>
+          <a:lstStyle/>
+          <a:p>
+            <a:r>
+              <a:rPr lang="it-IT" dirty="0"/>
+              <a:t>Strumenti utilizzati:</a:t>
+            </a:r>
+          </a:p>
+          <a:p>
+            <a:pPr marL="285750" indent="-285750">
+              <a:buFont typeface="Arial" panose="020B0604020202020204" pitchFamily="34" charset="0"/>
+              <a:buChar char="•"/>
+            </a:pPr>
+            <a:r>
+              <a:rPr lang="it-IT" dirty="0" err="1"/>
+              <a:t>Perf</a:t>
+            </a:r>
+            <a:endParaRPr lang="it-IT" dirty="0"/>
+          </a:p>
+          <a:p>
+            <a:pPr marL="285750" indent="-285750">
+              <a:buFont typeface="Arial" panose="020B0604020202020204" pitchFamily="34" charset="0"/>
+              <a:buChar char="•"/>
+            </a:pPr>
+            <a:r>
+              <a:rPr lang="it-IT" dirty="0" err="1"/>
+              <a:t>Clock_gettime</a:t>
+            </a:r>
+            <a:r>
+              <a:rPr lang="it-IT" dirty="0"/>
+              <a:t> </a:t>
+            </a:r>
+          </a:p>
+        </p:txBody>
+      </p:sp>
+      <p:pic>
+        <p:nvPicPr>
+          <p:cNvPr id="5" name="Immagine 4">
+            <a:extLst>
+              <a:ext uri="{FF2B5EF4-FFF2-40B4-BE49-F238E27FC236}">
+                <a16:creationId xmlns:a16="http://schemas.microsoft.com/office/drawing/2014/main" id="{AE0670ED-A437-CC24-CC0B-AECFE35A9A07}"/>
+              </a:ext>
+            </a:extLst>
+          </p:cNvPr>
+          <p:cNvPicPr>
+            <a:picLocks noChangeAspect="1"/>
+          </p:cNvPicPr>
+          <p:nvPr/>
+        </p:nvPicPr>
+        <p:blipFill>
+          <a:blip r:embed="rId2"/>
+          <a:stretch>
+            <a:fillRect/>
+          </a:stretch>
+        </p:blipFill>
+        <p:spPr>
+          <a:xfrm>
+            <a:off x="7837167" y="1023732"/>
+            <a:ext cx="2743206" cy="2743206"/>
+          </a:xfrm>
+          <a:prstGeom prst="rect">
+            <a:avLst/>
+          </a:prstGeom>
+        </p:spPr>
+      </p:pic>
+      <p:pic>
+        <p:nvPicPr>
+          <p:cNvPr id="7" name="Immagine 6" descr="Time symbol png Images - Free Download on Magnific (formerly Freepik)">
+            <a:extLst>
+              <a:ext uri="{FF2B5EF4-FFF2-40B4-BE49-F238E27FC236}">
+                <a16:creationId xmlns:a16="http://schemas.microsoft.com/office/drawing/2014/main" id="{5A3187E4-C147-8CFC-7B24-78F9496CFC1A}"/>
+              </a:ext>
+            </a:extLst>
+          </p:cNvPr>
+          <p:cNvPicPr>
+            <a:picLocks noChangeAspect="1"/>
+          </p:cNvPicPr>
+          <p:nvPr/>
+        </p:nvPicPr>
+        <p:blipFill>
+          <a:blip r:embed="rId3"/>
+          <a:stretch>
+            <a:fillRect/>
+          </a:stretch>
+        </p:blipFill>
+        <p:spPr>
+          <a:xfrm>
+            <a:off x="5463508" y="3605013"/>
+            <a:ext cx="2951830" cy="2951830"/>
+          </a:xfrm>
+          <a:prstGeom prst="rect">
+            <a:avLst/>
+          </a:prstGeom>
+        </p:spPr>
+      </p:pic>
+    </p:spTree>
+    <p:extLst>
+      <p:ext uri="{BB962C8B-B14F-4D97-AF65-F5344CB8AC3E}">
+        <p14:creationId xmlns:p14="http://schemas.microsoft.com/office/powerpoint/2010/main" val="1465422638"/>
+      </p:ext>
+    </p:extLst>
+  </p:cSld>
+  <p:clrMapOvr>
+    <a:masterClrMapping/>
+  </p:clrMapOvr>
+</p:sld>
+</file>
+
+<file path=ppt/slides/slide17.xml><?xml version="1.0" encoding="utf-8"?>
+<p:sld xmlns:a="http://schemas.openxmlformats.org/drawingml/2006/main" xmlns:r="http://schemas.openxmlformats.org/officeDocument/2006/relationships" xmlns:p="http://schemas.openxmlformats.org/presentationml/2006/main">
+  <p:cSld>
+    <p:spTree>
+      <p:nvGrpSpPr>
+        <p:cNvPr id="1" name=""/>
+        <p:cNvGrpSpPr/>
+        <p:nvPr/>
+      </p:nvGrpSpPr>
+      <p:grpSpPr>
+        <a:xfrm>
+          <a:off x="0" y="0"/>
+          <a:ext cx="0" cy="0"/>
+          <a:chOff x="0" y="0"/>
+          <a:chExt cx="0" cy="0"/>
+        </a:xfrm>
+      </p:grpSpPr>
+      <p:sp>
+        <p:nvSpPr>
+          <p:cNvPr id="2" name="Titolo 1">
+            <a:extLst>
+              <a:ext uri="{FF2B5EF4-FFF2-40B4-BE49-F238E27FC236}">
+                <a16:creationId xmlns:a16="http://schemas.microsoft.com/office/drawing/2014/main" id="{61E4177B-5BED-732D-416F-4A3E8F6078D5}"/>
+              </a:ext>
+            </a:extLst>
+          </p:cNvPr>
+          <p:cNvSpPr>
+            <a:spLocks noGrp="1"/>
+          </p:cNvSpPr>
+          <p:nvPr>
+            <p:ph type="title"/>
+          </p:nvPr>
+        </p:nvSpPr>
+        <p:spPr/>
+        <p:txBody>
+          <a:bodyPr/>
+          <a:lstStyle/>
+          <a:p>
+            <a:r>
+              <a:rPr lang="it-IT" dirty="0"/>
+              <a:t>Metriche di Analisi</a:t>
+            </a:r>
+          </a:p>
+        </p:txBody>
+      </p:sp>
+      <mc:AlternateContent xmlns:mc="http://schemas.openxmlformats.org/markup-compatibility/2006">
+        <mc:Choice xmlns:a14="http://schemas.microsoft.com/office/drawing/2010/main" Requires="a14">
+          <p:sp>
+            <p:nvSpPr>
+              <p:cNvPr id="8" name="Segnaposto contenuto 7">
+                <a:extLst>
+                  <a:ext uri="{FF2B5EF4-FFF2-40B4-BE49-F238E27FC236}">
+                    <a16:creationId xmlns:a16="http://schemas.microsoft.com/office/drawing/2014/main" id="{A6E9697B-30F9-9129-BEAA-86E3543871D3}"/>
+                  </a:ext>
+                </a:extLst>
+              </p:cNvPr>
+              <p:cNvSpPr>
+                <a:spLocks noGrp="1"/>
+              </p:cNvSpPr>
+              <p:nvPr>
+                <p:ph idx="1"/>
+              </p:nvPr>
+            </p:nvSpPr>
+            <p:spPr>
+              <a:xfrm>
+                <a:off x="488933" y="2398490"/>
+                <a:ext cx="11214133" cy="3981262"/>
+              </a:xfrm>
+            </p:spPr>
+            <p:txBody>
+              <a:bodyPr>
+                <a:normAutofit fontScale="77500" lnSpcReduction="20000"/>
+              </a:bodyPr>
+              <a:lstStyle/>
+              <a:p>
+                <a:pPr marL="0" indent="0">
+                  <a:buNone/>
+                </a:pPr>
+                <a:r>
+                  <a:rPr lang="it-IT" sz="2300" dirty="0"/>
+                  <a:t>Per analizzare le prestazioni del codice, sono state considerate:</a:t>
+                </a:r>
+              </a:p>
+              <a:p>
+                <a:pPr lvl="1"/>
+                <a:r>
+                  <a:rPr lang="it-IT" sz="2300" b="1" dirty="0" err="1"/>
+                  <a:t>Speedup</a:t>
+                </a:r>
+                <a:r>
+                  <a:rPr lang="it-IT" sz="2300" b="1" dirty="0"/>
+                  <a:t> = </a:t>
+                </a:r>
+                <a14:m>
+                  <m:oMath xmlns:m="http://schemas.openxmlformats.org/officeDocument/2006/math">
+                    <m:sSub>
+                      <m:sSubPr>
+                        <m:ctrlPr>
+                          <a:rPr lang="it-IT" sz="2300" b="1" i="1" smtClean="0">
+                            <a:latin typeface="Cambria Math" panose="02040503050406030204" pitchFamily="18" charset="0"/>
+                          </a:rPr>
+                        </m:ctrlPr>
+                      </m:sSubPr>
+                      <m:e>
+                        <m:r>
+                          <a:rPr lang="it-IT" sz="2300" b="1" i="1" smtClean="0">
+                            <a:latin typeface="Cambria Math" panose="02040503050406030204" pitchFamily="18" charset="0"/>
+                          </a:rPr>
+                          <m:t>𝑺</m:t>
+                        </m:r>
+                      </m:e>
+                      <m:sub>
+                        <m:r>
+                          <a:rPr lang="it-IT" sz="2300" b="1" i="1" smtClean="0">
+                            <a:latin typeface="Cambria Math" panose="02040503050406030204" pitchFamily="18" charset="0"/>
+                          </a:rPr>
+                          <m:t>𝒑</m:t>
+                        </m:r>
+                      </m:sub>
+                    </m:sSub>
+                    <m:r>
+                      <a:rPr lang="it-IT" sz="2300" b="1" i="1" smtClean="0">
+                        <a:latin typeface="Cambria Math" panose="02040503050406030204" pitchFamily="18" charset="0"/>
+                      </a:rPr>
+                      <m:t>=</m:t>
+                    </m:r>
+                    <m:f>
+                      <m:fPr>
+                        <m:ctrlPr>
+                          <a:rPr lang="it-IT" sz="2300" b="1" i="1" smtClean="0">
+                            <a:latin typeface="Cambria Math" panose="02040503050406030204" pitchFamily="18" charset="0"/>
+                          </a:rPr>
+                        </m:ctrlPr>
+                      </m:fPr>
+                      <m:num>
+                        <m:sSub>
+                          <m:sSubPr>
+                            <m:ctrlPr>
+                              <a:rPr lang="it-IT" sz="2300" b="1" i="1" smtClean="0">
+                                <a:latin typeface="Cambria Math" panose="02040503050406030204" pitchFamily="18" charset="0"/>
+                              </a:rPr>
+                            </m:ctrlPr>
+                          </m:sSubPr>
+                          <m:e>
+                            <m:r>
+                              <a:rPr lang="it-IT" sz="2300" b="1" i="1" smtClean="0">
+                                <a:latin typeface="Cambria Math" panose="02040503050406030204" pitchFamily="18" charset="0"/>
+                              </a:rPr>
+                              <m:t>𝑻</m:t>
+                            </m:r>
+                          </m:e>
+                          <m:sub>
+                            <m:r>
+                              <a:rPr lang="it-IT" sz="2300" b="1" i="1" smtClean="0">
+                                <a:latin typeface="Cambria Math" panose="02040503050406030204" pitchFamily="18" charset="0"/>
+                              </a:rPr>
+                              <m:t>𝟏</m:t>
+                            </m:r>
+                          </m:sub>
+                        </m:sSub>
+                      </m:num>
+                      <m:den>
+                        <m:sSub>
+                          <m:sSubPr>
+                            <m:ctrlPr>
+                              <a:rPr lang="it-IT" sz="2300" b="1" i="1" smtClean="0">
+                                <a:latin typeface="Cambria Math" panose="02040503050406030204" pitchFamily="18" charset="0"/>
+                              </a:rPr>
+                            </m:ctrlPr>
+                          </m:sSubPr>
+                          <m:e>
+                            <m:r>
+                              <a:rPr lang="it-IT" sz="2300" b="1" i="1" smtClean="0">
+                                <a:latin typeface="Cambria Math" panose="02040503050406030204" pitchFamily="18" charset="0"/>
+                              </a:rPr>
+                              <m:t>𝑻</m:t>
+                            </m:r>
+                          </m:e>
+                          <m:sub>
+                            <m:r>
+                              <a:rPr lang="it-IT" sz="2300" b="1" i="1" smtClean="0">
+                                <a:latin typeface="Cambria Math" panose="02040503050406030204" pitchFamily="18" charset="0"/>
+                              </a:rPr>
+                              <m:t>𝒑</m:t>
+                            </m:r>
+                          </m:sub>
+                        </m:sSub>
+                      </m:den>
+                    </m:f>
+                  </m:oMath>
+                </a14:m>
+                <a:endParaRPr lang="it-IT" sz="2300" b="1" dirty="0"/>
+              </a:p>
+              <a:p>
+                <a:pPr lvl="1" algn="just"/>
+                <a:r>
+                  <a:rPr lang="it-IT" sz="2300" b="1" dirty="0"/>
+                  <a:t>Efficienza = </a:t>
+                </a:r>
+                <a14:m>
+                  <m:oMath xmlns:m="http://schemas.openxmlformats.org/officeDocument/2006/math">
+                    <m:sSub>
+                      <m:sSubPr>
+                        <m:ctrlPr>
+                          <a:rPr lang="it-IT" sz="2300" b="1" i="1" smtClean="0">
+                            <a:latin typeface="Cambria Math" panose="02040503050406030204" pitchFamily="18" charset="0"/>
+                          </a:rPr>
+                        </m:ctrlPr>
+                      </m:sSubPr>
+                      <m:e>
+                        <m:r>
+                          <a:rPr lang="it-IT" sz="2300" b="1" i="1" smtClean="0">
+                            <a:latin typeface="Cambria Math" panose="02040503050406030204" pitchFamily="18" charset="0"/>
+                          </a:rPr>
+                          <m:t>𝑬</m:t>
+                        </m:r>
+                      </m:e>
+                      <m:sub>
+                        <m:r>
+                          <a:rPr lang="it-IT" sz="2300" b="1" i="1" smtClean="0">
+                            <a:latin typeface="Cambria Math" panose="02040503050406030204" pitchFamily="18" charset="0"/>
+                          </a:rPr>
+                          <m:t>𝒑</m:t>
+                        </m:r>
+                      </m:sub>
+                    </m:sSub>
+                    <m:r>
+                      <a:rPr lang="it-IT" sz="2300" b="1" i="1" smtClean="0">
+                        <a:latin typeface="Cambria Math" panose="02040503050406030204" pitchFamily="18" charset="0"/>
+                      </a:rPr>
+                      <m:t>=</m:t>
+                    </m:r>
+                    <m:f>
+                      <m:fPr>
+                        <m:ctrlPr>
+                          <a:rPr lang="it-IT" sz="2300" b="1" i="1" smtClean="0">
+                            <a:latin typeface="Cambria Math" panose="02040503050406030204" pitchFamily="18" charset="0"/>
+                          </a:rPr>
+                        </m:ctrlPr>
+                      </m:fPr>
+                      <m:num>
+                        <m:sSub>
+                          <m:sSubPr>
+                            <m:ctrlPr>
+                              <a:rPr lang="it-IT" sz="2300" b="1" i="1" smtClean="0">
+                                <a:latin typeface="Cambria Math" panose="02040503050406030204" pitchFamily="18" charset="0"/>
+                              </a:rPr>
+                            </m:ctrlPr>
+                          </m:sSubPr>
+                          <m:e>
+                            <m:r>
+                              <a:rPr lang="it-IT" sz="2300" b="1" i="1" smtClean="0">
+                                <a:latin typeface="Cambria Math" panose="02040503050406030204" pitchFamily="18" charset="0"/>
+                              </a:rPr>
+                              <m:t>𝑺</m:t>
+                            </m:r>
+                          </m:e>
+                          <m:sub>
+                            <m:r>
+                              <a:rPr lang="it-IT" sz="2300" b="1" i="1" smtClean="0">
+                                <a:latin typeface="Cambria Math" panose="02040503050406030204" pitchFamily="18" charset="0"/>
+                              </a:rPr>
+                              <m:t>𝒑</m:t>
+                            </m:r>
+                          </m:sub>
+                        </m:sSub>
+                      </m:num>
+                      <m:den>
+                        <m:r>
+                          <m:rPr>
+                            <m:sty m:val="p"/>
+                          </m:rPr>
+                          <a:rPr lang="it-IT" sz="2300" b="1" i="1" smtClean="0">
+                            <a:latin typeface="Cambria Math" panose="02040503050406030204" pitchFamily="18" charset="0"/>
+                          </a:rPr>
+                          <m:t>p</m:t>
+                        </m:r>
+                      </m:den>
+                    </m:f>
+                  </m:oMath>
+                </a14:m>
+                <a:endParaRPr lang="it-IT" sz="2300" b="1" dirty="0"/>
+              </a:p>
+              <a:p>
+                <a:pPr marL="0" indent="0" algn="just">
+                  <a:buNone/>
+                </a:pPr>
+                <a:br>
+                  <a:rPr lang="it-IT" sz="1800" dirty="0"/>
+                </a:br>
+                <a:r>
+                  <a:rPr lang="it-IT" sz="2300" dirty="0"/>
+                  <a:t>Inoltre, sono stati considerati i seguenti setup per mettere a paragone MPI puro con la versione Ibrida</a:t>
+                </a:r>
+                <a:r>
+                  <a:rPr lang="it-IT" sz="2300" b="1" dirty="0"/>
+                  <a:t>:</a:t>
+                </a:r>
+              </a:p>
+              <a:p>
+                <a:pPr lvl="1"/>
+                <a:r>
+                  <a:rPr lang="it-IT" sz="2300" b="1" dirty="0"/>
+                  <a:t>8 Processi x 1 Thread</a:t>
+                </a:r>
+              </a:p>
+              <a:p>
+                <a:pPr lvl="1"/>
+                <a:r>
+                  <a:rPr lang="it-IT" sz="2300" b="1" dirty="0"/>
+                  <a:t>4 Processi x 2 Thread</a:t>
+                </a:r>
+              </a:p>
+              <a:p>
+                <a:pPr lvl="1"/>
+                <a:r>
+                  <a:rPr lang="it-IT" sz="2300" b="1" dirty="0"/>
+                  <a:t>2 Processi x 4 Thread </a:t>
+                </a:r>
+              </a:p>
+              <a:p>
+                <a:pPr lvl="1"/>
+                <a:r>
+                  <a:rPr lang="it-IT" sz="2300" b="1" dirty="0"/>
+                  <a:t>1 Processo x 8 Thread</a:t>
+                </a:r>
+                <a:br>
+                  <a:rPr lang="it-IT" sz="2300" dirty="0"/>
+                </a:br>
+                <a:br>
+                  <a:rPr lang="it-IT" sz="2300" dirty="0"/>
+                </a:br>
+                <a:endParaRPr lang="it-IT" sz="2300" dirty="0"/>
+              </a:p>
+              <a:p>
+                <a:pPr marL="265176" lvl="1" indent="0" algn="just">
+                  <a:buNone/>
+                </a:pPr>
+                <a:endParaRPr lang="it-IT" sz="1600" dirty="0"/>
+              </a:p>
+            </p:txBody>
+          </p:sp>
+        </mc:Choice>
+        <mc:Fallback>
+          <p:sp>
+            <p:nvSpPr>
+              <p:cNvPr id="8" name="Segnaposto contenuto 7">
+                <a:extLst>
+                  <a:ext uri="{FF2B5EF4-FFF2-40B4-BE49-F238E27FC236}">
+                    <a16:creationId xmlns:a16="http://schemas.microsoft.com/office/drawing/2014/main" id="{A6E9697B-30F9-9129-BEAA-86E3543871D3}"/>
+                  </a:ext>
+                </a:extLst>
+              </p:cNvPr>
+              <p:cNvSpPr>
+                <a:spLocks noGrp="1" noRot="1" noChangeAspect="1" noMove="1" noResize="1" noEditPoints="1" noAdjustHandles="1" noChangeArrowheads="1" noChangeShapeType="1" noTextEdit="1"/>
+              </p:cNvSpPr>
+              <p:nvPr>
+                <p:ph idx="1"/>
+              </p:nvPr>
+            </p:nvSpPr>
+            <p:spPr>
+              <a:xfrm>
+                <a:off x="488933" y="2398490"/>
+                <a:ext cx="11214133" cy="3981262"/>
+              </a:xfrm>
+              <a:blipFill>
+                <a:blip r:embed="rId3"/>
+                <a:stretch>
+                  <a:fillRect l="-435" t="-765"/>
+                </a:stretch>
+              </a:blipFill>
+            </p:spPr>
+            <p:txBody>
+              <a:bodyPr/>
+              <a:lstStyle/>
+              <a:p>
+                <a:r>
+                  <a:rPr lang="it-IT">
+                    <a:noFill/>
+                  </a:rPr>
+                  <a:t> </a:t>
+                </a:r>
+              </a:p>
+            </p:txBody>
+          </p:sp>
+        </mc:Fallback>
+      </mc:AlternateContent>
+    </p:spTree>
+    <p:extLst>
+      <p:ext uri="{BB962C8B-B14F-4D97-AF65-F5344CB8AC3E}">
+        <p14:creationId xmlns:p14="http://schemas.microsoft.com/office/powerpoint/2010/main" val="2600859803"/>
       </p:ext>
     </p:extLst>
   </p:cSld>
@@ -6968,41 +7613,6 @@
           </a:p>
         </p:txBody>
       </p:sp>
-      <p:cxnSp>
-        <p:nvCxnSpPr>
-          <p:cNvPr id="4" name="Straight Connector 11">
-            <a:extLst>
-              <a:ext uri="{FF2B5EF4-FFF2-40B4-BE49-F238E27FC236}">
-                <a16:creationId xmlns:a16="http://schemas.microsoft.com/office/drawing/2014/main" id="{F32C8394-2663-8B79-96F7-9656E874A3E5}"/>
-              </a:ext>
-              <a:ext uri="{C183D7F6-B498-43B3-948B-1728B52AA6E4}">
-                <adec:decorative xmlns:adec="http://schemas.microsoft.com/office/drawing/2017/decorative" val="1"/>
-              </a:ext>
-            </a:extLst>
-          </p:cNvPr>
-          <p:cNvCxnSpPr>
-            <a:cxnSpLocks noMove="1" noResize="1"/>
-          </p:cNvCxnSpPr>
-          <p:nvPr/>
-        </p:nvCxnSpPr>
-        <p:spPr>
-          <a:xfrm>
-            <a:off x="713232" y="1031004"/>
-            <a:ext cx="978865" cy="0"/>
-          </a:xfrm>
-          <a:prstGeom prst="straightConnector1">
-            <a:avLst/>
-          </a:prstGeom>
-          <a:noFill/>
-          <a:ln w="76196" cap="flat">
-            <a:solidFill>
-              <a:srgbClr val="1973EB"/>
-            </a:solidFill>
-            <a:prstDash val="solid"/>
-            <a:miter/>
-          </a:ln>
-        </p:spPr>
-      </p:cxnSp>
       <mc:AlternateContent xmlns:mc="http://schemas.openxmlformats.org/markup-compatibility/2006" xmlns:a14="http://schemas.microsoft.com/office/drawing/2010/main">
         <mc:Choice Requires="a14">
           <p:sp>
@@ -7390,6 +8000,41 @@
           </p:sp>
         </mc:Fallback>
       </mc:AlternateContent>
+      <p:cxnSp>
+        <p:nvCxnSpPr>
+          <p:cNvPr id="4" name="Straight Connector 11">
+            <a:extLst>
+              <a:ext uri="{FF2B5EF4-FFF2-40B4-BE49-F238E27FC236}">
+                <a16:creationId xmlns:a16="http://schemas.microsoft.com/office/drawing/2014/main" id="{F32C8394-2663-8B79-96F7-9656E874A3E5}"/>
+              </a:ext>
+              <a:ext uri="{C183D7F6-B498-43B3-948B-1728B52AA6E4}">
+                <adec:decorative xmlns:adec="http://schemas.microsoft.com/office/drawing/2017/decorative" val="1"/>
+              </a:ext>
+            </a:extLst>
+          </p:cNvPr>
+          <p:cNvCxnSpPr>
+            <a:cxnSpLocks noMove="1" noResize="1"/>
+          </p:cNvCxnSpPr>
+          <p:nvPr/>
+        </p:nvCxnSpPr>
+        <p:spPr>
+          <a:xfrm>
+            <a:off x="713232" y="1031004"/>
+            <a:ext cx="978865" cy="0"/>
+          </a:xfrm>
+          <a:prstGeom prst="straightConnector1">
+            <a:avLst/>
+          </a:prstGeom>
+          <a:noFill/>
+          <a:ln w="76196" cap="flat">
+            <a:solidFill>
+              <a:srgbClr val="1973EB"/>
+            </a:solidFill>
+            <a:prstDash val="solid"/>
+            <a:miter/>
+          </a:ln>
+        </p:spPr>
+      </p:cxnSp>
       <p:pic>
         <p:nvPicPr>
           <p:cNvPr id="6" name="Immagine 4">
@@ -7559,6 +8204,186 @@
           </a:p>
         </p:txBody>
       </p:sp>
+      <p:sp>
+        <p:nvSpPr>
+          <p:cNvPr id="6" name="Segnaposto contenuto 2">
+            <a:extLst>
+              <a:ext uri="{FF2B5EF4-FFF2-40B4-BE49-F238E27FC236}">
+                <a16:creationId xmlns:a16="http://schemas.microsoft.com/office/drawing/2014/main" id="{990AC120-5871-FA03-4779-5764D82911EA}"/>
+              </a:ext>
+            </a:extLst>
+          </p:cNvPr>
+          <p:cNvSpPr txBox="1">
+            <a:spLocks noGrp="1"/>
+          </p:cNvSpPr>
+          <p:nvPr>
+            <p:ph idx="1"/>
+          </p:nvPr>
+        </p:nvSpPr>
+        <p:spPr>
+          <a:xfrm>
+            <a:off x="5793144" y="2633234"/>
+            <a:ext cx="5737860" cy="3666981"/>
+          </a:xfrm>
+        </p:spPr>
+        <p:txBody>
+          <a:bodyPr/>
+          <a:lstStyle/>
+          <a:p>
+            <a:pPr lvl="0">
+              <a:lnSpc>
+                <a:spcPct val="110000"/>
+              </a:lnSpc>
+            </a:pPr>
+            <a:r>
+              <a:rPr lang="it-IT" sz="1400" b="1" dirty="0"/>
+              <a:t>Processore:</a:t>
+            </a:r>
+            <a:r>
+              <a:rPr lang="it-IT" sz="1400" dirty="0"/>
+              <a:t> AMD Ryzen 5 5500U (Architettura Zen 2 / Lucienne, x86_64)</a:t>
+            </a:r>
+          </a:p>
+          <a:p>
+            <a:pPr lvl="0">
+              <a:lnSpc>
+                <a:spcPct val="110000"/>
+              </a:lnSpc>
+            </a:pPr>
+            <a:r>
+              <a:rPr lang="it-IT" sz="1400" b="1" dirty="0"/>
+              <a:t>Topologia Core:</a:t>
+            </a:r>
+            <a:r>
+              <a:rPr lang="it-IT" sz="1400" dirty="0"/>
+              <a:t> 6 Core Fisici / 12 Core Logici (Thread per core: 2, SMT abilitato)</a:t>
+            </a:r>
+          </a:p>
+          <a:p>
+            <a:pPr lvl="0">
+              <a:lnSpc>
+                <a:spcPct val="110000"/>
+              </a:lnSpc>
+            </a:pPr>
+            <a:r>
+              <a:rPr lang="it-IT" sz="1400" b="1" dirty="0"/>
+              <a:t>Frequenza di Clock:</a:t>
+            </a:r>
+            <a:r>
+              <a:rPr lang="it-IT" sz="1400" dirty="0"/>
+              <a:t> Base 2.10 GHz / Max Boost 4.05 GHz</a:t>
+            </a:r>
+          </a:p>
+          <a:p>
+            <a:pPr lvl="0">
+              <a:lnSpc>
+                <a:spcPct val="110000"/>
+              </a:lnSpc>
+            </a:pPr>
+            <a:r>
+              <a:rPr lang="it-IT" sz="1400" b="1" dirty="0"/>
+              <a:t>Sottosistema di Cache:</a:t>
+            </a:r>
+            <a:endParaRPr lang="it-IT" sz="1400" dirty="0"/>
+          </a:p>
+          <a:p>
+            <a:pPr lvl="1">
+              <a:lnSpc>
+                <a:spcPct val="110000"/>
+              </a:lnSpc>
+            </a:pPr>
+            <a:r>
+              <a:rPr lang="it-IT" sz="1400" b="1" dirty="0"/>
+              <a:t>Cache L1d:</a:t>
+            </a:r>
+            <a:r>
+              <a:rPr lang="it-IT" sz="1400" dirty="0"/>
+              <a:t> 192 </a:t>
+            </a:r>
+            <a:r>
+              <a:rPr lang="it-IT" sz="1400" dirty="0" err="1"/>
+              <a:t>KiB</a:t>
+            </a:r>
+            <a:r>
+              <a:rPr lang="it-IT" sz="1400" dirty="0"/>
+              <a:t> totali </a:t>
+            </a:r>
+          </a:p>
+          <a:p>
+            <a:pPr lvl="1">
+              <a:lnSpc>
+                <a:spcPct val="110000"/>
+              </a:lnSpc>
+            </a:pPr>
+            <a:r>
+              <a:rPr lang="it-IT" sz="1400" b="1" dirty="0"/>
+              <a:t>Cache L2:</a:t>
+            </a:r>
+            <a:r>
+              <a:rPr lang="it-IT" sz="1400" dirty="0"/>
+              <a:t> 3 </a:t>
+            </a:r>
+            <a:r>
+              <a:rPr lang="it-IT" sz="1400" dirty="0" err="1"/>
+              <a:t>MiB</a:t>
+            </a:r>
+            <a:r>
+              <a:rPr lang="it-IT" sz="1400" dirty="0"/>
+              <a:t> totali </a:t>
+            </a:r>
+          </a:p>
+          <a:p>
+            <a:pPr lvl="1">
+              <a:lnSpc>
+                <a:spcPct val="110000"/>
+              </a:lnSpc>
+            </a:pPr>
+            <a:r>
+              <a:rPr lang="it-IT" sz="1400" b="1" dirty="0"/>
+              <a:t>Cache L3:</a:t>
+            </a:r>
+            <a:r>
+              <a:rPr lang="it-IT" sz="1400" dirty="0"/>
+              <a:t> </a:t>
+            </a:r>
+            <a:r>
+              <a:rPr lang="it-IT" sz="1400" b="1" dirty="0"/>
+              <a:t>8 </a:t>
+            </a:r>
+            <a:r>
+              <a:rPr lang="it-IT" sz="1400" b="1" dirty="0" err="1"/>
+              <a:t>MiB</a:t>
+            </a:r>
+            <a:r>
+              <a:rPr lang="it-IT" sz="1400" b="1" dirty="0"/>
+              <a:t> totali</a:t>
+            </a:r>
+          </a:p>
+          <a:p>
+            <a:pPr lvl="0">
+              <a:lnSpc>
+                <a:spcPct val="110000"/>
+              </a:lnSpc>
+            </a:pPr>
+            <a:r>
+              <a:rPr lang="it-IT" sz="1400" b="1" dirty="0"/>
+              <a:t>Memoria RAM:</a:t>
+            </a:r>
+            <a:r>
+              <a:rPr lang="it-IT" sz="1400" dirty="0"/>
+              <a:t> 8 GB DDR4 (Memoria disponibile a sistema: ~5.8 GB unificati)</a:t>
+            </a:r>
+          </a:p>
+          <a:p>
+            <a:pPr lvl="0">
+              <a:lnSpc>
+                <a:spcPct val="110000"/>
+              </a:lnSpc>
+            </a:pPr>
+            <a:endParaRPr lang="it-IT" sz="1400" dirty="0"/>
+          </a:p>
+        </p:txBody>
+      </p:sp>
       <p:pic>
         <p:nvPicPr>
           <p:cNvPr id="4" name="Immagine 3" descr="Laptop - Free computer icons">
@@ -7628,186 +8453,6 @@
           </a:ln>
         </p:spPr>
       </p:cxnSp>
-      <p:sp>
-        <p:nvSpPr>
-          <p:cNvPr id="6" name="Segnaposto contenuto 2">
-            <a:extLst>
-              <a:ext uri="{FF2B5EF4-FFF2-40B4-BE49-F238E27FC236}">
-                <a16:creationId xmlns:a16="http://schemas.microsoft.com/office/drawing/2014/main" id="{990AC120-5871-FA03-4779-5764D82911EA}"/>
-              </a:ext>
-            </a:extLst>
-          </p:cNvPr>
-          <p:cNvSpPr txBox="1">
-            <a:spLocks noGrp="1"/>
-          </p:cNvSpPr>
-          <p:nvPr>
-            <p:ph idx="1"/>
-          </p:nvPr>
-        </p:nvSpPr>
-        <p:spPr>
-          <a:xfrm>
-            <a:off x="5793144" y="2633234"/>
-            <a:ext cx="5737860" cy="3666981"/>
-          </a:xfrm>
-        </p:spPr>
-        <p:txBody>
-          <a:bodyPr/>
-          <a:lstStyle/>
-          <a:p>
-            <a:pPr lvl="0">
-              <a:lnSpc>
-                <a:spcPct val="110000"/>
-              </a:lnSpc>
-            </a:pPr>
-            <a:r>
-              <a:rPr lang="it-IT" sz="1400" b="1" dirty="0"/>
-              <a:t>Processore:</a:t>
-            </a:r>
-            <a:r>
-              <a:rPr lang="it-IT" sz="1400" dirty="0"/>
-              <a:t> AMD Ryzen 5 5500U (Architettura Zen 2 / Lucienne, x86_64)</a:t>
-            </a:r>
-          </a:p>
-          <a:p>
-            <a:pPr lvl="0">
-              <a:lnSpc>
-                <a:spcPct val="110000"/>
-              </a:lnSpc>
-            </a:pPr>
-            <a:r>
-              <a:rPr lang="it-IT" sz="1400" b="1" dirty="0"/>
-              <a:t>Topologia Core:</a:t>
-            </a:r>
-            <a:r>
-              <a:rPr lang="it-IT" sz="1400" dirty="0"/>
-              <a:t> 6 Core Fisici / 12 Core Logici (Thread per core: 2, SMT abilitato)</a:t>
-            </a:r>
-          </a:p>
-          <a:p>
-            <a:pPr lvl="0">
-              <a:lnSpc>
-                <a:spcPct val="110000"/>
-              </a:lnSpc>
-            </a:pPr>
-            <a:r>
-              <a:rPr lang="it-IT" sz="1400" b="1" dirty="0"/>
-              <a:t>Frequenza di Clock:</a:t>
-            </a:r>
-            <a:r>
-              <a:rPr lang="it-IT" sz="1400" dirty="0"/>
-              <a:t> Base 2.10 GHz / Max Boost 4.05 GHz</a:t>
-            </a:r>
-          </a:p>
-          <a:p>
-            <a:pPr lvl="0">
-              <a:lnSpc>
-                <a:spcPct val="110000"/>
-              </a:lnSpc>
-            </a:pPr>
-            <a:r>
-              <a:rPr lang="it-IT" sz="1400" b="1" dirty="0"/>
-              <a:t>Sottosistema di Cache:</a:t>
-            </a:r>
-            <a:endParaRPr lang="it-IT" sz="1400" dirty="0"/>
-          </a:p>
-          <a:p>
-            <a:pPr lvl="1">
-              <a:lnSpc>
-                <a:spcPct val="110000"/>
-              </a:lnSpc>
-            </a:pPr>
-            <a:r>
-              <a:rPr lang="it-IT" sz="1400" b="1" dirty="0"/>
-              <a:t>Cache L1d:</a:t>
-            </a:r>
-            <a:r>
-              <a:rPr lang="it-IT" sz="1400" dirty="0"/>
-              <a:t> 192 </a:t>
-            </a:r>
-            <a:r>
-              <a:rPr lang="it-IT" sz="1400" dirty="0" err="1"/>
-              <a:t>KiB</a:t>
-            </a:r>
-            <a:r>
-              <a:rPr lang="it-IT" sz="1400" dirty="0"/>
-              <a:t> totali </a:t>
-            </a:r>
-          </a:p>
-          <a:p>
-            <a:pPr lvl="1">
-              <a:lnSpc>
-                <a:spcPct val="110000"/>
-              </a:lnSpc>
-            </a:pPr>
-            <a:r>
-              <a:rPr lang="it-IT" sz="1400" b="1" dirty="0"/>
-              <a:t>Cache L2:</a:t>
-            </a:r>
-            <a:r>
-              <a:rPr lang="it-IT" sz="1400" dirty="0"/>
-              <a:t> 3 </a:t>
-            </a:r>
-            <a:r>
-              <a:rPr lang="it-IT" sz="1400" dirty="0" err="1"/>
-              <a:t>MiB</a:t>
-            </a:r>
-            <a:r>
-              <a:rPr lang="it-IT" sz="1400" dirty="0"/>
-              <a:t> totali </a:t>
-            </a:r>
-          </a:p>
-          <a:p>
-            <a:pPr lvl="1">
-              <a:lnSpc>
-                <a:spcPct val="110000"/>
-              </a:lnSpc>
-            </a:pPr>
-            <a:r>
-              <a:rPr lang="it-IT" sz="1400" b="1" dirty="0"/>
-              <a:t>Cache L3:</a:t>
-            </a:r>
-            <a:r>
-              <a:rPr lang="it-IT" sz="1400" dirty="0"/>
-              <a:t> </a:t>
-            </a:r>
-            <a:r>
-              <a:rPr lang="it-IT" sz="1400" b="1" dirty="0"/>
-              <a:t>8 </a:t>
-            </a:r>
-            <a:r>
-              <a:rPr lang="it-IT" sz="1400" b="1" dirty="0" err="1"/>
-              <a:t>MiB</a:t>
-            </a:r>
-            <a:r>
-              <a:rPr lang="it-IT" sz="1400" b="1" dirty="0"/>
-              <a:t> totali</a:t>
-            </a:r>
-          </a:p>
-          <a:p>
-            <a:pPr lvl="0">
-              <a:lnSpc>
-                <a:spcPct val="110000"/>
-              </a:lnSpc>
-            </a:pPr>
-            <a:r>
-              <a:rPr lang="it-IT" sz="1400" b="1" dirty="0"/>
-              <a:t>Memoria RAM:</a:t>
-            </a:r>
-            <a:r>
-              <a:rPr lang="it-IT" sz="1400" dirty="0"/>
-              <a:t> 8 GB DDR4 (Memoria disponibile a sistema: ~5.8 GB unificati)</a:t>
-            </a:r>
-          </a:p>
-          <a:p>
-            <a:pPr lvl="0">
-              <a:lnSpc>
-                <a:spcPct val="110000"/>
-              </a:lnSpc>
-            </a:pPr>
-            <a:endParaRPr lang="it-IT" sz="1400" dirty="0"/>
-          </a:p>
-        </p:txBody>
-      </p:sp>
     </p:spTree>
   </p:cSld>
   <p:clrMapOvr>
@@ -8441,6 +9086,35 @@
           </a:p>
         </p:txBody>
       </p:sp>
+      <p:pic>
+        <p:nvPicPr>
+          <p:cNvPr id="7" name="Segnaposto contenuto 14">
+            <a:extLst>
+              <a:ext uri="{FF2B5EF4-FFF2-40B4-BE49-F238E27FC236}">
+                <a16:creationId xmlns:a16="http://schemas.microsoft.com/office/drawing/2014/main" id="{0292EFF8-4FA1-70F6-F391-BA6B1279DDC2}"/>
+              </a:ext>
+            </a:extLst>
+          </p:cNvPr>
+          <p:cNvPicPr>
+            <a:picLocks noGrp="1" noChangeAspect="1"/>
+          </p:cNvPicPr>
+          <p:nvPr>
+            <p:ph idx="1"/>
+          </p:nvPr>
+        </p:nvPicPr>
+        <p:blipFill>
+          <a:blip r:embed="rId2"/>
+          <a:stretch>
+            <a:fillRect/>
+          </a:stretch>
+        </p:blipFill>
+        <p:spPr>
+          <a:xfrm>
+            <a:off x="713232" y="2829427"/>
+            <a:ext cx="5497180" cy="1662900"/>
+          </a:xfrm>
+        </p:spPr>
+      </p:pic>
       <p:cxnSp>
         <p:nvCxnSpPr>
           <p:cNvPr id="5" name="Straight Connector 30">
@@ -8491,7 +9165,7 @@
           <p:nvPr/>
         </p:nvPicPr>
         <p:blipFill>
-          <a:blip r:embed="rId2"/>
+          <a:blip r:embed="rId3"/>
           <a:stretch>
             <a:fillRect/>
           </a:stretch>
@@ -8508,35 +9182,6 @@
           <a:ln cap="flat">
             <a:noFill/>
           </a:ln>
-        </p:spPr>
-      </p:pic>
-      <p:pic>
-        <p:nvPicPr>
-          <p:cNvPr id="7" name="Segnaposto contenuto 14">
-            <a:extLst>
-              <a:ext uri="{FF2B5EF4-FFF2-40B4-BE49-F238E27FC236}">
-                <a16:creationId xmlns:a16="http://schemas.microsoft.com/office/drawing/2014/main" id="{0292EFF8-4FA1-70F6-F391-BA6B1279DDC2}"/>
-              </a:ext>
-            </a:extLst>
-          </p:cNvPr>
-          <p:cNvPicPr>
-            <a:picLocks noGrp="1" noChangeAspect="1"/>
-          </p:cNvPicPr>
-          <p:nvPr>
-            <p:ph idx="1"/>
-          </p:nvPr>
-        </p:nvPicPr>
-        <p:blipFill>
-          <a:blip r:embed="rId3"/>
-          <a:stretch>
-            <a:fillRect/>
-          </a:stretch>
-        </p:blipFill>
-        <p:spPr>
-          <a:xfrm>
-            <a:off x="713232" y="2829427"/>
-            <a:ext cx="5497180" cy="1662900"/>
-          </a:xfrm>
         </p:spPr>
       </p:pic>
       <p:pic>
@@ -8708,6 +9353,40 @@
           </a:p>
         </p:txBody>
       </p:sp>
+      <p:sp>
+        <p:nvSpPr>
+          <p:cNvPr id="5" name="Segnaposto contenuto 6">
+            <a:extLst>
+              <a:ext uri="{FF2B5EF4-FFF2-40B4-BE49-F238E27FC236}">
+                <a16:creationId xmlns:a16="http://schemas.microsoft.com/office/drawing/2014/main" id="{D5A1F5DD-D28A-D669-AE59-1485BE570D60}"/>
+              </a:ext>
+            </a:extLst>
+          </p:cNvPr>
+          <p:cNvSpPr txBox="1">
+            <a:spLocks noGrp="1"/>
+          </p:cNvSpPr>
+          <p:nvPr>
+            <p:ph idx="1"/>
+          </p:nvPr>
+        </p:nvSpPr>
+        <p:spPr>
+          <a:xfrm>
+            <a:off x="6915149" y="2256291"/>
+            <a:ext cx="4563614" cy="3760460"/>
+          </a:xfrm>
+        </p:spPr>
+        <p:txBody>
+          <a:bodyPr/>
+          <a:lstStyle/>
+          <a:p>
+            <a:pPr lvl="0"/>
+            <a:r>
+              <a:rPr lang="it-IT"/>
+              <a:t>Il codice sequenziale, banalmente, ricalca alla perfezione quello che è lo pseudocodice visto precedentemente.</a:t>
+            </a:r>
+          </a:p>
+        </p:txBody>
+      </p:sp>
       <p:pic>
         <p:nvPicPr>
           <p:cNvPr id="4" name="Immagine 8">
@@ -8742,40 +9421,6 @@
           </a:ln>
         </p:spPr>
       </p:pic>
-      <p:sp>
-        <p:nvSpPr>
-          <p:cNvPr id="5" name="Segnaposto contenuto 6">
-            <a:extLst>
-              <a:ext uri="{FF2B5EF4-FFF2-40B4-BE49-F238E27FC236}">
-                <a16:creationId xmlns:a16="http://schemas.microsoft.com/office/drawing/2014/main" id="{D5A1F5DD-D28A-D669-AE59-1485BE570D60}"/>
-              </a:ext>
-            </a:extLst>
-          </p:cNvPr>
-          <p:cNvSpPr txBox="1">
-            <a:spLocks noGrp="1"/>
-          </p:cNvSpPr>
-          <p:nvPr>
-            <p:ph idx="1"/>
-          </p:nvPr>
-        </p:nvSpPr>
-        <p:spPr>
-          <a:xfrm>
-            <a:off x="6915149" y="2256291"/>
-            <a:ext cx="4563614" cy="3760460"/>
-          </a:xfrm>
-        </p:spPr>
-        <p:txBody>
-          <a:bodyPr/>
-          <a:lstStyle/>
-          <a:p>
-            <a:pPr lvl="0"/>
-            <a:r>
-              <a:rPr lang="it-IT"/>
-              <a:t>Il codice sequenziale, banalmente, ricalca alla perfezione quello che è lo pseudocodice visto precedentemente.</a:t>
-            </a:r>
-          </a:p>
-        </p:txBody>
-      </p:sp>
       <p:cxnSp>
         <p:nvCxnSpPr>
           <p:cNvPr id="6" name="Straight Connector 25">
@@ -8852,12 +9497,7 @@
             <p:ph type="title"/>
           </p:nvPr>
         </p:nvSpPr>
-        <p:spPr>
-          <a:xfrm>
-            <a:off x="640080" y="1371600"/>
-            <a:ext cx="3859398" cy="1451719"/>
-          </a:xfrm>
-        </p:spPr>
+        <p:spPr/>
         <p:txBody>
           <a:bodyPr wrap="square" anchor="t">
             <a:normAutofit/>
@@ -8869,6 +9509,68 @@
               <a:rPr lang="it-IT"/>
               <a:t>MPI– Topologia</a:t>
             </a:r>
+          </a:p>
+        </p:txBody>
+      </p:sp>
+      <p:sp>
+        <p:nvSpPr>
+          <p:cNvPr id="3" name="Segnaposto contenuto 2">
+            <a:extLst>
+              <a:ext uri="{FF2B5EF4-FFF2-40B4-BE49-F238E27FC236}">
+                <a16:creationId xmlns:a16="http://schemas.microsoft.com/office/drawing/2014/main" id="{F2C30C96-647A-C38B-E01A-D925D137F510}"/>
+              </a:ext>
+            </a:extLst>
+          </p:cNvPr>
+          <p:cNvSpPr txBox="1">
+            <a:spLocks noGrp="1"/>
+          </p:cNvSpPr>
+          <p:nvPr>
+            <p:ph type="body" idx="2"/>
+          </p:nvPr>
+        </p:nvSpPr>
+        <p:spPr/>
+        <p:txBody>
+          <a:bodyPr wrap="square" anchor="t">
+            <a:normAutofit/>
+          </a:bodyPr>
+          <a:lstStyle/>
+          <a:p>
+            <a:pPr lvl="0"/>
+            <a:r>
+              <a:rPr lang="it-IT" dirty="0"/>
+              <a:t>La matrice viene divisa secondo un partizionamento orizzontale cercando di assegnare ad ogni processo un </a:t>
+            </a:r>
+            <a:r>
+              <a:rPr lang="it-IT" b="1" dirty="0"/>
+              <a:t>numero equo di righe da calcolare.</a:t>
+            </a:r>
+          </a:p>
+          <a:p>
+            <a:pPr lvl="0"/>
+            <a:r>
+              <a:rPr lang="it-IT" dirty="0"/>
+              <a:t>Grazie all’uso di </a:t>
+            </a:r>
+            <a:r>
+              <a:rPr lang="it-IT" b="1" dirty="0" err="1"/>
+              <a:t>MPI_Cart_create</a:t>
+            </a:r>
+            <a:r>
+              <a:rPr lang="it-IT" dirty="0"/>
+              <a:t>, è possibile effettuare questo tipo di decomposizione molto facilmente gestendo facilmente l’identificazione e lo scambio di messaggi con i vicini tramite le </a:t>
+            </a:r>
+            <a:r>
+              <a:rPr lang="it-IT" b="1" dirty="0"/>
+              <a:t>righe di Halo</a:t>
+            </a:r>
+            <a:r>
+              <a:rPr lang="it-IT" dirty="0"/>
+              <a:t>.</a:t>
+            </a:r>
+          </a:p>
+          <a:p>
+            <a:pPr lvl="0"/>
+            <a:endParaRPr lang="it-IT" dirty="0"/>
           </a:p>
         </p:txBody>
       </p:sp>
@@ -8906,73 +9608,6 @@
           </a:ln>
         </p:spPr>
       </p:pic>
-      <p:sp>
-        <p:nvSpPr>
-          <p:cNvPr id="3" name="Segnaposto contenuto 2">
-            <a:extLst>
-              <a:ext uri="{FF2B5EF4-FFF2-40B4-BE49-F238E27FC236}">
-                <a16:creationId xmlns:a16="http://schemas.microsoft.com/office/drawing/2014/main" id="{F2C30C96-647A-C38B-E01A-D925D137F510}"/>
-              </a:ext>
-            </a:extLst>
-          </p:cNvPr>
-          <p:cNvSpPr txBox="1">
-            <a:spLocks noGrp="1"/>
-          </p:cNvSpPr>
-          <p:nvPr>
-            <p:ph type="body" idx="2"/>
-          </p:nvPr>
-        </p:nvSpPr>
-        <p:spPr>
-          <a:xfrm>
-            <a:off x="640080" y="2972165"/>
-            <a:ext cx="3859398" cy="3226826"/>
-          </a:xfrm>
-        </p:spPr>
-        <p:txBody>
-          <a:bodyPr wrap="square" anchor="t">
-            <a:normAutofit/>
-          </a:bodyPr>
-          <a:lstStyle/>
-          <a:p>
-            <a:pPr lvl="0"/>
-            <a:r>
-              <a:rPr lang="it-IT" dirty="0"/>
-              <a:t>La matrice viene divisa secondo un partizionamento orizzontale cercando di assegnare ad ogni processo un </a:t>
-            </a:r>
-            <a:r>
-              <a:rPr lang="it-IT" b="1" dirty="0"/>
-              <a:t>numero equo di righe da calcolare.</a:t>
-            </a:r>
-          </a:p>
-          <a:p>
-            <a:pPr lvl="0"/>
-            <a:r>
-              <a:rPr lang="it-IT" dirty="0"/>
-              <a:t>Grazie all’uso di </a:t>
-            </a:r>
-            <a:r>
-              <a:rPr lang="it-IT" b="1" dirty="0" err="1"/>
-              <a:t>MPI_Cart_create</a:t>
-            </a:r>
-            <a:r>
-              <a:rPr lang="it-IT" dirty="0"/>
-              <a:t>, è possibile effettuare questo tipo di decomposizione molto facilmente gestendo facilmente l’identificazione e lo scambio di messaggi con i vicini tramite le </a:t>
-            </a:r>
-            <a:r>
-              <a:rPr lang="it-IT" b="1" dirty="0"/>
-              <a:t>righe di Halo</a:t>
-            </a:r>
-            <a:r>
-              <a:rPr lang="it-IT" dirty="0"/>
-              <a:t>.</a:t>
-            </a:r>
-          </a:p>
-          <a:p>
-            <a:pPr lvl="0"/>
-            <a:endParaRPr lang="it-IT" dirty="0"/>
-          </a:p>
-        </p:txBody>
-      </p:sp>
     </p:spTree>
   </p:cSld>
   <p:clrMapOvr>

--- a/Secondo Semestre/principi_prog_parallela/Codici/Progetto/Simulazione della Diffusione del Calore 2D.pptx
+++ b/Secondo Semestre/principi_prog_parallela/Codici/Progetto/Simulazione della Diffusione del Calore 2D.pptx
@@ -5,7 +5,7 @@
     <p:sldMasterId id="2147483648" r:id="rId1"/>
   </p:sldMasterIdLst>
   <p:notesMasterIdLst>
-    <p:notesMasterId r:id="rId19"/>
+    <p:notesMasterId r:id="rId23"/>
   </p:notesMasterIdLst>
   <p:sldIdLst>
     <p:sldId id="256" r:id="rId2"/>
@@ -25,6 +25,10 @@
     <p:sldId id="271" r:id="rId16"/>
     <p:sldId id="273" r:id="rId17"/>
     <p:sldId id="274" r:id="rId18"/>
+    <p:sldId id="275" r:id="rId19"/>
+    <p:sldId id="276" r:id="rId20"/>
+    <p:sldId id="277" r:id="rId21"/>
+    <p:sldId id="278" r:id="rId22"/>
   </p:sldIdLst>
   <p:sldSz cx="12192000" cy="6858000"/>
   <p:notesSz cx="6858000" cy="9144000"/>
@@ -131,6 +135,3464 @@
 </p:presentation>
 </file>
 
+<file path=ppt/charts/chart1.xml><?xml version="1.0" encoding="utf-8"?>
+<c:chartSpace xmlns:c="http://schemas.openxmlformats.org/drawingml/2006/chart" xmlns:a="http://schemas.openxmlformats.org/drawingml/2006/main" xmlns:r="http://schemas.openxmlformats.org/officeDocument/2006/relationships" xmlns:c16r2="http://schemas.microsoft.com/office/drawing/2015/06/chart">
+  <c:date1904 val="0"/>
+  <c:lang val="it-IT"/>
+  <c:roundedCorners val="0"/>
+  <mc:AlternateContent xmlns:mc="http://schemas.openxmlformats.org/markup-compatibility/2006">
+    <mc:Choice xmlns:c14="http://schemas.microsoft.com/office/drawing/2007/8/2/chart" Requires="c14">
+      <c14:style val="102"/>
+    </mc:Choice>
+    <mc:Fallback>
+      <c:style val="2"/>
+    </mc:Fallback>
+  </mc:AlternateContent>
+  <c:chart>
+    <c:autoTitleDeleted val="0"/>
+    <c:plotArea>
+      <c:layout>
+        <c:manualLayout>
+          <c:layoutTarget val="inner"/>
+          <c:xMode val="edge"/>
+          <c:yMode val="edge"/>
+          <c:x val="5.5416730896725684E-2"/>
+          <c:y val="0.13950256852942694"/>
+          <c:w val="0.92942512819462875"/>
+          <c:h val="0.73158242138584706"/>
+        </c:manualLayout>
+      </c:layout>
+      <c:lineChart>
+        <c:grouping val="standard"/>
+        <c:varyColors val="0"/>
+        <c:ser>
+          <c:idx val="0"/>
+          <c:order val="0"/>
+          <c:tx>
+            <c:strRef>
+              <c:f>Foglio1!$B$1</c:f>
+              <c:strCache>
+                <c:ptCount val="1"/>
+                <c:pt idx="0">
+                  <c:v>Sequenziale</c:v>
+                </c:pt>
+              </c:strCache>
+            </c:strRef>
+          </c:tx>
+          <c:spPr>
+            <a:ln w="22225" cap="rnd">
+              <a:solidFill>
+                <a:schemeClr val="accent1"/>
+              </a:solidFill>
+              <a:round/>
+            </a:ln>
+            <a:effectLst/>
+          </c:spPr>
+          <c:marker>
+            <c:symbol val="diamond"/>
+            <c:size val="6"/>
+            <c:spPr>
+              <a:solidFill>
+                <a:schemeClr val="accent1"/>
+              </a:solidFill>
+              <a:ln w="9525">
+                <a:solidFill>
+                  <a:schemeClr val="accent1"/>
+                </a:solidFill>
+                <a:round/>
+              </a:ln>
+              <a:effectLst/>
+            </c:spPr>
+          </c:marker>
+          <c:dLbls>
+            <c:spPr>
+              <a:noFill/>
+              <a:ln>
+                <a:noFill/>
+              </a:ln>
+              <a:effectLst/>
+            </c:spPr>
+            <c:txPr>
+              <a:bodyPr rot="0" spcFirstLastPara="1" vertOverflow="ellipsis" vert="horz" wrap="square" lIns="38100" tIns="19050" rIns="38100" bIns="19050" anchor="ctr" anchorCtr="1">
+                <a:spAutoFit/>
+              </a:bodyPr>
+              <a:lstStyle/>
+              <a:p>
+                <a:pPr>
+                  <a:defRPr sz="1197" b="0" i="0" u="none" strike="noStrike" kern="1200" baseline="0">
+                    <a:solidFill>
+                      <a:schemeClr val="tx1">
+                        <a:lumMod val="50000"/>
+                        <a:lumOff val="50000"/>
+                      </a:schemeClr>
+                    </a:solidFill>
+                    <a:latin typeface="+mn-lt"/>
+                    <a:ea typeface="+mn-ea"/>
+                    <a:cs typeface="+mn-cs"/>
+                  </a:defRPr>
+                </a:pPr>
+                <a:endParaRPr lang="it-IT"/>
+              </a:p>
+            </c:txPr>
+            <c:dLblPos val="t"/>
+            <c:showLegendKey val="0"/>
+            <c:showVal val="1"/>
+            <c:showCatName val="0"/>
+            <c:showSerName val="0"/>
+            <c:showPercent val="0"/>
+            <c:showBubbleSize val="0"/>
+            <c:showLeaderLines val="0"/>
+            <c:extLst>
+              <c:ext xmlns:c15="http://schemas.microsoft.com/office/drawing/2012/chart" uri="{CE6537A1-D6FC-4f65-9D91-7224C49458BB}">
+                <c15:showLeaderLines val="1"/>
+                <c15:leaderLines>
+                  <c:spPr>
+                    <a:ln w="9525">
+                      <a:solidFill>
+                        <a:schemeClr val="tx1">
+                          <a:lumMod val="35000"/>
+                          <a:lumOff val="65000"/>
+                        </a:schemeClr>
+                      </a:solidFill>
+                    </a:ln>
+                    <a:effectLst/>
+                  </c:spPr>
+                </c15:leaderLines>
+              </c:ext>
+            </c:extLst>
+          </c:dLbls>
+          <c:cat>
+            <c:strRef>
+              <c:f>Foglio1!$A$2:$A$6</c:f>
+              <c:strCache>
+                <c:ptCount val="5"/>
+                <c:pt idx="0">
+                  <c:v>N 64</c:v>
+                </c:pt>
+                <c:pt idx="1">
+                  <c:v>N 128</c:v>
+                </c:pt>
+                <c:pt idx="2">
+                  <c:v>N 256</c:v>
+                </c:pt>
+                <c:pt idx="3">
+                  <c:v>N 512</c:v>
+                </c:pt>
+                <c:pt idx="4">
+                  <c:v>N 1024</c:v>
+                </c:pt>
+              </c:strCache>
+            </c:strRef>
+          </c:cat>
+          <c:val>
+            <c:numRef>
+              <c:f>Foglio1!$B$2:$B$6</c:f>
+              <c:numCache>
+                <c:formatCode>General</c:formatCode>
+                <c:ptCount val="5"/>
+                <c:pt idx="0">
+                  <c:v>2.92E-2</c:v>
+                </c:pt>
+                <c:pt idx="1">
+                  <c:v>0.47149999999999997</c:v>
+                </c:pt>
+                <c:pt idx="2" formatCode="#,##0">
+                  <c:v>7.1670999999999996</c:v>
+                </c:pt>
+                <c:pt idx="3">
+                  <c:v>118.16200000000001</c:v>
+                </c:pt>
+                <c:pt idx="4" formatCode="#,##0">
+                  <c:v>2537.8130000000001</c:v>
+                </c:pt>
+              </c:numCache>
+            </c:numRef>
+          </c:val>
+          <c:smooth val="0"/>
+          <c:extLst>
+            <c:ext xmlns:c16="http://schemas.microsoft.com/office/drawing/2014/chart" uri="{C3380CC4-5D6E-409C-BE32-E72D297353CC}">
+              <c16:uniqueId val="{00000000-4E9A-45BC-8682-668C40769E03}"/>
+            </c:ext>
+          </c:extLst>
+        </c:ser>
+        <c:ser>
+          <c:idx val="1"/>
+          <c:order val="1"/>
+          <c:tx>
+            <c:strRef>
+              <c:f>Foglio1!$C$1</c:f>
+              <c:strCache>
+                <c:ptCount val="1"/>
+                <c:pt idx="0">
+                  <c:v>O(N^4)</c:v>
+                </c:pt>
+              </c:strCache>
+            </c:strRef>
+          </c:tx>
+          <c:spPr>
+            <a:ln w="22225" cap="rnd">
+              <a:solidFill>
+                <a:schemeClr val="accent2"/>
+              </a:solidFill>
+              <a:prstDash val="dash"/>
+              <a:round/>
+              <a:headEnd type="none"/>
+            </a:ln>
+            <a:effectLst/>
+          </c:spPr>
+          <c:marker>
+            <c:symbol val="none"/>
+          </c:marker>
+          <c:dLbls>
+            <c:delete val="1"/>
+          </c:dLbls>
+          <c:cat>
+            <c:strRef>
+              <c:f>Foglio1!$A$2:$A$6</c:f>
+              <c:strCache>
+                <c:ptCount val="5"/>
+                <c:pt idx="0">
+                  <c:v>N 64</c:v>
+                </c:pt>
+                <c:pt idx="1">
+                  <c:v>N 128</c:v>
+                </c:pt>
+                <c:pt idx="2">
+                  <c:v>N 256</c:v>
+                </c:pt>
+                <c:pt idx="3">
+                  <c:v>N 512</c:v>
+                </c:pt>
+                <c:pt idx="4">
+                  <c:v>N 1024</c:v>
+                </c:pt>
+              </c:strCache>
+            </c:strRef>
+          </c:cat>
+          <c:val>
+            <c:numRef>
+              <c:f>Foglio1!$C$2:$C$6</c:f>
+              <c:numCache>
+                <c:formatCode>General</c:formatCode>
+                <c:ptCount val="5"/>
+                <c:pt idx="0">
+                  <c:v>2.92E-2</c:v>
+                </c:pt>
+                <c:pt idx="1">
+                  <c:v>0.4672</c:v>
+                </c:pt>
+                <c:pt idx="2">
+                  <c:v>7.4752000000000001</c:v>
+                </c:pt>
+                <c:pt idx="3">
+                  <c:v>119.6032</c:v>
+                </c:pt>
+                <c:pt idx="4">
+                  <c:v>1913.6512</c:v>
+                </c:pt>
+              </c:numCache>
+            </c:numRef>
+          </c:val>
+          <c:smooth val="0"/>
+          <c:extLst>
+            <c:ext xmlns:c16="http://schemas.microsoft.com/office/drawing/2014/chart" uri="{C3380CC4-5D6E-409C-BE32-E72D297353CC}">
+              <c16:uniqueId val="{00000003-4E9A-45BC-8682-668C40769E03}"/>
+            </c:ext>
+          </c:extLst>
+        </c:ser>
+        <c:dLbls>
+          <c:dLblPos val="t"/>
+          <c:showLegendKey val="0"/>
+          <c:showVal val="1"/>
+          <c:showCatName val="0"/>
+          <c:showSerName val="0"/>
+          <c:showPercent val="0"/>
+          <c:showBubbleSize val="0"/>
+        </c:dLbls>
+        <c:marker val="1"/>
+        <c:smooth val="0"/>
+        <c:axId val="148093072"/>
+        <c:axId val="163322976"/>
+      </c:lineChart>
+      <c:catAx>
+        <c:axId val="148093072"/>
+        <c:scaling>
+          <c:orientation val="minMax"/>
+        </c:scaling>
+        <c:delete val="0"/>
+        <c:axPos val="b"/>
+        <c:majorGridlines>
+          <c:spPr>
+            <a:ln w="9525" cap="flat" cmpd="sng" algn="ctr">
+              <a:solidFill>
+                <a:schemeClr val="tx1">
+                  <a:lumMod val="15000"/>
+                  <a:lumOff val="85000"/>
+                </a:schemeClr>
+              </a:solidFill>
+              <a:round/>
+            </a:ln>
+            <a:effectLst/>
+          </c:spPr>
+        </c:majorGridlines>
+        <c:numFmt formatCode="General" sourceLinked="1"/>
+        <c:majorTickMark val="none"/>
+        <c:minorTickMark val="none"/>
+        <c:tickLblPos val="nextTo"/>
+        <c:spPr>
+          <a:noFill/>
+          <a:ln w="9525" cap="flat" cmpd="sng" algn="ctr">
+            <a:solidFill>
+              <a:schemeClr val="tx1">
+                <a:lumMod val="15000"/>
+                <a:lumOff val="85000"/>
+              </a:schemeClr>
+            </a:solidFill>
+            <a:round/>
+          </a:ln>
+          <a:effectLst/>
+        </c:spPr>
+        <c:txPr>
+          <a:bodyPr rot="-60000000" spcFirstLastPara="1" vertOverflow="ellipsis" vert="horz" wrap="square" anchor="ctr" anchorCtr="1"/>
+          <a:lstStyle/>
+          <a:p>
+            <a:pPr>
+              <a:defRPr sz="1064" b="0" i="0" u="none" strike="noStrike" kern="1200" cap="all" spc="120" normalizeH="0" baseline="0">
+                <a:solidFill>
+                  <a:schemeClr val="tx1">
+                    <a:lumMod val="65000"/>
+                    <a:lumOff val="35000"/>
+                  </a:schemeClr>
+                </a:solidFill>
+                <a:latin typeface="+mn-lt"/>
+                <a:ea typeface="+mn-ea"/>
+                <a:cs typeface="+mn-cs"/>
+              </a:defRPr>
+            </a:pPr>
+            <a:endParaRPr lang="it-IT"/>
+          </a:p>
+        </c:txPr>
+        <c:crossAx val="163322976"/>
+        <c:crossesAt val="1.0000000000000002E-2"/>
+        <c:auto val="1"/>
+        <c:lblAlgn val="ctr"/>
+        <c:lblOffset val="100"/>
+        <c:noMultiLvlLbl val="0"/>
+      </c:catAx>
+      <c:valAx>
+        <c:axId val="163322976"/>
+        <c:scaling>
+          <c:orientation val="minMax"/>
+        </c:scaling>
+        <c:delete val="0"/>
+        <c:axPos val="l"/>
+        <c:numFmt formatCode="General" sourceLinked="1"/>
+        <c:majorTickMark val="none"/>
+        <c:minorTickMark val="none"/>
+        <c:tickLblPos val="nextTo"/>
+        <c:spPr>
+          <a:noFill/>
+          <a:ln w="9525" cap="flat" cmpd="sng" algn="ctr">
+            <a:solidFill>
+              <a:schemeClr val="dk1">
+                <a:lumMod val="15000"/>
+                <a:lumOff val="85000"/>
+              </a:schemeClr>
+            </a:solidFill>
+            <a:round/>
+          </a:ln>
+          <a:effectLst/>
+        </c:spPr>
+        <c:txPr>
+          <a:bodyPr rot="-60000000" spcFirstLastPara="1" vertOverflow="ellipsis" vert="horz" wrap="square" anchor="ctr" anchorCtr="1"/>
+          <a:lstStyle/>
+          <a:p>
+            <a:pPr>
+              <a:defRPr sz="1197" b="0" i="0" u="none" strike="noStrike" kern="1200" baseline="0">
+                <a:solidFill>
+                  <a:schemeClr val="tx1">
+                    <a:lumMod val="65000"/>
+                    <a:lumOff val="35000"/>
+                  </a:schemeClr>
+                </a:solidFill>
+                <a:latin typeface="+mn-lt"/>
+                <a:ea typeface="+mn-ea"/>
+                <a:cs typeface="+mn-cs"/>
+              </a:defRPr>
+            </a:pPr>
+            <a:endParaRPr lang="it-IT"/>
+          </a:p>
+        </c:txPr>
+        <c:crossAx val="148093072"/>
+        <c:crosses val="autoZero"/>
+        <c:crossBetween val="between"/>
+      </c:valAx>
+      <c:spPr>
+        <a:noFill/>
+        <a:ln>
+          <a:noFill/>
+        </a:ln>
+        <a:effectLst/>
+      </c:spPr>
+    </c:plotArea>
+    <c:legend>
+      <c:legendPos val="t"/>
+      <c:overlay val="0"/>
+      <c:spPr>
+        <a:noFill/>
+        <a:ln>
+          <a:noFill/>
+        </a:ln>
+        <a:effectLst/>
+      </c:spPr>
+      <c:txPr>
+        <a:bodyPr rot="0" spcFirstLastPara="1" vertOverflow="ellipsis" vert="horz" wrap="square" anchor="ctr" anchorCtr="1"/>
+        <a:lstStyle/>
+        <a:p>
+          <a:pPr>
+            <a:defRPr sz="1197" b="0" i="0" u="none" strike="noStrike" kern="1200" baseline="0">
+              <a:solidFill>
+                <a:schemeClr val="tx1">
+                  <a:lumMod val="65000"/>
+                  <a:lumOff val="35000"/>
+                </a:schemeClr>
+              </a:solidFill>
+              <a:latin typeface="+mn-lt"/>
+              <a:ea typeface="+mn-ea"/>
+              <a:cs typeface="+mn-cs"/>
+            </a:defRPr>
+          </a:pPr>
+          <a:endParaRPr lang="it-IT"/>
+        </a:p>
+      </c:txPr>
+    </c:legend>
+    <c:plotVisOnly val="1"/>
+    <c:dispBlanksAs val="gap"/>
+    <c:showDLblsOverMax val="0"/>
+    <c:extLst>
+      <c:ext xmlns:c16r3="http://schemas.microsoft.com/office/drawing/2017/03/chart" uri="{56B9EC1D-385E-4148-901F-78D8002777C0}">
+        <c16r3:dataDisplayOptions16>
+          <c16r3:dispNaAsBlank val="1"/>
+        </c16r3:dataDisplayOptions16>
+      </c:ext>
+    </c:extLst>
+  </c:chart>
+  <c:spPr>
+    <a:noFill/>
+    <a:ln>
+      <a:noFill/>
+    </a:ln>
+    <a:effectLst/>
+  </c:spPr>
+  <c:txPr>
+    <a:bodyPr/>
+    <a:lstStyle/>
+    <a:p>
+      <a:pPr>
+        <a:defRPr/>
+      </a:pPr>
+      <a:endParaRPr lang="it-IT"/>
+    </a:p>
+  </c:txPr>
+  <c:externalData r:id="rId3">
+    <c:autoUpdate val="0"/>
+  </c:externalData>
+</c:chartSpace>
+</file>
+
+<file path=ppt/charts/chart2.xml><?xml version="1.0" encoding="utf-8"?>
+<c:chartSpace xmlns:c="http://schemas.openxmlformats.org/drawingml/2006/chart" xmlns:a="http://schemas.openxmlformats.org/drawingml/2006/main" xmlns:r="http://schemas.openxmlformats.org/officeDocument/2006/relationships" xmlns:c16r2="http://schemas.microsoft.com/office/drawing/2015/06/chart">
+  <c:date1904 val="0"/>
+  <c:lang val="it-IT"/>
+  <c:roundedCorners val="0"/>
+  <mc:AlternateContent xmlns:mc="http://schemas.openxmlformats.org/markup-compatibility/2006">
+    <mc:Choice xmlns:c14="http://schemas.microsoft.com/office/drawing/2007/8/2/chart" Requires="c14">
+      <c14:style val="102"/>
+    </mc:Choice>
+    <mc:Fallback>
+      <c:style val="2"/>
+    </mc:Fallback>
+  </mc:AlternateContent>
+  <c:chart>
+    <c:title>
+      <c:tx>
+        <c:rich>
+          <a:bodyPr rot="0" spcFirstLastPara="1" vertOverflow="ellipsis" vert="horz" wrap="square" anchor="ctr" anchorCtr="1"/>
+          <a:lstStyle/>
+          <a:p>
+            <a:pPr>
+              <a:defRPr sz="1862" b="0" i="0" u="none" strike="noStrike" kern="1200" spc="0" baseline="0">
+                <a:solidFill>
+                  <a:schemeClr val="tx1">
+                    <a:lumMod val="65000"/>
+                    <a:lumOff val="35000"/>
+                  </a:schemeClr>
+                </a:solidFill>
+                <a:latin typeface="+mn-lt"/>
+                <a:ea typeface="+mn-ea"/>
+                <a:cs typeface="+mn-cs"/>
+              </a:defRPr>
+            </a:pPr>
+            <a:r>
+              <a:rPr lang="it-IT" dirty="0"/>
+              <a:t>Tempi</a:t>
+            </a:r>
+          </a:p>
+        </c:rich>
+      </c:tx>
+      <c:overlay val="0"/>
+      <c:spPr>
+        <a:noFill/>
+        <a:ln>
+          <a:noFill/>
+        </a:ln>
+        <a:effectLst/>
+      </c:spPr>
+      <c:txPr>
+        <a:bodyPr rot="0" spcFirstLastPara="1" vertOverflow="ellipsis" vert="horz" wrap="square" anchor="ctr" anchorCtr="1"/>
+        <a:lstStyle/>
+        <a:p>
+          <a:pPr>
+            <a:defRPr sz="1862" b="0" i="0" u="none" strike="noStrike" kern="1200" spc="0" baseline="0">
+              <a:solidFill>
+                <a:schemeClr val="tx1">
+                  <a:lumMod val="65000"/>
+                  <a:lumOff val="35000"/>
+                </a:schemeClr>
+              </a:solidFill>
+              <a:latin typeface="+mn-lt"/>
+              <a:ea typeface="+mn-ea"/>
+              <a:cs typeface="+mn-cs"/>
+            </a:defRPr>
+          </a:pPr>
+          <a:endParaRPr lang="it-IT"/>
+        </a:p>
+      </c:txPr>
+    </c:title>
+    <c:autoTitleDeleted val="0"/>
+    <c:plotArea>
+      <c:layout/>
+      <c:lineChart>
+        <c:grouping val="standard"/>
+        <c:varyColors val="0"/>
+        <c:ser>
+          <c:idx val="0"/>
+          <c:order val="0"/>
+          <c:tx>
+            <c:strRef>
+              <c:f>Foglio1!$B$1</c:f>
+              <c:strCache>
+                <c:ptCount val="1"/>
+                <c:pt idx="0">
+                  <c:v>N 64</c:v>
+                </c:pt>
+              </c:strCache>
+            </c:strRef>
+          </c:tx>
+          <c:spPr>
+            <a:ln w="28575" cap="rnd">
+              <a:solidFill>
+                <a:schemeClr val="accent1"/>
+              </a:solidFill>
+              <a:round/>
+            </a:ln>
+            <a:effectLst/>
+          </c:spPr>
+          <c:marker>
+            <c:symbol val="circle"/>
+            <c:size val="5"/>
+            <c:spPr>
+              <a:solidFill>
+                <a:schemeClr val="accent1"/>
+              </a:solidFill>
+              <a:ln w="9525">
+                <a:solidFill>
+                  <a:schemeClr val="accent1"/>
+                </a:solidFill>
+              </a:ln>
+              <a:effectLst/>
+            </c:spPr>
+          </c:marker>
+          <c:cat>
+            <c:strRef>
+              <c:f>Foglio1!$A$2:$A$6</c:f>
+              <c:strCache>
+                <c:ptCount val="5"/>
+                <c:pt idx="0">
+                  <c:v>1P</c:v>
+                </c:pt>
+                <c:pt idx="1">
+                  <c:v>2P</c:v>
+                </c:pt>
+                <c:pt idx="2">
+                  <c:v>4P</c:v>
+                </c:pt>
+                <c:pt idx="3">
+                  <c:v>6P</c:v>
+                </c:pt>
+                <c:pt idx="4">
+                  <c:v>8P</c:v>
+                </c:pt>
+              </c:strCache>
+            </c:strRef>
+          </c:cat>
+          <c:val>
+            <c:numRef>
+              <c:f>Foglio1!$B$2:$B$6</c:f>
+              <c:numCache>
+                <c:formatCode>General</c:formatCode>
+                <c:ptCount val="5"/>
+                <c:pt idx="0">
+                  <c:v>3.2399999999999998E-2</c:v>
+                </c:pt>
+                <c:pt idx="1">
+                  <c:v>2.3E-2</c:v>
+                </c:pt>
+                <c:pt idx="2">
+                  <c:v>2.7400000000000001E-2</c:v>
+                </c:pt>
+                <c:pt idx="3">
+                  <c:v>3.6700000000000003E-2</c:v>
+                </c:pt>
+                <c:pt idx="4">
+                  <c:v>4.3499999999999997E-2</c:v>
+                </c:pt>
+              </c:numCache>
+            </c:numRef>
+          </c:val>
+          <c:smooth val="0"/>
+          <c:extLst>
+            <c:ext xmlns:c16="http://schemas.microsoft.com/office/drawing/2014/chart" uri="{C3380CC4-5D6E-409C-BE32-E72D297353CC}">
+              <c16:uniqueId val="{00000000-E126-4A07-9811-EC39CEB3B034}"/>
+            </c:ext>
+          </c:extLst>
+        </c:ser>
+        <c:ser>
+          <c:idx val="1"/>
+          <c:order val="1"/>
+          <c:tx>
+            <c:strRef>
+              <c:f>Foglio1!$C$1</c:f>
+              <c:strCache>
+                <c:ptCount val="1"/>
+                <c:pt idx="0">
+                  <c:v>N 128</c:v>
+                </c:pt>
+              </c:strCache>
+            </c:strRef>
+          </c:tx>
+          <c:spPr>
+            <a:ln w="28575" cap="rnd">
+              <a:solidFill>
+                <a:schemeClr val="accent2"/>
+              </a:solidFill>
+              <a:round/>
+            </a:ln>
+            <a:effectLst/>
+          </c:spPr>
+          <c:marker>
+            <c:symbol val="circle"/>
+            <c:size val="5"/>
+            <c:spPr>
+              <a:solidFill>
+                <a:schemeClr val="accent2"/>
+              </a:solidFill>
+              <a:ln w="9525">
+                <a:solidFill>
+                  <a:schemeClr val="accent2"/>
+                </a:solidFill>
+              </a:ln>
+              <a:effectLst/>
+            </c:spPr>
+          </c:marker>
+          <c:cat>
+            <c:strRef>
+              <c:f>Foglio1!$A$2:$A$6</c:f>
+              <c:strCache>
+                <c:ptCount val="5"/>
+                <c:pt idx="0">
+                  <c:v>1P</c:v>
+                </c:pt>
+                <c:pt idx="1">
+                  <c:v>2P</c:v>
+                </c:pt>
+                <c:pt idx="2">
+                  <c:v>4P</c:v>
+                </c:pt>
+                <c:pt idx="3">
+                  <c:v>6P</c:v>
+                </c:pt>
+                <c:pt idx="4">
+                  <c:v>8P</c:v>
+                </c:pt>
+              </c:strCache>
+            </c:strRef>
+          </c:cat>
+          <c:val>
+            <c:numRef>
+              <c:f>Foglio1!$C$2:$C$6</c:f>
+              <c:numCache>
+                <c:formatCode>General</c:formatCode>
+                <c:ptCount val="5"/>
+                <c:pt idx="0">
+                  <c:v>0.46789999999999998</c:v>
+                </c:pt>
+                <c:pt idx="1">
+                  <c:v>0.26119999999999999</c:v>
+                </c:pt>
+                <c:pt idx="2">
+                  <c:v>0.20019999999999999</c:v>
+                </c:pt>
+                <c:pt idx="3">
+                  <c:v>0.19070000000000001</c:v>
+                </c:pt>
+                <c:pt idx="4">
+                  <c:v>0.26939999999999997</c:v>
+                </c:pt>
+              </c:numCache>
+            </c:numRef>
+          </c:val>
+          <c:smooth val="0"/>
+          <c:extLst>
+            <c:ext xmlns:c16="http://schemas.microsoft.com/office/drawing/2014/chart" uri="{C3380CC4-5D6E-409C-BE32-E72D297353CC}">
+              <c16:uniqueId val="{00000003-E126-4A07-9811-EC39CEB3B034}"/>
+            </c:ext>
+          </c:extLst>
+        </c:ser>
+        <c:ser>
+          <c:idx val="2"/>
+          <c:order val="2"/>
+          <c:tx>
+            <c:strRef>
+              <c:f>Foglio1!$D$1</c:f>
+              <c:strCache>
+                <c:ptCount val="1"/>
+                <c:pt idx="0">
+                  <c:v>N 256</c:v>
+                </c:pt>
+              </c:strCache>
+            </c:strRef>
+          </c:tx>
+          <c:spPr>
+            <a:ln w="28575" cap="rnd">
+              <a:solidFill>
+                <a:schemeClr val="accent3"/>
+              </a:solidFill>
+              <a:round/>
+            </a:ln>
+            <a:effectLst/>
+          </c:spPr>
+          <c:marker>
+            <c:symbol val="circle"/>
+            <c:size val="5"/>
+            <c:spPr>
+              <a:solidFill>
+                <a:schemeClr val="accent3"/>
+              </a:solidFill>
+              <a:ln w="9525">
+                <a:solidFill>
+                  <a:schemeClr val="accent3"/>
+                </a:solidFill>
+              </a:ln>
+              <a:effectLst/>
+            </c:spPr>
+          </c:marker>
+          <c:cat>
+            <c:strRef>
+              <c:f>Foglio1!$A$2:$A$6</c:f>
+              <c:strCache>
+                <c:ptCount val="5"/>
+                <c:pt idx="0">
+                  <c:v>1P</c:v>
+                </c:pt>
+                <c:pt idx="1">
+                  <c:v>2P</c:v>
+                </c:pt>
+                <c:pt idx="2">
+                  <c:v>4P</c:v>
+                </c:pt>
+                <c:pt idx="3">
+                  <c:v>6P</c:v>
+                </c:pt>
+                <c:pt idx="4">
+                  <c:v>8P</c:v>
+                </c:pt>
+              </c:strCache>
+            </c:strRef>
+          </c:cat>
+          <c:val>
+            <c:numRef>
+              <c:f>Foglio1!$D$2:$D$6</c:f>
+              <c:numCache>
+                <c:formatCode>#,##0</c:formatCode>
+                <c:ptCount val="5"/>
+                <c:pt idx="0">
+                  <c:v>7.1218000000000004</c:v>
+                </c:pt>
+                <c:pt idx="1">
+                  <c:v>3.8228</c:v>
+                </c:pt>
+                <c:pt idx="2" formatCode="General">
+                  <c:v>2.4794999999999998</c:v>
+                </c:pt>
+                <c:pt idx="3" formatCode="General">
+                  <c:v>2.0785999999999998</c:v>
+                </c:pt>
+                <c:pt idx="4">
+                  <c:v>2.9129999999999998</c:v>
+                </c:pt>
+              </c:numCache>
+            </c:numRef>
+          </c:val>
+          <c:smooth val="0"/>
+          <c:extLst>
+            <c:ext xmlns:c16="http://schemas.microsoft.com/office/drawing/2014/chart" uri="{C3380CC4-5D6E-409C-BE32-E72D297353CC}">
+              <c16:uniqueId val="{00000004-E126-4A07-9811-EC39CEB3B034}"/>
+            </c:ext>
+          </c:extLst>
+        </c:ser>
+        <c:ser>
+          <c:idx val="3"/>
+          <c:order val="3"/>
+          <c:tx>
+            <c:strRef>
+              <c:f>Foglio1!$E$1</c:f>
+              <c:strCache>
+                <c:ptCount val="1"/>
+                <c:pt idx="0">
+                  <c:v>N 512</c:v>
+                </c:pt>
+              </c:strCache>
+            </c:strRef>
+          </c:tx>
+          <c:spPr>
+            <a:ln w="28575" cap="rnd">
+              <a:solidFill>
+                <a:schemeClr val="accent4"/>
+              </a:solidFill>
+              <a:round/>
+            </a:ln>
+            <a:effectLst/>
+          </c:spPr>
+          <c:marker>
+            <c:symbol val="circle"/>
+            <c:size val="5"/>
+            <c:spPr>
+              <a:solidFill>
+                <a:schemeClr val="accent4"/>
+              </a:solidFill>
+              <a:ln w="9525">
+                <a:solidFill>
+                  <a:schemeClr val="accent4"/>
+                </a:solidFill>
+              </a:ln>
+              <a:effectLst/>
+            </c:spPr>
+          </c:marker>
+          <c:cat>
+            <c:strRef>
+              <c:f>Foglio1!$A$2:$A$6</c:f>
+              <c:strCache>
+                <c:ptCount val="5"/>
+                <c:pt idx="0">
+                  <c:v>1P</c:v>
+                </c:pt>
+                <c:pt idx="1">
+                  <c:v>2P</c:v>
+                </c:pt>
+                <c:pt idx="2">
+                  <c:v>4P</c:v>
+                </c:pt>
+                <c:pt idx="3">
+                  <c:v>6P</c:v>
+                </c:pt>
+                <c:pt idx="4">
+                  <c:v>8P</c:v>
+                </c:pt>
+              </c:strCache>
+            </c:strRef>
+          </c:cat>
+          <c:val>
+            <c:numRef>
+              <c:f>Foglio1!$E$2:$E$6</c:f>
+              <c:numCache>
+                <c:formatCode>General</c:formatCode>
+                <c:ptCount val="5"/>
+                <c:pt idx="0">
+                  <c:v>122.0479</c:v>
+                </c:pt>
+                <c:pt idx="1">
+                  <c:v>63.9861</c:v>
+                </c:pt>
+                <c:pt idx="2" formatCode="#,##0">
+                  <c:v>37.343000000000004</c:v>
+                </c:pt>
+                <c:pt idx="3" formatCode="#,##0">
+                  <c:v>30.943200000000001</c:v>
+                </c:pt>
+                <c:pt idx="4">
+                  <c:v>44.939799999999998</c:v>
+                </c:pt>
+              </c:numCache>
+            </c:numRef>
+          </c:val>
+          <c:smooth val="0"/>
+          <c:extLst>
+            <c:ext xmlns:c16="http://schemas.microsoft.com/office/drawing/2014/chart" uri="{C3380CC4-5D6E-409C-BE32-E72D297353CC}">
+              <c16:uniqueId val="{00000005-E126-4A07-9811-EC39CEB3B034}"/>
+            </c:ext>
+          </c:extLst>
+        </c:ser>
+        <c:dLbls>
+          <c:dLblPos val="ctr"/>
+          <c:showLegendKey val="0"/>
+          <c:showVal val="0"/>
+          <c:showCatName val="0"/>
+          <c:showSerName val="0"/>
+          <c:showPercent val="0"/>
+          <c:showBubbleSize val="0"/>
+        </c:dLbls>
+        <c:marker val="1"/>
+        <c:smooth val="0"/>
+        <c:axId val="352876720"/>
+        <c:axId val="351642016"/>
+      </c:lineChart>
+      <c:catAx>
+        <c:axId val="352876720"/>
+        <c:scaling>
+          <c:orientation val="minMax"/>
+        </c:scaling>
+        <c:delete val="0"/>
+        <c:axPos val="b"/>
+        <c:numFmt formatCode="General" sourceLinked="1"/>
+        <c:majorTickMark val="none"/>
+        <c:minorTickMark val="none"/>
+        <c:tickLblPos val="nextTo"/>
+        <c:spPr>
+          <a:noFill/>
+          <a:ln w="9525" cap="flat" cmpd="sng" algn="ctr">
+            <a:solidFill>
+              <a:schemeClr val="tx1">
+                <a:lumMod val="15000"/>
+                <a:lumOff val="85000"/>
+              </a:schemeClr>
+            </a:solidFill>
+            <a:round/>
+          </a:ln>
+          <a:effectLst/>
+        </c:spPr>
+        <c:txPr>
+          <a:bodyPr rot="-60000000" spcFirstLastPara="1" vertOverflow="ellipsis" vert="horz" wrap="square" anchor="ctr" anchorCtr="1"/>
+          <a:lstStyle/>
+          <a:p>
+            <a:pPr>
+              <a:defRPr sz="1197" b="0" i="0" u="none" strike="noStrike" kern="1200" baseline="0">
+                <a:solidFill>
+                  <a:schemeClr val="tx1">
+                    <a:lumMod val="65000"/>
+                    <a:lumOff val="35000"/>
+                  </a:schemeClr>
+                </a:solidFill>
+                <a:latin typeface="+mn-lt"/>
+                <a:ea typeface="+mn-ea"/>
+                <a:cs typeface="+mn-cs"/>
+              </a:defRPr>
+            </a:pPr>
+            <a:endParaRPr lang="it-IT"/>
+          </a:p>
+        </c:txPr>
+        <c:crossAx val="351642016"/>
+        <c:crossesAt val="1.0000000000000002E-2"/>
+        <c:auto val="1"/>
+        <c:lblAlgn val="ctr"/>
+        <c:lblOffset val="100"/>
+        <c:noMultiLvlLbl val="0"/>
+      </c:catAx>
+      <c:valAx>
+        <c:axId val="351642016"/>
+        <c:scaling>
+          <c:logBase val="10"/>
+          <c:orientation val="minMax"/>
+        </c:scaling>
+        <c:delete val="0"/>
+        <c:axPos val="l"/>
+        <c:majorGridlines>
+          <c:spPr>
+            <a:ln w="9525" cap="flat" cmpd="sng" algn="ctr">
+              <a:solidFill>
+                <a:schemeClr val="tx1">
+                  <a:lumMod val="15000"/>
+                  <a:lumOff val="85000"/>
+                </a:schemeClr>
+              </a:solidFill>
+              <a:round/>
+            </a:ln>
+            <a:effectLst/>
+          </c:spPr>
+        </c:majorGridlines>
+        <c:title>
+          <c:tx>
+            <c:rich>
+              <a:bodyPr rot="-5400000" spcFirstLastPara="1" vertOverflow="ellipsis" vert="horz" wrap="square" anchor="ctr" anchorCtr="1"/>
+              <a:lstStyle/>
+              <a:p>
+                <a:pPr>
+                  <a:defRPr sz="1330" b="0" i="0" u="none" strike="noStrike" kern="1200" baseline="0">
+                    <a:solidFill>
+                      <a:schemeClr val="tx1">
+                        <a:lumMod val="65000"/>
+                        <a:lumOff val="35000"/>
+                      </a:schemeClr>
+                    </a:solidFill>
+                    <a:latin typeface="+mn-lt"/>
+                    <a:ea typeface="+mn-ea"/>
+                    <a:cs typeface="+mn-cs"/>
+                  </a:defRPr>
+                </a:pPr>
+                <a:r>
+                  <a:rPr lang="it-IT" dirty="0"/>
+                  <a:t>Secondi</a:t>
+                </a:r>
+              </a:p>
+            </c:rich>
+          </c:tx>
+          <c:overlay val="0"/>
+          <c:spPr>
+            <a:noFill/>
+            <a:ln>
+              <a:noFill/>
+            </a:ln>
+            <a:effectLst/>
+          </c:spPr>
+          <c:txPr>
+            <a:bodyPr rot="-5400000" spcFirstLastPara="1" vertOverflow="ellipsis" vert="horz" wrap="square" anchor="ctr" anchorCtr="1"/>
+            <a:lstStyle/>
+            <a:p>
+              <a:pPr>
+                <a:defRPr sz="1330" b="0" i="0" u="none" strike="noStrike" kern="1200" baseline="0">
+                  <a:solidFill>
+                    <a:schemeClr val="tx1">
+                      <a:lumMod val="65000"/>
+                      <a:lumOff val="35000"/>
+                    </a:schemeClr>
+                  </a:solidFill>
+                  <a:latin typeface="+mn-lt"/>
+                  <a:ea typeface="+mn-ea"/>
+                  <a:cs typeface="+mn-cs"/>
+                </a:defRPr>
+              </a:pPr>
+              <a:endParaRPr lang="it-IT"/>
+            </a:p>
+          </c:txPr>
+        </c:title>
+        <c:numFmt formatCode="General" sourceLinked="1"/>
+        <c:majorTickMark val="none"/>
+        <c:minorTickMark val="none"/>
+        <c:tickLblPos val="nextTo"/>
+        <c:spPr>
+          <a:noFill/>
+          <a:ln>
+            <a:noFill/>
+          </a:ln>
+          <a:effectLst/>
+        </c:spPr>
+        <c:txPr>
+          <a:bodyPr rot="-60000000" spcFirstLastPara="1" vertOverflow="ellipsis" vert="horz" wrap="square" anchor="ctr" anchorCtr="1"/>
+          <a:lstStyle/>
+          <a:p>
+            <a:pPr>
+              <a:defRPr sz="1197" b="0" i="0" u="none" strike="noStrike" kern="1200" baseline="0">
+                <a:solidFill>
+                  <a:schemeClr val="tx1">
+                    <a:lumMod val="65000"/>
+                    <a:lumOff val="35000"/>
+                  </a:schemeClr>
+                </a:solidFill>
+                <a:latin typeface="+mn-lt"/>
+                <a:ea typeface="+mn-ea"/>
+                <a:cs typeface="+mn-cs"/>
+              </a:defRPr>
+            </a:pPr>
+            <a:endParaRPr lang="it-IT"/>
+          </a:p>
+        </c:txPr>
+        <c:crossAx val="352876720"/>
+        <c:crosses val="autoZero"/>
+        <c:crossBetween val="between"/>
+      </c:valAx>
+      <c:spPr>
+        <a:noFill/>
+        <a:ln>
+          <a:noFill/>
+        </a:ln>
+        <a:effectLst/>
+      </c:spPr>
+    </c:plotArea>
+    <c:legend>
+      <c:legendPos val="r"/>
+      <c:overlay val="0"/>
+      <c:spPr>
+        <a:noFill/>
+        <a:ln>
+          <a:noFill/>
+        </a:ln>
+        <a:effectLst/>
+      </c:spPr>
+      <c:txPr>
+        <a:bodyPr rot="0" spcFirstLastPara="1" vertOverflow="ellipsis" vert="horz" wrap="square" anchor="ctr" anchorCtr="1"/>
+        <a:lstStyle/>
+        <a:p>
+          <a:pPr>
+            <a:defRPr sz="1197" b="0" i="0" u="none" strike="noStrike" kern="1200" baseline="0">
+              <a:solidFill>
+                <a:schemeClr val="tx1">
+                  <a:lumMod val="65000"/>
+                  <a:lumOff val="35000"/>
+                </a:schemeClr>
+              </a:solidFill>
+              <a:latin typeface="+mn-lt"/>
+              <a:ea typeface="+mn-ea"/>
+              <a:cs typeface="+mn-cs"/>
+            </a:defRPr>
+          </a:pPr>
+          <a:endParaRPr lang="it-IT"/>
+        </a:p>
+      </c:txPr>
+    </c:legend>
+    <c:plotVisOnly val="1"/>
+    <c:dispBlanksAs val="gap"/>
+    <c:showDLblsOverMax val="0"/>
+    <c:extLst>
+      <c:ext xmlns:c16r3="http://schemas.microsoft.com/office/drawing/2017/03/chart" uri="{56B9EC1D-385E-4148-901F-78D8002777C0}">
+        <c16r3:dataDisplayOptions16>
+          <c16r3:dispNaAsBlank val="1"/>
+        </c16r3:dataDisplayOptions16>
+      </c:ext>
+    </c:extLst>
+  </c:chart>
+  <c:spPr>
+    <a:noFill/>
+    <a:ln>
+      <a:noFill/>
+    </a:ln>
+    <a:effectLst/>
+  </c:spPr>
+  <c:txPr>
+    <a:bodyPr/>
+    <a:lstStyle/>
+    <a:p>
+      <a:pPr>
+        <a:defRPr/>
+      </a:pPr>
+      <a:endParaRPr lang="it-IT"/>
+    </a:p>
+  </c:txPr>
+  <c:externalData r:id="rId3">
+    <c:autoUpdate val="0"/>
+  </c:externalData>
+</c:chartSpace>
+</file>
+
+<file path=ppt/charts/chart3.xml><?xml version="1.0" encoding="utf-8"?>
+<c:chartSpace xmlns:c="http://schemas.openxmlformats.org/drawingml/2006/chart" xmlns:a="http://schemas.openxmlformats.org/drawingml/2006/main" xmlns:r="http://schemas.openxmlformats.org/officeDocument/2006/relationships" xmlns:c16r2="http://schemas.microsoft.com/office/drawing/2015/06/chart">
+  <c:date1904 val="0"/>
+  <c:lang val="it-IT"/>
+  <c:roundedCorners val="0"/>
+  <mc:AlternateContent xmlns:mc="http://schemas.openxmlformats.org/markup-compatibility/2006">
+    <mc:Choice xmlns:c14="http://schemas.microsoft.com/office/drawing/2007/8/2/chart" Requires="c14">
+      <c14:style val="102"/>
+    </mc:Choice>
+    <mc:Fallback>
+      <c:style val="2"/>
+    </mc:Fallback>
+  </mc:AlternateContent>
+  <c:chart>
+    <c:title>
+      <c:tx>
+        <c:rich>
+          <a:bodyPr rot="0" spcFirstLastPara="1" vertOverflow="ellipsis" vert="horz" wrap="square" anchor="ctr" anchorCtr="1"/>
+          <a:lstStyle/>
+          <a:p>
+            <a:pPr>
+              <a:defRPr sz="1862" b="0" i="0" u="none" strike="noStrike" kern="1200" spc="0" baseline="0">
+                <a:solidFill>
+                  <a:schemeClr val="tx1">
+                    <a:lumMod val="65000"/>
+                    <a:lumOff val="35000"/>
+                  </a:schemeClr>
+                </a:solidFill>
+                <a:latin typeface="+mn-lt"/>
+                <a:ea typeface="+mn-ea"/>
+                <a:cs typeface="+mn-cs"/>
+              </a:defRPr>
+            </a:pPr>
+            <a:r>
+              <a:rPr lang="en-US" noProof="0" dirty="0"/>
+              <a:t>Speed</a:t>
+            </a:r>
+            <a:r>
+              <a:rPr lang="en-US" baseline="0" noProof="0" dirty="0"/>
+              <a:t>up</a:t>
+            </a:r>
+          </a:p>
+        </c:rich>
+      </c:tx>
+      <c:overlay val="0"/>
+      <c:spPr>
+        <a:noFill/>
+        <a:ln>
+          <a:noFill/>
+        </a:ln>
+        <a:effectLst/>
+      </c:spPr>
+      <c:txPr>
+        <a:bodyPr rot="0" spcFirstLastPara="1" vertOverflow="ellipsis" vert="horz" wrap="square" anchor="ctr" anchorCtr="1"/>
+        <a:lstStyle/>
+        <a:p>
+          <a:pPr>
+            <a:defRPr sz="1862" b="0" i="0" u="none" strike="noStrike" kern="1200" spc="0" baseline="0">
+              <a:solidFill>
+                <a:schemeClr val="tx1">
+                  <a:lumMod val="65000"/>
+                  <a:lumOff val="35000"/>
+                </a:schemeClr>
+              </a:solidFill>
+              <a:latin typeface="+mn-lt"/>
+              <a:ea typeface="+mn-ea"/>
+              <a:cs typeface="+mn-cs"/>
+            </a:defRPr>
+          </a:pPr>
+          <a:endParaRPr lang="it-IT"/>
+        </a:p>
+      </c:txPr>
+    </c:title>
+    <c:autoTitleDeleted val="0"/>
+    <c:plotArea>
+      <c:layout/>
+      <c:lineChart>
+        <c:grouping val="standard"/>
+        <c:varyColors val="0"/>
+        <c:ser>
+          <c:idx val="0"/>
+          <c:order val="0"/>
+          <c:tx>
+            <c:strRef>
+              <c:f>Foglio1!$B$1</c:f>
+              <c:strCache>
+                <c:ptCount val="1"/>
+                <c:pt idx="0">
+                  <c:v>N 64</c:v>
+                </c:pt>
+              </c:strCache>
+            </c:strRef>
+          </c:tx>
+          <c:spPr>
+            <a:ln w="28575" cap="rnd">
+              <a:solidFill>
+                <a:schemeClr val="accent1"/>
+              </a:solidFill>
+              <a:round/>
+            </a:ln>
+            <a:effectLst/>
+          </c:spPr>
+          <c:marker>
+            <c:symbol val="circle"/>
+            <c:size val="5"/>
+            <c:spPr>
+              <a:solidFill>
+                <a:schemeClr val="accent1"/>
+              </a:solidFill>
+              <a:ln w="9525">
+                <a:solidFill>
+                  <a:schemeClr val="accent1"/>
+                </a:solidFill>
+              </a:ln>
+              <a:effectLst/>
+            </c:spPr>
+          </c:marker>
+          <c:cat>
+            <c:strRef>
+              <c:f>Foglio1!$A$2:$A$6</c:f>
+              <c:strCache>
+                <c:ptCount val="5"/>
+                <c:pt idx="0">
+                  <c:v>1P</c:v>
+                </c:pt>
+                <c:pt idx="1">
+                  <c:v>2P</c:v>
+                </c:pt>
+                <c:pt idx="2">
+                  <c:v>4P</c:v>
+                </c:pt>
+                <c:pt idx="3">
+                  <c:v>6P</c:v>
+                </c:pt>
+                <c:pt idx="4">
+                  <c:v>8P</c:v>
+                </c:pt>
+              </c:strCache>
+            </c:strRef>
+          </c:cat>
+          <c:val>
+            <c:numRef>
+              <c:f>Foglio1!$B$2:$B$6</c:f>
+              <c:numCache>
+                <c:formatCode>General</c:formatCode>
+                <c:ptCount val="5"/>
+                <c:pt idx="0">
+                  <c:v>0.9</c:v>
+                </c:pt>
+                <c:pt idx="1">
+                  <c:v>1.26</c:v>
+                </c:pt>
+                <c:pt idx="2">
+                  <c:v>1.06</c:v>
+                </c:pt>
+                <c:pt idx="3">
+                  <c:v>0.79</c:v>
+                </c:pt>
+                <c:pt idx="4">
+                  <c:v>0.67</c:v>
+                </c:pt>
+              </c:numCache>
+            </c:numRef>
+          </c:val>
+          <c:smooth val="0"/>
+          <c:extLst>
+            <c:ext xmlns:c16="http://schemas.microsoft.com/office/drawing/2014/chart" uri="{C3380CC4-5D6E-409C-BE32-E72D297353CC}">
+              <c16:uniqueId val="{00000000-125B-4236-80F3-41BCFC5D0C76}"/>
+            </c:ext>
+          </c:extLst>
+        </c:ser>
+        <c:ser>
+          <c:idx val="1"/>
+          <c:order val="1"/>
+          <c:tx>
+            <c:strRef>
+              <c:f>Foglio1!$C$1</c:f>
+              <c:strCache>
+                <c:ptCount val="1"/>
+                <c:pt idx="0">
+                  <c:v>N 128</c:v>
+                </c:pt>
+              </c:strCache>
+            </c:strRef>
+          </c:tx>
+          <c:spPr>
+            <a:ln w="28575" cap="rnd">
+              <a:solidFill>
+                <a:schemeClr val="accent2"/>
+              </a:solidFill>
+              <a:round/>
+            </a:ln>
+            <a:effectLst/>
+          </c:spPr>
+          <c:marker>
+            <c:symbol val="circle"/>
+            <c:size val="5"/>
+            <c:spPr>
+              <a:solidFill>
+                <a:schemeClr val="accent2"/>
+              </a:solidFill>
+              <a:ln w="9525">
+                <a:solidFill>
+                  <a:schemeClr val="accent2"/>
+                </a:solidFill>
+              </a:ln>
+              <a:effectLst/>
+            </c:spPr>
+          </c:marker>
+          <c:cat>
+            <c:strRef>
+              <c:f>Foglio1!$A$2:$A$6</c:f>
+              <c:strCache>
+                <c:ptCount val="5"/>
+                <c:pt idx="0">
+                  <c:v>1P</c:v>
+                </c:pt>
+                <c:pt idx="1">
+                  <c:v>2P</c:v>
+                </c:pt>
+                <c:pt idx="2">
+                  <c:v>4P</c:v>
+                </c:pt>
+                <c:pt idx="3">
+                  <c:v>6P</c:v>
+                </c:pt>
+                <c:pt idx="4">
+                  <c:v>8P</c:v>
+                </c:pt>
+              </c:strCache>
+            </c:strRef>
+          </c:cat>
+          <c:val>
+            <c:numRef>
+              <c:f>Foglio1!$C$2:$C$6</c:f>
+              <c:numCache>
+                <c:formatCode>General</c:formatCode>
+                <c:ptCount val="5"/>
+                <c:pt idx="0">
+                  <c:v>1.04</c:v>
+                </c:pt>
+                <c:pt idx="1">
+                  <c:v>1.87</c:v>
+                </c:pt>
+                <c:pt idx="2">
+                  <c:v>2.44</c:v>
+                </c:pt>
+                <c:pt idx="3">
+                  <c:v>2.56</c:v>
+                </c:pt>
+                <c:pt idx="4">
+                  <c:v>1.81</c:v>
+                </c:pt>
+              </c:numCache>
+            </c:numRef>
+          </c:val>
+          <c:smooth val="0"/>
+          <c:extLst>
+            <c:ext xmlns:c16="http://schemas.microsoft.com/office/drawing/2014/chart" uri="{C3380CC4-5D6E-409C-BE32-E72D297353CC}">
+              <c16:uniqueId val="{00000001-125B-4236-80F3-41BCFC5D0C76}"/>
+            </c:ext>
+          </c:extLst>
+        </c:ser>
+        <c:ser>
+          <c:idx val="2"/>
+          <c:order val="2"/>
+          <c:tx>
+            <c:strRef>
+              <c:f>Foglio1!$D$1</c:f>
+              <c:strCache>
+                <c:ptCount val="1"/>
+                <c:pt idx="0">
+                  <c:v>N 256</c:v>
+                </c:pt>
+              </c:strCache>
+            </c:strRef>
+          </c:tx>
+          <c:spPr>
+            <a:ln w="28575" cap="rnd">
+              <a:solidFill>
+                <a:schemeClr val="accent3"/>
+              </a:solidFill>
+              <a:round/>
+            </a:ln>
+            <a:effectLst/>
+          </c:spPr>
+          <c:marker>
+            <c:symbol val="circle"/>
+            <c:size val="5"/>
+            <c:spPr>
+              <a:solidFill>
+                <a:schemeClr val="accent3"/>
+              </a:solidFill>
+              <a:ln w="9525">
+                <a:solidFill>
+                  <a:schemeClr val="accent3"/>
+                </a:solidFill>
+              </a:ln>
+              <a:effectLst/>
+            </c:spPr>
+          </c:marker>
+          <c:cat>
+            <c:strRef>
+              <c:f>Foglio1!$A$2:$A$6</c:f>
+              <c:strCache>
+                <c:ptCount val="5"/>
+                <c:pt idx="0">
+                  <c:v>1P</c:v>
+                </c:pt>
+                <c:pt idx="1">
+                  <c:v>2P</c:v>
+                </c:pt>
+                <c:pt idx="2">
+                  <c:v>4P</c:v>
+                </c:pt>
+                <c:pt idx="3">
+                  <c:v>6P</c:v>
+                </c:pt>
+                <c:pt idx="4">
+                  <c:v>8P</c:v>
+                </c:pt>
+              </c:strCache>
+            </c:strRef>
+          </c:cat>
+          <c:val>
+            <c:numRef>
+              <c:f>Foglio1!$D$2:$D$6</c:f>
+              <c:numCache>
+                <c:formatCode>General</c:formatCode>
+                <c:ptCount val="5"/>
+                <c:pt idx="0">
+                  <c:v>0.99</c:v>
+                </c:pt>
+                <c:pt idx="1">
+                  <c:v>1.84</c:v>
+                </c:pt>
+                <c:pt idx="2">
+                  <c:v>2.83</c:v>
+                </c:pt>
+                <c:pt idx="3">
+                  <c:v>3.38</c:v>
+                </c:pt>
+                <c:pt idx="4">
+                  <c:v>2.41</c:v>
+                </c:pt>
+              </c:numCache>
+            </c:numRef>
+          </c:val>
+          <c:smooth val="0"/>
+          <c:extLst>
+            <c:ext xmlns:c16="http://schemas.microsoft.com/office/drawing/2014/chart" uri="{C3380CC4-5D6E-409C-BE32-E72D297353CC}">
+              <c16:uniqueId val="{00000002-125B-4236-80F3-41BCFC5D0C76}"/>
+            </c:ext>
+          </c:extLst>
+        </c:ser>
+        <c:ser>
+          <c:idx val="3"/>
+          <c:order val="3"/>
+          <c:tx>
+            <c:strRef>
+              <c:f>Foglio1!$E$1</c:f>
+              <c:strCache>
+                <c:ptCount val="1"/>
+                <c:pt idx="0">
+                  <c:v>N 512</c:v>
+                </c:pt>
+              </c:strCache>
+            </c:strRef>
+          </c:tx>
+          <c:spPr>
+            <a:ln w="28575" cap="rnd">
+              <a:solidFill>
+                <a:schemeClr val="accent4"/>
+              </a:solidFill>
+              <a:round/>
+            </a:ln>
+            <a:effectLst/>
+          </c:spPr>
+          <c:marker>
+            <c:symbol val="circle"/>
+            <c:size val="5"/>
+            <c:spPr>
+              <a:solidFill>
+                <a:schemeClr val="accent4"/>
+              </a:solidFill>
+              <a:ln w="9525">
+                <a:solidFill>
+                  <a:schemeClr val="accent4"/>
+                </a:solidFill>
+              </a:ln>
+              <a:effectLst/>
+            </c:spPr>
+          </c:marker>
+          <c:cat>
+            <c:strRef>
+              <c:f>Foglio1!$A$2:$A$6</c:f>
+              <c:strCache>
+                <c:ptCount val="5"/>
+                <c:pt idx="0">
+                  <c:v>1P</c:v>
+                </c:pt>
+                <c:pt idx="1">
+                  <c:v>2P</c:v>
+                </c:pt>
+                <c:pt idx="2">
+                  <c:v>4P</c:v>
+                </c:pt>
+                <c:pt idx="3">
+                  <c:v>6P</c:v>
+                </c:pt>
+                <c:pt idx="4">
+                  <c:v>8P</c:v>
+                </c:pt>
+              </c:strCache>
+            </c:strRef>
+          </c:cat>
+          <c:val>
+            <c:numRef>
+              <c:f>Foglio1!$E$2:$E$6</c:f>
+              <c:numCache>
+                <c:formatCode>General</c:formatCode>
+                <c:ptCount val="5"/>
+                <c:pt idx="0">
+                  <c:v>0.97</c:v>
+                </c:pt>
+                <c:pt idx="1">
+                  <c:v>1.85</c:v>
+                </c:pt>
+                <c:pt idx="2">
+                  <c:v>3.18</c:v>
+                </c:pt>
+                <c:pt idx="3">
+                  <c:v>3.83</c:v>
+                </c:pt>
+                <c:pt idx="4">
+                  <c:v>2.64</c:v>
+                </c:pt>
+              </c:numCache>
+            </c:numRef>
+          </c:val>
+          <c:smooth val="0"/>
+          <c:extLst>
+            <c:ext xmlns:c16="http://schemas.microsoft.com/office/drawing/2014/chart" uri="{C3380CC4-5D6E-409C-BE32-E72D297353CC}">
+              <c16:uniqueId val="{00000003-125B-4236-80F3-41BCFC5D0C76}"/>
+            </c:ext>
+          </c:extLst>
+        </c:ser>
+        <c:dLbls>
+          <c:showLegendKey val="0"/>
+          <c:showVal val="0"/>
+          <c:showCatName val="0"/>
+          <c:showSerName val="0"/>
+          <c:showPercent val="0"/>
+          <c:showBubbleSize val="0"/>
+        </c:dLbls>
+        <c:marker val="1"/>
+        <c:smooth val="0"/>
+        <c:axId val="455103296"/>
+        <c:axId val="351644896"/>
+      </c:lineChart>
+      <c:catAx>
+        <c:axId val="455103296"/>
+        <c:scaling>
+          <c:orientation val="minMax"/>
+        </c:scaling>
+        <c:delete val="0"/>
+        <c:axPos val="b"/>
+        <c:numFmt formatCode="General" sourceLinked="1"/>
+        <c:majorTickMark val="none"/>
+        <c:minorTickMark val="none"/>
+        <c:tickLblPos val="nextTo"/>
+        <c:spPr>
+          <a:noFill/>
+          <a:ln w="9525" cap="flat" cmpd="sng" algn="ctr">
+            <a:solidFill>
+              <a:schemeClr val="tx1">
+                <a:lumMod val="15000"/>
+                <a:lumOff val="85000"/>
+              </a:schemeClr>
+            </a:solidFill>
+            <a:round/>
+          </a:ln>
+          <a:effectLst/>
+        </c:spPr>
+        <c:txPr>
+          <a:bodyPr rot="-60000000" spcFirstLastPara="1" vertOverflow="ellipsis" vert="horz" wrap="square" anchor="ctr" anchorCtr="1"/>
+          <a:lstStyle/>
+          <a:p>
+            <a:pPr>
+              <a:defRPr sz="1197" b="0" i="0" u="none" strike="noStrike" kern="1200" baseline="0">
+                <a:solidFill>
+                  <a:schemeClr val="tx1">
+                    <a:lumMod val="65000"/>
+                    <a:lumOff val="35000"/>
+                  </a:schemeClr>
+                </a:solidFill>
+                <a:latin typeface="+mn-lt"/>
+                <a:ea typeface="+mn-ea"/>
+                <a:cs typeface="+mn-cs"/>
+              </a:defRPr>
+            </a:pPr>
+            <a:endParaRPr lang="it-IT"/>
+          </a:p>
+        </c:txPr>
+        <c:crossAx val="351644896"/>
+        <c:crosses val="autoZero"/>
+        <c:auto val="1"/>
+        <c:lblAlgn val="ctr"/>
+        <c:lblOffset val="100"/>
+        <c:noMultiLvlLbl val="0"/>
+      </c:catAx>
+      <c:valAx>
+        <c:axId val="351644896"/>
+        <c:scaling>
+          <c:orientation val="minMax"/>
+        </c:scaling>
+        <c:delete val="0"/>
+        <c:axPos val="l"/>
+        <c:majorGridlines>
+          <c:spPr>
+            <a:ln w="9525" cap="flat" cmpd="sng" algn="ctr">
+              <a:solidFill>
+                <a:schemeClr val="tx1">
+                  <a:lumMod val="15000"/>
+                  <a:lumOff val="85000"/>
+                </a:schemeClr>
+              </a:solidFill>
+              <a:round/>
+            </a:ln>
+            <a:effectLst/>
+          </c:spPr>
+        </c:majorGridlines>
+        <c:numFmt formatCode="General" sourceLinked="1"/>
+        <c:majorTickMark val="none"/>
+        <c:minorTickMark val="none"/>
+        <c:tickLblPos val="nextTo"/>
+        <c:spPr>
+          <a:noFill/>
+          <a:ln>
+            <a:noFill/>
+          </a:ln>
+          <a:effectLst/>
+        </c:spPr>
+        <c:txPr>
+          <a:bodyPr rot="-60000000" spcFirstLastPara="1" vertOverflow="ellipsis" vert="horz" wrap="square" anchor="ctr" anchorCtr="1"/>
+          <a:lstStyle/>
+          <a:p>
+            <a:pPr>
+              <a:defRPr sz="1197" b="0" i="0" u="none" strike="noStrike" kern="1200" baseline="0">
+                <a:solidFill>
+                  <a:schemeClr val="tx1">
+                    <a:lumMod val="65000"/>
+                    <a:lumOff val="35000"/>
+                  </a:schemeClr>
+                </a:solidFill>
+                <a:latin typeface="+mn-lt"/>
+                <a:ea typeface="+mn-ea"/>
+                <a:cs typeface="+mn-cs"/>
+              </a:defRPr>
+            </a:pPr>
+            <a:endParaRPr lang="it-IT"/>
+          </a:p>
+        </c:txPr>
+        <c:crossAx val="455103296"/>
+        <c:crosses val="autoZero"/>
+        <c:crossBetween val="between"/>
+      </c:valAx>
+      <c:spPr>
+        <a:noFill/>
+        <a:ln>
+          <a:noFill/>
+        </a:ln>
+        <a:effectLst/>
+      </c:spPr>
+    </c:plotArea>
+    <c:legend>
+      <c:legendPos val="b"/>
+      <c:overlay val="0"/>
+      <c:spPr>
+        <a:noFill/>
+        <a:ln>
+          <a:noFill/>
+        </a:ln>
+        <a:effectLst/>
+      </c:spPr>
+      <c:txPr>
+        <a:bodyPr rot="0" spcFirstLastPara="1" vertOverflow="ellipsis" vert="horz" wrap="square" anchor="ctr" anchorCtr="1"/>
+        <a:lstStyle/>
+        <a:p>
+          <a:pPr>
+            <a:defRPr sz="1197" b="0" i="0" u="none" strike="noStrike" kern="1200" baseline="0">
+              <a:solidFill>
+                <a:schemeClr val="tx1">
+                  <a:lumMod val="65000"/>
+                  <a:lumOff val="35000"/>
+                </a:schemeClr>
+              </a:solidFill>
+              <a:latin typeface="+mn-lt"/>
+              <a:ea typeface="+mn-ea"/>
+              <a:cs typeface="+mn-cs"/>
+            </a:defRPr>
+          </a:pPr>
+          <a:endParaRPr lang="it-IT"/>
+        </a:p>
+      </c:txPr>
+    </c:legend>
+    <c:plotVisOnly val="1"/>
+    <c:dispBlanksAs val="gap"/>
+    <c:showDLblsOverMax val="0"/>
+    <c:extLst>
+      <c:ext xmlns:c16r3="http://schemas.microsoft.com/office/drawing/2017/03/chart" uri="{56B9EC1D-385E-4148-901F-78D8002777C0}">
+        <c16r3:dataDisplayOptions16>
+          <c16r3:dispNaAsBlank val="1"/>
+        </c16r3:dataDisplayOptions16>
+      </c:ext>
+    </c:extLst>
+  </c:chart>
+  <c:spPr>
+    <a:noFill/>
+    <a:ln>
+      <a:noFill/>
+    </a:ln>
+    <a:effectLst/>
+  </c:spPr>
+  <c:txPr>
+    <a:bodyPr/>
+    <a:lstStyle/>
+    <a:p>
+      <a:pPr>
+        <a:defRPr/>
+      </a:pPr>
+      <a:endParaRPr lang="it-IT"/>
+    </a:p>
+  </c:txPr>
+  <c:externalData r:id="rId3">
+    <c:autoUpdate val="0"/>
+  </c:externalData>
+</c:chartSpace>
+</file>
+
+<file path=ppt/charts/colors1.xml><?xml version="1.0" encoding="utf-8"?>
+<cs:colorStyle xmlns:cs="http://schemas.microsoft.com/office/drawing/2012/chartStyle" xmlns:a="http://schemas.openxmlformats.org/drawingml/2006/main" meth="cycle" id="10">
+  <a:schemeClr val="accent1"/>
+  <a:schemeClr val="accent2"/>
+  <a:schemeClr val="accent3"/>
+  <a:schemeClr val="accent4"/>
+  <a:schemeClr val="accent5"/>
+  <a:schemeClr val="accent6"/>
+  <cs:variation/>
+  <cs:variation>
+    <a:lumMod val="60000"/>
+  </cs:variation>
+  <cs:variation>
+    <a:lumMod val="80000"/>
+    <a:lumOff val="20000"/>
+  </cs:variation>
+  <cs:variation>
+    <a:lumMod val="80000"/>
+  </cs:variation>
+  <cs:variation>
+    <a:lumMod val="60000"/>
+    <a:lumOff val="40000"/>
+  </cs:variation>
+  <cs:variation>
+    <a:lumMod val="50000"/>
+  </cs:variation>
+  <cs:variation>
+    <a:lumMod val="70000"/>
+    <a:lumOff val="30000"/>
+  </cs:variation>
+  <cs:variation>
+    <a:lumMod val="70000"/>
+  </cs:variation>
+  <cs:variation>
+    <a:lumMod val="50000"/>
+    <a:lumOff val="50000"/>
+  </cs:variation>
+</cs:colorStyle>
+</file>
+
+<file path=ppt/charts/colors2.xml><?xml version="1.0" encoding="utf-8"?>
+<cs:colorStyle xmlns:cs="http://schemas.microsoft.com/office/drawing/2012/chartStyle" xmlns:a="http://schemas.openxmlformats.org/drawingml/2006/main" meth="cycle" id="10">
+  <a:schemeClr val="accent1"/>
+  <a:schemeClr val="accent2"/>
+  <a:schemeClr val="accent3"/>
+  <a:schemeClr val="accent4"/>
+  <a:schemeClr val="accent5"/>
+  <a:schemeClr val="accent6"/>
+  <cs:variation/>
+  <cs:variation>
+    <a:lumMod val="60000"/>
+  </cs:variation>
+  <cs:variation>
+    <a:lumMod val="80000"/>
+    <a:lumOff val="20000"/>
+  </cs:variation>
+  <cs:variation>
+    <a:lumMod val="80000"/>
+  </cs:variation>
+  <cs:variation>
+    <a:lumMod val="60000"/>
+    <a:lumOff val="40000"/>
+  </cs:variation>
+  <cs:variation>
+    <a:lumMod val="50000"/>
+  </cs:variation>
+  <cs:variation>
+    <a:lumMod val="70000"/>
+    <a:lumOff val="30000"/>
+  </cs:variation>
+  <cs:variation>
+    <a:lumMod val="70000"/>
+  </cs:variation>
+  <cs:variation>
+    <a:lumMod val="50000"/>
+    <a:lumOff val="50000"/>
+  </cs:variation>
+</cs:colorStyle>
+</file>
+
+<file path=ppt/charts/colors3.xml><?xml version="1.0" encoding="utf-8"?>
+<cs:colorStyle xmlns:cs="http://schemas.microsoft.com/office/drawing/2012/chartStyle" xmlns:a="http://schemas.openxmlformats.org/drawingml/2006/main" meth="cycle" id="10">
+  <a:schemeClr val="accent1"/>
+  <a:schemeClr val="accent2"/>
+  <a:schemeClr val="accent3"/>
+  <a:schemeClr val="accent4"/>
+  <a:schemeClr val="accent5"/>
+  <a:schemeClr val="accent6"/>
+  <cs:variation/>
+  <cs:variation>
+    <a:lumMod val="60000"/>
+  </cs:variation>
+  <cs:variation>
+    <a:lumMod val="80000"/>
+    <a:lumOff val="20000"/>
+  </cs:variation>
+  <cs:variation>
+    <a:lumMod val="80000"/>
+  </cs:variation>
+  <cs:variation>
+    <a:lumMod val="60000"/>
+    <a:lumOff val="40000"/>
+  </cs:variation>
+  <cs:variation>
+    <a:lumMod val="50000"/>
+  </cs:variation>
+  <cs:variation>
+    <a:lumMod val="70000"/>
+    <a:lumOff val="30000"/>
+  </cs:variation>
+  <cs:variation>
+    <a:lumMod val="70000"/>
+  </cs:variation>
+  <cs:variation>
+    <a:lumMod val="50000"/>
+    <a:lumOff val="50000"/>
+  </cs:variation>
+</cs:colorStyle>
+</file>
+
+<file path=ppt/charts/style1.xml><?xml version="1.0" encoding="utf-8"?>
+<cs:chartStyle xmlns:cs="http://schemas.microsoft.com/office/drawing/2012/chartStyle" xmlns:a="http://schemas.openxmlformats.org/drawingml/2006/main" id="239">
+  <cs:axisTitle>
+    <cs:lnRef idx="0"/>
+    <cs:fillRef idx="0"/>
+    <cs:effectRef idx="0"/>
+    <cs:fontRef idx="minor">
+      <a:schemeClr val="tx1">
+        <a:lumMod val="65000"/>
+        <a:lumOff val="35000"/>
+      </a:schemeClr>
+    </cs:fontRef>
+    <cs:defRPr sz="1197" kern="1200" cap="all"/>
+  </cs:axisTitle>
+  <cs:categoryAxis>
+    <cs:lnRef idx="0"/>
+    <cs:fillRef idx="0"/>
+    <cs:effectRef idx="0"/>
+    <cs:fontRef idx="minor">
+      <a:schemeClr val="tx1">
+        <a:lumMod val="65000"/>
+        <a:lumOff val="35000"/>
+      </a:schemeClr>
+    </cs:fontRef>
+    <cs:spPr>
+      <a:ln w="9525" cap="flat" cmpd="sng" algn="ctr">
+        <a:solidFill>
+          <a:schemeClr val="tx1">
+            <a:lumMod val="15000"/>
+            <a:lumOff val="85000"/>
+          </a:schemeClr>
+        </a:solidFill>
+        <a:round/>
+      </a:ln>
+    </cs:spPr>
+    <cs:defRPr sz="1064" kern="1200" cap="all" spc="120" normalizeH="0" baseline="0"/>
+  </cs:categoryAxis>
+  <cs:chartArea mods="allowNoFillOverride allowNoLineOverride">
+    <cs:lnRef idx="0"/>
+    <cs:fillRef idx="0"/>
+    <cs:effectRef idx="0"/>
+    <cs:fontRef idx="minor">
+      <a:schemeClr val="dk1"/>
+    </cs:fontRef>
+    <cs:spPr>
+      <a:solidFill>
+        <a:schemeClr val="lt1"/>
+      </a:solidFill>
+      <a:ln w="9525" cap="flat" cmpd="sng" algn="ctr">
+        <a:solidFill>
+          <a:schemeClr val="tx1">
+            <a:lumMod val="15000"/>
+            <a:lumOff val="85000"/>
+          </a:schemeClr>
+        </a:solidFill>
+        <a:round/>
+      </a:ln>
+    </cs:spPr>
+    <cs:defRPr sz="1197" kern="1200"/>
+  </cs:chartArea>
+  <cs:dataLabel>
+    <cs:lnRef idx="0"/>
+    <cs:fillRef idx="0"/>
+    <cs:effectRef idx="0"/>
+    <cs:fontRef idx="minor">
+      <a:schemeClr val="tx1">
+        <a:lumMod val="50000"/>
+        <a:lumOff val="50000"/>
+      </a:schemeClr>
+    </cs:fontRef>
+    <cs:defRPr sz="1197" b="0" i="0" u="none" strike="noStrike" kern="1200" baseline="0"/>
+  </cs:dataLabel>
+  <cs:dataLabelCallout>
+    <cs:lnRef idx="0"/>
+    <cs:fillRef idx="0"/>
+    <cs:effectRef idx="0"/>
+    <cs:fontRef idx="minor">
+      <a:schemeClr val="dk1">
+        <a:lumMod val="65000"/>
+        <a:lumOff val="35000"/>
+      </a:schemeClr>
+    </cs:fontRef>
+    <cs:spPr>
+      <a:solidFill>
+        <a:schemeClr val="lt1"/>
+      </a:solidFill>
+      <a:ln>
+        <a:solidFill>
+          <a:schemeClr val="dk1">
+            <a:lumMod val="25000"/>
+            <a:lumOff val="75000"/>
+          </a:schemeClr>
+        </a:solidFill>
+      </a:ln>
+    </cs:spPr>
+    <cs:defRPr sz="1197" kern="1200"/>
+    <cs:bodyPr rot="0" spcFirstLastPara="1" vertOverflow="clip" horzOverflow="clip" vert="horz" wrap="square" lIns="36576" tIns="18288" rIns="36576" bIns="18288" anchor="ctr" anchorCtr="1">
+      <a:spAutoFit/>
+    </cs:bodyPr>
+  </cs:dataLabelCallout>
+  <cs:dataPoint>
+    <cs:lnRef idx="0"/>
+    <cs:fillRef idx="0">
+      <cs:styleClr val="auto"/>
+    </cs:fillRef>
+    <cs:effectRef idx="0"/>
+    <cs:fontRef idx="minor">
+      <a:schemeClr val="dk1"/>
+    </cs:fontRef>
+    <cs:spPr>
+      <a:solidFill>
+        <a:schemeClr val="phClr"/>
+      </a:solidFill>
+    </cs:spPr>
+  </cs:dataPoint>
+  <cs:dataPoint3D>
+    <cs:lnRef idx="0"/>
+    <cs:fillRef idx="0">
+      <cs:styleClr val="auto"/>
+    </cs:fillRef>
+    <cs:effectRef idx="0"/>
+    <cs:fontRef idx="minor">
+      <a:schemeClr val="dk1"/>
+    </cs:fontRef>
+    <cs:spPr>
+      <a:solidFill>
+        <a:schemeClr val="phClr"/>
+      </a:solidFill>
+    </cs:spPr>
+  </cs:dataPoint3D>
+  <cs:dataPointLine>
+    <cs:lnRef idx="0">
+      <cs:styleClr val="auto"/>
+    </cs:lnRef>
+    <cs:fillRef idx="0"/>
+    <cs:effectRef idx="0"/>
+    <cs:fontRef idx="minor">
+      <a:schemeClr val="dk1"/>
+    </cs:fontRef>
+    <cs:spPr>
+      <a:ln w="22225" cap="rnd">
+        <a:solidFill>
+          <a:schemeClr val="phClr"/>
+        </a:solidFill>
+        <a:round/>
+      </a:ln>
+    </cs:spPr>
+  </cs:dataPointLine>
+  <cs:dataPointMarker>
+    <cs:lnRef idx="0">
+      <cs:styleClr val="auto"/>
+    </cs:lnRef>
+    <cs:fillRef idx="0">
+      <cs:styleClr val="auto"/>
+    </cs:fillRef>
+    <cs:effectRef idx="0"/>
+    <cs:fontRef idx="minor">
+      <a:schemeClr val="dk1"/>
+    </cs:fontRef>
+    <cs:spPr>
+      <a:solidFill>
+        <a:schemeClr val="phClr"/>
+      </a:solidFill>
+      <a:ln w="9525">
+        <a:solidFill>
+          <a:schemeClr val="phClr"/>
+        </a:solidFill>
+        <a:round/>
+      </a:ln>
+    </cs:spPr>
+  </cs:dataPointMarker>
+  <cs:dataPointMarkerLayout size="6"/>
+  <cs:dataPointWireframe>
+    <cs:lnRef idx="0">
+      <cs:styleClr val="auto"/>
+    </cs:lnRef>
+    <cs:fillRef idx="0"/>
+    <cs:effectRef idx="0"/>
+    <cs:fontRef idx="minor">
+      <a:schemeClr val="dk1"/>
+    </cs:fontRef>
+    <cs:spPr>
+      <a:ln w="9525" cap="rnd">
+        <a:solidFill>
+          <a:schemeClr val="phClr"/>
+        </a:solidFill>
+        <a:round/>
+      </a:ln>
+    </cs:spPr>
+  </cs:dataPointWireframe>
+  <cs:dataTable>
+    <cs:lnRef idx="0"/>
+    <cs:fillRef idx="0"/>
+    <cs:effectRef idx="0"/>
+    <cs:fontRef idx="minor">
+      <a:schemeClr val="tx1">
+        <a:lumMod val="65000"/>
+        <a:lumOff val="35000"/>
+      </a:schemeClr>
+    </cs:fontRef>
+    <cs:spPr>
+      <a:ln w="9525">
+        <a:solidFill>
+          <a:schemeClr val="tx1">
+            <a:lumMod val="15000"/>
+            <a:lumOff val="85000"/>
+          </a:schemeClr>
+        </a:solidFill>
+      </a:ln>
+    </cs:spPr>
+    <cs:defRPr sz="1197" kern="1200"/>
+  </cs:dataTable>
+  <cs:downBar>
+    <cs:lnRef idx="0"/>
+    <cs:fillRef idx="0"/>
+    <cs:effectRef idx="0"/>
+    <cs:fontRef idx="minor">
+      <a:schemeClr val="dk1"/>
+    </cs:fontRef>
+    <cs:spPr>
+      <a:solidFill>
+        <a:schemeClr val="dk1">
+          <a:lumMod val="75000"/>
+          <a:lumOff val="25000"/>
+        </a:schemeClr>
+      </a:solidFill>
+      <a:ln w="9525">
+        <a:solidFill>
+          <a:schemeClr val="tx1">
+            <a:lumMod val="15000"/>
+            <a:lumOff val="85000"/>
+          </a:schemeClr>
+        </a:solidFill>
+      </a:ln>
+    </cs:spPr>
+  </cs:downBar>
+  <cs:dropLine>
+    <cs:lnRef idx="0"/>
+    <cs:fillRef idx="0"/>
+    <cs:effectRef idx="0"/>
+    <cs:fontRef idx="minor">
+      <a:schemeClr val="dk1"/>
+    </cs:fontRef>
+    <cs:spPr>
+      <a:ln w="9525">
+        <a:solidFill>
+          <a:schemeClr val="tx1">
+            <a:lumMod val="35000"/>
+            <a:lumOff val="65000"/>
+          </a:schemeClr>
+        </a:solidFill>
+      </a:ln>
+    </cs:spPr>
+  </cs:dropLine>
+  <cs:errorBar>
+    <cs:lnRef idx="0"/>
+    <cs:fillRef idx="0"/>
+    <cs:effectRef idx="0"/>
+    <cs:fontRef idx="minor">
+      <a:schemeClr val="dk1"/>
+    </cs:fontRef>
+    <cs:spPr>
+      <a:ln w="9525">
+        <a:solidFill>
+          <a:schemeClr val="tx1">
+            <a:lumMod val="65000"/>
+            <a:lumOff val="35000"/>
+          </a:schemeClr>
+        </a:solidFill>
+        <a:round/>
+      </a:ln>
+    </cs:spPr>
+  </cs:errorBar>
+  <cs:floor>
+    <cs:lnRef idx="0"/>
+    <cs:fillRef idx="0"/>
+    <cs:effectRef idx="0"/>
+    <cs:fontRef idx="minor">
+      <a:schemeClr val="dk1"/>
+    </cs:fontRef>
+  </cs:floor>
+  <cs:gridlineMajor>
+    <cs:lnRef idx="0"/>
+    <cs:fillRef idx="0"/>
+    <cs:effectRef idx="0"/>
+    <cs:fontRef idx="minor">
+      <a:schemeClr val="dk1"/>
+    </cs:fontRef>
+    <cs:spPr>
+      <a:ln w="9525" cap="flat" cmpd="sng" algn="ctr">
+        <a:solidFill>
+          <a:schemeClr val="tx1">
+            <a:lumMod val="15000"/>
+            <a:lumOff val="85000"/>
+          </a:schemeClr>
+        </a:solidFill>
+        <a:round/>
+      </a:ln>
+    </cs:spPr>
+  </cs:gridlineMajor>
+  <cs:gridlineMinor>
+    <cs:lnRef idx="0"/>
+    <cs:fillRef idx="0"/>
+    <cs:effectRef idx="0"/>
+    <cs:fontRef idx="minor">
+      <a:schemeClr val="dk1"/>
+    </cs:fontRef>
+    <cs:spPr>
+      <a:ln>
+        <a:solidFill>
+          <a:schemeClr val="tx1">
+            <a:lumMod val="5000"/>
+            <a:lumOff val="95000"/>
+          </a:schemeClr>
+        </a:solidFill>
+      </a:ln>
+    </cs:spPr>
+  </cs:gridlineMinor>
+  <cs:hiLoLine>
+    <cs:lnRef idx="0"/>
+    <cs:fillRef idx="0"/>
+    <cs:effectRef idx="0"/>
+    <cs:fontRef idx="minor">
+      <a:schemeClr val="dk1"/>
+    </cs:fontRef>
+    <cs:spPr>
+      <a:ln w="9525">
+        <a:solidFill>
+          <a:schemeClr val="tx1">
+            <a:lumMod val="50000"/>
+            <a:lumOff val="50000"/>
+          </a:schemeClr>
+        </a:solidFill>
+      </a:ln>
+    </cs:spPr>
+  </cs:hiLoLine>
+  <cs:leaderLine>
+    <cs:lnRef idx="0"/>
+    <cs:fillRef idx="0"/>
+    <cs:effectRef idx="0"/>
+    <cs:fontRef idx="minor">
+      <a:schemeClr val="dk1"/>
+    </cs:fontRef>
+    <cs:spPr>
+      <a:ln w="9525">
+        <a:solidFill>
+          <a:schemeClr val="tx1">
+            <a:lumMod val="35000"/>
+            <a:lumOff val="65000"/>
+          </a:schemeClr>
+        </a:solidFill>
+      </a:ln>
+    </cs:spPr>
+  </cs:leaderLine>
+  <cs:legend>
+    <cs:lnRef idx="0"/>
+    <cs:fillRef idx="0"/>
+    <cs:effectRef idx="0"/>
+    <cs:fontRef idx="minor">
+      <a:schemeClr val="tx1">
+        <a:lumMod val="65000"/>
+        <a:lumOff val="35000"/>
+      </a:schemeClr>
+    </cs:fontRef>
+    <cs:defRPr sz="1197" kern="1200"/>
+  </cs:legend>
+  <cs:plotArea mods="allowNoFillOverride allowNoLineOverride">
+    <cs:lnRef idx="0"/>
+    <cs:fillRef idx="0"/>
+    <cs:effectRef idx="0"/>
+    <cs:fontRef idx="minor">
+      <a:schemeClr val="dk1"/>
+    </cs:fontRef>
+  </cs:plotArea>
+  <cs:plotArea3D mods="allowNoFillOverride allowNoLineOverride">
+    <cs:lnRef idx="0"/>
+    <cs:fillRef idx="0"/>
+    <cs:effectRef idx="0"/>
+    <cs:fontRef idx="minor">
+      <a:schemeClr val="dk1"/>
+    </cs:fontRef>
+  </cs:plotArea3D>
+  <cs:seriesAxis>
+    <cs:lnRef idx="0"/>
+    <cs:fillRef idx="0"/>
+    <cs:effectRef idx="0"/>
+    <cs:fontRef idx="minor">
+      <a:schemeClr val="tx1">
+        <a:lumMod val="65000"/>
+        <a:lumOff val="35000"/>
+      </a:schemeClr>
+    </cs:fontRef>
+    <cs:spPr>
+      <a:ln w="9525" cap="flat" cmpd="sng" algn="ctr">
+        <a:solidFill>
+          <a:schemeClr val="tx1">
+            <a:lumMod val="15000"/>
+            <a:lumOff val="85000"/>
+          </a:schemeClr>
+        </a:solidFill>
+        <a:round/>
+      </a:ln>
+    </cs:spPr>
+    <cs:defRPr sz="1197" kern="1200"/>
+  </cs:seriesAxis>
+  <cs:seriesLine>
+    <cs:lnRef idx="0"/>
+    <cs:fillRef idx="0"/>
+    <cs:effectRef idx="0"/>
+    <cs:fontRef idx="minor">
+      <a:schemeClr val="dk1"/>
+    </cs:fontRef>
+    <cs:spPr>
+      <a:ln w="9525">
+        <a:solidFill>
+          <a:schemeClr val="tx1">
+            <a:lumMod val="35000"/>
+            <a:lumOff val="65000"/>
+          </a:schemeClr>
+        </a:solidFill>
+        <a:round/>
+      </a:ln>
+    </cs:spPr>
+  </cs:seriesLine>
+  <cs:title>
+    <cs:lnRef idx="0"/>
+    <cs:fillRef idx="0"/>
+    <cs:effectRef idx="0"/>
+    <cs:fontRef idx="minor">
+      <a:schemeClr val="tx1">
+        <a:lumMod val="65000"/>
+        <a:lumOff val="35000"/>
+      </a:schemeClr>
+    </cs:fontRef>
+    <cs:defRPr sz="2128" b="1" kern="1200" cap="all" spc="120" normalizeH="0" baseline="0"/>
+  </cs:title>
+  <cs:trendline>
+    <cs:lnRef idx="0">
+      <cs:styleClr val="auto"/>
+    </cs:lnRef>
+    <cs:fillRef idx="0"/>
+    <cs:effectRef idx="0"/>
+    <cs:fontRef idx="minor">
+      <a:schemeClr val="dk1"/>
+    </cs:fontRef>
+    <cs:spPr>
+      <a:ln w="19050" cap="rnd">
+        <a:solidFill>
+          <a:schemeClr val="phClr"/>
+        </a:solidFill>
+        <a:prstDash val="sysDash"/>
+      </a:ln>
+    </cs:spPr>
+  </cs:trendline>
+  <cs:trendlineLabel>
+    <cs:lnRef idx="0"/>
+    <cs:fillRef idx="0"/>
+    <cs:effectRef idx="0"/>
+    <cs:fontRef idx="minor">
+      <a:schemeClr val="tx1">
+        <a:lumMod val="65000"/>
+        <a:lumOff val="35000"/>
+      </a:schemeClr>
+    </cs:fontRef>
+    <cs:defRPr sz="1064" kern="1200"/>
+  </cs:trendlineLabel>
+  <cs:upBar>
+    <cs:lnRef idx="0"/>
+    <cs:fillRef idx="0"/>
+    <cs:effectRef idx="0"/>
+    <cs:fontRef idx="minor">
+      <a:schemeClr val="dk1"/>
+    </cs:fontRef>
+    <cs:spPr>
+      <a:solidFill>
+        <a:schemeClr val="lt1"/>
+      </a:solidFill>
+      <a:ln w="9525">
+        <a:solidFill>
+          <a:schemeClr val="tx1">
+            <a:lumMod val="65000"/>
+            <a:lumOff val="35000"/>
+          </a:schemeClr>
+        </a:solidFill>
+      </a:ln>
+    </cs:spPr>
+  </cs:upBar>
+  <cs:valueAxis>
+    <cs:lnRef idx="0"/>
+    <cs:fillRef idx="0"/>
+    <cs:effectRef idx="0"/>
+    <cs:fontRef idx="minor">
+      <a:schemeClr val="tx1">
+        <a:lumMod val="65000"/>
+        <a:lumOff val="35000"/>
+      </a:schemeClr>
+    </cs:fontRef>
+    <cs:spPr>
+      <a:ln w="9525" cap="flat" cmpd="sng" algn="ctr">
+        <a:solidFill>
+          <a:schemeClr val="dk1">
+            <a:lumMod val="15000"/>
+            <a:lumOff val="85000"/>
+          </a:schemeClr>
+        </a:solidFill>
+        <a:round/>
+      </a:ln>
+    </cs:spPr>
+    <cs:defRPr sz="1197" kern="1200"/>
+  </cs:valueAxis>
+  <cs:wall>
+    <cs:lnRef idx="0"/>
+    <cs:fillRef idx="0"/>
+    <cs:effectRef idx="0"/>
+    <cs:fontRef idx="minor">
+      <a:schemeClr val="dk1"/>
+    </cs:fontRef>
+  </cs:wall>
+</cs:chartStyle>
+</file>
+
+<file path=ppt/charts/style2.xml><?xml version="1.0" encoding="utf-8"?>
+<cs:chartStyle xmlns:cs="http://schemas.microsoft.com/office/drawing/2012/chartStyle" xmlns:a="http://schemas.openxmlformats.org/drawingml/2006/main" id="227">
+  <cs:axisTitle>
+    <cs:lnRef idx="0"/>
+    <cs:fillRef idx="0"/>
+    <cs:effectRef idx="0"/>
+    <cs:fontRef idx="minor">
+      <a:schemeClr val="tx1">
+        <a:lumMod val="65000"/>
+        <a:lumOff val="35000"/>
+      </a:schemeClr>
+    </cs:fontRef>
+    <cs:defRPr sz="1330" kern="1200"/>
+  </cs:axisTitle>
+  <cs:categoryAxis>
+    <cs:lnRef idx="0"/>
+    <cs:fillRef idx="0"/>
+    <cs:effectRef idx="0"/>
+    <cs:fontRef idx="minor">
+      <a:schemeClr val="tx1">
+        <a:lumMod val="65000"/>
+        <a:lumOff val="35000"/>
+      </a:schemeClr>
+    </cs:fontRef>
+    <cs:spPr>
+      <a:ln w="9525" cap="flat" cmpd="sng" algn="ctr">
+        <a:solidFill>
+          <a:schemeClr val="tx1">
+            <a:lumMod val="15000"/>
+            <a:lumOff val="85000"/>
+          </a:schemeClr>
+        </a:solidFill>
+        <a:round/>
+      </a:ln>
+    </cs:spPr>
+    <cs:defRPr sz="1197" kern="1200"/>
+  </cs:categoryAxis>
+  <cs:chartArea mods="allowNoFillOverride allowNoLineOverride">
+    <cs:lnRef idx="0"/>
+    <cs:fillRef idx="0"/>
+    <cs:effectRef idx="0"/>
+    <cs:fontRef idx="minor">
+      <a:schemeClr val="tx1"/>
+    </cs:fontRef>
+    <cs:spPr>
+      <a:solidFill>
+        <a:schemeClr val="bg1"/>
+      </a:solidFill>
+      <a:ln w="9525" cap="flat" cmpd="sng" algn="ctr">
+        <a:solidFill>
+          <a:schemeClr val="tx1">
+            <a:lumMod val="15000"/>
+            <a:lumOff val="85000"/>
+          </a:schemeClr>
+        </a:solidFill>
+        <a:round/>
+      </a:ln>
+    </cs:spPr>
+    <cs:defRPr sz="1330" kern="1200"/>
+  </cs:chartArea>
+  <cs:dataLabel>
+    <cs:lnRef idx="0"/>
+    <cs:fillRef idx="0"/>
+    <cs:effectRef idx="0"/>
+    <cs:fontRef idx="minor">
+      <a:schemeClr val="tx1">
+        <a:lumMod val="75000"/>
+        <a:lumOff val="25000"/>
+      </a:schemeClr>
+    </cs:fontRef>
+    <cs:defRPr sz="1197" kern="1200"/>
+  </cs:dataLabel>
+  <cs:dataLabelCallout>
+    <cs:lnRef idx="0"/>
+    <cs:fillRef idx="0"/>
+    <cs:effectRef idx="0"/>
+    <cs:fontRef idx="minor">
+      <a:schemeClr val="dk1">
+        <a:lumMod val="65000"/>
+        <a:lumOff val="35000"/>
+      </a:schemeClr>
+    </cs:fontRef>
+    <cs:spPr>
+      <a:solidFill>
+        <a:schemeClr val="lt1"/>
+      </a:solidFill>
+      <a:ln>
+        <a:solidFill>
+          <a:schemeClr val="dk1">
+            <a:lumMod val="25000"/>
+            <a:lumOff val="75000"/>
+          </a:schemeClr>
+        </a:solidFill>
+      </a:ln>
+    </cs:spPr>
+    <cs:defRPr sz="1197" kern="1200"/>
+    <cs:bodyPr rot="0" spcFirstLastPara="1" vertOverflow="clip" horzOverflow="clip" vert="horz" wrap="square" lIns="36576" tIns="18288" rIns="36576" bIns="18288" anchor="ctr" anchorCtr="1">
+      <a:spAutoFit/>
+    </cs:bodyPr>
+  </cs:dataLabelCallout>
+  <cs:dataPoint>
+    <cs:lnRef idx="0"/>
+    <cs:fillRef idx="1">
+      <cs:styleClr val="auto"/>
+    </cs:fillRef>
+    <cs:effectRef idx="0"/>
+    <cs:fontRef idx="minor">
+      <a:schemeClr val="tx1"/>
+    </cs:fontRef>
+    <cs:spPr>
+      <a:solidFill>
+        <a:schemeClr val="phClr"/>
+      </a:solidFill>
+    </cs:spPr>
+  </cs:dataPoint>
+  <cs:dataPoint3D>
+    <cs:lnRef idx="0"/>
+    <cs:fillRef idx="1">
+      <cs:styleClr val="auto"/>
+    </cs:fillRef>
+    <cs:effectRef idx="0"/>
+    <cs:fontRef idx="minor">
+      <a:schemeClr val="tx1"/>
+    </cs:fontRef>
+    <cs:spPr>
+      <a:solidFill>
+        <a:schemeClr val="phClr"/>
+      </a:solidFill>
+    </cs:spPr>
+  </cs:dataPoint3D>
+  <cs:dataPointLine>
+    <cs:lnRef idx="0">
+      <cs:styleClr val="auto"/>
+    </cs:lnRef>
+    <cs:fillRef idx="1"/>
+    <cs:effectRef idx="0"/>
+    <cs:fontRef idx="minor">
+      <a:schemeClr val="tx1"/>
+    </cs:fontRef>
+    <cs:spPr>
+      <a:ln w="28575" cap="rnd">
+        <a:solidFill>
+          <a:schemeClr val="phClr"/>
+        </a:solidFill>
+        <a:round/>
+      </a:ln>
+    </cs:spPr>
+  </cs:dataPointLine>
+  <cs:dataPointMarker>
+    <cs:lnRef idx="0">
+      <cs:styleClr val="auto"/>
+    </cs:lnRef>
+    <cs:fillRef idx="1">
+      <cs:styleClr val="auto"/>
+    </cs:fillRef>
+    <cs:effectRef idx="0"/>
+    <cs:fontRef idx="minor">
+      <a:schemeClr val="tx1"/>
+    </cs:fontRef>
+    <cs:spPr>
+      <a:solidFill>
+        <a:schemeClr val="phClr"/>
+      </a:solidFill>
+      <a:ln w="9525">
+        <a:solidFill>
+          <a:schemeClr val="phClr"/>
+        </a:solidFill>
+      </a:ln>
+    </cs:spPr>
+  </cs:dataPointMarker>
+  <cs:dataPointMarkerLayout symbol="circle" size="5"/>
+  <cs:dataPointWireframe>
+    <cs:lnRef idx="0">
+      <cs:styleClr val="auto"/>
+    </cs:lnRef>
+    <cs:fillRef idx="1"/>
+    <cs:effectRef idx="0"/>
+    <cs:fontRef idx="minor">
+      <a:schemeClr val="tx1"/>
+    </cs:fontRef>
+    <cs:spPr>
+      <a:ln w="9525" cap="rnd">
+        <a:solidFill>
+          <a:schemeClr val="phClr"/>
+        </a:solidFill>
+        <a:round/>
+      </a:ln>
+    </cs:spPr>
+  </cs:dataPointWireframe>
+  <cs:dataTable>
+    <cs:lnRef idx="0"/>
+    <cs:fillRef idx="0"/>
+    <cs:effectRef idx="0"/>
+    <cs:fontRef idx="minor">
+      <a:schemeClr val="tx1">
+        <a:lumMod val="65000"/>
+        <a:lumOff val="35000"/>
+      </a:schemeClr>
+    </cs:fontRef>
+    <cs:spPr>
+      <a:noFill/>
+      <a:ln w="9525" cap="flat" cmpd="sng" algn="ctr">
+        <a:solidFill>
+          <a:schemeClr val="tx1">
+            <a:lumMod val="15000"/>
+            <a:lumOff val="85000"/>
+          </a:schemeClr>
+        </a:solidFill>
+        <a:round/>
+      </a:ln>
+    </cs:spPr>
+    <cs:defRPr sz="1197" kern="1200"/>
+  </cs:dataTable>
+  <cs:downBar>
+    <cs:lnRef idx="0"/>
+    <cs:fillRef idx="0"/>
+    <cs:effectRef idx="0"/>
+    <cs:fontRef idx="minor">
+      <a:schemeClr val="dk1"/>
+    </cs:fontRef>
+    <cs:spPr>
+      <a:solidFill>
+        <a:schemeClr val="dk1">
+          <a:lumMod val="65000"/>
+          <a:lumOff val="35000"/>
+        </a:schemeClr>
+      </a:solidFill>
+      <a:ln w="9525">
+        <a:solidFill>
+          <a:schemeClr val="tx1">
+            <a:lumMod val="65000"/>
+            <a:lumOff val="35000"/>
+          </a:schemeClr>
+        </a:solidFill>
+      </a:ln>
+    </cs:spPr>
+  </cs:downBar>
+  <cs:dropLine>
+    <cs:lnRef idx="0"/>
+    <cs:fillRef idx="0"/>
+    <cs:effectRef idx="0"/>
+    <cs:fontRef idx="minor">
+      <a:schemeClr val="tx1"/>
+    </cs:fontRef>
+    <cs:spPr>
+      <a:ln w="9525" cap="flat" cmpd="sng" algn="ctr">
+        <a:solidFill>
+          <a:schemeClr val="tx1">
+            <a:lumMod val="35000"/>
+            <a:lumOff val="65000"/>
+          </a:schemeClr>
+        </a:solidFill>
+        <a:round/>
+      </a:ln>
+    </cs:spPr>
+  </cs:dropLine>
+  <cs:errorBar>
+    <cs:lnRef idx="0"/>
+    <cs:fillRef idx="0"/>
+    <cs:effectRef idx="0"/>
+    <cs:fontRef idx="minor">
+      <a:schemeClr val="tx1"/>
+    </cs:fontRef>
+    <cs:spPr>
+      <a:ln w="9525" cap="flat" cmpd="sng" algn="ctr">
+        <a:solidFill>
+          <a:schemeClr val="tx1">
+            <a:lumMod val="65000"/>
+            <a:lumOff val="35000"/>
+          </a:schemeClr>
+        </a:solidFill>
+        <a:round/>
+      </a:ln>
+    </cs:spPr>
+  </cs:errorBar>
+  <cs:floor>
+    <cs:lnRef idx="0"/>
+    <cs:fillRef idx="0"/>
+    <cs:effectRef idx="0"/>
+    <cs:fontRef idx="minor">
+      <a:schemeClr val="tx1"/>
+    </cs:fontRef>
+    <cs:spPr>
+      <a:noFill/>
+      <a:ln>
+        <a:noFill/>
+      </a:ln>
+    </cs:spPr>
+  </cs:floor>
+  <cs:gridlineMajor>
+    <cs:lnRef idx="0"/>
+    <cs:fillRef idx="0"/>
+    <cs:effectRef idx="0"/>
+    <cs:fontRef idx="minor">
+      <a:schemeClr val="tx1"/>
+    </cs:fontRef>
+    <cs:spPr>
+      <a:ln w="9525" cap="flat" cmpd="sng" algn="ctr">
+        <a:solidFill>
+          <a:schemeClr val="tx1">
+            <a:lumMod val="15000"/>
+            <a:lumOff val="85000"/>
+          </a:schemeClr>
+        </a:solidFill>
+        <a:round/>
+      </a:ln>
+    </cs:spPr>
+  </cs:gridlineMajor>
+  <cs:gridlineMinor>
+    <cs:lnRef idx="0"/>
+    <cs:fillRef idx="0"/>
+    <cs:effectRef idx="0"/>
+    <cs:fontRef idx="minor">
+      <a:schemeClr val="tx1"/>
+    </cs:fontRef>
+    <cs:spPr>
+      <a:ln w="9525" cap="flat" cmpd="sng" algn="ctr">
+        <a:solidFill>
+          <a:schemeClr val="tx1">
+            <a:lumMod val="5000"/>
+            <a:lumOff val="95000"/>
+          </a:schemeClr>
+        </a:solidFill>
+        <a:round/>
+      </a:ln>
+    </cs:spPr>
+  </cs:gridlineMinor>
+  <cs:hiLoLine>
+    <cs:lnRef idx="0"/>
+    <cs:fillRef idx="0"/>
+    <cs:effectRef idx="0"/>
+    <cs:fontRef idx="minor">
+      <a:schemeClr val="tx1"/>
+    </cs:fontRef>
+    <cs:spPr>
+      <a:ln w="9525" cap="flat" cmpd="sng" algn="ctr">
+        <a:solidFill>
+          <a:schemeClr val="tx1">
+            <a:lumMod val="75000"/>
+            <a:lumOff val="25000"/>
+          </a:schemeClr>
+        </a:solidFill>
+        <a:round/>
+      </a:ln>
+    </cs:spPr>
+  </cs:hiLoLine>
+  <cs:leaderLine>
+    <cs:lnRef idx="0"/>
+    <cs:fillRef idx="0"/>
+    <cs:effectRef idx="0"/>
+    <cs:fontRef idx="minor">
+      <a:schemeClr val="tx1"/>
+    </cs:fontRef>
+    <cs:spPr>
+      <a:ln w="9525" cap="flat" cmpd="sng" algn="ctr">
+        <a:solidFill>
+          <a:schemeClr val="tx1">
+            <a:lumMod val="35000"/>
+            <a:lumOff val="65000"/>
+          </a:schemeClr>
+        </a:solidFill>
+        <a:round/>
+      </a:ln>
+    </cs:spPr>
+  </cs:leaderLine>
+  <cs:legend>
+    <cs:lnRef idx="0"/>
+    <cs:fillRef idx="0"/>
+    <cs:effectRef idx="0"/>
+    <cs:fontRef idx="minor">
+      <a:schemeClr val="tx1">
+        <a:lumMod val="65000"/>
+        <a:lumOff val="35000"/>
+      </a:schemeClr>
+    </cs:fontRef>
+    <cs:defRPr sz="1197" kern="1200"/>
+  </cs:legend>
+  <cs:plotArea mods="allowNoFillOverride allowNoLineOverride">
+    <cs:lnRef idx="0"/>
+    <cs:fillRef idx="0"/>
+    <cs:effectRef idx="0"/>
+    <cs:fontRef idx="minor">
+      <a:schemeClr val="tx1"/>
+    </cs:fontRef>
+  </cs:plotArea>
+  <cs:plotArea3D mods="allowNoFillOverride allowNoLineOverride">
+    <cs:lnRef idx="0"/>
+    <cs:fillRef idx="0"/>
+    <cs:effectRef idx="0"/>
+    <cs:fontRef idx="minor">
+      <a:schemeClr val="tx1"/>
+    </cs:fontRef>
+  </cs:plotArea3D>
+  <cs:seriesAxis>
+    <cs:lnRef idx="0"/>
+    <cs:fillRef idx="0"/>
+    <cs:effectRef idx="0"/>
+    <cs:fontRef idx="minor">
+      <a:schemeClr val="tx1">
+        <a:lumMod val="65000"/>
+        <a:lumOff val="35000"/>
+      </a:schemeClr>
+    </cs:fontRef>
+    <cs:defRPr sz="1197" kern="1200"/>
+  </cs:seriesAxis>
+  <cs:seriesLine>
+    <cs:lnRef idx="0"/>
+    <cs:fillRef idx="0"/>
+    <cs:effectRef idx="0"/>
+    <cs:fontRef idx="minor">
+      <a:schemeClr val="tx1"/>
+    </cs:fontRef>
+    <cs:spPr>
+      <a:ln w="9525" cap="flat" cmpd="sng" algn="ctr">
+        <a:solidFill>
+          <a:schemeClr val="tx1">
+            <a:lumMod val="35000"/>
+            <a:lumOff val="65000"/>
+          </a:schemeClr>
+        </a:solidFill>
+        <a:round/>
+      </a:ln>
+    </cs:spPr>
+  </cs:seriesLine>
+  <cs:title>
+    <cs:lnRef idx="0"/>
+    <cs:fillRef idx="0"/>
+    <cs:effectRef idx="0"/>
+    <cs:fontRef idx="minor">
+      <a:schemeClr val="tx1">
+        <a:lumMod val="65000"/>
+        <a:lumOff val="35000"/>
+      </a:schemeClr>
+    </cs:fontRef>
+    <cs:defRPr sz="1862" b="0" kern="1200" spc="0" baseline="0"/>
+  </cs:title>
+  <cs:trendline>
+    <cs:lnRef idx="0">
+      <cs:styleClr val="auto"/>
+    </cs:lnRef>
+    <cs:fillRef idx="0"/>
+    <cs:effectRef idx="0"/>
+    <cs:fontRef idx="minor">
+      <a:schemeClr val="tx1"/>
+    </cs:fontRef>
+    <cs:spPr>
+      <a:ln w="19050" cap="rnd">
+        <a:solidFill>
+          <a:schemeClr val="phClr"/>
+        </a:solidFill>
+        <a:prstDash val="sysDot"/>
+      </a:ln>
+    </cs:spPr>
+  </cs:trendline>
+  <cs:trendlineLabel>
+    <cs:lnRef idx="0"/>
+    <cs:fillRef idx="0"/>
+    <cs:effectRef idx="0"/>
+    <cs:fontRef idx="minor">
+      <a:schemeClr val="tx1">
+        <a:lumMod val="65000"/>
+        <a:lumOff val="35000"/>
+      </a:schemeClr>
+    </cs:fontRef>
+    <cs:defRPr sz="1197" kern="1200"/>
+  </cs:trendlineLabel>
+  <cs:upBar>
+    <cs:lnRef idx="0"/>
+    <cs:fillRef idx="0"/>
+    <cs:effectRef idx="0"/>
+    <cs:fontRef idx="minor">
+      <a:schemeClr val="dk1"/>
+    </cs:fontRef>
+    <cs:spPr>
+      <a:solidFill>
+        <a:schemeClr val="lt1"/>
+      </a:solidFill>
+      <a:ln w="9525">
+        <a:solidFill>
+          <a:schemeClr val="tx1">
+            <a:lumMod val="15000"/>
+            <a:lumOff val="85000"/>
+          </a:schemeClr>
+        </a:solidFill>
+      </a:ln>
+    </cs:spPr>
+  </cs:upBar>
+  <cs:valueAxis>
+    <cs:lnRef idx="0"/>
+    <cs:fillRef idx="0"/>
+    <cs:effectRef idx="0"/>
+    <cs:fontRef idx="minor">
+      <a:schemeClr val="tx1">
+        <a:lumMod val="65000"/>
+        <a:lumOff val="35000"/>
+      </a:schemeClr>
+    </cs:fontRef>
+    <cs:defRPr sz="1197" kern="1200"/>
+  </cs:valueAxis>
+  <cs:wall>
+    <cs:lnRef idx="0"/>
+    <cs:fillRef idx="0"/>
+    <cs:effectRef idx="0"/>
+    <cs:fontRef idx="minor">
+      <a:schemeClr val="tx1"/>
+    </cs:fontRef>
+    <cs:spPr>
+      <a:noFill/>
+      <a:ln>
+        <a:noFill/>
+      </a:ln>
+    </cs:spPr>
+  </cs:wall>
+</cs:chartStyle>
+</file>
+
+<file path=ppt/charts/style3.xml><?xml version="1.0" encoding="utf-8"?>
+<cs:chartStyle xmlns:cs="http://schemas.microsoft.com/office/drawing/2012/chartStyle" xmlns:a="http://schemas.openxmlformats.org/drawingml/2006/main" id="332">
+  <cs:axisTitle>
+    <cs:lnRef idx="0"/>
+    <cs:fillRef idx="0"/>
+    <cs:effectRef idx="0"/>
+    <cs:fontRef idx="minor">
+      <a:schemeClr val="tx1">
+        <a:lumMod val="65000"/>
+        <a:lumOff val="35000"/>
+      </a:schemeClr>
+    </cs:fontRef>
+    <cs:defRPr sz="1330" kern="1200"/>
+  </cs:axisTitle>
+  <cs:categoryAxis>
+    <cs:lnRef idx="0"/>
+    <cs:fillRef idx="0"/>
+    <cs:effectRef idx="0"/>
+    <cs:fontRef idx="minor">
+      <a:schemeClr val="tx1">
+        <a:lumMod val="65000"/>
+        <a:lumOff val="35000"/>
+      </a:schemeClr>
+    </cs:fontRef>
+    <cs:spPr>
+      <a:ln w="9525" cap="flat" cmpd="sng" algn="ctr">
+        <a:solidFill>
+          <a:schemeClr val="tx1">
+            <a:lumMod val="15000"/>
+            <a:lumOff val="85000"/>
+          </a:schemeClr>
+        </a:solidFill>
+        <a:round/>
+      </a:ln>
+    </cs:spPr>
+    <cs:defRPr sz="1197" kern="1200"/>
+  </cs:categoryAxis>
+  <cs:chartArea mods="allowNoFillOverride allowNoLineOverride">
+    <cs:lnRef idx="0"/>
+    <cs:fillRef idx="0"/>
+    <cs:effectRef idx="0"/>
+    <cs:fontRef idx="minor">
+      <a:schemeClr val="tx1"/>
+    </cs:fontRef>
+    <cs:spPr>
+      <a:solidFill>
+        <a:schemeClr val="bg1"/>
+      </a:solidFill>
+      <a:ln w="9525" cap="flat" cmpd="sng" algn="ctr">
+        <a:solidFill>
+          <a:schemeClr val="tx1">
+            <a:lumMod val="15000"/>
+            <a:lumOff val="85000"/>
+          </a:schemeClr>
+        </a:solidFill>
+        <a:round/>
+      </a:ln>
+    </cs:spPr>
+    <cs:defRPr sz="1330" kern="1200"/>
+  </cs:chartArea>
+  <cs:dataLabel>
+    <cs:lnRef idx="0"/>
+    <cs:fillRef idx="0"/>
+    <cs:effectRef idx="0"/>
+    <cs:fontRef idx="minor">
+      <a:schemeClr val="tx1">
+        <a:lumMod val="75000"/>
+        <a:lumOff val="25000"/>
+      </a:schemeClr>
+    </cs:fontRef>
+    <cs:defRPr sz="1197" kern="1200"/>
+  </cs:dataLabel>
+  <cs:dataLabelCallout>
+    <cs:lnRef idx="0"/>
+    <cs:fillRef idx="0"/>
+    <cs:effectRef idx="0"/>
+    <cs:fontRef idx="minor">
+      <a:schemeClr val="dk1">
+        <a:lumMod val="65000"/>
+        <a:lumOff val="35000"/>
+      </a:schemeClr>
+    </cs:fontRef>
+    <cs:spPr>
+      <a:solidFill>
+        <a:schemeClr val="lt1"/>
+      </a:solidFill>
+      <a:ln>
+        <a:solidFill>
+          <a:schemeClr val="dk1">
+            <a:lumMod val="25000"/>
+            <a:lumOff val="75000"/>
+          </a:schemeClr>
+        </a:solidFill>
+      </a:ln>
+    </cs:spPr>
+    <cs:defRPr sz="1197" kern="1200"/>
+    <cs:bodyPr rot="0" spcFirstLastPara="1" vertOverflow="clip" horzOverflow="clip" vert="horz" wrap="square" lIns="36576" tIns="18288" rIns="36576" bIns="18288" anchor="ctr" anchorCtr="1">
+      <a:spAutoFit/>
+    </cs:bodyPr>
+  </cs:dataLabelCallout>
+  <cs:dataPoint>
+    <cs:lnRef idx="0"/>
+    <cs:fillRef idx="1">
+      <cs:styleClr val="auto"/>
+    </cs:fillRef>
+    <cs:effectRef idx="0"/>
+    <cs:fontRef idx="minor">
+      <a:schemeClr val="tx1"/>
+    </cs:fontRef>
+  </cs:dataPoint>
+  <cs:dataPoint3D>
+    <cs:lnRef idx="0"/>
+    <cs:fillRef idx="1">
+      <cs:styleClr val="auto"/>
+    </cs:fillRef>
+    <cs:effectRef idx="0"/>
+    <cs:fontRef idx="minor">
+      <a:schemeClr val="tx1"/>
+    </cs:fontRef>
+  </cs:dataPoint3D>
+  <cs:dataPointLine>
+    <cs:lnRef idx="0">
+      <cs:styleClr val="auto"/>
+    </cs:lnRef>
+    <cs:fillRef idx="1"/>
+    <cs:effectRef idx="0"/>
+    <cs:fontRef idx="minor">
+      <a:schemeClr val="tx1"/>
+    </cs:fontRef>
+    <cs:spPr>
+      <a:ln w="28575" cap="rnd">
+        <a:solidFill>
+          <a:schemeClr val="phClr"/>
+        </a:solidFill>
+        <a:round/>
+      </a:ln>
+    </cs:spPr>
+  </cs:dataPointLine>
+  <cs:dataPointMarker>
+    <cs:lnRef idx="0">
+      <cs:styleClr val="auto"/>
+    </cs:lnRef>
+    <cs:fillRef idx="1">
+      <cs:styleClr val="auto"/>
+    </cs:fillRef>
+    <cs:effectRef idx="0"/>
+    <cs:fontRef idx="minor">
+      <a:schemeClr val="tx1"/>
+    </cs:fontRef>
+    <cs:spPr>
+      <a:ln w="9525">
+        <a:solidFill>
+          <a:schemeClr val="phClr"/>
+        </a:solidFill>
+      </a:ln>
+    </cs:spPr>
+  </cs:dataPointMarker>
+  <cs:dataPointMarkerLayout symbol="circle" size="5"/>
+  <cs:dataPointWireframe>
+    <cs:lnRef idx="0">
+      <cs:styleClr val="auto"/>
+    </cs:lnRef>
+    <cs:fillRef idx="1"/>
+    <cs:effectRef idx="0"/>
+    <cs:fontRef idx="minor">
+      <a:schemeClr val="tx1"/>
+    </cs:fontRef>
+    <cs:spPr>
+      <a:ln w="9525" cap="rnd">
+        <a:solidFill>
+          <a:schemeClr val="phClr"/>
+        </a:solidFill>
+        <a:round/>
+      </a:ln>
+    </cs:spPr>
+  </cs:dataPointWireframe>
+  <cs:dataTable>
+    <cs:lnRef idx="0"/>
+    <cs:fillRef idx="0"/>
+    <cs:effectRef idx="0"/>
+    <cs:fontRef idx="minor">
+      <a:schemeClr val="tx1">
+        <a:lumMod val="65000"/>
+        <a:lumOff val="35000"/>
+      </a:schemeClr>
+    </cs:fontRef>
+    <cs:spPr>
+      <a:noFill/>
+      <a:ln w="9525" cap="flat" cmpd="sng" algn="ctr">
+        <a:solidFill>
+          <a:schemeClr val="tx1">
+            <a:lumMod val="15000"/>
+            <a:lumOff val="85000"/>
+          </a:schemeClr>
+        </a:solidFill>
+        <a:round/>
+      </a:ln>
+    </cs:spPr>
+    <cs:defRPr sz="1197" kern="1200"/>
+  </cs:dataTable>
+  <cs:downBar>
+    <cs:lnRef idx="0"/>
+    <cs:fillRef idx="0"/>
+    <cs:effectRef idx="0"/>
+    <cs:fontRef idx="minor">
+      <a:schemeClr val="dk1"/>
+    </cs:fontRef>
+    <cs:spPr>
+      <a:solidFill>
+        <a:schemeClr val="dk1">
+          <a:lumMod val="65000"/>
+          <a:lumOff val="35000"/>
+        </a:schemeClr>
+      </a:solidFill>
+      <a:ln w="9525">
+        <a:solidFill>
+          <a:schemeClr val="tx1">
+            <a:lumMod val="65000"/>
+            <a:lumOff val="35000"/>
+          </a:schemeClr>
+        </a:solidFill>
+      </a:ln>
+    </cs:spPr>
+  </cs:downBar>
+  <cs:dropLine>
+    <cs:lnRef idx="0"/>
+    <cs:fillRef idx="0"/>
+    <cs:effectRef idx="0"/>
+    <cs:fontRef idx="minor">
+      <a:schemeClr val="tx1"/>
+    </cs:fontRef>
+    <cs:spPr>
+      <a:ln w="9525" cap="flat" cmpd="sng" algn="ctr">
+        <a:solidFill>
+          <a:schemeClr val="tx1">
+            <a:lumMod val="35000"/>
+            <a:lumOff val="65000"/>
+          </a:schemeClr>
+        </a:solidFill>
+        <a:round/>
+      </a:ln>
+    </cs:spPr>
+  </cs:dropLine>
+  <cs:errorBar>
+    <cs:lnRef idx="0"/>
+    <cs:fillRef idx="0"/>
+    <cs:effectRef idx="0"/>
+    <cs:fontRef idx="minor">
+      <a:schemeClr val="tx1"/>
+    </cs:fontRef>
+    <cs:spPr>
+      <a:ln w="9525" cap="flat" cmpd="sng" algn="ctr">
+        <a:solidFill>
+          <a:schemeClr val="tx1">
+            <a:lumMod val="65000"/>
+            <a:lumOff val="35000"/>
+          </a:schemeClr>
+        </a:solidFill>
+        <a:round/>
+      </a:ln>
+    </cs:spPr>
+  </cs:errorBar>
+  <cs:floor>
+    <cs:lnRef idx="0"/>
+    <cs:fillRef idx="0"/>
+    <cs:effectRef idx="0"/>
+    <cs:fontRef idx="minor">
+      <a:schemeClr val="tx1"/>
+    </cs:fontRef>
+    <cs:spPr>
+      <a:noFill/>
+      <a:ln>
+        <a:noFill/>
+      </a:ln>
+    </cs:spPr>
+  </cs:floor>
+  <cs:gridlineMajor>
+    <cs:lnRef idx="0"/>
+    <cs:fillRef idx="0"/>
+    <cs:effectRef idx="0"/>
+    <cs:fontRef idx="minor">
+      <a:schemeClr val="tx1"/>
+    </cs:fontRef>
+    <cs:spPr>
+      <a:ln w="9525" cap="flat" cmpd="sng" algn="ctr">
+        <a:solidFill>
+          <a:schemeClr val="tx1">
+            <a:lumMod val="15000"/>
+            <a:lumOff val="85000"/>
+          </a:schemeClr>
+        </a:solidFill>
+        <a:round/>
+      </a:ln>
+    </cs:spPr>
+  </cs:gridlineMajor>
+  <cs:gridlineMinor>
+    <cs:lnRef idx="0"/>
+    <cs:fillRef idx="0"/>
+    <cs:effectRef idx="0"/>
+    <cs:fontRef idx="minor">
+      <a:schemeClr val="tx1"/>
+    </cs:fontRef>
+    <cs:spPr>
+      <a:ln w="9525" cap="flat" cmpd="sng" algn="ctr">
+        <a:solidFill>
+          <a:schemeClr val="tx1">
+            <a:lumMod val="5000"/>
+            <a:lumOff val="95000"/>
+          </a:schemeClr>
+        </a:solidFill>
+        <a:round/>
+      </a:ln>
+    </cs:spPr>
+  </cs:gridlineMinor>
+  <cs:hiLoLine>
+    <cs:lnRef idx="0"/>
+    <cs:fillRef idx="0"/>
+    <cs:effectRef idx="0"/>
+    <cs:fontRef idx="minor">
+      <a:schemeClr val="tx1"/>
+    </cs:fontRef>
+    <cs:spPr>
+      <a:ln w="9525" cap="flat" cmpd="sng" algn="ctr">
+        <a:solidFill>
+          <a:schemeClr val="tx1">
+            <a:lumMod val="75000"/>
+            <a:lumOff val="25000"/>
+          </a:schemeClr>
+        </a:solidFill>
+        <a:round/>
+      </a:ln>
+    </cs:spPr>
+  </cs:hiLoLine>
+  <cs:leaderLine>
+    <cs:lnRef idx="0"/>
+    <cs:fillRef idx="0"/>
+    <cs:effectRef idx="0"/>
+    <cs:fontRef idx="minor">
+      <a:schemeClr val="tx1"/>
+    </cs:fontRef>
+    <cs:spPr>
+      <a:ln w="9525" cap="flat" cmpd="sng" algn="ctr">
+        <a:solidFill>
+          <a:schemeClr val="tx1">
+            <a:lumMod val="35000"/>
+            <a:lumOff val="65000"/>
+          </a:schemeClr>
+        </a:solidFill>
+        <a:round/>
+      </a:ln>
+    </cs:spPr>
+  </cs:leaderLine>
+  <cs:legend>
+    <cs:lnRef idx="0"/>
+    <cs:fillRef idx="0"/>
+    <cs:effectRef idx="0"/>
+    <cs:fontRef idx="minor">
+      <a:schemeClr val="tx1">
+        <a:lumMod val="65000"/>
+        <a:lumOff val="35000"/>
+      </a:schemeClr>
+    </cs:fontRef>
+    <cs:defRPr sz="1197" kern="1200"/>
+  </cs:legend>
+  <cs:plotArea mods="allowNoFillOverride allowNoLineOverride">
+    <cs:lnRef idx="0"/>
+    <cs:fillRef idx="0"/>
+    <cs:effectRef idx="0"/>
+    <cs:fontRef idx="minor">
+      <a:schemeClr val="tx1"/>
+    </cs:fontRef>
+  </cs:plotArea>
+  <cs:plotArea3D mods="allowNoFillOverride allowNoLineOverride">
+    <cs:lnRef idx="0"/>
+    <cs:fillRef idx="0"/>
+    <cs:effectRef idx="0"/>
+    <cs:fontRef idx="minor">
+      <a:schemeClr val="tx1"/>
+    </cs:fontRef>
+  </cs:plotArea3D>
+  <cs:seriesAxis>
+    <cs:lnRef idx="0"/>
+    <cs:fillRef idx="0"/>
+    <cs:effectRef idx="0"/>
+    <cs:fontRef idx="minor">
+      <a:schemeClr val="tx1">
+        <a:lumMod val="65000"/>
+        <a:lumOff val="35000"/>
+      </a:schemeClr>
+    </cs:fontRef>
+    <cs:defRPr sz="1197" kern="1200"/>
+  </cs:seriesAxis>
+  <cs:seriesLine>
+    <cs:lnRef idx="0"/>
+    <cs:fillRef idx="0"/>
+    <cs:effectRef idx="0"/>
+    <cs:fontRef idx="minor">
+      <a:schemeClr val="tx1"/>
+    </cs:fontRef>
+    <cs:spPr>
+      <a:ln w="9525" cap="flat" cmpd="sng" algn="ctr">
+        <a:solidFill>
+          <a:schemeClr val="tx1">
+            <a:lumMod val="35000"/>
+            <a:lumOff val="65000"/>
+          </a:schemeClr>
+        </a:solidFill>
+        <a:round/>
+      </a:ln>
+    </cs:spPr>
+  </cs:seriesLine>
+  <cs:title>
+    <cs:lnRef idx="0"/>
+    <cs:fillRef idx="0"/>
+    <cs:effectRef idx="0"/>
+    <cs:fontRef idx="minor">
+      <a:schemeClr val="tx1">
+        <a:lumMod val="65000"/>
+        <a:lumOff val="35000"/>
+      </a:schemeClr>
+    </cs:fontRef>
+    <cs:defRPr sz="1862" b="0" kern="1200" spc="0" baseline="0"/>
+  </cs:title>
+  <cs:trendline>
+    <cs:lnRef idx="0">
+      <cs:styleClr val="auto"/>
+    </cs:lnRef>
+    <cs:fillRef idx="0"/>
+    <cs:effectRef idx="0"/>
+    <cs:fontRef idx="minor">
+      <a:schemeClr val="tx1"/>
+    </cs:fontRef>
+    <cs:spPr>
+      <a:ln w="19050" cap="rnd">
+        <a:solidFill>
+          <a:schemeClr val="phClr"/>
+        </a:solidFill>
+        <a:prstDash val="sysDot"/>
+      </a:ln>
+    </cs:spPr>
+  </cs:trendline>
+  <cs:trendlineLabel>
+    <cs:lnRef idx="0"/>
+    <cs:fillRef idx="0"/>
+    <cs:effectRef idx="0"/>
+    <cs:fontRef idx="minor">
+      <a:schemeClr val="tx1">
+        <a:lumMod val="65000"/>
+        <a:lumOff val="35000"/>
+      </a:schemeClr>
+    </cs:fontRef>
+    <cs:defRPr sz="1197" kern="1200"/>
+  </cs:trendlineLabel>
+  <cs:upBar>
+    <cs:lnRef idx="0"/>
+    <cs:fillRef idx="0"/>
+    <cs:effectRef idx="0"/>
+    <cs:fontRef idx="minor">
+      <a:schemeClr val="dk1"/>
+    </cs:fontRef>
+    <cs:spPr>
+      <a:solidFill>
+        <a:schemeClr val="lt1"/>
+      </a:solidFill>
+      <a:ln w="9525">
+        <a:solidFill>
+          <a:schemeClr val="tx1">
+            <a:lumMod val="15000"/>
+            <a:lumOff val="85000"/>
+          </a:schemeClr>
+        </a:solidFill>
+      </a:ln>
+    </cs:spPr>
+  </cs:upBar>
+  <cs:valueAxis>
+    <cs:lnRef idx="0"/>
+    <cs:fillRef idx="0"/>
+    <cs:effectRef idx="0"/>
+    <cs:fontRef idx="minor">
+      <a:schemeClr val="tx1">
+        <a:lumMod val="65000"/>
+        <a:lumOff val="35000"/>
+      </a:schemeClr>
+    </cs:fontRef>
+    <cs:defRPr sz="1197" kern="1200"/>
+  </cs:valueAxis>
+  <cs:wall>
+    <cs:lnRef idx="0"/>
+    <cs:fillRef idx="0"/>
+    <cs:effectRef idx="0"/>
+    <cs:fontRef idx="minor">
+      <a:schemeClr val="tx1"/>
+    </cs:fontRef>
+    <cs:spPr>
+      <a:noFill/>
+      <a:ln>
+        <a:noFill/>
+      </a:ln>
+    </cs:spPr>
+  </cs:wall>
+</cs:chartStyle>
+</file>
+
 <file path=ppt/notesMasters/notesMaster1.xml><?xml version="1.0" encoding="utf-8"?>
 <p:notesMaster xmlns:a="http://schemas.openxmlformats.org/drawingml/2006/main" xmlns:r="http://schemas.openxmlformats.org/officeDocument/2006/relationships" xmlns:p="http://schemas.openxmlformats.org/presentationml/2006/main">
   <p:cSld>
@@ -277,7 +3739,7 @@
             <a:fld id="{345BF391-7E6E-4620-98FD-023CDA366473}" type="datetime1">
               <a:rPr lang="it-IT"/>
               <a:pPr lvl="0"/>
-              <a:t>10/07/2026</a:t>
+              <a:t>11/07/2026</a:t>
             </a:fld>
             <a:endParaRPr lang="it-IT"/>
           </a:p>
@@ -1207,6 +4669,96 @@
 </p:notes>
 </file>
 
+<file path=ppt/notesSlides/notesSlide6.xml><?xml version="1.0" encoding="utf-8"?>
+<p:notes xmlns:a="http://schemas.openxmlformats.org/drawingml/2006/main" xmlns:r="http://schemas.openxmlformats.org/officeDocument/2006/relationships" xmlns:p="http://schemas.openxmlformats.org/presentationml/2006/main">
+  <p:cSld>
+    <p:spTree>
+      <p:nvGrpSpPr>
+        <p:cNvPr id="1" name=""/>
+        <p:cNvGrpSpPr/>
+        <p:nvPr/>
+      </p:nvGrpSpPr>
+      <p:grpSpPr>
+        <a:xfrm>
+          <a:off x="0" y="0"/>
+          <a:ext cx="0" cy="0"/>
+          <a:chOff x="0" y="0"/>
+          <a:chExt cx="0" cy="0"/>
+        </a:xfrm>
+      </p:grpSpPr>
+      <p:sp>
+        <p:nvSpPr>
+          <p:cNvPr id="2" name="Segnaposto immagine diapositiva 1"/>
+          <p:cNvSpPr>
+            <a:spLocks noGrp="1" noRot="1" noChangeAspect="1"/>
+          </p:cNvSpPr>
+          <p:nvPr>
+            <p:ph type="sldImg"/>
+          </p:nvPr>
+        </p:nvSpPr>
+        <p:spPr>
+          <a:xfrm>
+            <a:off x="685800" y="1143000"/>
+            <a:ext cx="5486400" cy="3086100"/>
+          </a:xfrm>
+        </p:spPr>
+      </p:sp>
+      <p:sp>
+        <p:nvSpPr>
+          <p:cNvPr id="3" name="Segnaposto note 2"/>
+          <p:cNvSpPr>
+            <a:spLocks noGrp="1"/>
+          </p:cNvSpPr>
+          <p:nvPr>
+            <p:ph type="body" idx="1"/>
+          </p:nvPr>
+        </p:nvSpPr>
+        <p:spPr/>
+        <p:txBody>
+          <a:bodyPr/>
+          <a:lstStyle/>
+          <a:p>
+            <a:endParaRPr lang="it-IT" dirty="0"/>
+          </a:p>
+        </p:txBody>
+      </p:sp>
+      <p:sp>
+        <p:nvSpPr>
+          <p:cNvPr id="4" name="Segnaposto numero diapositiva 3"/>
+          <p:cNvSpPr>
+            <a:spLocks noGrp="1"/>
+          </p:cNvSpPr>
+          <p:nvPr>
+            <p:ph type="sldNum" sz="quarter" idx="5"/>
+          </p:nvPr>
+        </p:nvSpPr>
+        <p:spPr/>
+        <p:txBody>
+          <a:bodyPr/>
+          <a:lstStyle/>
+          <a:p>
+            <a:pPr lvl="0"/>
+            <a:fld id="{DF8E85A9-1D11-4CA2-93D1-7F51BDFAA9B0}" type="slidenum">
+              <a:rPr lang="it-IT" smtClean="0"/>
+              <a:t>20</a:t>
+            </a:fld>
+            <a:endParaRPr lang="it-IT"/>
+          </a:p>
+        </p:txBody>
+      </p:sp>
+    </p:spTree>
+    <p:extLst>
+      <p:ext uri="{BB962C8B-B14F-4D97-AF65-F5344CB8AC3E}">
+        <p14:creationId xmlns:p14="http://schemas.microsoft.com/office/powerpoint/2010/main" val="2770748043"/>
+      </p:ext>
+    </p:extLst>
+  </p:cSld>
+  <p:clrMapOvr>
+    <a:masterClrMapping/>
+  </p:clrMapOvr>
+</p:notes>
+</file>
+
 <file path=ppt/slideLayouts/slideLayout1.xml><?xml version="1.0" encoding="utf-8"?>
 <p:sldLayout xmlns:a="http://schemas.openxmlformats.org/drawingml/2006/main" xmlns:r="http://schemas.openxmlformats.org/officeDocument/2006/relationships" xmlns:p="http://schemas.openxmlformats.org/presentationml/2006/main" type="title" preserve="1">
   <p:cSld name="Title Slide">
@@ -1333,7 +4885,7 @@
             <a:fld id="{BFCAB46A-6DD9-4F62-ABE0-FC90F728C7BD}" type="datetime1">
               <a:rPr lang="en-US"/>
               <a:pPr lvl="0"/>
-              <a:t>7/10/2026</a:t>
+              <a:t>7/11/2026</a:t>
             </a:fld>
             <a:endParaRPr lang="en-US"/>
           </a:p>
@@ -1568,7 +5120,7 @@
             <a:fld id="{D2A8780D-DC3D-49DD-80BA-AF37FC030400}" type="datetime1">
               <a:rPr lang="en-US"/>
               <a:pPr lvl="0"/>
-              <a:t>7/10/2026</a:t>
+              <a:t>7/11/2026</a:t>
             </a:fld>
             <a:endParaRPr lang="en-US"/>
           </a:p>
@@ -1875,7 +5427,7 @@
             <a:fld id="{864CF83D-396D-4087-A7AC-2608151ECF00}" type="datetime1">
               <a:rPr lang="en-US"/>
               <a:pPr lvl="0"/>
-              <a:t>7/10/2026</a:t>
+              <a:t>7/11/2026</a:t>
             </a:fld>
             <a:endParaRPr lang="en-US"/>
           </a:p>
@@ -2142,7 +5694,7 @@
             <a:fld id="{B0B338F0-B854-43AE-9608-61F80A23B07E}" type="datetime1">
               <a:rPr lang="en-US"/>
               <a:pPr lvl="0"/>
-              <a:t>7/10/2026</a:t>
+              <a:t>7/11/2026</a:t>
             </a:fld>
             <a:endParaRPr lang="en-US"/>
           </a:p>
@@ -2411,7 +5963,7 @@
             <a:fld id="{B093E276-F7A9-4844-8194-3164C7EFB60D}" type="datetime1">
               <a:rPr lang="en-US"/>
               <a:pPr lvl="0"/>
-              <a:t>7/10/2026</a:t>
+              <a:t>7/11/2026</a:t>
             </a:fld>
             <a:endParaRPr lang="en-US"/>
           </a:p>
@@ -2761,7 +6313,7 @@
             <a:fld id="{D4EB2D0A-4E10-4794-ADEA-97748A83AB24}" type="datetime1">
               <a:rPr lang="en-US"/>
               <a:pPr lvl="0"/>
-              <a:t>7/10/2026</a:t>
+              <a:t>7/11/2026</a:t>
             </a:fld>
             <a:endParaRPr lang="en-US"/>
           </a:p>
@@ -3161,7 +6713,7 @@
             <a:fld id="{6A0503B2-A64A-4185-816F-E5138D67B637}" type="datetime1">
               <a:rPr lang="en-US"/>
               <a:pPr lvl="0"/>
-              <a:t>7/10/2026</a:t>
+              <a:t>7/11/2026</a:t>
             </a:fld>
             <a:endParaRPr lang="en-US"/>
           </a:p>
@@ -3322,7 +6874,7 @@
             <a:fld id="{C5BFD29E-4622-48D4-BC35-30ADB7E99029}" type="datetime1">
               <a:rPr lang="en-US"/>
               <a:pPr lvl="0"/>
-              <a:t>7/10/2026</a:t>
+              <a:t>7/11/2026</a:t>
             </a:fld>
             <a:endParaRPr lang="en-US"/>
           </a:p>
@@ -3513,7 +7065,7 @@
             <a:fld id="{7668017F-0127-4BE8-A92F-7CA6D920EA84}" type="datetime1">
               <a:rPr lang="en-US"/>
               <a:pPr lvl="0"/>
-              <a:t>7/10/2026</a:t>
+              <a:t>7/11/2026</a:t>
             </a:fld>
             <a:endParaRPr lang="en-US"/>
           </a:p>
@@ -3796,7 +7348,7 @@
             <a:fld id="{3AC66ADE-EAF2-4E0D-AB93-F35B2645C19A}" type="datetime1">
               <a:rPr lang="en-US"/>
               <a:pPr lvl="0"/>
-              <a:t>7/10/2026</a:t>
+              <a:t>7/11/2026</a:t>
             </a:fld>
             <a:endParaRPr lang="en-US"/>
           </a:p>
@@ -4040,7 +7592,7 @@
             <a:fld id="{959BCB41-B51A-4811-BCAB-ED3D313D0567}" type="datetime1">
               <a:rPr lang="en-US"/>
               <a:pPr lvl="0"/>
-              <a:t>7/10/2026</a:t>
+              <a:t>7/11/2026</a:t>
             </a:fld>
             <a:endParaRPr lang="en-US"/>
           </a:p>
@@ -4321,7 +7873,7 @@
             <a:fld id="{CCE64167-1427-45D0-A173-8E84E9565017}" type="datetime1">
               <a:rPr lang="en-US"/>
               <a:pPr lvl="0"/>
-              <a:t>7/10/2026</a:t>
+              <a:t>7/11/2026</a:t>
             </a:fld>
             <a:endParaRPr lang="en-US"/>
           </a:p>
@@ -6553,8 +10105,8 @@
           </a:p>
         </p:txBody>
       </p:sp>
-      <mc:AlternateContent xmlns:mc="http://schemas.openxmlformats.org/markup-compatibility/2006">
-        <mc:Choice xmlns:a14="http://schemas.microsoft.com/office/drawing/2010/main" Requires="a14">
+      <mc:AlternateContent xmlns:mc="http://schemas.openxmlformats.org/markup-compatibility/2006" xmlns:a14="http://schemas.microsoft.com/office/drawing/2010/main">
+        <mc:Choice Requires="a14">
           <p:sp>
             <p:nvSpPr>
               <p:cNvPr id="8" name="Segnaposto contenuto 7">
@@ -6851,7 +10403,7 @@
             </p:txBody>
           </p:sp>
         </mc:Choice>
-        <mc:Fallback>
+        <mc:Fallback xmlns="">
           <p:sp>
             <p:nvSpPr>
               <p:cNvPr id="8" name="Segnaposto contenuto 7">
@@ -6899,6 +10451,402 @@
     <p:extLst>
       <p:ext uri="{BB962C8B-B14F-4D97-AF65-F5344CB8AC3E}">
         <p14:creationId xmlns:p14="http://schemas.microsoft.com/office/powerpoint/2010/main" val="2600859803"/>
+      </p:ext>
+    </p:extLst>
+  </p:cSld>
+  <p:clrMapOvr>
+    <a:masterClrMapping/>
+  </p:clrMapOvr>
+</p:sld>
+</file>
+
+<file path=ppt/slides/slide18.xml><?xml version="1.0" encoding="utf-8"?>
+<p:sld xmlns:a="http://schemas.openxmlformats.org/drawingml/2006/main" xmlns:r="http://schemas.openxmlformats.org/officeDocument/2006/relationships" xmlns:p="http://schemas.openxmlformats.org/presentationml/2006/main">
+  <p:cSld>
+    <p:spTree>
+      <p:nvGrpSpPr>
+        <p:cNvPr id="1" name=""/>
+        <p:cNvGrpSpPr/>
+        <p:nvPr/>
+      </p:nvGrpSpPr>
+      <p:grpSpPr>
+        <a:xfrm>
+          <a:off x="0" y="0"/>
+          <a:ext cx="0" cy="0"/>
+          <a:chOff x="0" y="0"/>
+          <a:chExt cx="0" cy="0"/>
+        </a:xfrm>
+      </p:grpSpPr>
+      <p:sp>
+        <p:nvSpPr>
+          <p:cNvPr id="2" name="Titolo 1">
+            <a:extLst>
+              <a:ext uri="{FF2B5EF4-FFF2-40B4-BE49-F238E27FC236}">
+                <a16:creationId xmlns:a16="http://schemas.microsoft.com/office/drawing/2014/main" id="{82F1B685-8655-DB8D-67D1-546733005C9B}"/>
+              </a:ext>
+            </a:extLst>
+          </p:cNvPr>
+          <p:cNvSpPr>
+            <a:spLocks noGrp="1"/>
+          </p:cNvSpPr>
+          <p:nvPr>
+            <p:ph type="title"/>
+          </p:nvPr>
+        </p:nvSpPr>
+        <p:spPr/>
+        <p:txBody>
+          <a:bodyPr/>
+          <a:lstStyle/>
+          <a:p>
+            <a:r>
+              <a:rPr lang="it-IT" dirty="0"/>
+              <a:t>Analisi – Tempo Sequenziale</a:t>
+            </a:r>
+          </a:p>
+        </p:txBody>
+      </p:sp>
+      <p:graphicFrame>
+        <p:nvGraphicFramePr>
+          <p:cNvPr id="11" name="Segnaposto contenuto 10">
+            <a:extLst>
+              <a:ext uri="{FF2B5EF4-FFF2-40B4-BE49-F238E27FC236}">
+                <a16:creationId xmlns:a16="http://schemas.microsoft.com/office/drawing/2014/main" id="{DAF6E4D3-37AC-94A8-0A29-3E72441C4D07}"/>
+              </a:ext>
+            </a:extLst>
+          </p:cNvPr>
+          <p:cNvGraphicFramePr>
+            <a:graphicFrameLocks noGrp="1"/>
+          </p:cNvGraphicFramePr>
+          <p:nvPr>
+            <p:ph idx="1"/>
+            <p:extLst>
+              <p:ext uri="{D42A27DB-BD31-4B8C-83A1-F6EECF244321}">
+                <p14:modId xmlns:p14="http://schemas.microsoft.com/office/powerpoint/2010/main" val="3163075499"/>
+              </p:ext>
+            </p:extLst>
+          </p:nvPr>
+        </p:nvGraphicFramePr>
+        <p:xfrm>
+          <a:off x="639764" y="2281383"/>
+          <a:ext cx="10890924" cy="3917806"/>
+        </p:xfrm>
+        <a:graphic>
+          <a:graphicData uri="http://schemas.openxmlformats.org/drawingml/2006/chart">
+            <c:chart xmlns:c="http://schemas.openxmlformats.org/drawingml/2006/chart" xmlns:r="http://schemas.openxmlformats.org/officeDocument/2006/relationships" r:id="rId2"/>
+          </a:graphicData>
+        </a:graphic>
+      </p:graphicFrame>
+    </p:spTree>
+    <p:extLst>
+      <p:ext uri="{BB962C8B-B14F-4D97-AF65-F5344CB8AC3E}">
+        <p14:creationId xmlns:p14="http://schemas.microsoft.com/office/powerpoint/2010/main" val="2363376588"/>
+      </p:ext>
+    </p:extLst>
+  </p:cSld>
+  <p:clrMapOvr>
+    <a:masterClrMapping/>
+  </p:clrMapOvr>
+</p:sld>
+</file>
+
+<file path=ppt/slides/slide19.xml><?xml version="1.0" encoding="utf-8"?>
+<p:sld xmlns:a="http://schemas.openxmlformats.org/drawingml/2006/main" xmlns:r="http://schemas.openxmlformats.org/officeDocument/2006/relationships" xmlns:p="http://schemas.openxmlformats.org/presentationml/2006/main">
+  <p:cSld>
+    <p:spTree>
+      <p:nvGrpSpPr>
+        <p:cNvPr id="1" name=""/>
+        <p:cNvGrpSpPr/>
+        <p:nvPr/>
+      </p:nvGrpSpPr>
+      <p:grpSpPr>
+        <a:xfrm>
+          <a:off x="0" y="0"/>
+          <a:ext cx="0" cy="0"/>
+          <a:chOff x="0" y="0"/>
+          <a:chExt cx="0" cy="0"/>
+        </a:xfrm>
+      </p:grpSpPr>
+      <p:sp>
+        <p:nvSpPr>
+          <p:cNvPr id="2" name="Titolo 1">
+            <a:extLst>
+              <a:ext uri="{FF2B5EF4-FFF2-40B4-BE49-F238E27FC236}">
+                <a16:creationId xmlns:a16="http://schemas.microsoft.com/office/drawing/2014/main" id="{9D74DACE-A7A1-98C2-AB20-2627F434AA4C}"/>
+              </a:ext>
+            </a:extLst>
+          </p:cNvPr>
+          <p:cNvSpPr>
+            <a:spLocks noGrp="1"/>
+          </p:cNvSpPr>
+          <p:nvPr>
+            <p:ph type="title"/>
+          </p:nvPr>
+        </p:nvSpPr>
+        <p:spPr/>
+        <p:txBody>
+          <a:bodyPr/>
+          <a:lstStyle/>
+          <a:p>
+            <a:r>
+              <a:rPr lang="it-IT" dirty="0"/>
+              <a:t>Analisi – Tempo Sequenziale</a:t>
+            </a:r>
+          </a:p>
+        </p:txBody>
+      </p:sp>
+      <mc:AlternateContent xmlns:mc="http://schemas.openxmlformats.org/markup-compatibility/2006">
+        <mc:Choice xmlns:a14="http://schemas.microsoft.com/office/drawing/2010/main" Requires="a14">
+          <p:sp>
+            <p:nvSpPr>
+              <p:cNvPr id="3" name="Segnaposto contenuto 2">
+                <a:extLst>
+                  <a:ext uri="{FF2B5EF4-FFF2-40B4-BE49-F238E27FC236}">
+                    <a16:creationId xmlns:a16="http://schemas.microsoft.com/office/drawing/2014/main" id="{BC5ACEE4-ECEA-BB1B-25B2-6A587573F718}"/>
+                  </a:ext>
+                </a:extLst>
+              </p:cNvPr>
+              <p:cNvSpPr>
+                <a:spLocks noGrp="1"/>
+              </p:cNvSpPr>
+              <p:nvPr>
+                <p:ph idx="1"/>
+              </p:nvPr>
+            </p:nvSpPr>
+            <p:spPr/>
+            <p:txBody>
+              <a:bodyPr/>
+              <a:lstStyle/>
+              <a:p>
+                <a:r>
+                  <a:rPr lang="it-IT" dirty="0"/>
+                  <a:t>A </a:t>
+                </a:r>
+                <a14:m>
+                  <m:oMath xmlns:m="http://schemas.openxmlformats.org/officeDocument/2006/math">
+                    <m:r>
+                      <a:rPr lang="it-IT" i="1" dirty="0" smtClean="0">
+                        <a:latin typeface="Cambria Math" panose="02040503050406030204" pitchFamily="18" charset="0"/>
+                      </a:rPr>
+                      <m:t>𝑁</m:t>
+                    </m:r>
+                    <m:r>
+                      <a:rPr lang="it-IT" i="1" dirty="0">
+                        <a:latin typeface="Cambria Math" panose="02040503050406030204" pitchFamily="18" charset="0"/>
+                      </a:rPr>
+                      <m:t>=</m:t>
+                    </m:r>
+                    <m:r>
+                      <a:rPr lang="it-IT" i="1" dirty="0" smtClean="0">
+                        <a:latin typeface="Cambria Math" panose="02040503050406030204" pitchFamily="18" charset="0"/>
+                      </a:rPr>
+                      <m:t>512 </m:t>
+                    </m:r>
+                  </m:oMath>
+                </a14:m>
+                <a:r>
+                  <a:rPr lang="it-IT" dirty="0"/>
+                  <a:t>il tempo reale ricalca fedelmente la curva teorica </a:t>
+                </a:r>
+                <a14:m>
+                  <m:oMath xmlns:m="http://schemas.openxmlformats.org/officeDocument/2006/math">
+                    <m:r>
+                      <a:rPr lang="it-IT" i="1" dirty="0" smtClean="0">
+                        <a:latin typeface="Cambria Math" panose="02040503050406030204" pitchFamily="18" charset="0"/>
+                      </a:rPr>
+                      <m:t>𝑂</m:t>
+                    </m:r>
+                    <m:d>
+                      <m:dPr>
+                        <m:ctrlPr>
+                          <a:rPr lang="it-IT" i="1" dirty="0">
+                            <a:latin typeface="Cambria Math" panose="02040503050406030204" pitchFamily="18" charset="0"/>
+                          </a:rPr>
+                        </m:ctrlPr>
+                      </m:dPr>
+                      <m:e>
+                        <m:sSup>
+                          <m:sSupPr>
+                            <m:ctrlPr>
+                              <a:rPr lang="it-IT" i="1" dirty="0">
+                                <a:latin typeface="Cambria Math" panose="02040503050406030204" pitchFamily="18" charset="0"/>
+                              </a:rPr>
+                            </m:ctrlPr>
+                          </m:sSupPr>
+                          <m:e>
+                            <m:r>
+                              <a:rPr lang="it-IT" i="1" dirty="0">
+                                <a:latin typeface="Cambria Math" panose="02040503050406030204" pitchFamily="18" charset="0"/>
+                              </a:rPr>
+                              <m:t>𝑁</m:t>
+                            </m:r>
+                          </m:e>
+                          <m:sup>
+                            <m:r>
+                              <a:rPr lang="it-IT" i="1" dirty="0">
+                                <a:latin typeface="Cambria Math" panose="02040503050406030204" pitchFamily="18" charset="0"/>
+                              </a:rPr>
+                              <m:t>4</m:t>
+                            </m:r>
+                          </m:sup>
+                        </m:sSup>
+                      </m:e>
+                    </m:d>
+                  </m:oMath>
+                </a14:m>
+                <a:r>
+                  <a:rPr lang="it-IT" dirty="0"/>
+                  <a:t>.</a:t>
+                </a:r>
+              </a:p>
+              <a:p>
+                <a:r>
+                  <a:rPr lang="it-IT" dirty="0"/>
+                  <a:t>A </a:t>
+                </a:r>
+                <a14:m>
+                  <m:oMath xmlns:m="http://schemas.openxmlformats.org/officeDocument/2006/math">
+                    <m:r>
+                      <a:rPr lang="it-IT" i="1" dirty="0" smtClean="0">
+                        <a:latin typeface="Cambria Math" panose="02040503050406030204" pitchFamily="18" charset="0"/>
+                      </a:rPr>
+                      <m:t>𝑁</m:t>
+                    </m:r>
+                    <m:r>
+                      <a:rPr lang="it-IT" i="1" dirty="0">
+                        <a:latin typeface="Cambria Math" panose="02040503050406030204" pitchFamily="18" charset="0"/>
+                      </a:rPr>
+                      <m:t>=</m:t>
+                    </m:r>
+                    <m:r>
+                      <a:rPr lang="it-IT" i="1" dirty="0" smtClean="0">
+                        <a:latin typeface="Cambria Math" panose="02040503050406030204" pitchFamily="18" charset="0"/>
+                      </a:rPr>
+                      <m:t>1024</m:t>
+                    </m:r>
+                  </m:oMath>
+                </a14:m>
+                <a:r>
+                  <a:rPr lang="it-IT" dirty="0"/>
+                  <a:t>, il tempo reale (</a:t>
+                </a:r>
+                <a14:m>
+                  <m:oMath xmlns:m="http://schemas.openxmlformats.org/officeDocument/2006/math">
+                    <m:r>
+                      <a:rPr lang="it-IT" i="1" dirty="0" smtClean="0">
+                        <a:latin typeface="Cambria Math" panose="02040503050406030204" pitchFamily="18" charset="0"/>
+                      </a:rPr>
+                      <m:t>2537.81</m:t>
+                    </m:r>
+                  </m:oMath>
+                </a14:m>
+                <a:r>
+                  <a:rPr lang="it-IT" dirty="0"/>
+                  <a:t> s) devia nettamente verso l'alto rispetto alla proiezione asintotica (</a:t>
+                </a:r>
+                <a14:m>
+                  <m:oMath xmlns:m="http://schemas.openxmlformats.org/officeDocument/2006/math">
+                    <m:r>
+                      <a:rPr lang="it-IT" i="1" dirty="0" smtClean="0">
+                        <a:latin typeface="Cambria Math" panose="02040503050406030204" pitchFamily="18" charset="0"/>
+                      </a:rPr>
+                      <m:t>1913.65</m:t>
+                    </m:r>
+                  </m:oMath>
+                </a14:m>
+                <a:r>
+                  <a:rPr lang="it-IT" dirty="0"/>
+                  <a:t> s). Perché?</a:t>
+                </a:r>
+              </a:p>
+              <a:p>
+                <a:r>
+                  <a:rPr lang="it-IT" dirty="0"/>
+                  <a:t>La </a:t>
+                </a:r>
+                <a:r>
+                  <a:rPr lang="it-IT" b="1" dirty="0"/>
+                  <a:t>cache L3 </a:t>
+                </a:r>
+                <a:r>
+                  <a:rPr lang="it-IT" dirty="0"/>
+                  <a:t>ha uno spazio totale di </a:t>
+                </a:r>
+                <a:r>
+                  <a:rPr lang="it-IT" b="1" dirty="0"/>
+                  <a:t>8MB </a:t>
+                </a:r>
+                <a:r>
+                  <a:rPr lang="it-IT" dirty="0"/>
+                  <a:t>mentre, invece, le due matrici occupano uno spazio di circa </a:t>
+                </a:r>
+                <a:r>
+                  <a:rPr lang="it-IT" b="1" dirty="0"/>
+                  <a:t>8 MB </a:t>
+                </a:r>
+                <a:r>
+                  <a:rPr lang="it-IT" dirty="0"/>
+                  <a:t>l’una, rendendo quindi il totale </a:t>
+                </a:r>
+                <a:r>
+                  <a:rPr lang="it-IT" b="1" dirty="0"/>
+                  <a:t>16 MB </a:t>
+                </a:r>
+                <a:r>
+                  <a:rPr lang="it-IT" dirty="0"/>
+                  <a:t>forzando dunque continui accessi alla RAM.</a:t>
+                </a:r>
+                <a:endParaRPr lang="it-IT" b="1" dirty="0"/>
+              </a:p>
+              <a:p>
+                <a:endParaRPr lang="it-IT" dirty="0"/>
+              </a:p>
+            </p:txBody>
+          </p:sp>
+        </mc:Choice>
+        <mc:Fallback>
+          <p:sp>
+            <p:nvSpPr>
+              <p:cNvPr id="3" name="Segnaposto contenuto 2">
+                <a:extLst>
+                  <a:ext uri="{FF2B5EF4-FFF2-40B4-BE49-F238E27FC236}">
+                    <a16:creationId xmlns:a16="http://schemas.microsoft.com/office/drawing/2014/main" id="{BC5ACEE4-ECEA-BB1B-25B2-6A587573F718}"/>
+                  </a:ext>
+                </a:extLst>
+              </p:cNvPr>
+              <p:cNvSpPr>
+                <a:spLocks noGrp="1" noRot="1" noChangeAspect="1" noMove="1" noResize="1" noEditPoints="1" noAdjustHandles="1" noChangeArrowheads="1" noChangeShapeType="1" noTextEdit="1"/>
+              </p:cNvSpPr>
+              <p:nvPr>
+                <p:ph idx="1"/>
+              </p:nvPr>
+            </p:nvSpPr>
+            <p:spPr>
+              <a:blipFill>
+                <a:blip r:embed="rId2"/>
+                <a:stretch>
+                  <a:fillRect l="-336" t="-171" r="-839"/>
+                </a:stretch>
+              </a:blipFill>
+            </p:spPr>
+            <p:txBody>
+              <a:bodyPr/>
+              <a:lstStyle/>
+              <a:p>
+                <a:r>
+                  <a:rPr lang="it-IT">
+                    <a:noFill/>
+                  </a:rPr>
+                  <a:t> </a:t>
+                </a:r>
+              </a:p>
+            </p:txBody>
+          </p:sp>
+        </mc:Fallback>
+      </mc:AlternateContent>
+    </p:spTree>
+    <p:extLst>
+      <p:ext uri="{BB962C8B-B14F-4D97-AF65-F5344CB8AC3E}">
+        <p14:creationId xmlns:p14="http://schemas.microsoft.com/office/powerpoint/2010/main" val="2756742803"/>
       </p:ext>
     </p:extLst>
   </p:cSld>
@@ -7393,6 +11341,184 @@
 </p:sld>
 </file>
 
+<file path=ppt/slides/slide20.xml><?xml version="1.0" encoding="utf-8"?>
+<p:sld xmlns:a="http://schemas.openxmlformats.org/drawingml/2006/main" xmlns:r="http://schemas.openxmlformats.org/officeDocument/2006/relationships" xmlns:p="http://schemas.openxmlformats.org/presentationml/2006/main">
+  <p:cSld>
+    <p:spTree>
+      <p:nvGrpSpPr>
+        <p:cNvPr id="1" name=""/>
+        <p:cNvGrpSpPr/>
+        <p:nvPr/>
+      </p:nvGrpSpPr>
+      <p:grpSpPr>
+        <a:xfrm>
+          <a:off x="0" y="0"/>
+          <a:ext cx="0" cy="0"/>
+          <a:chOff x="0" y="0"/>
+          <a:chExt cx="0" cy="0"/>
+        </a:xfrm>
+      </p:grpSpPr>
+      <p:sp>
+        <p:nvSpPr>
+          <p:cNvPr id="2" name="Titolo 1">
+            <a:extLst>
+              <a:ext uri="{FF2B5EF4-FFF2-40B4-BE49-F238E27FC236}">
+                <a16:creationId xmlns:a16="http://schemas.microsoft.com/office/drawing/2014/main" id="{481FA6A8-D99B-67C9-9EA0-F517BD5D3C15}"/>
+              </a:ext>
+            </a:extLst>
+          </p:cNvPr>
+          <p:cNvSpPr>
+            <a:spLocks noGrp="1"/>
+          </p:cNvSpPr>
+          <p:nvPr>
+            <p:ph type="title"/>
+          </p:nvPr>
+        </p:nvSpPr>
+        <p:spPr/>
+        <p:txBody>
+          <a:bodyPr/>
+          <a:lstStyle/>
+          <a:p>
+            <a:r>
+              <a:rPr lang="it-IT" dirty="0"/>
+              <a:t>Analisi – Strong Scaling – MPI </a:t>
+            </a:r>
+          </a:p>
+        </p:txBody>
+      </p:sp>
+      <p:graphicFrame>
+        <p:nvGraphicFramePr>
+          <p:cNvPr id="6" name="Segnaposto contenuto 5">
+            <a:extLst>
+              <a:ext uri="{FF2B5EF4-FFF2-40B4-BE49-F238E27FC236}">
+                <a16:creationId xmlns:a16="http://schemas.microsoft.com/office/drawing/2014/main" id="{B76F5DEC-0AB9-CFDB-2791-74570536B345}"/>
+              </a:ext>
+            </a:extLst>
+          </p:cNvPr>
+          <p:cNvGraphicFramePr>
+            <a:graphicFrameLocks noGrp="1"/>
+          </p:cNvGraphicFramePr>
+          <p:nvPr>
+            <p:ph idx="1"/>
+            <p:extLst>
+              <p:ext uri="{D42A27DB-BD31-4B8C-83A1-F6EECF244321}">
+                <p14:modId xmlns:p14="http://schemas.microsoft.com/office/powerpoint/2010/main" val="2041528192"/>
+              </p:ext>
+            </p:extLst>
+          </p:nvPr>
+        </p:nvGraphicFramePr>
+        <p:xfrm>
+          <a:off x="640080" y="2185988"/>
+          <a:ext cx="10890924" cy="3919537"/>
+        </p:xfrm>
+        <a:graphic>
+          <a:graphicData uri="http://schemas.openxmlformats.org/drawingml/2006/chart">
+            <c:chart xmlns:c="http://schemas.openxmlformats.org/drawingml/2006/chart" xmlns:r="http://schemas.openxmlformats.org/officeDocument/2006/relationships" r:id="rId3"/>
+          </a:graphicData>
+        </a:graphic>
+      </p:graphicFrame>
+    </p:spTree>
+    <p:extLst>
+      <p:ext uri="{BB962C8B-B14F-4D97-AF65-F5344CB8AC3E}">
+        <p14:creationId xmlns:p14="http://schemas.microsoft.com/office/powerpoint/2010/main" val="1491229942"/>
+      </p:ext>
+    </p:extLst>
+  </p:cSld>
+  <p:clrMapOvr>
+    <a:masterClrMapping/>
+  </p:clrMapOvr>
+</p:sld>
+</file>
+
+<file path=ppt/slides/slide21.xml><?xml version="1.0" encoding="utf-8"?>
+<p:sld xmlns:a="http://schemas.openxmlformats.org/drawingml/2006/main" xmlns:r="http://schemas.openxmlformats.org/officeDocument/2006/relationships" xmlns:p="http://schemas.openxmlformats.org/presentationml/2006/main">
+  <p:cSld>
+    <p:spTree>
+      <p:nvGrpSpPr>
+        <p:cNvPr id="1" name=""/>
+        <p:cNvGrpSpPr/>
+        <p:nvPr/>
+      </p:nvGrpSpPr>
+      <p:grpSpPr>
+        <a:xfrm>
+          <a:off x="0" y="0"/>
+          <a:ext cx="0" cy="0"/>
+          <a:chOff x="0" y="0"/>
+          <a:chExt cx="0" cy="0"/>
+        </a:xfrm>
+      </p:grpSpPr>
+      <p:sp>
+        <p:nvSpPr>
+          <p:cNvPr id="2" name="Titolo 1">
+            <a:extLst>
+              <a:ext uri="{FF2B5EF4-FFF2-40B4-BE49-F238E27FC236}">
+                <a16:creationId xmlns:a16="http://schemas.microsoft.com/office/drawing/2014/main" id="{5ABE67F2-AE56-2BCC-9C60-964D5A7B8AB3}"/>
+              </a:ext>
+            </a:extLst>
+          </p:cNvPr>
+          <p:cNvSpPr>
+            <a:spLocks noGrp="1"/>
+          </p:cNvSpPr>
+          <p:nvPr>
+            <p:ph type="title"/>
+          </p:nvPr>
+        </p:nvSpPr>
+        <p:spPr/>
+        <p:txBody>
+          <a:bodyPr/>
+          <a:lstStyle/>
+          <a:p>
+            <a:r>
+              <a:rPr lang="it-IT" dirty="0"/>
+              <a:t>Analisi – Strong Scaling – MPI </a:t>
+            </a:r>
+          </a:p>
+        </p:txBody>
+      </p:sp>
+      <p:graphicFrame>
+        <p:nvGraphicFramePr>
+          <p:cNvPr id="6" name="Segnaposto contenuto 5">
+            <a:extLst>
+              <a:ext uri="{FF2B5EF4-FFF2-40B4-BE49-F238E27FC236}">
+                <a16:creationId xmlns:a16="http://schemas.microsoft.com/office/drawing/2014/main" id="{89E2DBA0-6FEA-2ED1-9A6B-526AC1487ABE}"/>
+              </a:ext>
+            </a:extLst>
+          </p:cNvPr>
+          <p:cNvGraphicFramePr>
+            <a:graphicFrameLocks noGrp="1"/>
+          </p:cNvGraphicFramePr>
+          <p:nvPr>
+            <p:ph idx="1"/>
+            <p:extLst>
+              <p:ext uri="{D42A27DB-BD31-4B8C-83A1-F6EECF244321}">
+                <p14:modId xmlns:p14="http://schemas.microsoft.com/office/powerpoint/2010/main" val="555854292"/>
+              </p:ext>
+            </p:extLst>
+          </p:nvPr>
+        </p:nvGraphicFramePr>
+        <p:xfrm>
+          <a:off x="639763" y="2633663"/>
+          <a:ext cx="5999162" cy="3565525"/>
+        </p:xfrm>
+        <a:graphic>
+          <a:graphicData uri="http://schemas.openxmlformats.org/drawingml/2006/chart">
+            <c:chart xmlns:c="http://schemas.openxmlformats.org/drawingml/2006/chart" xmlns:r="http://schemas.openxmlformats.org/officeDocument/2006/relationships" r:id="rId2"/>
+          </a:graphicData>
+        </a:graphic>
+      </p:graphicFrame>
+    </p:spTree>
+    <p:extLst>
+      <p:ext uri="{BB962C8B-B14F-4D97-AF65-F5344CB8AC3E}">
+        <p14:creationId xmlns:p14="http://schemas.microsoft.com/office/powerpoint/2010/main" val="2777621118"/>
+      </p:ext>
+    </p:extLst>
+  </p:cSld>
+  <p:clrMapOvr>
+    <a:masterClrMapping/>
+  </p:clrMapOvr>
+</p:sld>
+</file>
+
 <file path=ppt/slides/slide3.xml><?xml version="1.0" encoding="utf-8"?>
 <p:sld xmlns:a="http://schemas.openxmlformats.org/drawingml/2006/main" xmlns:r="http://schemas.openxmlformats.org/officeDocument/2006/relationships" xmlns:p="http://schemas.openxmlformats.org/presentationml/2006/main">
   <p:cSld name="Slide3">
@@ -7647,7 +11773,7 @@
                   </a:lnSpc>
                 </a:pPr>
                 <a:r>
-                  <a:rPr lang="it-IT" sz="1900"/>
+                  <a:rPr lang="it-IT" sz="1900" dirty="0"/>
                   <a:t>La complessità di una singola iterazione del do-while è </a:t>
                 </a:r>
                 <a14:m>
@@ -7698,7 +11824,7 @@
                   </m:oMath>
                 </a14:m>
                 <a:r>
-                  <a:rPr lang="it-IT" sz="1900"/>
+                  <a:rPr lang="it-IT" sz="1900" dirty="0"/>
                   <a:t> a causa dei due cicli for annidati. </a:t>
                 </a:r>
               </a:p>
@@ -7709,7 +11835,7 @@
                   </a:lnSpc>
                 </a:pPr>
                 <a:r>
-                  <a:rPr lang="it-IT" sz="1900"/>
+                  <a:rPr lang="it-IT" sz="1900" dirty="0"/>
                   <a:t>Il do-while viene eseguito un numero </a:t>
                 </a:r>
                 <a14:m>
@@ -7723,7 +11849,7 @@
                   </m:oMath>
                 </a14:m>
                 <a:r>
-                  <a:rPr lang="it-IT" sz="1900"/>
+                  <a:rPr lang="it-IT" sz="1900" dirty="0"/>
                   <a:t> di volte che cresce all’aumentare non solo di </a:t>
                 </a:r>
                 <a14:m>
@@ -7743,7 +11869,7 @@
                   </m:oMath>
                 </a14:m>
                 <a:r>
-                  <a:rPr lang="it-IT" sz="1900"/>
+                  <a:rPr lang="it-IT" sz="1900" dirty="0"/>
                   <a:t>ma anche in base al valore di convergenza impostato. Di fatto, ciò rende </a:t>
                 </a:r>
                 <a14:m>
@@ -7763,7 +11889,7 @@
                   </m:oMath>
                 </a14:m>
                 <a:r>
-                  <a:rPr lang="it-IT" sz="1900"/>
+                  <a:rPr lang="it-IT" sz="1900" dirty="0"/>
                   <a:t>un valore assolutamente non trascurabile che, dai dati raccolti sembra essere circa un </a:t>
                 </a:r>
                 <a14:m>
@@ -7818,7 +11944,7 @@
                     </m:r>
                   </m:oMath>
                 </a14:m>
-                <a:endParaRPr lang="it-IT" sz="1900"/>
+                <a:endParaRPr lang="it-IT" sz="1900" dirty="0"/>
               </a:p>
               <a:p>
                 <a:pPr lvl="0">
@@ -7827,7 +11953,7 @@
                   </a:lnSpc>
                 </a:pPr>
                 <a:r>
-                  <a:rPr lang="it-IT" sz="1900"/>
+                  <a:rPr lang="it-IT" sz="1900" dirty="0"/>
                   <a:t>Di fatto dunque la risoluzione ha un costo </a:t>
                 </a:r>
                 <a14:m>
@@ -7888,7 +12014,7 @@
                   </m:oMath>
                 </a14:m>
                 <a:r>
-                  <a:rPr lang="it-IT" sz="1900"/>
+                  <a:rPr lang="it-IT" sz="1900" dirty="0"/>
                   <a:t> che è circa </a:t>
                 </a:r>
                 <a14:m>
@@ -7943,7 +12069,7 @@
                     </m:r>
                   </m:oMath>
                 </a14:m>
-                <a:endParaRPr lang="it-IT" sz="1900"/>
+                <a:endParaRPr lang="it-IT" sz="1900" dirty="0"/>
               </a:p>
               <a:p>
                 <a:pPr lvl="0">
@@ -7951,7 +12077,7 @@
                     <a:spcPct val="110000"/>
                   </a:lnSpc>
                 </a:pPr>
-                <a:endParaRPr lang="it-IT" sz="1900"/>
+                <a:endParaRPr lang="it-IT" sz="1900" dirty="0"/>
               </a:p>
             </p:txBody>
           </p:sp>
@@ -8057,7 +12183,7 @@
         </p:blipFill>
         <p:spPr>
           <a:xfrm>
-            <a:off x="6537959" y="922355"/>
+            <a:off x="6377940" y="1031004"/>
             <a:ext cx="5494016" cy="5480282"/>
           </a:xfrm>
           <a:prstGeom prst="rect">

--- a/Secondo Semestre/principi_prog_parallela/Codici/Progetto/Simulazione della Diffusione del Calore 2D.pptx
+++ b/Secondo Semestre/principi_prog_parallela/Codici/Progetto/Simulazione della Diffusione del Calore 2D.pptx
@@ -5,7 +5,7 @@
     <p:sldMasterId id="2147483648" r:id="rId1"/>
   </p:sldMasterIdLst>
   <p:notesMasterIdLst>
-    <p:notesMasterId r:id="rId23"/>
+    <p:notesMasterId r:id="rId26"/>
   </p:notesMasterIdLst>
   <p:sldIdLst>
     <p:sldId id="256" r:id="rId2"/>
@@ -29,6 +29,9 @@
     <p:sldId id="276" r:id="rId20"/>
     <p:sldId id="277" r:id="rId21"/>
     <p:sldId id="278" r:id="rId22"/>
+    <p:sldId id="279" r:id="rId23"/>
+    <p:sldId id="280" r:id="rId24"/>
+    <p:sldId id="281" r:id="rId25"/>
   </p:sldIdLst>
   <p:sldSz cx="12192000" cy="6858000"/>
   <p:notesSz cx="6858000" cy="9144000"/>
@@ -713,6 +716,64 @@
               <a:effectLst/>
             </c:spPr>
           </c:marker>
+          <c:dLbls>
+            <c:spPr>
+              <a:noFill/>
+              <a:ln>
+                <a:noFill/>
+              </a:ln>
+              <a:effectLst/>
+            </c:spPr>
+            <c:txPr>
+              <a:bodyPr rot="0" spcFirstLastPara="1" vertOverflow="ellipsis" vert="horz" wrap="square" lIns="38100" tIns="19050" rIns="38100" bIns="19050" anchor="ctr" anchorCtr="1">
+                <a:spAutoFit/>
+              </a:bodyPr>
+              <a:lstStyle/>
+              <a:p>
+                <a:pPr>
+                  <a:defRPr sz="1197" b="0" i="0" u="none" strike="noStrike" kern="1200" baseline="0">
+                    <a:solidFill>
+                      <a:schemeClr val="tx1">
+                        <a:lumMod val="75000"/>
+                        <a:lumOff val="25000"/>
+                      </a:schemeClr>
+                    </a:solidFill>
+                    <a:latin typeface="+mn-lt"/>
+                    <a:ea typeface="+mn-ea"/>
+                    <a:cs typeface="+mn-cs"/>
+                  </a:defRPr>
+                </a:pPr>
+                <a:endParaRPr lang="it-IT"/>
+              </a:p>
+            </c:txPr>
+            <c:dLblPos val="t"/>
+            <c:showLegendKey val="0"/>
+            <c:showVal val="1"/>
+            <c:showCatName val="0"/>
+            <c:showSerName val="0"/>
+            <c:showPercent val="0"/>
+            <c:showBubbleSize val="0"/>
+            <c:showLeaderLines val="0"/>
+            <c:extLst>
+              <c:ext xmlns:c15="http://schemas.microsoft.com/office/drawing/2012/chart" uri="{CE6537A1-D6FC-4f65-9D91-7224C49458BB}">
+                <c15:showLeaderLines val="1"/>
+                <c15:leaderLines>
+                  <c:spPr>
+                    <a:ln w="9525" cap="flat" cmpd="sng" algn="ctr">
+                      <a:solidFill>
+                        <a:schemeClr val="tx1">
+                          <a:lumMod val="35000"/>
+                          <a:lumOff val="65000"/>
+                        </a:schemeClr>
+                      </a:solidFill>
+                      <a:round/>
+                    </a:ln>
+                    <a:effectLst/>
+                  </c:spPr>
+                </c15:leaderLines>
+              </c:ext>
+            </c:extLst>
+          </c:dLbls>
           <c:cat>
             <c:strRef>
               <c:f>Foglio1!$A$2:$A$6</c:f>
@@ -805,6 +866,64 @@
               <a:effectLst/>
             </c:spPr>
           </c:marker>
+          <c:dLbls>
+            <c:spPr>
+              <a:noFill/>
+              <a:ln>
+                <a:noFill/>
+              </a:ln>
+              <a:effectLst/>
+            </c:spPr>
+            <c:txPr>
+              <a:bodyPr rot="0" spcFirstLastPara="1" vertOverflow="ellipsis" vert="horz" wrap="square" lIns="38100" tIns="19050" rIns="38100" bIns="19050" anchor="ctr" anchorCtr="1">
+                <a:spAutoFit/>
+              </a:bodyPr>
+              <a:lstStyle/>
+              <a:p>
+                <a:pPr>
+                  <a:defRPr sz="1197" b="0" i="0" u="none" strike="noStrike" kern="1200" baseline="0">
+                    <a:solidFill>
+                      <a:schemeClr val="tx1">
+                        <a:lumMod val="75000"/>
+                        <a:lumOff val="25000"/>
+                      </a:schemeClr>
+                    </a:solidFill>
+                    <a:latin typeface="+mn-lt"/>
+                    <a:ea typeface="+mn-ea"/>
+                    <a:cs typeface="+mn-cs"/>
+                  </a:defRPr>
+                </a:pPr>
+                <a:endParaRPr lang="it-IT"/>
+              </a:p>
+            </c:txPr>
+            <c:dLblPos val="t"/>
+            <c:showLegendKey val="0"/>
+            <c:showVal val="1"/>
+            <c:showCatName val="0"/>
+            <c:showSerName val="0"/>
+            <c:showPercent val="0"/>
+            <c:showBubbleSize val="0"/>
+            <c:showLeaderLines val="0"/>
+            <c:extLst>
+              <c:ext xmlns:c15="http://schemas.microsoft.com/office/drawing/2012/chart" uri="{CE6537A1-D6FC-4f65-9D91-7224C49458BB}">
+                <c15:showLeaderLines val="1"/>
+                <c15:leaderLines>
+                  <c:spPr>
+                    <a:ln w="9525" cap="flat" cmpd="sng" algn="ctr">
+                      <a:solidFill>
+                        <a:schemeClr val="tx1">
+                          <a:lumMod val="35000"/>
+                          <a:lumOff val="65000"/>
+                        </a:schemeClr>
+                      </a:solidFill>
+                      <a:round/>
+                    </a:ln>
+                    <a:effectLst/>
+                  </c:spPr>
+                </c15:leaderLines>
+              </c:ext>
+            </c:extLst>
+          </c:dLbls>
           <c:cat>
             <c:strRef>
               <c:f>Foglio1!$A$2:$A$6</c:f>
@@ -897,6 +1016,64 @@
               <a:effectLst/>
             </c:spPr>
           </c:marker>
+          <c:dLbls>
+            <c:spPr>
+              <a:noFill/>
+              <a:ln>
+                <a:noFill/>
+              </a:ln>
+              <a:effectLst/>
+            </c:spPr>
+            <c:txPr>
+              <a:bodyPr rot="0" spcFirstLastPara="1" vertOverflow="ellipsis" vert="horz" wrap="square" lIns="38100" tIns="19050" rIns="38100" bIns="19050" anchor="ctr" anchorCtr="1">
+                <a:spAutoFit/>
+              </a:bodyPr>
+              <a:lstStyle/>
+              <a:p>
+                <a:pPr>
+                  <a:defRPr sz="1197" b="0" i="0" u="none" strike="noStrike" kern="1200" baseline="0">
+                    <a:solidFill>
+                      <a:schemeClr val="tx1">
+                        <a:lumMod val="75000"/>
+                        <a:lumOff val="25000"/>
+                      </a:schemeClr>
+                    </a:solidFill>
+                    <a:latin typeface="+mn-lt"/>
+                    <a:ea typeface="+mn-ea"/>
+                    <a:cs typeface="+mn-cs"/>
+                  </a:defRPr>
+                </a:pPr>
+                <a:endParaRPr lang="it-IT"/>
+              </a:p>
+            </c:txPr>
+            <c:dLblPos val="t"/>
+            <c:showLegendKey val="0"/>
+            <c:showVal val="1"/>
+            <c:showCatName val="0"/>
+            <c:showSerName val="0"/>
+            <c:showPercent val="0"/>
+            <c:showBubbleSize val="0"/>
+            <c:showLeaderLines val="0"/>
+            <c:extLst>
+              <c:ext xmlns:c15="http://schemas.microsoft.com/office/drawing/2012/chart" uri="{CE6537A1-D6FC-4f65-9D91-7224C49458BB}">
+                <c15:showLeaderLines val="1"/>
+                <c15:leaderLines>
+                  <c:spPr>
+                    <a:ln w="9525" cap="flat" cmpd="sng" algn="ctr">
+                      <a:solidFill>
+                        <a:schemeClr val="tx1">
+                          <a:lumMod val="35000"/>
+                          <a:lumOff val="65000"/>
+                        </a:schemeClr>
+                      </a:solidFill>
+                      <a:round/>
+                    </a:ln>
+                    <a:effectLst/>
+                  </c:spPr>
+                </c15:leaderLines>
+              </c:ext>
+            </c:extLst>
+          </c:dLbls>
           <c:cat>
             <c:strRef>
               <c:f>Foglio1!$A$2:$A$6</c:f>
@@ -989,6 +1166,64 @@
               <a:effectLst/>
             </c:spPr>
           </c:marker>
+          <c:dLbls>
+            <c:spPr>
+              <a:noFill/>
+              <a:ln>
+                <a:noFill/>
+              </a:ln>
+              <a:effectLst/>
+            </c:spPr>
+            <c:txPr>
+              <a:bodyPr rot="0" spcFirstLastPara="1" vertOverflow="ellipsis" vert="horz" wrap="square" lIns="38100" tIns="19050" rIns="38100" bIns="19050" anchor="ctr" anchorCtr="1">
+                <a:spAutoFit/>
+              </a:bodyPr>
+              <a:lstStyle/>
+              <a:p>
+                <a:pPr>
+                  <a:defRPr sz="1197" b="0" i="0" u="none" strike="noStrike" kern="1200" baseline="0">
+                    <a:solidFill>
+                      <a:schemeClr val="tx1">
+                        <a:lumMod val="75000"/>
+                        <a:lumOff val="25000"/>
+                      </a:schemeClr>
+                    </a:solidFill>
+                    <a:latin typeface="+mn-lt"/>
+                    <a:ea typeface="+mn-ea"/>
+                    <a:cs typeface="+mn-cs"/>
+                  </a:defRPr>
+                </a:pPr>
+                <a:endParaRPr lang="it-IT"/>
+              </a:p>
+            </c:txPr>
+            <c:dLblPos val="t"/>
+            <c:showLegendKey val="0"/>
+            <c:showVal val="1"/>
+            <c:showCatName val="0"/>
+            <c:showSerName val="0"/>
+            <c:showPercent val="0"/>
+            <c:showBubbleSize val="0"/>
+            <c:showLeaderLines val="0"/>
+            <c:extLst>
+              <c:ext xmlns:c15="http://schemas.microsoft.com/office/drawing/2012/chart" uri="{CE6537A1-D6FC-4f65-9D91-7224C49458BB}">
+                <c15:showLeaderLines val="1"/>
+                <c15:leaderLines>
+                  <c:spPr>
+                    <a:ln w="9525" cap="flat" cmpd="sng" algn="ctr">
+                      <a:solidFill>
+                        <a:schemeClr val="tx1">
+                          <a:lumMod val="35000"/>
+                          <a:lumOff val="65000"/>
+                        </a:schemeClr>
+                      </a:solidFill>
+                      <a:round/>
+                    </a:ln>
+                    <a:effectLst/>
+                  </c:spPr>
+                </c15:leaderLines>
+              </c:ext>
+            </c:extLst>
+          </c:dLbls>
           <c:cat>
             <c:strRef>
               <c:f>Foglio1!$A$2:$A$6</c:f>
@@ -1044,9 +1279,9 @@
           </c:extLst>
         </c:ser>
         <c:dLbls>
-          <c:dLblPos val="ctr"/>
+          <c:dLblPos val="t"/>
           <c:showLegendKey val="0"/>
-          <c:showVal val="0"/>
+          <c:showVal val="1"/>
           <c:showCatName val="0"/>
           <c:showSerName val="0"/>
           <c:showPercent val="0"/>
@@ -1440,7 +1675,7 @@
                 <c:formatCode>General</c:formatCode>
                 <c:ptCount val="5"/>
                 <c:pt idx="0">
-                  <c:v>0.9</c:v>
+                  <c:v>1</c:v>
                 </c:pt>
                 <c:pt idx="1">
                   <c:v>1.26</c:v>
@@ -1532,7 +1767,7 @@
                 <c:formatCode>General</c:formatCode>
                 <c:ptCount val="5"/>
                 <c:pt idx="0">
-                  <c:v>1.04</c:v>
+                  <c:v>1</c:v>
                 </c:pt>
                 <c:pt idx="1">
                   <c:v>1.87</c:v>
@@ -1624,7 +1859,7 @@
                 <c:formatCode>General</c:formatCode>
                 <c:ptCount val="5"/>
                 <c:pt idx="0">
-                  <c:v>0.99</c:v>
+                  <c:v>1</c:v>
                 </c:pt>
                 <c:pt idx="1">
                   <c:v>1.84</c:v>
@@ -1716,7 +1951,7 @@
                 <c:formatCode>General</c:formatCode>
                 <c:ptCount val="5"/>
                 <c:pt idx="0">
-                  <c:v>0.97</c:v>
+                  <c:v>1</c:v>
                 </c:pt>
                 <c:pt idx="1">
                   <c:v>1.85</c:v>
@@ -1857,6 +2092,2799 @@
           </a:p>
         </c:txPr>
         <c:crossAx val="455103296"/>
+        <c:crosses val="autoZero"/>
+        <c:crossBetween val="between"/>
+      </c:valAx>
+      <c:spPr>
+        <a:noFill/>
+        <a:ln>
+          <a:noFill/>
+        </a:ln>
+        <a:effectLst/>
+      </c:spPr>
+    </c:plotArea>
+    <c:legend>
+      <c:legendPos val="b"/>
+      <c:overlay val="0"/>
+      <c:spPr>
+        <a:noFill/>
+        <a:ln>
+          <a:noFill/>
+        </a:ln>
+        <a:effectLst/>
+      </c:spPr>
+      <c:txPr>
+        <a:bodyPr rot="0" spcFirstLastPara="1" vertOverflow="ellipsis" vert="horz" wrap="square" anchor="ctr" anchorCtr="1"/>
+        <a:lstStyle/>
+        <a:p>
+          <a:pPr>
+            <a:defRPr sz="1197" b="0" i="0" u="none" strike="noStrike" kern="1200" baseline="0">
+              <a:solidFill>
+                <a:schemeClr val="tx1">
+                  <a:lumMod val="65000"/>
+                  <a:lumOff val="35000"/>
+                </a:schemeClr>
+              </a:solidFill>
+              <a:latin typeface="+mn-lt"/>
+              <a:ea typeface="+mn-ea"/>
+              <a:cs typeface="+mn-cs"/>
+            </a:defRPr>
+          </a:pPr>
+          <a:endParaRPr lang="it-IT"/>
+        </a:p>
+      </c:txPr>
+    </c:legend>
+    <c:plotVisOnly val="1"/>
+    <c:dispBlanksAs val="gap"/>
+    <c:showDLblsOverMax val="0"/>
+    <c:extLst>
+      <c:ext xmlns:c16r3="http://schemas.microsoft.com/office/drawing/2017/03/chart" uri="{56B9EC1D-385E-4148-901F-78D8002777C0}">
+        <c16r3:dataDisplayOptions16>
+          <c16r3:dispNaAsBlank val="1"/>
+        </c16r3:dataDisplayOptions16>
+      </c:ext>
+    </c:extLst>
+  </c:chart>
+  <c:spPr>
+    <a:noFill/>
+    <a:ln>
+      <a:noFill/>
+    </a:ln>
+    <a:effectLst/>
+  </c:spPr>
+  <c:txPr>
+    <a:bodyPr/>
+    <a:lstStyle/>
+    <a:p>
+      <a:pPr>
+        <a:defRPr/>
+      </a:pPr>
+      <a:endParaRPr lang="it-IT"/>
+    </a:p>
+  </c:txPr>
+  <c:externalData r:id="rId3">
+    <c:autoUpdate val="0"/>
+  </c:externalData>
+</c:chartSpace>
+</file>
+
+<file path=ppt/charts/chart4.xml><?xml version="1.0" encoding="utf-8"?>
+<c:chartSpace xmlns:c="http://schemas.openxmlformats.org/drawingml/2006/chart" xmlns:a="http://schemas.openxmlformats.org/drawingml/2006/main" xmlns:r="http://schemas.openxmlformats.org/officeDocument/2006/relationships" xmlns:c16r2="http://schemas.microsoft.com/office/drawing/2015/06/chart">
+  <c:date1904 val="0"/>
+  <c:lang val="it-IT"/>
+  <c:roundedCorners val="0"/>
+  <mc:AlternateContent xmlns:mc="http://schemas.openxmlformats.org/markup-compatibility/2006">
+    <mc:Choice xmlns:c14="http://schemas.microsoft.com/office/drawing/2007/8/2/chart" Requires="c14">
+      <c14:style val="102"/>
+    </mc:Choice>
+    <mc:Fallback>
+      <c:style val="2"/>
+    </mc:Fallback>
+  </mc:AlternateContent>
+  <c:chart>
+    <c:title>
+      <c:tx>
+        <c:rich>
+          <a:bodyPr rot="0" spcFirstLastPara="1" vertOverflow="ellipsis" vert="horz" wrap="square" anchor="ctr" anchorCtr="1"/>
+          <a:lstStyle/>
+          <a:p>
+            <a:pPr>
+              <a:defRPr sz="1862" b="0" i="0" u="none" strike="noStrike" kern="1200" spc="0" baseline="0">
+                <a:solidFill>
+                  <a:schemeClr val="tx1">
+                    <a:lumMod val="65000"/>
+                    <a:lumOff val="35000"/>
+                  </a:schemeClr>
+                </a:solidFill>
+                <a:latin typeface="+mn-lt"/>
+                <a:ea typeface="+mn-ea"/>
+                <a:cs typeface="+mn-cs"/>
+              </a:defRPr>
+            </a:pPr>
+            <a:r>
+              <a:rPr lang="it-IT" dirty="0"/>
+              <a:t>Efficienza</a:t>
+            </a:r>
+          </a:p>
+        </c:rich>
+      </c:tx>
+      <c:overlay val="0"/>
+      <c:spPr>
+        <a:noFill/>
+        <a:ln>
+          <a:noFill/>
+        </a:ln>
+        <a:effectLst/>
+      </c:spPr>
+      <c:txPr>
+        <a:bodyPr rot="0" spcFirstLastPara="1" vertOverflow="ellipsis" vert="horz" wrap="square" anchor="ctr" anchorCtr="1"/>
+        <a:lstStyle/>
+        <a:p>
+          <a:pPr>
+            <a:defRPr sz="1862" b="0" i="0" u="none" strike="noStrike" kern="1200" spc="0" baseline="0">
+              <a:solidFill>
+                <a:schemeClr val="tx1">
+                  <a:lumMod val="65000"/>
+                  <a:lumOff val="35000"/>
+                </a:schemeClr>
+              </a:solidFill>
+              <a:latin typeface="+mn-lt"/>
+              <a:ea typeface="+mn-ea"/>
+              <a:cs typeface="+mn-cs"/>
+            </a:defRPr>
+          </a:pPr>
+          <a:endParaRPr lang="it-IT"/>
+        </a:p>
+      </c:txPr>
+    </c:title>
+    <c:autoTitleDeleted val="0"/>
+    <c:plotArea>
+      <c:layout/>
+      <c:lineChart>
+        <c:grouping val="standard"/>
+        <c:varyColors val="0"/>
+        <c:ser>
+          <c:idx val="0"/>
+          <c:order val="0"/>
+          <c:tx>
+            <c:strRef>
+              <c:f>Foglio1!$B$1</c:f>
+              <c:strCache>
+                <c:ptCount val="1"/>
+                <c:pt idx="0">
+                  <c:v>N 64</c:v>
+                </c:pt>
+              </c:strCache>
+            </c:strRef>
+          </c:tx>
+          <c:spPr>
+            <a:ln w="28575" cap="rnd">
+              <a:solidFill>
+                <a:schemeClr val="accent1"/>
+              </a:solidFill>
+              <a:round/>
+            </a:ln>
+            <a:effectLst/>
+          </c:spPr>
+          <c:marker>
+            <c:symbol val="circle"/>
+            <c:size val="5"/>
+            <c:spPr>
+              <a:solidFill>
+                <a:schemeClr val="accent1"/>
+              </a:solidFill>
+              <a:ln w="9525">
+                <a:solidFill>
+                  <a:schemeClr val="accent1"/>
+                </a:solidFill>
+              </a:ln>
+              <a:effectLst/>
+            </c:spPr>
+          </c:marker>
+          <c:cat>
+            <c:strRef>
+              <c:f>Foglio1!$A$2:$A$6</c:f>
+              <c:strCache>
+                <c:ptCount val="5"/>
+                <c:pt idx="0">
+                  <c:v>1P</c:v>
+                </c:pt>
+                <c:pt idx="1">
+                  <c:v>2P</c:v>
+                </c:pt>
+                <c:pt idx="2">
+                  <c:v>4P</c:v>
+                </c:pt>
+                <c:pt idx="3">
+                  <c:v>6P</c:v>
+                </c:pt>
+                <c:pt idx="4">
+                  <c:v>8P</c:v>
+                </c:pt>
+              </c:strCache>
+            </c:strRef>
+          </c:cat>
+          <c:val>
+            <c:numRef>
+              <c:f>Foglio1!$B$2:$B$6</c:f>
+              <c:numCache>
+                <c:formatCode>General</c:formatCode>
+                <c:ptCount val="5"/>
+                <c:pt idx="0">
+                  <c:v>1</c:v>
+                </c:pt>
+                <c:pt idx="1">
+                  <c:v>0.63</c:v>
+                </c:pt>
+                <c:pt idx="2">
+                  <c:v>0.26</c:v>
+                </c:pt>
+                <c:pt idx="3">
+                  <c:v>0.13</c:v>
+                </c:pt>
+                <c:pt idx="4">
+                  <c:v>0.08</c:v>
+                </c:pt>
+              </c:numCache>
+            </c:numRef>
+          </c:val>
+          <c:smooth val="0"/>
+          <c:extLst>
+            <c:ext xmlns:c16="http://schemas.microsoft.com/office/drawing/2014/chart" uri="{C3380CC4-5D6E-409C-BE32-E72D297353CC}">
+              <c16:uniqueId val="{00000000-6165-4582-A19D-E8195E3B2AAB}"/>
+            </c:ext>
+          </c:extLst>
+        </c:ser>
+        <c:ser>
+          <c:idx val="1"/>
+          <c:order val="1"/>
+          <c:tx>
+            <c:strRef>
+              <c:f>Foglio1!$C$1</c:f>
+              <c:strCache>
+                <c:ptCount val="1"/>
+                <c:pt idx="0">
+                  <c:v>N 128 </c:v>
+                </c:pt>
+              </c:strCache>
+            </c:strRef>
+          </c:tx>
+          <c:spPr>
+            <a:ln w="28575" cap="rnd">
+              <a:solidFill>
+                <a:schemeClr val="accent2"/>
+              </a:solidFill>
+              <a:round/>
+            </a:ln>
+            <a:effectLst/>
+          </c:spPr>
+          <c:marker>
+            <c:symbol val="circle"/>
+            <c:size val="5"/>
+            <c:spPr>
+              <a:solidFill>
+                <a:schemeClr val="accent2"/>
+              </a:solidFill>
+              <a:ln w="9525">
+                <a:solidFill>
+                  <a:schemeClr val="accent2"/>
+                </a:solidFill>
+              </a:ln>
+              <a:effectLst/>
+            </c:spPr>
+          </c:marker>
+          <c:cat>
+            <c:strRef>
+              <c:f>Foglio1!$A$2:$A$6</c:f>
+              <c:strCache>
+                <c:ptCount val="5"/>
+                <c:pt idx="0">
+                  <c:v>1P</c:v>
+                </c:pt>
+                <c:pt idx="1">
+                  <c:v>2P</c:v>
+                </c:pt>
+                <c:pt idx="2">
+                  <c:v>4P</c:v>
+                </c:pt>
+                <c:pt idx="3">
+                  <c:v>6P</c:v>
+                </c:pt>
+                <c:pt idx="4">
+                  <c:v>8P</c:v>
+                </c:pt>
+              </c:strCache>
+            </c:strRef>
+          </c:cat>
+          <c:val>
+            <c:numRef>
+              <c:f>Foglio1!$C$2:$C$6</c:f>
+              <c:numCache>
+                <c:formatCode>General</c:formatCode>
+                <c:ptCount val="5"/>
+                <c:pt idx="0">
+                  <c:v>1</c:v>
+                </c:pt>
+                <c:pt idx="1">
+                  <c:v>0.94</c:v>
+                </c:pt>
+                <c:pt idx="2">
+                  <c:v>0.61</c:v>
+                </c:pt>
+                <c:pt idx="3">
+                  <c:v>0.43</c:v>
+                </c:pt>
+                <c:pt idx="4">
+                  <c:v>0.23</c:v>
+                </c:pt>
+              </c:numCache>
+            </c:numRef>
+          </c:val>
+          <c:smooth val="0"/>
+          <c:extLst>
+            <c:ext xmlns:c16="http://schemas.microsoft.com/office/drawing/2014/chart" uri="{C3380CC4-5D6E-409C-BE32-E72D297353CC}">
+              <c16:uniqueId val="{00000001-6165-4582-A19D-E8195E3B2AAB}"/>
+            </c:ext>
+          </c:extLst>
+        </c:ser>
+        <c:ser>
+          <c:idx val="2"/>
+          <c:order val="2"/>
+          <c:tx>
+            <c:strRef>
+              <c:f>Foglio1!$D$1</c:f>
+              <c:strCache>
+                <c:ptCount val="1"/>
+                <c:pt idx="0">
+                  <c:v>N 256 </c:v>
+                </c:pt>
+              </c:strCache>
+            </c:strRef>
+          </c:tx>
+          <c:spPr>
+            <a:ln w="28575" cap="rnd">
+              <a:solidFill>
+                <a:schemeClr val="accent3"/>
+              </a:solidFill>
+              <a:round/>
+            </a:ln>
+            <a:effectLst/>
+          </c:spPr>
+          <c:marker>
+            <c:symbol val="circle"/>
+            <c:size val="5"/>
+            <c:spPr>
+              <a:solidFill>
+                <a:schemeClr val="accent3"/>
+              </a:solidFill>
+              <a:ln w="9525">
+                <a:solidFill>
+                  <a:schemeClr val="accent3"/>
+                </a:solidFill>
+              </a:ln>
+              <a:effectLst/>
+            </c:spPr>
+          </c:marker>
+          <c:cat>
+            <c:strRef>
+              <c:f>Foglio1!$A$2:$A$6</c:f>
+              <c:strCache>
+                <c:ptCount val="5"/>
+                <c:pt idx="0">
+                  <c:v>1P</c:v>
+                </c:pt>
+                <c:pt idx="1">
+                  <c:v>2P</c:v>
+                </c:pt>
+                <c:pt idx="2">
+                  <c:v>4P</c:v>
+                </c:pt>
+                <c:pt idx="3">
+                  <c:v>6P</c:v>
+                </c:pt>
+                <c:pt idx="4">
+                  <c:v>8P</c:v>
+                </c:pt>
+              </c:strCache>
+            </c:strRef>
+          </c:cat>
+          <c:val>
+            <c:numRef>
+              <c:f>Foglio1!$D$2:$D$6</c:f>
+              <c:numCache>
+                <c:formatCode>General</c:formatCode>
+                <c:ptCount val="5"/>
+                <c:pt idx="0">
+                  <c:v>1</c:v>
+                </c:pt>
+                <c:pt idx="1">
+                  <c:v>0.92</c:v>
+                </c:pt>
+                <c:pt idx="2">
+                  <c:v>0.71</c:v>
+                </c:pt>
+                <c:pt idx="3">
+                  <c:v>0.56000000000000005</c:v>
+                </c:pt>
+                <c:pt idx="4">
+                  <c:v>0.3</c:v>
+                </c:pt>
+              </c:numCache>
+            </c:numRef>
+          </c:val>
+          <c:smooth val="0"/>
+          <c:extLst>
+            <c:ext xmlns:c16="http://schemas.microsoft.com/office/drawing/2014/chart" uri="{C3380CC4-5D6E-409C-BE32-E72D297353CC}">
+              <c16:uniqueId val="{00000002-6165-4582-A19D-E8195E3B2AAB}"/>
+            </c:ext>
+          </c:extLst>
+        </c:ser>
+        <c:ser>
+          <c:idx val="3"/>
+          <c:order val="3"/>
+          <c:tx>
+            <c:strRef>
+              <c:f>Foglio1!$E$1</c:f>
+              <c:strCache>
+                <c:ptCount val="1"/>
+                <c:pt idx="0">
+                  <c:v>N 512</c:v>
+                </c:pt>
+              </c:strCache>
+            </c:strRef>
+          </c:tx>
+          <c:spPr>
+            <a:ln w="28575" cap="rnd">
+              <a:solidFill>
+                <a:schemeClr val="accent4"/>
+              </a:solidFill>
+              <a:round/>
+            </a:ln>
+            <a:effectLst/>
+          </c:spPr>
+          <c:marker>
+            <c:symbol val="circle"/>
+            <c:size val="5"/>
+            <c:spPr>
+              <a:solidFill>
+                <a:schemeClr val="accent4"/>
+              </a:solidFill>
+              <a:ln w="9525">
+                <a:solidFill>
+                  <a:schemeClr val="accent4"/>
+                </a:solidFill>
+              </a:ln>
+              <a:effectLst/>
+            </c:spPr>
+          </c:marker>
+          <c:cat>
+            <c:strRef>
+              <c:f>Foglio1!$A$2:$A$6</c:f>
+              <c:strCache>
+                <c:ptCount val="5"/>
+                <c:pt idx="0">
+                  <c:v>1P</c:v>
+                </c:pt>
+                <c:pt idx="1">
+                  <c:v>2P</c:v>
+                </c:pt>
+                <c:pt idx="2">
+                  <c:v>4P</c:v>
+                </c:pt>
+                <c:pt idx="3">
+                  <c:v>6P</c:v>
+                </c:pt>
+                <c:pt idx="4">
+                  <c:v>8P</c:v>
+                </c:pt>
+              </c:strCache>
+            </c:strRef>
+          </c:cat>
+          <c:val>
+            <c:numRef>
+              <c:f>Foglio1!$E$2:$E$6</c:f>
+              <c:numCache>
+                <c:formatCode>General</c:formatCode>
+                <c:ptCount val="5"/>
+                <c:pt idx="0">
+                  <c:v>1</c:v>
+                </c:pt>
+                <c:pt idx="1">
+                  <c:v>0.93</c:v>
+                </c:pt>
+                <c:pt idx="2">
+                  <c:v>0.79</c:v>
+                </c:pt>
+                <c:pt idx="3">
+                  <c:v>0.64</c:v>
+                </c:pt>
+                <c:pt idx="4">
+                  <c:v>0.33</c:v>
+                </c:pt>
+              </c:numCache>
+            </c:numRef>
+          </c:val>
+          <c:smooth val="0"/>
+          <c:extLst>
+            <c:ext xmlns:c16="http://schemas.microsoft.com/office/drawing/2014/chart" uri="{C3380CC4-5D6E-409C-BE32-E72D297353CC}">
+              <c16:uniqueId val="{00000003-6165-4582-A19D-E8195E3B2AAB}"/>
+            </c:ext>
+          </c:extLst>
+        </c:ser>
+        <c:dLbls>
+          <c:showLegendKey val="0"/>
+          <c:showVal val="0"/>
+          <c:showCatName val="0"/>
+          <c:showSerName val="0"/>
+          <c:showPercent val="0"/>
+          <c:showBubbleSize val="0"/>
+        </c:dLbls>
+        <c:marker val="1"/>
+        <c:smooth val="0"/>
+        <c:axId val="18111376"/>
+        <c:axId val="2099601759"/>
+      </c:lineChart>
+      <c:catAx>
+        <c:axId val="18111376"/>
+        <c:scaling>
+          <c:orientation val="minMax"/>
+        </c:scaling>
+        <c:delete val="0"/>
+        <c:axPos val="b"/>
+        <c:numFmt formatCode="General" sourceLinked="1"/>
+        <c:majorTickMark val="none"/>
+        <c:minorTickMark val="none"/>
+        <c:tickLblPos val="nextTo"/>
+        <c:spPr>
+          <a:noFill/>
+          <a:ln w="9525" cap="flat" cmpd="sng" algn="ctr">
+            <a:solidFill>
+              <a:schemeClr val="tx1">
+                <a:lumMod val="15000"/>
+                <a:lumOff val="85000"/>
+              </a:schemeClr>
+            </a:solidFill>
+            <a:round/>
+          </a:ln>
+          <a:effectLst/>
+        </c:spPr>
+        <c:txPr>
+          <a:bodyPr rot="-60000000" spcFirstLastPara="1" vertOverflow="ellipsis" vert="horz" wrap="square" anchor="ctr" anchorCtr="1"/>
+          <a:lstStyle/>
+          <a:p>
+            <a:pPr>
+              <a:defRPr sz="1197" b="0" i="0" u="none" strike="noStrike" kern="1200" baseline="0">
+                <a:solidFill>
+                  <a:schemeClr val="tx1">
+                    <a:lumMod val="65000"/>
+                    <a:lumOff val="35000"/>
+                  </a:schemeClr>
+                </a:solidFill>
+                <a:latin typeface="+mn-lt"/>
+                <a:ea typeface="+mn-ea"/>
+                <a:cs typeface="+mn-cs"/>
+              </a:defRPr>
+            </a:pPr>
+            <a:endParaRPr lang="it-IT"/>
+          </a:p>
+        </c:txPr>
+        <c:crossAx val="2099601759"/>
+        <c:crosses val="autoZero"/>
+        <c:auto val="1"/>
+        <c:lblAlgn val="ctr"/>
+        <c:lblOffset val="100"/>
+        <c:noMultiLvlLbl val="0"/>
+      </c:catAx>
+      <c:valAx>
+        <c:axId val="2099601759"/>
+        <c:scaling>
+          <c:orientation val="minMax"/>
+          <c:max val="1"/>
+        </c:scaling>
+        <c:delete val="0"/>
+        <c:axPos val="l"/>
+        <c:majorGridlines>
+          <c:spPr>
+            <a:ln w="9525" cap="flat" cmpd="sng" algn="ctr">
+              <a:solidFill>
+                <a:schemeClr val="tx1">
+                  <a:lumMod val="15000"/>
+                  <a:lumOff val="85000"/>
+                </a:schemeClr>
+              </a:solidFill>
+              <a:round/>
+            </a:ln>
+            <a:effectLst/>
+          </c:spPr>
+        </c:majorGridlines>
+        <c:numFmt formatCode="General" sourceLinked="1"/>
+        <c:majorTickMark val="none"/>
+        <c:minorTickMark val="none"/>
+        <c:tickLblPos val="nextTo"/>
+        <c:spPr>
+          <a:noFill/>
+          <a:ln>
+            <a:noFill/>
+          </a:ln>
+          <a:effectLst/>
+        </c:spPr>
+        <c:txPr>
+          <a:bodyPr rot="-60000000" spcFirstLastPara="1" vertOverflow="ellipsis" vert="horz" wrap="square" anchor="ctr" anchorCtr="1"/>
+          <a:lstStyle/>
+          <a:p>
+            <a:pPr>
+              <a:defRPr sz="1197" b="0" i="0" u="none" strike="noStrike" kern="1200" baseline="0">
+                <a:solidFill>
+                  <a:schemeClr val="tx1">
+                    <a:lumMod val="65000"/>
+                    <a:lumOff val="35000"/>
+                  </a:schemeClr>
+                </a:solidFill>
+                <a:latin typeface="+mn-lt"/>
+                <a:ea typeface="+mn-ea"/>
+                <a:cs typeface="+mn-cs"/>
+              </a:defRPr>
+            </a:pPr>
+            <a:endParaRPr lang="it-IT"/>
+          </a:p>
+        </c:txPr>
+        <c:crossAx val="18111376"/>
+        <c:crosses val="autoZero"/>
+        <c:crossBetween val="between"/>
+      </c:valAx>
+      <c:spPr>
+        <a:noFill/>
+        <a:ln>
+          <a:noFill/>
+        </a:ln>
+        <a:effectLst/>
+      </c:spPr>
+    </c:plotArea>
+    <c:legend>
+      <c:legendPos val="b"/>
+      <c:overlay val="0"/>
+      <c:spPr>
+        <a:noFill/>
+        <a:ln>
+          <a:noFill/>
+        </a:ln>
+        <a:effectLst/>
+      </c:spPr>
+      <c:txPr>
+        <a:bodyPr rot="0" spcFirstLastPara="1" vertOverflow="ellipsis" vert="horz" wrap="square" anchor="ctr" anchorCtr="1"/>
+        <a:lstStyle/>
+        <a:p>
+          <a:pPr>
+            <a:defRPr sz="1197" b="0" i="0" u="none" strike="noStrike" kern="1200" baseline="0">
+              <a:solidFill>
+                <a:schemeClr val="tx1">
+                  <a:lumMod val="65000"/>
+                  <a:lumOff val="35000"/>
+                </a:schemeClr>
+              </a:solidFill>
+              <a:latin typeface="+mn-lt"/>
+              <a:ea typeface="+mn-ea"/>
+              <a:cs typeface="+mn-cs"/>
+            </a:defRPr>
+          </a:pPr>
+          <a:endParaRPr lang="it-IT"/>
+        </a:p>
+      </c:txPr>
+    </c:legend>
+    <c:plotVisOnly val="1"/>
+    <c:dispBlanksAs val="gap"/>
+    <c:showDLblsOverMax val="0"/>
+    <c:extLst>
+      <c:ext xmlns:c16r3="http://schemas.microsoft.com/office/drawing/2017/03/chart" uri="{56B9EC1D-385E-4148-901F-78D8002777C0}">
+        <c16r3:dataDisplayOptions16>
+          <c16r3:dispNaAsBlank val="1"/>
+        </c16r3:dataDisplayOptions16>
+      </c:ext>
+    </c:extLst>
+  </c:chart>
+  <c:spPr>
+    <a:noFill/>
+    <a:ln>
+      <a:noFill/>
+    </a:ln>
+    <a:effectLst/>
+  </c:spPr>
+  <c:txPr>
+    <a:bodyPr/>
+    <a:lstStyle/>
+    <a:p>
+      <a:pPr>
+        <a:defRPr/>
+      </a:pPr>
+      <a:endParaRPr lang="it-IT"/>
+    </a:p>
+  </c:txPr>
+  <c:externalData r:id="rId3">
+    <c:autoUpdate val="0"/>
+  </c:externalData>
+</c:chartSpace>
+</file>
+
+<file path=ppt/charts/chart5.xml><?xml version="1.0" encoding="utf-8"?>
+<c:chartSpace xmlns:c="http://schemas.openxmlformats.org/drawingml/2006/chart" xmlns:a="http://schemas.openxmlformats.org/drawingml/2006/main" xmlns:r="http://schemas.openxmlformats.org/officeDocument/2006/relationships" xmlns:c16r2="http://schemas.microsoft.com/office/drawing/2015/06/chart">
+  <c:date1904 val="0"/>
+  <c:lang val="it-IT"/>
+  <c:roundedCorners val="0"/>
+  <mc:AlternateContent xmlns:mc="http://schemas.openxmlformats.org/markup-compatibility/2006">
+    <mc:Choice xmlns:c14="http://schemas.microsoft.com/office/drawing/2007/8/2/chart" Requires="c14">
+      <c14:style val="102"/>
+    </mc:Choice>
+    <mc:Fallback>
+      <c:style val="2"/>
+    </mc:Fallback>
+  </mc:AlternateContent>
+  <c:chart>
+    <c:title>
+      <c:tx>
+        <c:rich>
+          <a:bodyPr rot="0" spcFirstLastPara="1" vertOverflow="ellipsis" vert="horz" wrap="square" anchor="ctr" anchorCtr="1"/>
+          <a:lstStyle/>
+          <a:p>
+            <a:pPr>
+              <a:defRPr sz="1862" b="0" i="0" u="none" strike="noStrike" kern="1200" spc="0" baseline="0">
+                <a:solidFill>
+                  <a:schemeClr val="tx1">
+                    <a:lumMod val="65000"/>
+                    <a:lumOff val="35000"/>
+                  </a:schemeClr>
+                </a:solidFill>
+                <a:latin typeface="+mn-lt"/>
+                <a:ea typeface="+mn-ea"/>
+                <a:cs typeface="+mn-cs"/>
+              </a:defRPr>
+            </a:pPr>
+            <a:r>
+              <a:rPr lang="it-IT" dirty="0"/>
+              <a:t>MPI</a:t>
+            </a:r>
+            <a:r>
+              <a:rPr lang="it-IT" baseline="0" dirty="0"/>
+              <a:t> + </a:t>
+            </a:r>
+            <a:r>
+              <a:rPr lang="it-IT" baseline="0" dirty="0" err="1"/>
+              <a:t>OpenMP</a:t>
+            </a:r>
+            <a:endParaRPr lang="it-IT" baseline="0" dirty="0"/>
+          </a:p>
+        </c:rich>
+      </c:tx>
+      <c:overlay val="0"/>
+      <c:spPr>
+        <a:noFill/>
+        <a:ln>
+          <a:noFill/>
+        </a:ln>
+        <a:effectLst/>
+      </c:spPr>
+      <c:txPr>
+        <a:bodyPr rot="0" spcFirstLastPara="1" vertOverflow="ellipsis" vert="horz" wrap="square" anchor="ctr" anchorCtr="1"/>
+        <a:lstStyle/>
+        <a:p>
+          <a:pPr>
+            <a:defRPr sz="1862" b="0" i="0" u="none" strike="noStrike" kern="1200" spc="0" baseline="0">
+              <a:solidFill>
+                <a:schemeClr val="tx1">
+                  <a:lumMod val="65000"/>
+                  <a:lumOff val="35000"/>
+                </a:schemeClr>
+              </a:solidFill>
+              <a:latin typeface="+mn-lt"/>
+              <a:ea typeface="+mn-ea"/>
+              <a:cs typeface="+mn-cs"/>
+            </a:defRPr>
+          </a:pPr>
+          <a:endParaRPr lang="it-IT"/>
+        </a:p>
+      </c:txPr>
+    </c:title>
+    <c:autoTitleDeleted val="0"/>
+    <c:plotArea>
+      <c:layout/>
+      <c:lineChart>
+        <c:grouping val="standard"/>
+        <c:varyColors val="0"/>
+        <c:ser>
+          <c:idx val="0"/>
+          <c:order val="0"/>
+          <c:tx>
+            <c:strRef>
+              <c:f>Foglio1!$B$1</c:f>
+              <c:strCache>
+                <c:ptCount val="1"/>
+                <c:pt idx="0">
+                  <c:v>N 64</c:v>
+                </c:pt>
+              </c:strCache>
+            </c:strRef>
+          </c:tx>
+          <c:spPr>
+            <a:ln w="28575" cap="rnd">
+              <a:solidFill>
+                <a:schemeClr val="accent1"/>
+              </a:solidFill>
+              <a:round/>
+            </a:ln>
+            <a:effectLst/>
+          </c:spPr>
+          <c:marker>
+            <c:symbol val="circle"/>
+            <c:size val="5"/>
+            <c:spPr>
+              <a:solidFill>
+                <a:schemeClr val="accent1"/>
+              </a:solidFill>
+              <a:ln w="9525">
+                <a:solidFill>
+                  <a:schemeClr val="accent1"/>
+                </a:solidFill>
+              </a:ln>
+              <a:effectLst/>
+            </c:spPr>
+          </c:marker>
+          <c:dLbls>
+            <c:spPr>
+              <a:noFill/>
+              <a:ln>
+                <a:noFill/>
+              </a:ln>
+              <a:effectLst/>
+            </c:spPr>
+            <c:txPr>
+              <a:bodyPr rot="0" spcFirstLastPara="1" vertOverflow="ellipsis" vert="horz" wrap="square" lIns="38100" tIns="19050" rIns="38100" bIns="19050" anchor="ctr" anchorCtr="1">
+                <a:spAutoFit/>
+              </a:bodyPr>
+              <a:lstStyle/>
+              <a:p>
+                <a:pPr>
+                  <a:defRPr sz="1197" b="0" i="0" u="none" strike="noStrike" kern="1200" baseline="0">
+                    <a:solidFill>
+                      <a:schemeClr val="tx1">
+                        <a:lumMod val="75000"/>
+                        <a:lumOff val="25000"/>
+                      </a:schemeClr>
+                    </a:solidFill>
+                    <a:latin typeface="+mn-lt"/>
+                    <a:ea typeface="+mn-ea"/>
+                    <a:cs typeface="+mn-cs"/>
+                  </a:defRPr>
+                </a:pPr>
+                <a:endParaRPr lang="it-IT"/>
+              </a:p>
+            </c:txPr>
+            <c:dLblPos val="t"/>
+            <c:showLegendKey val="0"/>
+            <c:showVal val="1"/>
+            <c:showCatName val="0"/>
+            <c:showSerName val="0"/>
+            <c:showPercent val="0"/>
+            <c:showBubbleSize val="0"/>
+            <c:showLeaderLines val="0"/>
+            <c:extLst>
+              <c:ext xmlns:c15="http://schemas.microsoft.com/office/drawing/2012/chart" uri="{CE6537A1-D6FC-4f65-9D91-7224C49458BB}">
+                <c15:showLeaderLines val="1"/>
+                <c15:leaderLines>
+                  <c:spPr>
+                    <a:ln w="9525" cap="flat" cmpd="sng" algn="ctr">
+                      <a:solidFill>
+                        <a:schemeClr val="tx1">
+                          <a:lumMod val="35000"/>
+                          <a:lumOff val="65000"/>
+                        </a:schemeClr>
+                      </a:solidFill>
+                      <a:round/>
+                    </a:ln>
+                    <a:effectLst/>
+                  </c:spPr>
+                </c15:leaderLines>
+              </c:ext>
+            </c:extLst>
+          </c:dLbls>
+          <c:cat>
+            <c:strRef>
+              <c:f>Foglio1!$A$2:$A$6</c:f>
+              <c:strCache>
+                <c:ptCount val="5"/>
+                <c:pt idx="0">
+                  <c:v>1P X 2T</c:v>
+                </c:pt>
+                <c:pt idx="1">
+                  <c:v>2P X 2T</c:v>
+                </c:pt>
+                <c:pt idx="2">
+                  <c:v>2P X 3T</c:v>
+                </c:pt>
+                <c:pt idx="3">
+                  <c:v>3P X 2T</c:v>
+                </c:pt>
+                <c:pt idx="4">
+                  <c:v>4P X 2T</c:v>
+                </c:pt>
+              </c:strCache>
+            </c:strRef>
+          </c:cat>
+          <c:val>
+            <c:numRef>
+              <c:f>Foglio1!$B$2:$B$6</c:f>
+              <c:numCache>
+                <c:formatCode>General</c:formatCode>
+                <c:ptCount val="5"/>
+                <c:pt idx="0">
+                  <c:v>5.11E-2</c:v>
+                </c:pt>
+                <c:pt idx="1">
+                  <c:v>3.4799999999999998E-2</c:v>
+                </c:pt>
+                <c:pt idx="2">
+                  <c:v>0.28889999999999999</c:v>
+                </c:pt>
+                <c:pt idx="3">
+                  <c:v>4.6899999999999997E-2</c:v>
+                </c:pt>
+                <c:pt idx="4">
+                  <c:v>5.4699999999999999E-2</c:v>
+                </c:pt>
+              </c:numCache>
+            </c:numRef>
+          </c:val>
+          <c:smooth val="0"/>
+          <c:extLst>
+            <c:ext xmlns:c16="http://schemas.microsoft.com/office/drawing/2014/chart" uri="{C3380CC4-5D6E-409C-BE32-E72D297353CC}">
+              <c16:uniqueId val="{00000000-57FF-4268-907E-D80889D5D4F0}"/>
+            </c:ext>
+          </c:extLst>
+        </c:ser>
+        <c:ser>
+          <c:idx val="1"/>
+          <c:order val="1"/>
+          <c:tx>
+            <c:strRef>
+              <c:f>Foglio1!$C$1</c:f>
+              <c:strCache>
+                <c:ptCount val="1"/>
+                <c:pt idx="0">
+                  <c:v>N 128</c:v>
+                </c:pt>
+              </c:strCache>
+            </c:strRef>
+          </c:tx>
+          <c:spPr>
+            <a:ln w="28575" cap="rnd">
+              <a:solidFill>
+                <a:schemeClr val="accent2"/>
+              </a:solidFill>
+              <a:round/>
+            </a:ln>
+            <a:effectLst/>
+          </c:spPr>
+          <c:marker>
+            <c:symbol val="circle"/>
+            <c:size val="5"/>
+            <c:spPr>
+              <a:solidFill>
+                <a:schemeClr val="accent2"/>
+              </a:solidFill>
+              <a:ln w="9525">
+                <a:solidFill>
+                  <a:schemeClr val="accent2"/>
+                </a:solidFill>
+              </a:ln>
+              <a:effectLst/>
+            </c:spPr>
+          </c:marker>
+          <c:dLbls>
+            <c:spPr>
+              <a:noFill/>
+              <a:ln>
+                <a:noFill/>
+              </a:ln>
+              <a:effectLst/>
+            </c:spPr>
+            <c:txPr>
+              <a:bodyPr rot="0" spcFirstLastPara="1" vertOverflow="ellipsis" vert="horz" wrap="square" lIns="38100" tIns="19050" rIns="38100" bIns="19050" anchor="ctr" anchorCtr="1">
+                <a:spAutoFit/>
+              </a:bodyPr>
+              <a:lstStyle/>
+              <a:p>
+                <a:pPr>
+                  <a:defRPr sz="1197" b="0" i="0" u="none" strike="noStrike" kern="1200" baseline="0">
+                    <a:solidFill>
+                      <a:schemeClr val="tx1">
+                        <a:lumMod val="75000"/>
+                        <a:lumOff val="25000"/>
+                      </a:schemeClr>
+                    </a:solidFill>
+                    <a:latin typeface="+mn-lt"/>
+                    <a:ea typeface="+mn-ea"/>
+                    <a:cs typeface="+mn-cs"/>
+                  </a:defRPr>
+                </a:pPr>
+                <a:endParaRPr lang="it-IT"/>
+              </a:p>
+            </c:txPr>
+            <c:dLblPos val="t"/>
+            <c:showLegendKey val="0"/>
+            <c:showVal val="1"/>
+            <c:showCatName val="0"/>
+            <c:showSerName val="0"/>
+            <c:showPercent val="0"/>
+            <c:showBubbleSize val="0"/>
+            <c:showLeaderLines val="0"/>
+            <c:extLst>
+              <c:ext xmlns:c15="http://schemas.microsoft.com/office/drawing/2012/chart" uri="{CE6537A1-D6FC-4f65-9D91-7224C49458BB}">
+                <c15:showLeaderLines val="1"/>
+                <c15:leaderLines>
+                  <c:spPr>
+                    <a:ln w="9525" cap="flat" cmpd="sng" algn="ctr">
+                      <a:solidFill>
+                        <a:schemeClr val="tx1">
+                          <a:lumMod val="35000"/>
+                          <a:lumOff val="65000"/>
+                        </a:schemeClr>
+                      </a:solidFill>
+                      <a:round/>
+                    </a:ln>
+                    <a:effectLst/>
+                  </c:spPr>
+                </c15:leaderLines>
+              </c:ext>
+            </c:extLst>
+          </c:dLbls>
+          <c:cat>
+            <c:strRef>
+              <c:f>Foglio1!$A$2:$A$6</c:f>
+              <c:strCache>
+                <c:ptCount val="5"/>
+                <c:pt idx="0">
+                  <c:v>1P X 2T</c:v>
+                </c:pt>
+                <c:pt idx="1">
+                  <c:v>2P X 2T</c:v>
+                </c:pt>
+                <c:pt idx="2">
+                  <c:v>2P X 3T</c:v>
+                </c:pt>
+                <c:pt idx="3">
+                  <c:v>3P X 2T</c:v>
+                </c:pt>
+                <c:pt idx="4">
+                  <c:v>4P X 2T</c:v>
+                </c:pt>
+              </c:strCache>
+            </c:strRef>
+          </c:cat>
+          <c:val>
+            <c:numRef>
+              <c:f>Foglio1!$C$2:$C$6</c:f>
+              <c:numCache>
+                <c:formatCode>General</c:formatCode>
+                <c:ptCount val="5"/>
+                <c:pt idx="0">
+                  <c:v>0.48149999999999998</c:v>
+                </c:pt>
+                <c:pt idx="1">
+                  <c:v>0.29759999999999998</c:v>
+                </c:pt>
+                <c:pt idx="2">
+                  <c:v>1.2470000000000001</c:v>
+                </c:pt>
+                <c:pt idx="3">
+                  <c:v>0.26750000000000002</c:v>
+                </c:pt>
+                <c:pt idx="4">
+                  <c:v>0.36620000000000003</c:v>
+                </c:pt>
+              </c:numCache>
+            </c:numRef>
+          </c:val>
+          <c:smooth val="0"/>
+          <c:extLst>
+            <c:ext xmlns:c16="http://schemas.microsoft.com/office/drawing/2014/chart" uri="{C3380CC4-5D6E-409C-BE32-E72D297353CC}">
+              <c16:uniqueId val="{00000001-57FF-4268-907E-D80889D5D4F0}"/>
+            </c:ext>
+          </c:extLst>
+        </c:ser>
+        <c:ser>
+          <c:idx val="2"/>
+          <c:order val="2"/>
+          <c:tx>
+            <c:strRef>
+              <c:f>Foglio1!$D$1</c:f>
+              <c:strCache>
+                <c:ptCount val="1"/>
+                <c:pt idx="0">
+                  <c:v>N 256</c:v>
+                </c:pt>
+              </c:strCache>
+            </c:strRef>
+          </c:tx>
+          <c:spPr>
+            <a:ln w="28575" cap="rnd">
+              <a:solidFill>
+                <a:schemeClr val="accent3"/>
+              </a:solidFill>
+              <a:round/>
+            </a:ln>
+            <a:effectLst/>
+          </c:spPr>
+          <c:marker>
+            <c:symbol val="circle"/>
+            <c:size val="5"/>
+            <c:spPr>
+              <a:solidFill>
+                <a:schemeClr val="accent3"/>
+              </a:solidFill>
+              <a:ln w="9525">
+                <a:solidFill>
+                  <a:schemeClr val="accent3"/>
+                </a:solidFill>
+              </a:ln>
+              <a:effectLst/>
+            </c:spPr>
+          </c:marker>
+          <c:dLbls>
+            <c:spPr>
+              <a:noFill/>
+              <a:ln>
+                <a:noFill/>
+              </a:ln>
+              <a:effectLst/>
+            </c:spPr>
+            <c:txPr>
+              <a:bodyPr rot="0" spcFirstLastPara="1" vertOverflow="ellipsis" vert="horz" wrap="square" lIns="38100" tIns="19050" rIns="38100" bIns="19050" anchor="ctr" anchorCtr="1">
+                <a:spAutoFit/>
+              </a:bodyPr>
+              <a:lstStyle/>
+              <a:p>
+                <a:pPr>
+                  <a:defRPr sz="1197" b="0" i="0" u="none" strike="noStrike" kern="1200" baseline="0">
+                    <a:solidFill>
+                      <a:schemeClr val="tx1">
+                        <a:lumMod val="75000"/>
+                        <a:lumOff val="25000"/>
+                      </a:schemeClr>
+                    </a:solidFill>
+                    <a:latin typeface="+mn-lt"/>
+                    <a:ea typeface="+mn-ea"/>
+                    <a:cs typeface="+mn-cs"/>
+                  </a:defRPr>
+                </a:pPr>
+                <a:endParaRPr lang="it-IT"/>
+              </a:p>
+            </c:txPr>
+            <c:dLblPos val="t"/>
+            <c:showLegendKey val="0"/>
+            <c:showVal val="1"/>
+            <c:showCatName val="0"/>
+            <c:showSerName val="0"/>
+            <c:showPercent val="0"/>
+            <c:showBubbleSize val="0"/>
+            <c:showLeaderLines val="0"/>
+            <c:extLst>
+              <c:ext xmlns:c15="http://schemas.microsoft.com/office/drawing/2012/chart" uri="{CE6537A1-D6FC-4f65-9D91-7224C49458BB}">
+                <c15:showLeaderLines val="1"/>
+                <c15:leaderLines>
+                  <c:spPr>
+                    <a:ln w="9525" cap="flat" cmpd="sng" algn="ctr">
+                      <a:solidFill>
+                        <a:schemeClr val="tx1">
+                          <a:lumMod val="35000"/>
+                          <a:lumOff val="65000"/>
+                        </a:schemeClr>
+                      </a:solidFill>
+                      <a:round/>
+                    </a:ln>
+                    <a:effectLst/>
+                  </c:spPr>
+                </c15:leaderLines>
+              </c:ext>
+            </c:extLst>
+          </c:dLbls>
+          <c:cat>
+            <c:strRef>
+              <c:f>Foglio1!$A$2:$A$6</c:f>
+              <c:strCache>
+                <c:ptCount val="5"/>
+                <c:pt idx="0">
+                  <c:v>1P X 2T</c:v>
+                </c:pt>
+                <c:pt idx="1">
+                  <c:v>2P X 2T</c:v>
+                </c:pt>
+                <c:pt idx="2">
+                  <c:v>2P X 3T</c:v>
+                </c:pt>
+                <c:pt idx="3">
+                  <c:v>3P X 2T</c:v>
+                </c:pt>
+                <c:pt idx="4">
+                  <c:v>4P X 2T</c:v>
+                </c:pt>
+              </c:strCache>
+            </c:strRef>
+          </c:cat>
+          <c:val>
+            <c:numRef>
+              <c:f>Foglio1!$D$2:$D$6</c:f>
+              <c:numCache>
+                <c:formatCode>General</c:formatCode>
+                <c:ptCount val="5"/>
+                <c:pt idx="0">
+                  <c:v>6.9762000000000004</c:v>
+                </c:pt>
+                <c:pt idx="1">
+                  <c:v>3.9447000000000001</c:v>
+                </c:pt>
+                <c:pt idx="2">
+                  <c:v>7.8125</c:v>
+                </c:pt>
+                <c:pt idx="3">
+                  <c:v>2.4386000000000001</c:v>
+                </c:pt>
+                <c:pt idx="4">
+                  <c:v>3.1823999999999999</c:v>
+                </c:pt>
+              </c:numCache>
+            </c:numRef>
+          </c:val>
+          <c:smooth val="0"/>
+          <c:extLst>
+            <c:ext xmlns:c16="http://schemas.microsoft.com/office/drawing/2014/chart" uri="{C3380CC4-5D6E-409C-BE32-E72D297353CC}">
+              <c16:uniqueId val="{00000002-57FF-4268-907E-D80889D5D4F0}"/>
+            </c:ext>
+          </c:extLst>
+        </c:ser>
+        <c:ser>
+          <c:idx val="3"/>
+          <c:order val="3"/>
+          <c:tx>
+            <c:strRef>
+              <c:f>Foglio1!$E$1</c:f>
+              <c:strCache>
+                <c:ptCount val="1"/>
+                <c:pt idx="0">
+                  <c:v>N 512</c:v>
+                </c:pt>
+              </c:strCache>
+            </c:strRef>
+          </c:tx>
+          <c:spPr>
+            <a:ln w="28575" cap="rnd">
+              <a:solidFill>
+                <a:schemeClr val="accent4"/>
+              </a:solidFill>
+              <a:round/>
+            </a:ln>
+            <a:effectLst/>
+          </c:spPr>
+          <c:marker>
+            <c:symbol val="circle"/>
+            <c:size val="5"/>
+            <c:spPr>
+              <a:solidFill>
+                <a:schemeClr val="accent4"/>
+              </a:solidFill>
+              <a:ln w="9525">
+                <a:solidFill>
+                  <a:schemeClr val="accent4"/>
+                </a:solidFill>
+              </a:ln>
+              <a:effectLst/>
+            </c:spPr>
+          </c:marker>
+          <c:dLbls>
+            <c:spPr>
+              <a:noFill/>
+              <a:ln>
+                <a:noFill/>
+              </a:ln>
+              <a:effectLst/>
+            </c:spPr>
+            <c:txPr>
+              <a:bodyPr rot="0" spcFirstLastPara="1" vertOverflow="ellipsis" vert="horz" wrap="square" lIns="38100" tIns="19050" rIns="38100" bIns="19050" anchor="ctr" anchorCtr="1">
+                <a:spAutoFit/>
+              </a:bodyPr>
+              <a:lstStyle/>
+              <a:p>
+                <a:pPr>
+                  <a:defRPr sz="1197" b="0" i="0" u="none" strike="noStrike" kern="1200" baseline="0">
+                    <a:solidFill>
+                      <a:schemeClr val="tx1">
+                        <a:lumMod val="75000"/>
+                        <a:lumOff val="25000"/>
+                      </a:schemeClr>
+                    </a:solidFill>
+                    <a:latin typeface="+mn-lt"/>
+                    <a:ea typeface="+mn-ea"/>
+                    <a:cs typeface="+mn-cs"/>
+                  </a:defRPr>
+                </a:pPr>
+                <a:endParaRPr lang="it-IT"/>
+              </a:p>
+            </c:txPr>
+            <c:dLblPos val="t"/>
+            <c:showLegendKey val="0"/>
+            <c:showVal val="1"/>
+            <c:showCatName val="0"/>
+            <c:showSerName val="0"/>
+            <c:showPercent val="0"/>
+            <c:showBubbleSize val="0"/>
+            <c:showLeaderLines val="0"/>
+            <c:extLst>
+              <c:ext xmlns:c15="http://schemas.microsoft.com/office/drawing/2012/chart" uri="{CE6537A1-D6FC-4f65-9D91-7224C49458BB}">
+                <c15:showLeaderLines val="1"/>
+                <c15:leaderLines>
+                  <c:spPr>
+                    <a:ln w="9525" cap="flat" cmpd="sng" algn="ctr">
+                      <a:solidFill>
+                        <a:schemeClr val="tx1">
+                          <a:lumMod val="35000"/>
+                          <a:lumOff val="65000"/>
+                        </a:schemeClr>
+                      </a:solidFill>
+                      <a:round/>
+                    </a:ln>
+                    <a:effectLst/>
+                  </c:spPr>
+                </c15:leaderLines>
+              </c:ext>
+            </c:extLst>
+          </c:dLbls>
+          <c:cat>
+            <c:strRef>
+              <c:f>Foglio1!$A$2:$A$6</c:f>
+              <c:strCache>
+                <c:ptCount val="5"/>
+                <c:pt idx="0">
+                  <c:v>1P X 2T</c:v>
+                </c:pt>
+                <c:pt idx="1">
+                  <c:v>2P X 2T</c:v>
+                </c:pt>
+                <c:pt idx="2">
+                  <c:v>2P X 3T</c:v>
+                </c:pt>
+                <c:pt idx="3">
+                  <c:v>3P X 2T</c:v>
+                </c:pt>
+                <c:pt idx="4">
+                  <c:v>4P X 2T</c:v>
+                </c:pt>
+              </c:strCache>
+            </c:strRef>
+          </c:cat>
+          <c:val>
+            <c:numRef>
+              <c:f>Foglio1!$E$2:$E$6</c:f>
+              <c:numCache>
+                <c:formatCode>General</c:formatCode>
+                <c:ptCount val="5"/>
+                <c:pt idx="0">
+                  <c:v>106.91</c:v>
+                </c:pt>
+                <c:pt idx="1">
+                  <c:v>62.448</c:v>
+                </c:pt>
+                <c:pt idx="2">
+                  <c:v>85.797499999999999</c:v>
+                </c:pt>
+                <c:pt idx="3">
+                  <c:v>31.348700000000001</c:v>
+                </c:pt>
+                <c:pt idx="4">
+                  <c:v>42.302900000000001</c:v>
+                </c:pt>
+              </c:numCache>
+            </c:numRef>
+          </c:val>
+          <c:smooth val="0"/>
+          <c:extLst>
+            <c:ext xmlns:c16="http://schemas.microsoft.com/office/drawing/2014/chart" uri="{C3380CC4-5D6E-409C-BE32-E72D297353CC}">
+              <c16:uniqueId val="{00000003-57FF-4268-907E-D80889D5D4F0}"/>
+            </c:ext>
+          </c:extLst>
+        </c:ser>
+        <c:dLbls>
+          <c:dLblPos val="t"/>
+          <c:showLegendKey val="0"/>
+          <c:showVal val="1"/>
+          <c:showCatName val="0"/>
+          <c:showSerName val="0"/>
+          <c:showPercent val="0"/>
+          <c:showBubbleSize val="0"/>
+        </c:dLbls>
+        <c:marker val="1"/>
+        <c:smooth val="0"/>
+        <c:axId val="1919494976"/>
+        <c:axId val="2099607039"/>
+      </c:lineChart>
+      <c:catAx>
+        <c:axId val="1919494976"/>
+        <c:scaling>
+          <c:orientation val="minMax"/>
+        </c:scaling>
+        <c:delete val="0"/>
+        <c:axPos val="b"/>
+        <c:numFmt formatCode="General" sourceLinked="1"/>
+        <c:majorTickMark val="none"/>
+        <c:minorTickMark val="none"/>
+        <c:tickLblPos val="nextTo"/>
+        <c:spPr>
+          <a:noFill/>
+          <a:ln w="9525" cap="flat" cmpd="sng" algn="ctr">
+            <a:solidFill>
+              <a:schemeClr val="tx1">
+                <a:lumMod val="15000"/>
+                <a:lumOff val="85000"/>
+              </a:schemeClr>
+            </a:solidFill>
+            <a:round/>
+          </a:ln>
+          <a:effectLst/>
+        </c:spPr>
+        <c:txPr>
+          <a:bodyPr rot="-60000000" spcFirstLastPara="1" vertOverflow="ellipsis" vert="horz" wrap="square" anchor="ctr" anchorCtr="1"/>
+          <a:lstStyle/>
+          <a:p>
+            <a:pPr>
+              <a:defRPr sz="1197" b="0" i="0" u="none" strike="noStrike" kern="1200" baseline="0">
+                <a:solidFill>
+                  <a:schemeClr val="tx1">
+                    <a:lumMod val="65000"/>
+                    <a:lumOff val="35000"/>
+                  </a:schemeClr>
+                </a:solidFill>
+                <a:latin typeface="+mn-lt"/>
+                <a:ea typeface="+mn-ea"/>
+                <a:cs typeface="+mn-cs"/>
+              </a:defRPr>
+            </a:pPr>
+            <a:endParaRPr lang="it-IT"/>
+          </a:p>
+        </c:txPr>
+        <c:crossAx val="2099607039"/>
+        <c:crossesAt val="1.0000000000000002E-2"/>
+        <c:auto val="1"/>
+        <c:lblAlgn val="ctr"/>
+        <c:lblOffset val="100"/>
+        <c:noMultiLvlLbl val="0"/>
+      </c:catAx>
+      <c:valAx>
+        <c:axId val="2099607039"/>
+        <c:scaling>
+          <c:logBase val="10"/>
+          <c:orientation val="minMax"/>
+        </c:scaling>
+        <c:delete val="0"/>
+        <c:axPos val="l"/>
+        <c:majorGridlines>
+          <c:spPr>
+            <a:ln w="9525" cap="flat" cmpd="sng" algn="ctr">
+              <a:solidFill>
+                <a:schemeClr val="tx1">
+                  <a:lumMod val="15000"/>
+                  <a:lumOff val="85000"/>
+                </a:schemeClr>
+              </a:solidFill>
+              <a:round/>
+            </a:ln>
+            <a:effectLst/>
+          </c:spPr>
+        </c:majorGridlines>
+        <c:numFmt formatCode="General" sourceLinked="1"/>
+        <c:majorTickMark val="none"/>
+        <c:minorTickMark val="none"/>
+        <c:tickLblPos val="nextTo"/>
+        <c:spPr>
+          <a:noFill/>
+          <a:ln>
+            <a:noFill/>
+          </a:ln>
+          <a:effectLst/>
+        </c:spPr>
+        <c:txPr>
+          <a:bodyPr rot="-60000000" spcFirstLastPara="1" vertOverflow="ellipsis" vert="horz" wrap="square" anchor="ctr" anchorCtr="1"/>
+          <a:lstStyle/>
+          <a:p>
+            <a:pPr>
+              <a:defRPr sz="1197" b="0" i="0" u="none" strike="noStrike" kern="1200" baseline="0">
+                <a:solidFill>
+                  <a:schemeClr val="tx1">
+                    <a:lumMod val="65000"/>
+                    <a:lumOff val="35000"/>
+                  </a:schemeClr>
+                </a:solidFill>
+                <a:latin typeface="+mn-lt"/>
+                <a:ea typeface="+mn-ea"/>
+                <a:cs typeface="+mn-cs"/>
+              </a:defRPr>
+            </a:pPr>
+            <a:endParaRPr lang="it-IT"/>
+          </a:p>
+        </c:txPr>
+        <c:crossAx val="1919494976"/>
+        <c:crosses val="autoZero"/>
+        <c:crossBetween val="between"/>
+      </c:valAx>
+      <c:spPr>
+        <a:noFill/>
+        <a:ln>
+          <a:noFill/>
+        </a:ln>
+        <a:effectLst/>
+      </c:spPr>
+    </c:plotArea>
+    <c:legend>
+      <c:legendPos val="b"/>
+      <c:overlay val="0"/>
+      <c:spPr>
+        <a:noFill/>
+        <a:ln>
+          <a:noFill/>
+        </a:ln>
+        <a:effectLst/>
+      </c:spPr>
+      <c:txPr>
+        <a:bodyPr rot="0" spcFirstLastPara="1" vertOverflow="ellipsis" vert="horz" wrap="square" anchor="ctr" anchorCtr="1"/>
+        <a:lstStyle/>
+        <a:p>
+          <a:pPr>
+            <a:defRPr sz="1197" b="0" i="0" u="none" strike="noStrike" kern="1200" baseline="0">
+              <a:solidFill>
+                <a:schemeClr val="tx1">
+                  <a:lumMod val="65000"/>
+                  <a:lumOff val="35000"/>
+                </a:schemeClr>
+              </a:solidFill>
+              <a:latin typeface="+mn-lt"/>
+              <a:ea typeface="+mn-ea"/>
+              <a:cs typeface="+mn-cs"/>
+            </a:defRPr>
+          </a:pPr>
+          <a:endParaRPr lang="it-IT"/>
+        </a:p>
+      </c:txPr>
+    </c:legend>
+    <c:plotVisOnly val="1"/>
+    <c:dispBlanksAs val="gap"/>
+    <c:showDLblsOverMax val="0"/>
+    <c:extLst>
+      <c:ext xmlns:c16r3="http://schemas.microsoft.com/office/drawing/2017/03/chart" uri="{56B9EC1D-385E-4148-901F-78D8002777C0}">
+        <c16r3:dataDisplayOptions16>
+          <c16r3:dispNaAsBlank val="1"/>
+        </c16r3:dataDisplayOptions16>
+      </c:ext>
+    </c:extLst>
+  </c:chart>
+  <c:spPr>
+    <a:noFill/>
+    <a:ln>
+      <a:noFill/>
+    </a:ln>
+    <a:effectLst/>
+  </c:spPr>
+  <c:txPr>
+    <a:bodyPr/>
+    <a:lstStyle/>
+    <a:p>
+      <a:pPr>
+        <a:defRPr/>
+      </a:pPr>
+      <a:endParaRPr lang="it-IT"/>
+    </a:p>
+  </c:txPr>
+  <c:externalData r:id="rId3">
+    <c:autoUpdate val="0"/>
+  </c:externalData>
+</c:chartSpace>
+</file>
+
+<file path=ppt/charts/chart6.xml><?xml version="1.0" encoding="utf-8"?>
+<c:chartSpace xmlns:c="http://schemas.openxmlformats.org/drawingml/2006/chart" xmlns:a="http://schemas.openxmlformats.org/drawingml/2006/main" xmlns:r="http://schemas.openxmlformats.org/officeDocument/2006/relationships" xmlns:c16r2="http://schemas.microsoft.com/office/drawing/2015/06/chart">
+  <c:date1904 val="0"/>
+  <c:lang val="it-IT"/>
+  <c:roundedCorners val="0"/>
+  <mc:AlternateContent xmlns:mc="http://schemas.openxmlformats.org/markup-compatibility/2006">
+    <mc:Choice xmlns:c14="http://schemas.microsoft.com/office/drawing/2007/8/2/chart" Requires="c14">
+      <c14:style val="102"/>
+    </mc:Choice>
+    <mc:Fallback>
+      <c:style val="2"/>
+    </mc:Fallback>
+  </mc:AlternateContent>
+  <c:chart>
+    <c:title>
+      <c:tx>
+        <c:rich>
+          <a:bodyPr rot="0" spcFirstLastPara="1" vertOverflow="ellipsis" vert="horz" wrap="square" anchor="ctr" anchorCtr="1"/>
+          <a:lstStyle/>
+          <a:p>
+            <a:pPr>
+              <a:defRPr sz="1862" b="0" i="0" u="none" strike="noStrike" kern="1200" spc="0" baseline="0">
+                <a:solidFill>
+                  <a:schemeClr val="tx1">
+                    <a:lumMod val="65000"/>
+                    <a:lumOff val="35000"/>
+                  </a:schemeClr>
+                </a:solidFill>
+                <a:latin typeface="+mn-lt"/>
+                <a:ea typeface="+mn-ea"/>
+                <a:cs typeface="+mn-cs"/>
+              </a:defRPr>
+            </a:pPr>
+            <a:r>
+              <a:rPr lang="en-US" noProof="0" dirty="0"/>
+              <a:t>Speed</a:t>
+            </a:r>
+            <a:r>
+              <a:rPr lang="en-US" baseline="0" noProof="0" dirty="0"/>
+              <a:t>up</a:t>
+            </a:r>
+          </a:p>
+        </c:rich>
+      </c:tx>
+      <c:overlay val="0"/>
+      <c:spPr>
+        <a:noFill/>
+        <a:ln>
+          <a:noFill/>
+        </a:ln>
+        <a:effectLst/>
+      </c:spPr>
+      <c:txPr>
+        <a:bodyPr rot="0" spcFirstLastPara="1" vertOverflow="ellipsis" vert="horz" wrap="square" anchor="ctr" anchorCtr="1"/>
+        <a:lstStyle/>
+        <a:p>
+          <a:pPr>
+            <a:defRPr sz="1862" b="0" i="0" u="none" strike="noStrike" kern="1200" spc="0" baseline="0">
+              <a:solidFill>
+                <a:schemeClr val="tx1">
+                  <a:lumMod val="65000"/>
+                  <a:lumOff val="35000"/>
+                </a:schemeClr>
+              </a:solidFill>
+              <a:latin typeface="+mn-lt"/>
+              <a:ea typeface="+mn-ea"/>
+              <a:cs typeface="+mn-cs"/>
+            </a:defRPr>
+          </a:pPr>
+          <a:endParaRPr lang="it-IT"/>
+        </a:p>
+      </c:txPr>
+    </c:title>
+    <c:autoTitleDeleted val="0"/>
+    <c:plotArea>
+      <c:layout/>
+      <c:lineChart>
+        <c:grouping val="standard"/>
+        <c:varyColors val="0"/>
+        <c:ser>
+          <c:idx val="0"/>
+          <c:order val="0"/>
+          <c:tx>
+            <c:strRef>
+              <c:f>Foglio1!$B$1</c:f>
+              <c:strCache>
+                <c:ptCount val="1"/>
+                <c:pt idx="0">
+                  <c:v>N 64</c:v>
+                </c:pt>
+              </c:strCache>
+            </c:strRef>
+          </c:tx>
+          <c:spPr>
+            <a:ln w="28575" cap="rnd">
+              <a:solidFill>
+                <a:schemeClr val="accent1"/>
+              </a:solidFill>
+              <a:round/>
+            </a:ln>
+            <a:effectLst/>
+          </c:spPr>
+          <c:marker>
+            <c:symbol val="circle"/>
+            <c:size val="5"/>
+            <c:spPr>
+              <a:solidFill>
+                <a:schemeClr val="accent1"/>
+              </a:solidFill>
+              <a:ln w="9525">
+                <a:solidFill>
+                  <a:schemeClr val="accent1"/>
+                </a:solidFill>
+              </a:ln>
+              <a:effectLst/>
+            </c:spPr>
+          </c:marker>
+          <c:cat>
+            <c:strRef>
+              <c:f>Foglio1!$A$2:$A$6</c:f>
+              <c:strCache>
+                <c:ptCount val="5"/>
+                <c:pt idx="0">
+                  <c:v>1P X 2T</c:v>
+                </c:pt>
+                <c:pt idx="1">
+                  <c:v>2P X 2T</c:v>
+                </c:pt>
+                <c:pt idx="2">
+                  <c:v>3P X 2T</c:v>
+                </c:pt>
+                <c:pt idx="3">
+                  <c:v>2P X 3T</c:v>
+                </c:pt>
+                <c:pt idx="4">
+                  <c:v>4P X 2T</c:v>
+                </c:pt>
+              </c:strCache>
+            </c:strRef>
+          </c:cat>
+          <c:val>
+            <c:numRef>
+              <c:f>Foglio1!$B$2:$B$6</c:f>
+              <c:numCache>
+                <c:formatCode>General</c:formatCode>
+                <c:ptCount val="5"/>
+                <c:pt idx="0">
+                  <c:v>0.56999999999999995</c:v>
+                </c:pt>
+                <c:pt idx="1">
+                  <c:v>0.83</c:v>
+                </c:pt>
+                <c:pt idx="2">
+                  <c:v>0.62</c:v>
+                </c:pt>
+                <c:pt idx="3">
+                  <c:v>0.1</c:v>
+                </c:pt>
+                <c:pt idx="4">
+                  <c:v>0.53</c:v>
+                </c:pt>
+              </c:numCache>
+            </c:numRef>
+          </c:val>
+          <c:smooth val="0"/>
+          <c:extLst>
+            <c:ext xmlns:c16="http://schemas.microsoft.com/office/drawing/2014/chart" uri="{C3380CC4-5D6E-409C-BE32-E72D297353CC}">
+              <c16:uniqueId val="{00000000-B4F8-4D7E-BB29-1BF3D0F2D383}"/>
+            </c:ext>
+          </c:extLst>
+        </c:ser>
+        <c:ser>
+          <c:idx val="1"/>
+          <c:order val="1"/>
+          <c:tx>
+            <c:strRef>
+              <c:f>Foglio1!$C$1</c:f>
+              <c:strCache>
+                <c:ptCount val="1"/>
+                <c:pt idx="0">
+                  <c:v>N 128</c:v>
+                </c:pt>
+              </c:strCache>
+            </c:strRef>
+          </c:tx>
+          <c:spPr>
+            <a:ln w="28575" cap="rnd">
+              <a:solidFill>
+                <a:schemeClr val="accent2"/>
+              </a:solidFill>
+              <a:round/>
+            </a:ln>
+            <a:effectLst/>
+          </c:spPr>
+          <c:marker>
+            <c:symbol val="circle"/>
+            <c:size val="5"/>
+            <c:spPr>
+              <a:solidFill>
+                <a:schemeClr val="accent2"/>
+              </a:solidFill>
+              <a:ln w="9525">
+                <a:solidFill>
+                  <a:schemeClr val="accent2"/>
+                </a:solidFill>
+              </a:ln>
+              <a:effectLst/>
+            </c:spPr>
+          </c:marker>
+          <c:cat>
+            <c:strRef>
+              <c:f>Foglio1!$A$2:$A$6</c:f>
+              <c:strCache>
+                <c:ptCount val="5"/>
+                <c:pt idx="0">
+                  <c:v>1P X 2T</c:v>
+                </c:pt>
+                <c:pt idx="1">
+                  <c:v>2P X 2T</c:v>
+                </c:pt>
+                <c:pt idx="2">
+                  <c:v>3P X 2T</c:v>
+                </c:pt>
+                <c:pt idx="3">
+                  <c:v>2P X 3T</c:v>
+                </c:pt>
+                <c:pt idx="4">
+                  <c:v>4P X 2T</c:v>
+                </c:pt>
+              </c:strCache>
+            </c:strRef>
+          </c:cat>
+          <c:val>
+            <c:numRef>
+              <c:f>Foglio1!$C$2:$C$6</c:f>
+              <c:numCache>
+                <c:formatCode>General</c:formatCode>
+                <c:ptCount val="5"/>
+                <c:pt idx="0">
+                  <c:v>1.01</c:v>
+                </c:pt>
+                <c:pt idx="1">
+                  <c:v>1.64</c:v>
+                </c:pt>
+                <c:pt idx="2">
+                  <c:v>1.83</c:v>
+                </c:pt>
+                <c:pt idx="3">
+                  <c:v>0.39</c:v>
+                </c:pt>
+                <c:pt idx="4">
+                  <c:v>1.33</c:v>
+                </c:pt>
+              </c:numCache>
+            </c:numRef>
+          </c:val>
+          <c:smooth val="0"/>
+          <c:extLst>
+            <c:ext xmlns:c16="http://schemas.microsoft.com/office/drawing/2014/chart" uri="{C3380CC4-5D6E-409C-BE32-E72D297353CC}">
+              <c16:uniqueId val="{00000001-B4F8-4D7E-BB29-1BF3D0F2D383}"/>
+            </c:ext>
+          </c:extLst>
+        </c:ser>
+        <c:ser>
+          <c:idx val="2"/>
+          <c:order val="2"/>
+          <c:tx>
+            <c:strRef>
+              <c:f>Foglio1!$D$1</c:f>
+              <c:strCache>
+                <c:ptCount val="1"/>
+                <c:pt idx="0">
+                  <c:v>N 256</c:v>
+                </c:pt>
+              </c:strCache>
+            </c:strRef>
+          </c:tx>
+          <c:spPr>
+            <a:ln w="28575" cap="rnd">
+              <a:solidFill>
+                <a:schemeClr val="accent3"/>
+              </a:solidFill>
+              <a:round/>
+            </a:ln>
+            <a:effectLst/>
+          </c:spPr>
+          <c:marker>
+            <c:symbol val="circle"/>
+            <c:size val="5"/>
+            <c:spPr>
+              <a:solidFill>
+                <a:schemeClr val="accent3"/>
+              </a:solidFill>
+              <a:ln w="9525">
+                <a:solidFill>
+                  <a:schemeClr val="accent3"/>
+                </a:solidFill>
+              </a:ln>
+              <a:effectLst/>
+            </c:spPr>
+          </c:marker>
+          <c:cat>
+            <c:strRef>
+              <c:f>Foglio1!$A$2:$A$6</c:f>
+              <c:strCache>
+                <c:ptCount val="5"/>
+                <c:pt idx="0">
+                  <c:v>1P X 2T</c:v>
+                </c:pt>
+                <c:pt idx="1">
+                  <c:v>2P X 2T</c:v>
+                </c:pt>
+                <c:pt idx="2">
+                  <c:v>3P X 2T</c:v>
+                </c:pt>
+                <c:pt idx="3">
+                  <c:v>2P X 3T</c:v>
+                </c:pt>
+                <c:pt idx="4">
+                  <c:v>4P X 2T</c:v>
+                </c:pt>
+              </c:strCache>
+            </c:strRef>
+          </c:cat>
+          <c:val>
+            <c:numRef>
+              <c:f>Foglio1!$D$2:$D$6</c:f>
+              <c:numCache>
+                <c:formatCode>General</c:formatCode>
+                <c:ptCount val="5"/>
+                <c:pt idx="0">
+                  <c:v>1.01</c:v>
+                </c:pt>
+                <c:pt idx="1">
+                  <c:v>1.78</c:v>
+                </c:pt>
+                <c:pt idx="2">
+                  <c:v>2.88</c:v>
+                </c:pt>
+                <c:pt idx="3">
+                  <c:v>0.9</c:v>
+                </c:pt>
+                <c:pt idx="4">
+                  <c:v>2.2000000000000002</c:v>
+                </c:pt>
+              </c:numCache>
+            </c:numRef>
+          </c:val>
+          <c:smooth val="0"/>
+          <c:extLst>
+            <c:ext xmlns:c16="http://schemas.microsoft.com/office/drawing/2014/chart" uri="{C3380CC4-5D6E-409C-BE32-E72D297353CC}">
+              <c16:uniqueId val="{00000002-B4F8-4D7E-BB29-1BF3D0F2D383}"/>
+            </c:ext>
+          </c:extLst>
+        </c:ser>
+        <c:ser>
+          <c:idx val="3"/>
+          <c:order val="3"/>
+          <c:tx>
+            <c:strRef>
+              <c:f>Foglio1!$E$1</c:f>
+              <c:strCache>
+                <c:ptCount val="1"/>
+                <c:pt idx="0">
+                  <c:v>N 512</c:v>
+                </c:pt>
+              </c:strCache>
+            </c:strRef>
+          </c:tx>
+          <c:spPr>
+            <a:ln w="28575" cap="rnd">
+              <a:solidFill>
+                <a:schemeClr val="accent4"/>
+              </a:solidFill>
+              <a:round/>
+            </a:ln>
+            <a:effectLst/>
+          </c:spPr>
+          <c:marker>
+            <c:symbol val="circle"/>
+            <c:size val="5"/>
+            <c:spPr>
+              <a:solidFill>
+                <a:schemeClr val="accent4"/>
+              </a:solidFill>
+              <a:ln w="9525">
+                <a:solidFill>
+                  <a:schemeClr val="accent4"/>
+                </a:solidFill>
+              </a:ln>
+              <a:effectLst/>
+            </c:spPr>
+          </c:marker>
+          <c:cat>
+            <c:strRef>
+              <c:f>Foglio1!$A$2:$A$6</c:f>
+              <c:strCache>
+                <c:ptCount val="5"/>
+                <c:pt idx="0">
+                  <c:v>1P X 2T</c:v>
+                </c:pt>
+                <c:pt idx="1">
+                  <c:v>2P X 2T</c:v>
+                </c:pt>
+                <c:pt idx="2">
+                  <c:v>3P X 2T</c:v>
+                </c:pt>
+                <c:pt idx="3">
+                  <c:v>2P X 3T</c:v>
+                </c:pt>
+                <c:pt idx="4">
+                  <c:v>4P X 2T</c:v>
+                </c:pt>
+              </c:strCache>
+            </c:strRef>
+          </c:cat>
+          <c:val>
+            <c:numRef>
+              <c:f>Foglio1!$E$2:$E$6</c:f>
+              <c:numCache>
+                <c:formatCode>General</c:formatCode>
+                <c:ptCount val="5"/>
+                <c:pt idx="0">
+                  <c:v>1.1100000000000001</c:v>
+                </c:pt>
+                <c:pt idx="1">
+                  <c:v>1.9</c:v>
+                </c:pt>
+                <c:pt idx="2">
+                  <c:v>3.78</c:v>
+                </c:pt>
+                <c:pt idx="3">
+                  <c:v>1.38</c:v>
+                </c:pt>
+                <c:pt idx="4">
+                  <c:v>2.8</c:v>
+                </c:pt>
+              </c:numCache>
+            </c:numRef>
+          </c:val>
+          <c:smooth val="0"/>
+          <c:extLst>
+            <c:ext xmlns:c16="http://schemas.microsoft.com/office/drawing/2014/chart" uri="{C3380CC4-5D6E-409C-BE32-E72D297353CC}">
+              <c16:uniqueId val="{00000003-B4F8-4D7E-BB29-1BF3D0F2D383}"/>
+            </c:ext>
+          </c:extLst>
+        </c:ser>
+        <c:dLbls>
+          <c:showLegendKey val="0"/>
+          <c:showVal val="0"/>
+          <c:showCatName val="0"/>
+          <c:showSerName val="0"/>
+          <c:showPercent val="0"/>
+          <c:showBubbleSize val="0"/>
+        </c:dLbls>
+        <c:marker val="1"/>
+        <c:smooth val="0"/>
+        <c:axId val="455103296"/>
+        <c:axId val="351644896"/>
+      </c:lineChart>
+      <c:catAx>
+        <c:axId val="455103296"/>
+        <c:scaling>
+          <c:orientation val="minMax"/>
+        </c:scaling>
+        <c:delete val="0"/>
+        <c:axPos val="b"/>
+        <c:numFmt formatCode="General" sourceLinked="1"/>
+        <c:majorTickMark val="none"/>
+        <c:minorTickMark val="none"/>
+        <c:tickLblPos val="nextTo"/>
+        <c:spPr>
+          <a:noFill/>
+          <a:ln w="9525" cap="flat" cmpd="sng" algn="ctr">
+            <a:solidFill>
+              <a:schemeClr val="tx1">
+                <a:lumMod val="15000"/>
+                <a:lumOff val="85000"/>
+              </a:schemeClr>
+            </a:solidFill>
+            <a:round/>
+          </a:ln>
+          <a:effectLst/>
+        </c:spPr>
+        <c:txPr>
+          <a:bodyPr rot="-60000000" spcFirstLastPara="1" vertOverflow="ellipsis" vert="horz" wrap="square" anchor="ctr" anchorCtr="1"/>
+          <a:lstStyle/>
+          <a:p>
+            <a:pPr>
+              <a:defRPr sz="1197" b="0" i="0" u="none" strike="noStrike" kern="1200" baseline="0">
+                <a:solidFill>
+                  <a:schemeClr val="tx1">
+                    <a:lumMod val="65000"/>
+                    <a:lumOff val="35000"/>
+                  </a:schemeClr>
+                </a:solidFill>
+                <a:latin typeface="+mn-lt"/>
+                <a:ea typeface="+mn-ea"/>
+                <a:cs typeface="+mn-cs"/>
+              </a:defRPr>
+            </a:pPr>
+            <a:endParaRPr lang="it-IT"/>
+          </a:p>
+        </c:txPr>
+        <c:crossAx val="351644896"/>
+        <c:crosses val="autoZero"/>
+        <c:auto val="1"/>
+        <c:lblAlgn val="ctr"/>
+        <c:lblOffset val="100"/>
+        <c:noMultiLvlLbl val="0"/>
+      </c:catAx>
+      <c:valAx>
+        <c:axId val="351644896"/>
+        <c:scaling>
+          <c:orientation val="minMax"/>
+        </c:scaling>
+        <c:delete val="0"/>
+        <c:axPos val="l"/>
+        <c:majorGridlines>
+          <c:spPr>
+            <a:ln w="9525" cap="flat" cmpd="sng" algn="ctr">
+              <a:solidFill>
+                <a:schemeClr val="tx1">
+                  <a:lumMod val="15000"/>
+                  <a:lumOff val="85000"/>
+                </a:schemeClr>
+              </a:solidFill>
+              <a:round/>
+            </a:ln>
+            <a:effectLst/>
+          </c:spPr>
+        </c:majorGridlines>
+        <c:numFmt formatCode="General" sourceLinked="1"/>
+        <c:majorTickMark val="none"/>
+        <c:minorTickMark val="none"/>
+        <c:tickLblPos val="nextTo"/>
+        <c:spPr>
+          <a:noFill/>
+          <a:ln>
+            <a:noFill/>
+          </a:ln>
+          <a:effectLst/>
+        </c:spPr>
+        <c:txPr>
+          <a:bodyPr rot="-60000000" spcFirstLastPara="1" vertOverflow="ellipsis" vert="horz" wrap="square" anchor="ctr" anchorCtr="1"/>
+          <a:lstStyle/>
+          <a:p>
+            <a:pPr>
+              <a:defRPr sz="1197" b="0" i="0" u="none" strike="noStrike" kern="1200" baseline="0">
+                <a:solidFill>
+                  <a:schemeClr val="tx1">
+                    <a:lumMod val="65000"/>
+                    <a:lumOff val="35000"/>
+                  </a:schemeClr>
+                </a:solidFill>
+                <a:latin typeface="+mn-lt"/>
+                <a:ea typeface="+mn-ea"/>
+                <a:cs typeface="+mn-cs"/>
+              </a:defRPr>
+            </a:pPr>
+            <a:endParaRPr lang="it-IT"/>
+          </a:p>
+        </c:txPr>
+        <c:crossAx val="455103296"/>
+        <c:crosses val="autoZero"/>
+        <c:crossBetween val="between"/>
+      </c:valAx>
+      <c:spPr>
+        <a:noFill/>
+        <a:ln>
+          <a:noFill/>
+        </a:ln>
+        <a:effectLst/>
+      </c:spPr>
+    </c:plotArea>
+    <c:legend>
+      <c:legendPos val="b"/>
+      <c:overlay val="0"/>
+      <c:spPr>
+        <a:noFill/>
+        <a:ln>
+          <a:noFill/>
+        </a:ln>
+        <a:effectLst/>
+      </c:spPr>
+      <c:txPr>
+        <a:bodyPr rot="0" spcFirstLastPara="1" vertOverflow="ellipsis" vert="horz" wrap="square" anchor="ctr" anchorCtr="1"/>
+        <a:lstStyle/>
+        <a:p>
+          <a:pPr>
+            <a:defRPr sz="1197" b="0" i="0" u="none" strike="noStrike" kern="1200" baseline="0">
+              <a:solidFill>
+                <a:schemeClr val="tx1">
+                  <a:lumMod val="65000"/>
+                  <a:lumOff val="35000"/>
+                </a:schemeClr>
+              </a:solidFill>
+              <a:latin typeface="+mn-lt"/>
+              <a:ea typeface="+mn-ea"/>
+              <a:cs typeface="+mn-cs"/>
+            </a:defRPr>
+          </a:pPr>
+          <a:endParaRPr lang="it-IT"/>
+        </a:p>
+      </c:txPr>
+    </c:legend>
+    <c:plotVisOnly val="1"/>
+    <c:dispBlanksAs val="gap"/>
+    <c:showDLblsOverMax val="0"/>
+    <c:extLst>
+      <c:ext xmlns:c16r3="http://schemas.microsoft.com/office/drawing/2017/03/chart" uri="{56B9EC1D-385E-4148-901F-78D8002777C0}">
+        <c16r3:dataDisplayOptions16>
+          <c16r3:dispNaAsBlank val="1"/>
+        </c16r3:dataDisplayOptions16>
+      </c:ext>
+    </c:extLst>
+  </c:chart>
+  <c:spPr>
+    <a:noFill/>
+    <a:ln>
+      <a:noFill/>
+    </a:ln>
+    <a:effectLst/>
+  </c:spPr>
+  <c:txPr>
+    <a:bodyPr/>
+    <a:lstStyle/>
+    <a:p>
+      <a:pPr>
+        <a:defRPr/>
+      </a:pPr>
+      <a:endParaRPr lang="it-IT"/>
+    </a:p>
+  </c:txPr>
+  <c:externalData r:id="rId3">
+    <c:autoUpdate val="0"/>
+  </c:externalData>
+</c:chartSpace>
+</file>
+
+<file path=ppt/charts/chart7.xml><?xml version="1.0" encoding="utf-8"?>
+<c:chartSpace xmlns:c="http://schemas.openxmlformats.org/drawingml/2006/chart" xmlns:a="http://schemas.openxmlformats.org/drawingml/2006/main" xmlns:r="http://schemas.openxmlformats.org/officeDocument/2006/relationships" xmlns:c16r2="http://schemas.microsoft.com/office/drawing/2015/06/chart">
+  <c:date1904 val="0"/>
+  <c:lang val="it-IT"/>
+  <c:roundedCorners val="0"/>
+  <mc:AlternateContent xmlns:mc="http://schemas.openxmlformats.org/markup-compatibility/2006">
+    <mc:Choice xmlns:c14="http://schemas.microsoft.com/office/drawing/2007/8/2/chart" Requires="c14">
+      <c14:style val="102"/>
+    </mc:Choice>
+    <mc:Fallback>
+      <c:style val="2"/>
+    </mc:Fallback>
+  </mc:AlternateContent>
+  <c:chart>
+    <c:title>
+      <c:tx>
+        <c:rich>
+          <a:bodyPr rot="0" spcFirstLastPara="1" vertOverflow="ellipsis" vert="horz" wrap="square" anchor="ctr" anchorCtr="1"/>
+          <a:lstStyle/>
+          <a:p>
+            <a:pPr>
+              <a:defRPr sz="1862" b="0" i="0" u="none" strike="noStrike" kern="1200" spc="0" baseline="0">
+                <a:solidFill>
+                  <a:schemeClr val="tx1">
+                    <a:lumMod val="65000"/>
+                    <a:lumOff val="35000"/>
+                  </a:schemeClr>
+                </a:solidFill>
+                <a:latin typeface="+mn-lt"/>
+                <a:ea typeface="+mn-ea"/>
+                <a:cs typeface="+mn-cs"/>
+              </a:defRPr>
+            </a:pPr>
+            <a:r>
+              <a:rPr lang="it-IT" dirty="0"/>
+              <a:t>Efficienza</a:t>
+            </a:r>
+          </a:p>
+        </c:rich>
+      </c:tx>
+      <c:overlay val="0"/>
+      <c:spPr>
+        <a:noFill/>
+        <a:ln>
+          <a:noFill/>
+        </a:ln>
+        <a:effectLst/>
+      </c:spPr>
+      <c:txPr>
+        <a:bodyPr rot="0" spcFirstLastPara="1" vertOverflow="ellipsis" vert="horz" wrap="square" anchor="ctr" anchorCtr="1"/>
+        <a:lstStyle/>
+        <a:p>
+          <a:pPr>
+            <a:defRPr sz="1862" b="0" i="0" u="none" strike="noStrike" kern="1200" spc="0" baseline="0">
+              <a:solidFill>
+                <a:schemeClr val="tx1">
+                  <a:lumMod val="65000"/>
+                  <a:lumOff val="35000"/>
+                </a:schemeClr>
+              </a:solidFill>
+              <a:latin typeface="+mn-lt"/>
+              <a:ea typeface="+mn-ea"/>
+              <a:cs typeface="+mn-cs"/>
+            </a:defRPr>
+          </a:pPr>
+          <a:endParaRPr lang="it-IT"/>
+        </a:p>
+      </c:txPr>
+    </c:title>
+    <c:autoTitleDeleted val="0"/>
+    <c:plotArea>
+      <c:layout/>
+      <c:lineChart>
+        <c:grouping val="standard"/>
+        <c:varyColors val="0"/>
+        <c:ser>
+          <c:idx val="0"/>
+          <c:order val="0"/>
+          <c:tx>
+            <c:strRef>
+              <c:f>Foglio1!$B$1</c:f>
+              <c:strCache>
+                <c:ptCount val="1"/>
+                <c:pt idx="0">
+                  <c:v>N 64</c:v>
+                </c:pt>
+              </c:strCache>
+            </c:strRef>
+          </c:tx>
+          <c:spPr>
+            <a:ln w="28575" cap="rnd">
+              <a:solidFill>
+                <a:schemeClr val="accent1"/>
+              </a:solidFill>
+              <a:round/>
+            </a:ln>
+            <a:effectLst/>
+          </c:spPr>
+          <c:marker>
+            <c:symbol val="circle"/>
+            <c:size val="5"/>
+            <c:spPr>
+              <a:solidFill>
+                <a:schemeClr val="accent1"/>
+              </a:solidFill>
+              <a:ln w="9525">
+                <a:solidFill>
+                  <a:schemeClr val="accent1"/>
+                </a:solidFill>
+              </a:ln>
+              <a:effectLst/>
+            </c:spPr>
+          </c:marker>
+          <c:cat>
+            <c:strRef>
+              <c:f>Foglio1!$A$2:$A$6</c:f>
+              <c:strCache>
+                <c:ptCount val="5"/>
+                <c:pt idx="0">
+                  <c:v>1P X 2T</c:v>
+                </c:pt>
+                <c:pt idx="1">
+                  <c:v>2P X 2T</c:v>
+                </c:pt>
+                <c:pt idx="2">
+                  <c:v>3P X 2T</c:v>
+                </c:pt>
+                <c:pt idx="3">
+                  <c:v>2P X 3T</c:v>
+                </c:pt>
+                <c:pt idx="4">
+                  <c:v>4P X 2T</c:v>
+                </c:pt>
+              </c:strCache>
+            </c:strRef>
+          </c:cat>
+          <c:val>
+            <c:numRef>
+              <c:f>Foglio1!$B$2:$B$6</c:f>
+              <c:numCache>
+                <c:formatCode>General</c:formatCode>
+                <c:ptCount val="5"/>
+                <c:pt idx="0">
+                  <c:v>0.28000000000000003</c:v>
+                </c:pt>
+                <c:pt idx="1">
+                  <c:v>0.21</c:v>
+                </c:pt>
+                <c:pt idx="2">
+                  <c:v>0.1</c:v>
+                </c:pt>
+                <c:pt idx="3">
+                  <c:v>0.02</c:v>
+                </c:pt>
+                <c:pt idx="4">
+                  <c:v>7.0000000000000007E-2</c:v>
+                </c:pt>
+              </c:numCache>
+            </c:numRef>
+          </c:val>
+          <c:smooth val="0"/>
+          <c:extLst>
+            <c:ext xmlns:c16="http://schemas.microsoft.com/office/drawing/2014/chart" uri="{C3380CC4-5D6E-409C-BE32-E72D297353CC}">
+              <c16:uniqueId val="{00000000-D161-4319-A33F-5AD92247EC23}"/>
+            </c:ext>
+          </c:extLst>
+        </c:ser>
+        <c:ser>
+          <c:idx val="1"/>
+          <c:order val="1"/>
+          <c:tx>
+            <c:strRef>
+              <c:f>Foglio1!$C$1</c:f>
+              <c:strCache>
+                <c:ptCount val="1"/>
+                <c:pt idx="0">
+                  <c:v>N 128 </c:v>
+                </c:pt>
+              </c:strCache>
+            </c:strRef>
+          </c:tx>
+          <c:spPr>
+            <a:ln w="28575" cap="rnd">
+              <a:solidFill>
+                <a:schemeClr val="accent2"/>
+              </a:solidFill>
+              <a:round/>
+            </a:ln>
+            <a:effectLst/>
+          </c:spPr>
+          <c:marker>
+            <c:symbol val="circle"/>
+            <c:size val="5"/>
+            <c:spPr>
+              <a:solidFill>
+                <a:schemeClr val="accent2"/>
+              </a:solidFill>
+              <a:ln w="9525">
+                <a:solidFill>
+                  <a:schemeClr val="accent2"/>
+                </a:solidFill>
+              </a:ln>
+              <a:effectLst/>
+            </c:spPr>
+          </c:marker>
+          <c:cat>
+            <c:strRef>
+              <c:f>Foglio1!$A$2:$A$6</c:f>
+              <c:strCache>
+                <c:ptCount val="5"/>
+                <c:pt idx="0">
+                  <c:v>1P X 2T</c:v>
+                </c:pt>
+                <c:pt idx="1">
+                  <c:v>2P X 2T</c:v>
+                </c:pt>
+                <c:pt idx="2">
+                  <c:v>3P X 2T</c:v>
+                </c:pt>
+                <c:pt idx="3">
+                  <c:v>2P X 3T</c:v>
+                </c:pt>
+                <c:pt idx="4">
+                  <c:v>4P X 2T</c:v>
+                </c:pt>
+              </c:strCache>
+            </c:strRef>
+          </c:cat>
+          <c:val>
+            <c:numRef>
+              <c:f>Foglio1!$C$2:$C$6</c:f>
+              <c:numCache>
+                <c:formatCode>General</c:formatCode>
+                <c:ptCount val="5"/>
+                <c:pt idx="0">
+                  <c:v>0.51</c:v>
+                </c:pt>
+                <c:pt idx="1">
+                  <c:v>0.41</c:v>
+                </c:pt>
+                <c:pt idx="2">
+                  <c:v>0.3</c:v>
+                </c:pt>
+                <c:pt idx="3">
+                  <c:v>7.0000000000000007E-2</c:v>
+                </c:pt>
+                <c:pt idx="4">
+                  <c:v>0.17</c:v>
+                </c:pt>
+              </c:numCache>
+            </c:numRef>
+          </c:val>
+          <c:smooth val="0"/>
+          <c:extLst>
+            <c:ext xmlns:c16="http://schemas.microsoft.com/office/drawing/2014/chart" uri="{C3380CC4-5D6E-409C-BE32-E72D297353CC}">
+              <c16:uniqueId val="{00000001-D161-4319-A33F-5AD92247EC23}"/>
+            </c:ext>
+          </c:extLst>
+        </c:ser>
+        <c:ser>
+          <c:idx val="2"/>
+          <c:order val="2"/>
+          <c:tx>
+            <c:strRef>
+              <c:f>Foglio1!$D$1</c:f>
+              <c:strCache>
+                <c:ptCount val="1"/>
+                <c:pt idx="0">
+                  <c:v>N 256 </c:v>
+                </c:pt>
+              </c:strCache>
+            </c:strRef>
+          </c:tx>
+          <c:spPr>
+            <a:ln w="28575" cap="rnd">
+              <a:solidFill>
+                <a:schemeClr val="accent3"/>
+              </a:solidFill>
+              <a:round/>
+            </a:ln>
+            <a:effectLst/>
+          </c:spPr>
+          <c:marker>
+            <c:symbol val="circle"/>
+            <c:size val="5"/>
+            <c:spPr>
+              <a:solidFill>
+                <a:schemeClr val="accent3"/>
+              </a:solidFill>
+              <a:ln w="9525">
+                <a:solidFill>
+                  <a:schemeClr val="accent3"/>
+                </a:solidFill>
+              </a:ln>
+              <a:effectLst/>
+            </c:spPr>
+          </c:marker>
+          <c:cat>
+            <c:strRef>
+              <c:f>Foglio1!$A$2:$A$6</c:f>
+              <c:strCache>
+                <c:ptCount val="5"/>
+                <c:pt idx="0">
+                  <c:v>1P X 2T</c:v>
+                </c:pt>
+                <c:pt idx="1">
+                  <c:v>2P X 2T</c:v>
+                </c:pt>
+                <c:pt idx="2">
+                  <c:v>3P X 2T</c:v>
+                </c:pt>
+                <c:pt idx="3">
+                  <c:v>2P X 3T</c:v>
+                </c:pt>
+                <c:pt idx="4">
+                  <c:v>4P X 2T</c:v>
+                </c:pt>
+              </c:strCache>
+            </c:strRef>
+          </c:cat>
+          <c:val>
+            <c:numRef>
+              <c:f>Foglio1!$D$2:$D$6</c:f>
+              <c:numCache>
+                <c:formatCode>General</c:formatCode>
+                <c:ptCount val="5"/>
+                <c:pt idx="0">
+                  <c:v>0.5</c:v>
+                </c:pt>
+                <c:pt idx="1">
+                  <c:v>0.44</c:v>
+                </c:pt>
+                <c:pt idx="2">
+                  <c:v>0.48</c:v>
+                </c:pt>
+                <c:pt idx="3">
+                  <c:v>0.15</c:v>
+                </c:pt>
+                <c:pt idx="4">
+                  <c:v>0.28000000000000003</c:v>
+                </c:pt>
+              </c:numCache>
+            </c:numRef>
+          </c:val>
+          <c:smooth val="0"/>
+          <c:extLst>
+            <c:ext xmlns:c16="http://schemas.microsoft.com/office/drawing/2014/chart" uri="{C3380CC4-5D6E-409C-BE32-E72D297353CC}">
+              <c16:uniqueId val="{00000002-D161-4319-A33F-5AD92247EC23}"/>
+            </c:ext>
+          </c:extLst>
+        </c:ser>
+        <c:ser>
+          <c:idx val="3"/>
+          <c:order val="3"/>
+          <c:tx>
+            <c:strRef>
+              <c:f>Foglio1!$E$1</c:f>
+              <c:strCache>
+                <c:ptCount val="1"/>
+                <c:pt idx="0">
+                  <c:v>N 512</c:v>
+                </c:pt>
+              </c:strCache>
+            </c:strRef>
+          </c:tx>
+          <c:spPr>
+            <a:ln w="28575" cap="rnd">
+              <a:solidFill>
+                <a:schemeClr val="accent4"/>
+              </a:solidFill>
+              <a:round/>
+            </a:ln>
+            <a:effectLst/>
+          </c:spPr>
+          <c:marker>
+            <c:symbol val="circle"/>
+            <c:size val="5"/>
+            <c:spPr>
+              <a:solidFill>
+                <a:schemeClr val="accent4"/>
+              </a:solidFill>
+              <a:ln w="9525">
+                <a:solidFill>
+                  <a:schemeClr val="accent4"/>
+                </a:solidFill>
+              </a:ln>
+              <a:effectLst/>
+            </c:spPr>
+          </c:marker>
+          <c:cat>
+            <c:strRef>
+              <c:f>Foglio1!$A$2:$A$6</c:f>
+              <c:strCache>
+                <c:ptCount val="5"/>
+                <c:pt idx="0">
+                  <c:v>1P X 2T</c:v>
+                </c:pt>
+                <c:pt idx="1">
+                  <c:v>2P X 2T</c:v>
+                </c:pt>
+                <c:pt idx="2">
+                  <c:v>3P X 2T</c:v>
+                </c:pt>
+                <c:pt idx="3">
+                  <c:v>2P X 3T</c:v>
+                </c:pt>
+                <c:pt idx="4">
+                  <c:v>4P X 2T</c:v>
+                </c:pt>
+              </c:strCache>
+            </c:strRef>
+          </c:cat>
+          <c:val>
+            <c:numRef>
+              <c:f>Foglio1!$E$2:$E$6</c:f>
+              <c:numCache>
+                <c:formatCode>General</c:formatCode>
+                <c:ptCount val="5"/>
+                <c:pt idx="0">
+                  <c:v>0.55000000000000004</c:v>
+                </c:pt>
+                <c:pt idx="1">
+                  <c:v>0.47</c:v>
+                </c:pt>
+                <c:pt idx="2">
+                  <c:v>0.63</c:v>
+                </c:pt>
+                <c:pt idx="3">
+                  <c:v>0.23</c:v>
+                </c:pt>
+                <c:pt idx="4">
+                  <c:v>0.35</c:v>
+                </c:pt>
+              </c:numCache>
+            </c:numRef>
+          </c:val>
+          <c:smooth val="0"/>
+          <c:extLst>
+            <c:ext xmlns:c16="http://schemas.microsoft.com/office/drawing/2014/chart" uri="{C3380CC4-5D6E-409C-BE32-E72D297353CC}">
+              <c16:uniqueId val="{00000003-D161-4319-A33F-5AD92247EC23}"/>
+            </c:ext>
+          </c:extLst>
+        </c:ser>
+        <c:dLbls>
+          <c:showLegendKey val="0"/>
+          <c:showVal val="0"/>
+          <c:showCatName val="0"/>
+          <c:showSerName val="0"/>
+          <c:showPercent val="0"/>
+          <c:showBubbleSize val="0"/>
+        </c:dLbls>
+        <c:marker val="1"/>
+        <c:smooth val="0"/>
+        <c:axId val="18111376"/>
+        <c:axId val="2099601759"/>
+      </c:lineChart>
+      <c:catAx>
+        <c:axId val="18111376"/>
+        <c:scaling>
+          <c:orientation val="minMax"/>
+        </c:scaling>
+        <c:delete val="0"/>
+        <c:axPos val="b"/>
+        <c:numFmt formatCode="General" sourceLinked="1"/>
+        <c:majorTickMark val="none"/>
+        <c:minorTickMark val="none"/>
+        <c:tickLblPos val="nextTo"/>
+        <c:spPr>
+          <a:noFill/>
+          <a:ln w="9525" cap="flat" cmpd="sng" algn="ctr">
+            <a:solidFill>
+              <a:schemeClr val="tx1">
+                <a:lumMod val="15000"/>
+                <a:lumOff val="85000"/>
+              </a:schemeClr>
+            </a:solidFill>
+            <a:round/>
+          </a:ln>
+          <a:effectLst/>
+        </c:spPr>
+        <c:txPr>
+          <a:bodyPr rot="-60000000" spcFirstLastPara="1" vertOverflow="ellipsis" vert="horz" wrap="square" anchor="ctr" anchorCtr="1"/>
+          <a:lstStyle/>
+          <a:p>
+            <a:pPr>
+              <a:defRPr sz="1197" b="0" i="0" u="none" strike="noStrike" kern="1200" baseline="0">
+                <a:solidFill>
+                  <a:schemeClr val="tx1">
+                    <a:lumMod val="65000"/>
+                    <a:lumOff val="35000"/>
+                  </a:schemeClr>
+                </a:solidFill>
+                <a:latin typeface="+mn-lt"/>
+                <a:ea typeface="+mn-ea"/>
+                <a:cs typeface="+mn-cs"/>
+              </a:defRPr>
+            </a:pPr>
+            <a:endParaRPr lang="it-IT"/>
+          </a:p>
+        </c:txPr>
+        <c:crossAx val="2099601759"/>
+        <c:crosses val="autoZero"/>
+        <c:auto val="1"/>
+        <c:lblAlgn val="ctr"/>
+        <c:lblOffset val="100"/>
+        <c:noMultiLvlLbl val="0"/>
+      </c:catAx>
+      <c:valAx>
+        <c:axId val="2099601759"/>
+        <c:scaling>
+          <c:orientation val="minMax"/>
+          <c:max val="1"/>
+        </c:scaling>
+        <c:delete val="0"/>
+        <c:axPos val="l"/>
+        <c:majorGridlines>
+          <c:spPr>
+            <a:ln w="9525" cap="flat" cmpd="sng" algn="ctr">
+              <a:solidFill>
+                <a:schemeClr val="tx1">
+                  <a:lumMod val="15000"/>
+                  <a:lumOff val="85000"/>
+                </a:schemeClr>
+              </a:solidFill>
+              <a:round/>
+            </a:ln>
+            <a:effectLst/>
+          </c:spPr>
+        </c:majorGridlines>
+        <c:numFmt formatCode="General" sourceLinked="1"/>
+        <c:majorTickMark val="none"/>
+        <c:minorTickMark val="none"/>
+        <c:tickLblPos val="nextTo"/>
+        <c:spPr>
+          <a:noFill/>
+          <a:ln>
+            <a:noFill/>
+          </a:ln>
+          <a:effectLst/>
+        </c:spPr>
+        <c:txPr>
+          <a:bodyPr rot="-60000000" spcFirstLastPara="1" vertOverflow="ellipsis" vert="horz" wrap="square" anchor="ctr" anchorCtr="1"/>
+          <a:lstStyle/>
+          <a:p>
+            <a:pPr>
+              <a:defRPr sz="1197" b="0" i="0" u="none" strike="noStrike" kern="1200" baseline="0">
+                <a:solidFill>
+                  <a:schemeClr val="tx1">
+                    <a:lumMod val="65000"/>
+                    <a:lumOff val="35000"/>
+                  </a:schemeClr>
+                </a:solidFill>
+                <a:latin typeface="+mn-lt"/>
+                <a:ea typeface="+mn-ea"/>
+                <a:cs typeface="+mn-cs"/>
+              </a:defRPr>
+            </a:pPr>
+            <a:endParaRPr lang="it-IT"/>
+          </a:p>
+        </c:txPr>
+        <c:crossAx val="18111376"/>
         <c:crosses val="autoZero"/>
         <c:crossBetween val="between"/>
       </c:valAx>
@@ -2053,6 +5081,166 @@
 </cs:colorStyle>
 </file>
 
+<file path=ppt/charts/colors4.xml><?xml version="1.0" encoding="utf-8"?>
+<cs:colorStyle xmlns:cs="http://schemas.microsoft.com/office/drawing/2012/chartStyle" xmlns:a="http://schemas.openxmlformats.org/drawingml/2006/main" meth="cycle" id="10">
+  <a:schemeClr val="accent1"/>
+  <a:schemeClr val="accent2"/>
+  <a:schemeClr val="accent3"/>
+  <a:schemeClr val="accent4"/>
+  <a:schemeClr val="accent5"/>
+  <a:schemeClr val="accent6"/>
+  <cs:variation/>
+  <cs:variation>
+    <a:lumMod val="60000"/>
+  </cs:variation>
+  <cs:variation>
+    <a:lumMod val="80000"/>
+    <a:lumOff val="20000"/>
+  </cs:variation>
+  <cs:variation>
+    <a:lumMod val="80000"/>
+  </cs:variation>
+  <cs:variation>
+    <a:lumMod val="60000"/>
+    <a:lumOff val="40000"/>
+  </cs:variation>
+  <cs:variation>
+    <a:lumMod val="50000"/>
+  </cs:variation>
+  <cs:variation>
+    <a:lumMod val="70000"/>
+    <a:lumOff val="30000"/>
+  </cs:variation>
+  <cs:variation>
+    <a:lumMod val="70000"/>
+  </cs:variation>
+  <cs:variation>
+    <a:lumMod val="50000"/>
+    <a:lumOff val="50000"/>
+  </cs:variation>
+</cs:colorStyle>
+</file>
+
+<file path=ppt/charts/colors5.xml><?xml version="1.0" encoding="utf-8"?>
+<cs:colorStyle xmlns:cs="http://schemas.microsoft.com/office/drawing/2012/chartStyle" xmlns:a="http://schemas.openxmlformats.org/drawingml/2006/main" meth="cycle" id="10">
+  <a:schemeClr val="accent1"/>
+  <a:schemeClr val="accent2"/>
+  <a:schemeClr val="accent3"/>
+  <a:schemeClr val="accent4"/>
+  <a:schemeClr val="accent5"/>
+  <a:schemeClr val="accent6"/>
+  <cs:variation/>
+  <cs:variation>
+    <a:lumMod val="60000"/>
+  </cs:variation>
+  <cs:variation>
+    <a:lumMod val="80000"/>
+    <a:lumOff val="20000"/>
+  </cs:variation>
+  <cs:variation>
+    <a:lumMod val="80000"/>
+  </cs:variation>
+  <cs:variation>
+    <a:lumMod val="60000"/>
+    <a:lumOff val="40000"/>
+  </cs:variation>
+  <cs:variation>
+    <a:lumMod val="50000"/>
+  </cs:variation>
+  <cs:variation>
+    <a:lumMod val="70000"/>
+    <a:lumOff val="30000"/>
+  </cs:variation>
+  <cs:variation>
+    <a:lumMod val="70000"/>
+  </cs:variation>
+  <cs:variation>
+    <a:lumMod val="50000"/>
+    <a:lumOff val="50000"/>
+  </cs:variation>
+</cs:colorStyle>
+</file>
+
+<file path=ppt/charts/colors6.xml><?xml version="1.0" encoding="utf-8"?>
+<cs:colorStyle xmlns:cs="http://schemas.microsoft.com/office/drawing/2012/chartStyle" xmlns:a="http://schemas.openxmlformats.org/drawingml/2006/main" meth="cycle" id="10">
+  <a:schemeClr val="accent1"/>
+  <a:schemeClr val="accent2"/>
+  <a:schemeClr val="accent3"/>
+  <a:schemeClr val="accent4"/>
+  <a:schemeClr val="accent5"/>
+  <a:schemeClr val="accent6"/>
+  <cs:variation/>
+  <cs:variation>
+    <a:lumMod val="60000"/>
+  </cs:variation>
+  <cs:variation>
+    <a:lumMod val="80000"/>
+    <a:lumOff val="20000"/>
+  </cs:variation>
+  <cs:variation>
+    <a:lumMod val="80000"/>
+  </cs:variation>
+  <cs:variation>
+    <a:lumMod val="60000"/>
+    <a:lumOff val="40000"/>
+  </cs:variation>
+  <cs:variation>
+    <a:lumMod val="50000"/>
+  </cs:variation>
+  <cs:variation>
+    <a:lumMod val="70000"/>
+    <a:lumOff val="30000"/>
+  </cs:variation>
+  <cs:variation>
+    <a:lumMod val="70000"/>
+  </cs:variation>
+  <cs:variation>
+    <a:lumMod val="50000"/>
+    <a:lumOff val="50000"/>
+  </cs:variation>
+</cs:colorStyle>
+</file>
+
+<file path=ppt/charts/colors7.xml><?xml version="1.0" encoding="utf-8"?>
+<cs:colorStyle xmlns:cs="http://schemas.microsoft.com/office/drawing/2012/chartStyle" xmlns:a="http://schemas.openxmlformats.org/drawingml/2006/main" meth="cycle" id="10">
+  <a:schemeClr val="accent1"/>
+  <a:schemeClr val="accent2"/>
+  <a:schemeClr val="accent3"/>
+  <a:schemeClr val="accent4"/>
+  <a:schemeClr val="accent5"/>
+  <a:schemeClr val="accent6"/>
+  <cs:variation/>
+  <cs:variation>
+    <a:lumMod val="60000"/>
+  </cs:variation>
+  <cs:variation>
+    <a:lumMod val="80000"/>
+    <a:lumOff val="20000"/>
+  </cs:variation>
+  <cs:variation>
+    <a:lumMod val="80000"/>
+  </cs:variation>
+  <cs:variation>
+    <a:lumMod val="60000"/>
+    <a:lumOff val="40000"/>
+  </cs:variation>
+  <cs:variation>
+    <a:lumMod val="50000"/>
+  </cs:variation>
+  <cs:variation>
+    <a:lumMod val="70000"/>
+    <a:lumOff val="30000"/>
+  </cs:variation>
+  <cs:variation>
+    <a:lumMod val="70000"/>
+  </cs:variation>
+  <cs:variation>
+    <a:lumMod val="50000"/>
+    <a:lumOff val="50000"/>
+  </cs:variation>
+</cs:colorStyle>
+</file>
+
 <file path=ppt/charts/style1.xml><?xml version="1.0" encoding="utf-8"?>
 <cs:chartStyle xmlns:cs="http://schemas.microsoft.com/office/drawing/2012/chartStyle" xmlns:a="http://schemas.openxmlformats.org/drawingml/2006/main" id="239">
   <cs:axisTitle>
@@ -3091,6 +6279,2018 @@
 </file>
 
 <file path=ppt/charts/style3.xml><?xml version="1.0" encoding="utf-8"?>
+<cs:chartStyle xmlns:cs="http://schemas.microsoft.com/office/drawing/2012/chartStyle" xmlns:a="http://schemas.openxmlformats.org/drawingml/2006/main" id="332">
+  <cs:axisTitle>
+    <cs:lnRef idx="0"/>
+    <cs:fillRef idx="0"/>
+    <cs:effectRef idx="0"/>
+    <cs:fontRef idx="minor">
+      <a:schemeClr val="tx1">
+        <a:lumMod val="65000"/>
+        <a:lumOff val="35000"/>
+      </a:schemeClr>
+    </cs:fontRef>
+    <cs:defRPr sz="1330" kern="1200"/>
+  </cs:axisTitle>
+  <cs:categoryAxis>
+    <cs:lnRef idx="0"/>
+    <cs:fillRef idx="0"/>
+    <cs:effectRef idx="0"/>
+    <cs:fontRef idx="minor">
+      <a:schemeClr val="tx1">
+        <a:lumMod val="65000"/>
+        <a:lumOff val="35000"/>
+      </a:schemeClr>
+    </cs:fontRef>
+    <cs:spPr>
+      <a:ln w="9525" cap="flat" cmpd="sng" algn="ctr">
+        <a:solidFill>
+          <a:schemeClr val="tx1">
+            <a:lumMod val="15000"/>
+            <a:lumOff val="85000"/>
+          </a:schemeClr>
+        </a:solidFill>
+        <a:round/>
+      </a:ln>
+    </cs:spPr>
+    <cs:defRPr sz="1197" kern="1200"/>
+  </cs:categoryAxis>
+  <cs:chartArea mods="allowNoFillOverride allowNoLineOverride">
+    <cs:lnRef idx="0"/>
+    <cs:fillRef idx="0"/>
+    <cs:effectRef idx="0"/>
+    <cs:fontRef idx="minor">
+      <a:schemeClr val="tx1"/>
+    </cs:fontRef>
+    <cs:spPr>
+      <a:solidFill>
+        <a:schemeClr val="bg1"/>
+      </a:solidFill>
+      <a:ln w="9525" cap="flat" cmpd="sng" algn="ctr">
+        <a:solidFill>
+          <a:schemeClr val="tx1">
+            <a:lumMod val="15000"/>
+            <a:lumOff val="85000"/>
+          </a:schemeClr>
+        </a:solidFill>
+        <a:round/>
+      </a:ln>
+    </cs:spPr>
+    <cs:defRPr sz="1330" kern="1200"/>
+  </cs:chartArea>
+  <cs:dataLabel>
+    <cs:lnRef idx="0"/>
+    <cs:fillRef idx="0"/>
+    <cs:effectRef idx="0"/>
+    <cs:fontRef idx="minor">
+      <a:schemeClr val="tx1">
+        <a:lumMod val="75000"/>
+        <a:lumOff val="25000"/>
+      </a:schemeClr>
+    </cs:fontRef>
+    <cs:defRPr sz="1197" kern="1200"/>
+  </cs:dataLabel>
+  <cs:dataLabelCallout>
+    <cs:lnRef idx="0"/>
+    <cs:fillRef idx="0"/>
+    <cs:effectRef idx="0"/>
+    <cs:fontRef idx="minor">
+      <a:schemeClr val="dk1">
+        <a:lumMod val="65000"/>
+        <a:lumOff val="35000"/>
+      </a:schemeClr>
+    </cs:fontRef>
+    <cs:spPr>
+      <a:solidFill>
+        <a:schemeClr val="lt1"/>
+      </a:solidFill>
+      <a:ln>
+        <a:solidFill>
+          <a:schemeClr val="dk1">
+            <a:lumMod val="25000"/>
+            <a:lumOff val="75000"/>
+          </a:schemeClr>
+        </a:solidFill>
+      </a:ln>
+    </cs:spPr>
+    <cs:defRPr sz="1197" kern="1200"/>
+    <cs:bodyPr rot="0" spcFirstLastPara="1" vertOverflow="clip" horzOverflow="clip" vert="horz" wrap="square" lIns="36576" tIns="18288" rIns="36576" bIns="18288" anchor="ctr" anchorCtr="1">
+      <a:spAutoFit/>
+    </cs:bodyPr>
+  </cs:dataLabelCallout>
+  <cs:dataPoint>
+    <cs:lnRef idx="0"/>
+    <cs:fillRef idx="1">
+      <cs:styleClr val="auto"/>
+    </cs:fillRef>
+    <cs:effectRef idx="0"/>
+    <cs:fontRef idx="minor">
+      <a:schemeClr val="tx1"/>
+    </cs:fontRef>
+  </cs:dataPoint>
+  <cs:dataPoint3D>
+    <cs:lnRef idx="0"/>
+    <cs:fillRef idx="1">
+      <cs:styleClr val="auto"/>
+    </cs:fillRef>
+    <cs:effectRef idx="0"/>
+    <cs:fontRef idx="minor">
+      <a:schemeClr val="tx1"/>
+    </cs:fontRef>
+  </cs:dataPoint3D>
+  <cs:dataPointLine>
+    <cs:lnRef idx="0">
+      <cs:styleClr val="auto"/>
+    </cs:lnRef>
+    <cs:fillRef idx="1"/>
+    <cs:effectRef idx="0"/>
+    <cs:fontRef idx="minor">
+      <a:schemeClr val="tx1"/>
+    </cs:fontRef>
+    <cs:spPr>
+      <a:ln w="28575" cap="rnd">
+        <a:solidFill>
+          <a:schemeClr val="phClr"/>
+        </a:solidFill>
+        <a:round/>
+      </a:ln>
+    </cs:spPr>
+  </cs:dataPointLine>
+  <cs:dataPointMarker>
+    <cs:lnRef idx="0">
+      <cs:styleClr val="auto"/>
+    </cs:lnRef>
+    <cs:fillRef idx="1">
+      <cs:styleClr val="auto"/>
+    </cs:fillRef>
+    <cs:effectRef idx="0"/>
+    <cs:fontRef idx="minor">
+      <a:schemeClr val="tx1"/>
+    </cs:fontRef>
+    <cs:spPr>
+      <a:ln w="9525">
+        <a:solidFill>
+          <a:schemeClr val="phClr"/>
+        </a:solidFill>
+      </a:ln>
+    </cs:spPr>
+  </cs:dataPointMarker>
+  <cs:dataPointMarkerLayout symbol="circle" size="5"/>
+  <cs:dataPointWireframe>
+    <cs:lnRef idx="0">
+      <cs:styleClr val="auto"/>
+    </cs:lnRef>
+    <cs:fillRef idx="1"/>
+    <cs:effectRef idx="0"/>
+    <cs:fontRef idx="minor">
+      <a:schemeClr val="tx1"/>
+    </cs:fontRef>
+    <cs:spPr>
+      <a:ln w="9525" cap="rnd">
+        <a:solidFill>
+          <a:schemeClr val="phClr"/>
+        </a:solidFill>
+        <a:round/>
+      </a:ln>
+    </cs:spPr>
+  </cs:dataPointWireframe>
+  <cs:dataTable>
+    <cs:lnRef idx="0"/>
+    <cs:fillRef idx="0"/>
+    <cs:effectRef idx="0"/>
+    <cs:fontRef idx="minor">
+      <a:schemeClr val="tx1">
+        <a:lumMod val="65000"/>
+        <a:lumOff val="35000"/>
+      </a:schemeClr>
+    </cs:fontRef>
+    <cs:spPr>
+      <a:noFill/>
+      <a:ln w="9525" cap="flat" cmpd="sng" algn="ctr">
+        <a:solidFill>
+          <a:schemeClr val="tx1">
+            <a:lumMod val="15000"/>
+            <a:lumOff val="85000"/>
+          </a:schemeClr>
+        </a:solidFill>
+        <a:round/>
+      </a:ln>
+    </cs:spPr>
+    <cs:defRPr sz="1197" kern="1200"/>
+  </cs:dataTable>
+  <cs:downBar>
+    <cs:lnRef idx="0"/>
+    <cs:fillRef idx="0"/>
+    <cs:effectRef idx="0"/>
+    <cs:fontRef idx="minor">
+      <a:schemeClr val="dk1"/>
+    </cs:fontRef>
+    <cs:spPr>
+      <a:solidFill>
+        <a:schemeClr val="dk1">
+          <a:lumMod val="65000"/>
+          <a:lumOff val="35000"/>
+        </a:schemeClr>
+      </a:solidFill>
+      <a:ln w="9525">
+        <a:solidFill>
+          <a:schemeClr val="tx1">
+            <a:lumMod val="65000"/>
+            <a:lumOff val="35000"/>
+          </a:schemeClr>
+        </a:solidFill>
+      </a:ln>
+    </cs:spPr>
+  </cs:downBar>
+  <cs:dropLine>
+    <cs:lnRef idx="0"/>
+    <cs:fillRef idx="0"/>
+    <cs:effectRef idx="0"/>
+    <cs:fontRef idx="minor">
+      <a:schemeClr val="tx1"/>
+    </cs:fontRef>
+    <cs:spPr>
+      <a:ln w="9525" cap="flat" cmpd="sng" algn="ctr">
+        <a:solidFill>
+          <a:schemeClr val="tx1">
+            <a:lumMod val="35000"/>
+            <a:lumOff val="65000"/>
+          </a:schemeClr>
+        </a:solidFill>
+        <a:round/>
+      </a:ln>
+    </cs:spPr>
+  </cs:dropLine>
+  <cs:errorBar>
+    <cs:lnRef idx="0"/>
+    <cs:fillRef idx="0"/>
+    <cs:effectRef idx="0"/>
+    <cs:fontRef idx="minor">
+      <a:schemeClr val="tx1"/>
+    </cs:fontRef>
+    <cs:spPr>
+      <a:ln w="9525" cap="flat" cmpd="sng" algn="ctr">
+        <a:solidFill>
+          <a:schemeClr val="tx1">
+            <a:lumMod val="65000"/>
+            <a:lumOff val="35000"/>
+          </a:schemeClr>
+        </a:solidFill>
+        <a:round/>
+      </a:ln>
+    </cs:spPr>
+  </cs:errorBar>
+  <cs:floor>
+    <cs:lnRef idx="0"/>
+    <cs:fillRef idx="0"/>
+    <cs:effectRef idx="0"/>
+    <cs:fontRef idx="minor">
+      <a:schemeClr val="tx1"/>
+    </cs:fontRef>
+    <cs:spPr>
+      <a:noFill/>
+      <a:ln>
+        <a:noFill/>
+      </a:ln>
+    </cs:spPr>
+  </cs:floor>
+  <cs:gridlineMajor>
+    <cs:lnRef idx="0"/>
+    <cs:fillRef idx="0"/>
+    <cs:effectRef idx="0"/>
+    <cs:fontRef idx="minor">
+      <a:schemeClr val="tx1"/>
+    </cs:fontRef>
+    <cs:spPr>
+      <a:ln w="9525" cap="flat" cmpd="sng" algn="ctr">
+        <a:solidFill>
+          <a:schemeClr val="tx1">
+            <a:lumMod val="15000"/>
+            <a:lumOff val="85000"/>
+          </a:schemeClr>
+        </a:solidFill>
+        <a:round/>
+      </a:ln>
+    </cs:spPr>
+  </cs:gridlineMajor>
+  <cs:gridlineMinor>
+    <cs:lnRef idx="0"/>
+    <cs:fillRef idx="0"/>
+    <cs:effectRef idx="0"/>
+    <cs:fontRef idx="minor">
+      <a:schemeClr val="tx1"/>
+    </cs:fontRef>
+    <cs:spPr>
+      <a:ln w="9525" cap="flat" cmpd="sng" algn="ctr">
+        <a:solidFill>
+          <a:schemeClr val="tx1">
+            <a:lumMod val="5000"/>
+            <a:lumOff val="95000"/>
+          </a:schemeClr>
+        </a:solidFill>
+        <a:round/>
+      </a:ln>
+    </cs:spPr>
+  </cs:gridlineMinor>
+  <cs:hiLoLine>
+    <cs:lnRef idx="0"/>
+    <cs:fillRef idx="0"/>
+    <cs:effectRef idx="0"/>
+    <cs:fontRef idx="minor">
+      <a:schemeClr val="tx1"/>
+    </cs:fontRef>
+    <cs:spPr>
+      <a:ln w="9525" cap="flat" cmpd="sng" algn="ctr">
+        <a:solidFill>
+          <a:schemeClr val="tx1">
+            <a:lumMod val="75000"/>
+            <a:lumOff val="25000"/>
+          </a:schemeClr>
+        </a:solidFill>
+        <a:round/>
+      </a:ln>
+    </cs:spPr>
+  </cs:hiLoLine>
+  <cs:leaderLine>
+    <cs:lnRef idx="0"/>
+    <cs:fillRef idx="0"/>
+    <cs:effectRef idx="0"/>
+    <cs:fontRef idx="minor">
+      <a:schemeClr val="tx1"/>
+    </cs:fontRef>
+    <cs:spPr>
+      <a:ln w="9525" cap="flat" cmpd="sng" algn="ctr">
+        <a:solidFill>
+          <a:schemeClr val="tx1">
+            <a:lumMod val="35000"/>
+            <a:lumOff val="65000"/>
+          </a:schemeClr>
+        </a:solidFill>
+        <a:round/>
+      </a:ln>
+    </cs:spPr>
+  </cs:leaderLine>
+  <cs:legend>
+    <cs:lnRef idx="0"/>
+    <cs:fillRef idx="0"/>
+    <cs:effectRef idx="0"/>
+    <cs:fontRef idx="minor">
+      <a:schemeClr val="tx1">
+        <a:lumMod val="65000"/>
+        <a:lumOff val="35000"/>
+      </a:schemeClr>
+    </cs:fontRef>
+    <cs:defRPr sz="1197" kern="1200"/>
+  </cs:legend>
+  <cs:plotArea mods="allowNoFillOverride allowNoLineOverride">
+    <cs:lnRef idx="0"/>
+    <cs:fillRef idx="0"/>
+    <cs:effectRef idx="0"/>
+    <cs:fontRef idx="minor">
+      <a:schemeClr val="tx1"/>
+    </cs:fontRef>
+  </cs:plotArea>
+  <cs:plotArea3D mods="allowNoFillOverride allowNoLineOverride">
+    <cs:lnRef idx="0"/>
+    <cs:fillRef idx="0"/>
+    <cs:effectRef idx="0"/>
+    <cs:fontRef idx="minor">
+      <a:schemeClr val="tx1"/>
+    </cs:fontRef>
+  </cs:plotArea3D>
+  <cs:seriesAxis>
+    <cs:lnRef idx="0"/>
+    <cs:fillRef idx="0"/>
+    <cs:effectRef idx="0"/>
+    <cs:fontRef idx="minor">
+      <a:schemeClr val="tx1">
+        <a:lumMod val="65000"/>
+        <a:lumOff val="35000"/>
+      </a:schemeClr>
+    </cs:fontRef>
+    <cs:defRPr sz="1197" kern="1200"/>
+  </cs:seriesAxis>
+  <cs:seriesLine>
+    <cs:lnRef idx="0"/>
+    <cs:fillRef idx="0"/>
+    <cs:effectRef idx="0"/>
+    <cs:fontRef idx="minor">
+      <a:schemeClr val="tx1"/>
+    </cs:fontRef>
+    <cs:spPr>
+      <a:ln w="9525" cap="flat" cmpd="sng" algn="ctr">
+        <a:solidFill>
+          <a:schemeClr val="tx1">
+            <a:lumMod val="35000"/>
+            <a:lumOff val="65000"/>
+          </a:schemeClr>
+        </a:solidFill>
+        <a:round/>
+      </a:ln>
+    </cs:spPr>
+  </cs:seriesLine>
+  <cs:title>
+    <cs:lnRef idx="0"/>
+    <cs:fillRef idx="0"/>
+    <cs:effectRef idx="0"/>
+    <cs:fontRef idx="minor">
+      <a:schemeClr val="tx1">
+        <a:lumMod val="65000"/>
+        <a:lumOff val="35000"/>
+      </a:schemeClr>
+    </cs:fontRef>
+    <cs:defRPr sz="1862" b="0" kern="1200" spc="0" baseline="0"/>
+  </cs:title>
+  <cs:trendline>
+    <cs:lnRef idx="0">
+      <cs:styleClr val="auto"/>
+    </cs:lnRef>
+    <cs:fillRef idx="0"/>
+    <cs:effectRef idx="0"/>
+    <cs:fontRef idx="minor">
+      <a:schemeClr val="tx1"/>
+    </cs:fontRef>
+    <cs:spPr>
+      <a:ln w="19050" cap="rnd">
+        <a:solidFill>
+          <a:schemeClr val="phClr"/>
+        </a:solidFill>
+        <a:prstDash val="sysDot"/>
+      </a:ln>
+    </cs:spPr>
+  </cs:trendline>
+  <cs:trendlineLabel>
+    <cs:lnRef idx="0"/>
+    <cs:fillRef idx="0"/>
+    <cs:effectRef idx="0"/>
+    <cs:fontRef idx="minor">
+      <a:schemeClr val="tx1">
+        <a:lumMod val="65000"/>
+        <a:lumOff val="35000"/>
+      </a:schemeClr>
+    </cs:fontRef>
+    <cs:defRPr sz="1197" kern="1200"/>
+  </cs:trendlineLabel>
+  <cs:upBar>
+    <cs:lnRef idx="0"/>
+    <cs:fillRef idx="0"/>
+    <cs:effectRef idx="0"/>
+    <cs:fontRef idx="minor">
+      <a:schemeClr val="dk1"/>
+    </cs:fontRef>
+    <cs:spPr>
+      <a:solidFill>
+        <a:schemeClr val="lt1"/>
+      </a:solidFill>
+      <a:ln w="9525">
+        <a:solidFill>
+          <a:schemeClr val="tx1">
+            <a:lumMod val="15000"/>
+            <a:lumOff val="85000"/>
+          </a:schemeClr>
+        </a:solidFill>
+      </a:ln>
+    </cs:spPr>
+  </cs:upBar>
+  <cs:valueAxis>
+    <cs:lnRef idx="0"/>
+    <cs:fillRef idx="0"/>
+    <cs:effectRef idx="0"/>
+    <cs:fontRef idx="minor">
+      <a:schemeClr val="tx1">
+        <a:lumMod val="65000"/>
+        <a:lumOff val="35000"/>
+      </a:schemeClr>
+    </cs:fontRef>
+    <cs:defRPr sz="1197" kern="1200"/>
+  </cs:valueAxis>
+  <cs:wall>
+    <cs:lnRef idx="0"/>
+    <cs:fillRef idx="0"/>
+    <cs:effectRef idx="0"/>
+    <cs:fontRef idx="minor">
+      <a:schemeClr val="tx1"/>
+    </cs:fontRef>
+    <cs:spPr>
+      <a:noFill/>
+      <a:ln>
+        <a:noFill/>
+      </a:ln>
+    </cs:spPr>
+  </cs:wall>
+</cs:chartStyle>
+</file>
+
+<file path=ppt/charts/style4.xml><?xml version="1.0" encoding="utf-8"?>
+<cs:chartStyle xmlns:cs="http://schemas.microsoft.com/office/drawing/2012/chartStyle" xmlns:a="http://schemas.openxmlformats.org/drawingml/2006/main" id="332">
+  <cs:axisTitle>
+    <cs:lnRef idx="0"/>
+    <cs:fillRef idx="0"/>
+    <cs:effectRef idx="0"/>
+    <cs:fontRef idx="minor">
+      <a:schemeClr val="tx1">
+        <a:lumMod val="65000"/>
+        <a:lumOff val="35000"/>
+      </a:schemeClr>
+    </cs:fontRef>
+    <cs:defRPr sz="1330" kern="1200"/>
+  </cs:axisTitle>
+  <cs:categoryAxis>
+    <cs:lnRef idx="0"/>
+    <cs:fillRef idx="0"/>
+    <cs:effectRef idx="0"/>
+    <cs:fontRef idx="minor">
+      <a:schemeClr val="tx1">
+        <a:lumMod val="65000"/>
+        <a:lumOff val="35000"/>
+      </a:schemeClr>
+    </cs:fontRef>
+    <cs:spPr>
+      <a:ln w="9525" cap="flat" cmpd="sng" algn="ctr">
+        <a:solidFill>
+          <a:schemeClr val="tx1">
+            <a:lumMod val="15000"/>
+            <a:lumOff val="85000"/>
+          </a:schemeClr>
+        </a:solidFill>
+        <a:round/>
+      </a:ln>
+    </cs:spPr>
+    <cs:defRPr sz="1197" kern="1200"/>
+  </cs:categoryAxis>
+  <cs:chartArea mods="allowNoFillOverride allowNoLineOverride">
+    <cs:lnRef idx="0"/>
+    <cs:fillRef idx="0"/>
+    <cs:effectRef idx="0"/>
+    <cs:fontRef idx="minor">
+      <a:schemeClr val="tx1"/>
+    </cs:fontRef>
+    <cs:spPr>
+      <a:solidFill>
+        <a:schemeClr val="bg1"/>
+      </a:solidFill>
+      <a:ln w="9525" cap="flat" cmpd="sng" algn="ctr">
+        <a:solidFill>
+          <a:schemeClr val="tx1">
+            <a:lumMod val="15000"/>
+            <a:lumOff val="85000"/>
+          </a:schemeClr>
+        </a:solidFill>
+        <a:round/>
+      </a:ln>
+    </cs:spPr>
+    <cs:defRPr sz="1330" kern="1200"/>
+  </cs:chartArea>
+  <cs:dataLabel>
+    <cs:lnRef idx="0"/>
+    <cs:fillRef idx="0"/>
+    <cs:effectRef idx="0"/>
+    <cs:fontRef idx="minor">
+      <a:schemeClr val="tx1">
+        <a:lumMod val="75000"/>
+        <a:lumOff val="25000"/>
+      </a:schemeClr>
+    </cs:fontRef>
+    <cs:defRPr sz="1197" kern="1200"/>
+  </cs:dataLabel>
+  <cs:dataLabelCallout>
+    <cs:lnRef idx="0"/>
+    <cs:fillRef idx="0"/>
+    <cs:effectRef idx="0"/>
+    <cs:fontRef idx="minor">
+      <a:schemeClr val="dk1">
+        <a:lumMod val="65000"/>
+        <a:lumOff val="35000"/>
+      </a:schemeClr>
+    </cs:fontRef>
+    <cs:spPr>
+      <a:solidFill>
+        <a:schemeClr val="lt1"/>
+      </a:solidFill>
+      <a:ln>
+        <a:solidFill>
+          <a:schemeClr val="dk1">
+            <a:lumMod val="25000"/>
+            <a:lumOff val="75000"/>
+          </a:schemeClr>
+        </a:solidFill>
+      </a:ln>
+    </cs:spPr>
+    <cs:defRPr sz="1197" kern="1200"/>
+    <cs:bodyPr rot="0" spcFirstLastPara="1" vertOverflow="clip" horzOverflow="clip" vert="horz" wrap="square" lIns="36576" tIns="18288" rIns="36576" bIns="18288" anchor="ctr" anchorCtr="1">
+      <a:spAutoFit/>
+    </cs:bodyPr>
+  </cs:dataLabelCallout>
+  <cs:dataPoint>
+    <cs:lnRef idx="0"/>
+    <cs:fillRef idx="1">
+      <cs:styleClr val="auto"/>
+    </cs:fillRef>
+    <cs:effectRef idx="0"/>
+    <cs:fontRef idx="minor">
+      <a:schemeClr val="tx1"/>
+    </cs:fontRef>
+  </cs:dataPoint>
+  <cs:dataPoint3D>
+    <cs:lnRef idx="0"/>
+    <cs:fillRef idx="1">
+      <cs:styleClr val="auto"/>
+    </cs:fillRef>
+    <cs:effectRef idx="0"/>
+    <cs:fontRef idx="minor">
+      <a:schemeClr val="tx1"/>
+    </cs:fontRef>
+  </cs:dataPoint3D>
+  <cs:dataPointLine>
+    <cs:lnRef idx="0">
+      <cs:styleClr val="auto"/>
+    </cs:lnRef>
+    <cs:fillRef idx="1"/>
+    <cs:effectRef idx="0"/>
+    <cs:fontRef idx="minor">
+      <a:schemeClr val="tx1"/>
+    </cs:fontRef>
+    <cs:spPr>
+      <a:ln w="28575" cap="rnd">
+        <a:solidFill>
+          <a:schemeClr val="phClr"/>
+        </a:solidFill>
+        <a:round/>
+      </a:ln>
+    </cs:spPr>
+  </cs:dataPointLine>
+  <cs:dataPointMarker>
+    <cs:lnRef idx="0">
+      <cs:styleClr val="auto"/>
+    </cs:lnRef>
+    <cs:fillRef idx="1">
+      <cs:styleClr val="auto"/>
+    </cs:fillRef>
+    <cs:effectRef idx="0"/>
+    <cs:fontRef idx="minor">
+      <a:schemeClr val="tx1"/>
+    </cs:fontRef>
+    <cs:spPr>
+      <a:ln w="9525">
+        <a:solidFill>
+          <a:schemeClr val="phClr"/>
+        </a:solidFill>
+      </a:ln>
+    </cs:spPr>
+  </cs:dataPointMarker>
+  <cs:dataPointMarkerLayout symbol="circle" size="5"/>
+  <cs:dataPointWireframe>
+    <cs:lnRef idx="0">
+      <cs:styleClr val="auto"/>
+    </cs:lnRef>
+    <cs:fillRef idx="1"/>
+    <cs:effectRef idx="0"/>
+    <cs:fontRef idx="minor">
+      <a:schemeClr val="tx1"/>
+    </cs:fontRef>
+    <cs:spPr>
+      <a:ln w="9525" cap="rnd">
+        <a:solidFill>
+          <a:schemeClr val="phClr"/>
+        </a:solidFill>
+        <a:round/>
+      </a:ln>
+    </cs:spPr>
+  </cs:dataPointWireframe>
+  <cs:dataTable>
+    <cs:lnRef idx="0"/>
+    <cs:fillRef idx="0"/>
+    <cs:effectRef idx="0"/>
+    <cs:fontRef idx="minor">
+      <a:schemeClr val="tx1">
+        <a:lumMod val="65000"/>
+        <a:lumOff val="35000"/>
+      </a:schemeClr>
+    </cs:fontRef>
+    <cs:spPr>
+      <a:noFill/>
+      <a:ln w="9525" cap="flat" cmpd="sng" algn="ctr">
+        <a:solidFill>
+          <a:schemeClr val="tx1">
+            <a:lumMod val="15000"/>
+            <a:lumOff val="85000"/>
+          </a:schemeClr>
+        </a:solidFill>
+        <a:round/>
+      </a:ln>
+    </cs:spPr>
+    <cs:defRPr sz="1197" kern="1200"/>
+  </cs:dataTable>
+  <cs:downBar>
+    <cs:lnRef idx="0"/>
+    <cs:fillRef idx="0"/>
+    <cs:effectRef idx="0"/>
+    <cs:fontRef idx="minor">
+      <a:schemeClr val="dk1"/>
+    </cs:fontRef>
+    <cs:spPr>
+      <a:solidFill>
+        <a:schemeClr val="dk1">
+          <a:lumMod val="65000"/>
+          <a:lumOff val="35000"/>
+        </a:schemeClr>
+      </a:solidFill>
+      <a:ln w="9525">
+        <a:solidFill>
+          <a:schemeClr val="tx1">
+            <a:lumMod val="65000"/>
+            <a:lumOff val="35000"/>
+          </a:schemeClr>
+        </a:solidFill>
+      </a:ln>
+    </cs:spPr>
+  </cs:downBar>
+  <cs:dropLine>
+    <cs:lnRef idx="0"/>
+    <cs:fillRef idx="0"/>
+    <cs:effectRef idx="0"/>
+    <cs:fontRef idx="minor">
+      <a:schemeClr val="tx1"/>
+    </cs:fontRef>
+    <cs:spPr>
+      <a:ln w="9525" cap="flat" cmpd="sng" algn="ctr">
+        <a:solidFill>
+          <a:schemeClr val="tx1">
+            <a:lumMod val="35000"/>
+            <a:lumOff val="65000"/>
+          </a:schemeClr>
+        </a:solidFill>
+        <a:round/>
+      </a:ln>
+    </cs:spPr>
+  </cs:dropLine>
+  <cs:errorBar>
+    <cs:lnRef idx="0"/>
+    <cs:fillRef idx="0"/>
+    <cs:effectRef idx="0"/>
+    <cs:fontRef idx="minor">
+      <a:schemeClr val="tx1"/>
+    </cs:fontRef>
+    <cs:spPr>
+      <a:ln w="9525" cap="flat" cmpd="sng" algn="ctr">
+        <a:solidFill>
+          <a:schemeClr val="tx1">
+            <a:lumMod val="65000"/>
+            <a:lumOff val="35000"/>
+          </a:schemeClr>
+        </a:solidFill>
+        <a:round/>
+      </a:ln>
+    </cs:spPr>
+  </cs:errorBar>
+  <cs:floor>
+    <cs:lnRef idx="0"/>
+    <cs:fillRef idx="0"/>
+    <cs:effectRef idx="0"/>
+    <cs:fontRef idx="minor">
+      <a:schemeClr val="tx1"/>
+    </cs:fontRef>
+    <cs:spPr>
+      <a:noFill/>
+      <a:ln>
+        <a:noFill/>
+      </a:ln>
+    </cs:spPr>
+  </cs:floor>
+  <cs:gridlineMajor>
+    <cs:lnRef idx="0"/>
+    <cs:fillRef idx="0"/>
+    <cs:effectRef idx="0"/>
+    <cs:fontRef idx="minor">
+      <a:schemeClr val="tx1"/>
+    </cs:fontRef>
+    <cs:spPr>
+      <a:ln w="9525" cap="flat" cmpd="sng" algn="ctr">
+        <a:solidFill>
+          <a:schemeClr val="tx1">
+            <a:lumMod val="15000"/>
+            <a:lumOff val="85000"/>
+          </a:schemeClr>
+        </a:solidFill>
+        <a:round/>
+      </a:ln>
+    </cs:spPr>
+  </cs:gridlineMajor>
+  <cs:gridlineMinor>
+    <cs:lnRef idx="0"/>
+    <cs:fillRef idx="0"/>
+    <cs:effectRef idx="0"/>
+    <cs:fontRef idx="minor">
+      <a:schemeClr val="tx1"/>
+    </cs:fontRef>
+    <cs:spPr>
+      <a:ln w="9525" cap="flat" cmpd="sng" algn="ctr">
+        <a:solidFill>
+          <a:schemeClr val="tx1">
+            <a:lumMod val="5000"/>
+            <a:lumOff val="95000"/>
+          </a:schemeClr>
+        </a:solidFill>
+        <a:round/>
+      </a:ln>
+    </cs:spPr>
+  </cs:gridlineMinor>
+  <cs:hiLoLine>
+    <cs:lnRef idx="0"/>
+    <cs:fillRef idx="0"/>
+    <cs:effectRef idx="0"/>
+    <cs:fontRef idx="minor">
+      <a:schemeClr val="tx1"/>
+    </cs:fontRef>
+    <cs:spPr>
+      <a:ln w="9525" cap="flat" cmpd="sng" algn="ctr">
+        <a:solidFill>
+          <a:schemeClr val="tx1">
+            <a:lumMod val="75000"/>
+            <a:lumOff val="25000"/>
+          </a:schemeClr>
+        </a:solidFill>
+        <a:round/>
+      </a:ln>
+    </cs:spPr>
+  </cs:hiLoLine>
+  <cs:leaderLine>
+    <cs:lnRef idx="0"/>
+    <cs:fillRef idx="0"/>
+    <cs:effectRef idx="0"/>
+    <cs:fontRef idx="minor">
+      <a:schemeClr val="tx1"/>
+    </cs:fontRef>
+    <cs:spPr>
+      <a:ln w="9525" cap="flat" cmpd="sng" algn="ctr">
+        <a:solidFill>
+          <a:schemeClr val="tx1">
+            <a:lumMod val="35000"/>
+            <a:lumOff val="65000"/>
+          </a:schemeClr>
+        </a:solidFill>
+        <a:round/>
+      </a:ln>
+    </cs:spPr>
+  </cs:leaderLine>
+  <cs:legend>
+    <cs:lnRef idx="0"/>
+    <cs:fillRef idx="0"/>
+    <cs:effectRef idx="0"/>
+    <cs:fontRef idx="minor">
+      <a:schemeClr val="tx1">
+        <a:lumMod val="65000"/>
+        <a:lumOff val="35000"/>
+      </a:schemeClr>
+    </cs:fontRef>
+    <cs:defRPr sz="1197" kern="1200"/>
+  </cs:legend>
+  <cs:plotArea mods="allowNoFillOverride allowNoLineOverride">
+    <cs:lnRef idx="0"/>
+    <cs:fillRef idx="0"/>
+    <cs:effectRef idx="0"/>
+    <cs:fontRef idx="minor">
+      <a:schemeClr val="tx1"/>
+    </cs:fontRef>
+  </cs:plotArea>
+  <cs:plotArea3D mods="allowNoFillOverride allowNoLineOverride">
+    <cs:lnRef idx="0"/>
+    <cs:fillRef idx="0"/>
+    <cs:effectRef idx="0"/>
+    <cs:fontRef idx="minor">
+      <a:schemeClr val="tx1"/>
+    </cs:fontRef>
+  </cs:plotArea3D>
+  <cs:seriesAxis>
+    <cs:lnRef idx="0"/>
+    <cs:fillRef idx="0"/>
+    <cs:effectRef idx="0"/>
+    <cs:fontRef idx="minor">
+      <a:schemeClr val="tx1">
+        <a:lumMod val="65000"/>
+        <a:lumOff val="35000"/>
+      </a:schemeClr>
+    </cs:fontRef>
+    <cs:defRPr sz="1197" kern="1200"/>
+  </cs:seriesAxis>
+  <cs:seriesLine>
+    <cs:lnRef idx="0"/>
+    <cs:fillRef idx="0"/>
+    <cs:effectRef idx="0"/>
+    <cs:fontRef idx="minor">
+      <a:schemeClr val="tx1"/>
+    </cs:fontRef>
+    <cs:spPr>
+      <a:ln w="9525" cap="flat" cmpd="sng" algn="ctr">
+        <a:solidFill>
+          <a:schemeClr val="tx1">
+            <a:lumMod val="35000"/>
+            <a:lumOff val="65000"/>
+          </a:schemeClr>
+        </a:solidFill>
+        <a:round/>
+      </a:ln>
+    </cs:spPr>
+  </cs:seriesLine>
+  <cs:title>
+    <cs:lnRef idx="0"/>
+    <cs:fillRef idx="0"/>
+    <cs:effectRef idx="0"/>
+    <cs:fontRef idx="minor">
+      <a:schemeClr val="tx1">
+        <a:lumMod val="65000"/>
+        <a:lumOff val="35000"/>
+      </a:schemeClr>
+    </cs:fontRef>
+    <cs:defRPr sz="1862" b="0" kern="1200" spc="0" baseline="0"/>
+  </cs:title>
+  <cs:trendline>
+    <cs:lnRef idx="0">
+      <cs:styleClr val="auto"/>
+    </cs:lnRef>
+    <cs:fillRef idx="0"/>
+    <cs:effectRef idx="0"/>
+    <cs:fontRef idx="minor">
+      <a:schemeClr val="tx1"/>
+    </cs:fontRef>
+    <cs:spPr>
+      <a:ln w="19050" cap="rnd">
+        <a:solidFill>
+          <a:schemeClr val="phClr"/>
+        </a:solidFill>
+        <a:prstDash val="sysDot"/>
+      </a:ln>
+    </cs:spPr>
+  </cs:trendline>
+  <cs:trendlineLabel>
+    <cs:lnRef idx="0"/>
+    <cs:fillRef idx="0"/>
+    <cs:effectRef idx="0"/>
+    <cs:fontRef idx="minor">
+      <a:schemeClr val="tx1">
+        <a:lumMod val="65000"/>
+        <a:lumOff val="35000"/>
+      </a:schemeClr>
+    </cs:fontRef>
+    <cs:defRPr sz="1197" kern="1200"/>
+  </cs:trendlineLabel>
+  <cs:upBar>
+    <cs:lnRef idx="0"/>
+    <cs:fillRef idx="0"/>
+    <cs:effectRef idx="0"/>
+    <cs:fontRef idx="minor">
+      <a:schemeClr val="dk1"/>
+    </cs:fontRef>
+    <cs:spPr>
+      <a:solidFill>
+        <a:schemeClr val="lt1"/>
+      </a:solidFill>
+      <a:ln w="9525">
+        <a:solidFill>
+          <a:schemeClr val="tx1">
+            <a:lumMod val="15000"/>
+            <a:lumOff val="85000"/>
+          </a:schemeClr>
+        </a:solidFill>
+      </a:ln>
+    </cs:spPr>
+  </cs:upBar>
+  <cs:valueAxis>
+    <cs:lnRef idx="0"/>
+    <cs:fillRef idx="0"/>
+    <cs:effectRef idx="0"/>
+    <cs:fontRef idx="minor">
+      <a:schemeClr val="tx1">
+        <a:lumMod val="65000"/>
+        <a:lumOff val="35000"/>
+      </a:schemeClr>
+    </cs:fontRef>
+    <cs:defRPr sz="1197" kern="1200"/>
+  </cs:valueAxis>
+  <cs:wall>
+    <cs:lnRef idx="0"/>
+    <cs:fillRef idx="0"/>
+    <cs:effectRef idx="0"/>
+    <cs:fontRef idx="minor">
+      <a:schemeClr val="tx1"/>
+    </cs:fontRef>
+    <cs:spPr>
+      <a:noFill/>
+      <a:ln>
+        <a:noFill/>
+      </a:ln>
+    </cs:spPr>
+  </cs:wall>
+</cs:chartStyle>
+</file>
+
+<file path=ppt/charts/style5.xml><?xml version="1.0" encoding="utf-8"?>
+<cs:chartStyle xmlns:cs="http://schemas.microsoft.com/office/drawing/2012/chartStyle" xmlns:a="http://schemas.openxmlformats.org/drawingml/2006/main" id="332">
+  <cs:axisTitle>
+    <cs:lnRef idx="0"/>
+    <cs:fillRef idx="0"/>
+    <cs:effectRef idx="0"/>
+    <cs:fontRef idx="minor">
+      <a:schemeClr val="tx1">
+        <a:lumMod val="65000"/>
+        <a:lumOff val="35000"/>
+      </a:schemeClr>
+    </cs:fontRef>
+    <cs:defRPr sz="1330" kern="1200"/>
+  </cs:axisTitle>
+  <cs:categoryAxis>
+    <cs:lnRef idx="0"/>
+    <cs:fillRef idx="0"/>
+    <cs:effectRef idx="0"/>
+    <cs:fontRef idx="minor">
+      <a:schemeClr val="tx1">
+        <a:lumMod val="65000"/>
+        <a:lumOff val="35000"/>
+      </a:schemeClr>
+    </cs:fontRef>
+    <cs:spPr>
+      <a:ln w="9525" cap="flat" cmpd="sng" algn="ctr">
+        <a:solidFill>
+          <a:schemeClr val="tx1">
+            <a:lumMod val="15000"/>
+            <a:lumOff val="85000"/>
+          </a:schemeClr>
+        </a:solidFill>
+        <a:round/>
+      </a:ln>
+    </cs:spPr>
+    <cs:defRPr sz="1197" kern="1200"/>
+  </cs:categoryAxis>
+  <cs:chartArea mods="allowNoFillOverride allowNoLineOverride">
+    <cs:lnRef idx="0"/>
+    <cs:fillRef idx="0"/>
+    <cs:effectRef idx="0"/>
+    <cs:fontRef idx="minor">
+      <a:schemeClr val="tx1"/>
+    </cs:fontRef>
+    <cs:spPr>
+      <a:solidFill>
+        <a:schemeClr val="bg1"/>
+      </a:solidFill>
+      <a:ln w="9525" cap="flat" cmpd="sng" algn="ctr">
+        <a:solidFill>
+          <a:schemeClr val="tx1">
+            <a:lumMod val="15000"/>
+            <a:lumOff val="85000"/>
+          </a:schemeClr>
+        </a:solidFill>
+        <a:round/>
+      </a:ln>
+    </cs:spPr>
+    <cs:defRPr sz="1330" kern="1200"/>
+  </cs:chartArea>
+  <cs:dataLabel>
+    <cs:lnRef idx="0"/>
+    <cs:fillRef idx="0"/>
+    <cs:effectRef idx="0"/>
+    <cs:fontRef idx="minor">
+      <a:schemeClr val="tx1">
+        <a:lumMod val="75000"/>
+        <a:lumOff val="25000"/>
+      </a:schemeClr>
+    </cs:fontRef>
+    <cs:defRPr sz="1197" kern="1200"/>
+  </cs:dataLabel>
+  <cs:dataLabelCallout>
+    <cs:lnRef idx="0"/>
+    <cs:fillRef idx="0"/>
+    <cs:effectRef idx="0"/>
+    <cs:fontRef idx="minor">
+      <a:schemeClr val="dk1">
+        <a:lumMod val="65000"/>
+        <a:lumOff val="35000"/>
+      </a:schemeClr>
+    </cs:fontRef>
+    <cs:spPr>
+      <a:solidFill>
+        <a:schemeClr val="lt1"/>
+      </a:solidFill>
+      <a:ln>
+        <a:solidFill>
+          <a:schemeClr val="dk1">
+            <a:lumMod val="25000"/>
+            <a:lumOff val="75000"/>
+          </a:schemeClr>
+        </a:solidFill>
+      </a:ln>
+    </cs:spPr>
+    <cs:defRPr sz="1197" kern="1200"/>
+    <cs:bodyPr rot="0" spcFirstLastPara="1" vertOverflow="clip" horzOverflow="clip" vert="horz" wrap="square" lIns="36576" tIns="18288" rIns="36576" bIns="18288" anchor="ctr" anchorCtr="1">
+      <a:spAutoFit/>
+    </cs:bodyPr>
+  </cs:dataLabelCallout>
+  <cs:dataPoint>
+    <cs:lnRef idx="0"/>
+    <cs:fillRef idx="1">
+      <cs:styleClr val="auto"/>
+    </cs:fillRef>
+    <cs:effectRef idx="0"/>
+    <cs:fontRef idx="minor">
+      <a:schemeClr val="tx1"/>
+    </cs:fontRef>
+  </cs:dataPoint>
+  <cs:dataPoint3D>
+    <cs:lnRef idx="0"/>
+    <cs:fillRef idx="1">
+      <cs:styleClr val="auto"/>
+    </cs:fillRef>
+    <cs:effectRef idx="0"/>
+    <cs:fontRef idx="minor">
+      <a:schemeClr val="tx1"/>
+    </cs:fontRef>
+  </cs:dataPoint3D>
+  <cs:dataPointLine>
+    <cs:lnRef idx="0">
+      <cs:styleClr val="auto"/>
+    </cs:lnRef>
+    <cs:fillRef idx="1"/>
+    <cs:effectRef idx="0"/>
+    <cs:fontRef idx="minor">
+      <a:schemeClr val="tx1"/>
+    </cs:fontRef>
+    <cs:spPr>
+      <a:ln w="28575" cap="rnd">
+        <a:solidFill>
+          <a:schemeClr val="phClr"/>
+        </a:solidFill>
+        <a:round/>
+      </a:ln>
+    </cs:spPr>
+  </cs:dataPointLine>
+  <cs:dataPointMarker>
+    <cs:lnRef idx="0">
+      <cs:styleClr val="auto"/>
+    </cs:lnRef>
+    <cs:fillRef idx="1">
+      <cs:styleClr val="auto"/>
+    </cs:fillRef>
+    <cs:effectRef idx="0"/>
+    <cs:fontRef idx="minor">
+      <a:schemeClr val="tx1"/>
+    </cs:fontRef>
+    <cs:spPr>
+      <a:ln w="9525">
+        <a:solidFill>
+          <a:schemeClr val="phClr"/>
+        </a:solidFill>
+      </a:ln>
+    </cs:spPr>
+  </cs:dataPointMarker>
+  <cs:dataPointMarkerLayout symbol="circle" size="5"/>
+  <cs:dataPointWireframe>
+    <cs:lnRef idx="0">
+      <cs:styleClr val="auto"/>
+    </cs:lnRef>
+    <cs:fillRef idx="1"/>
+    <cs:effectRef idx="0"/>
+    <cs:fontRef idx="minor">
+      <a:schemeClr val="tx1"/>
+    </cs:fontRef>
+    <cs:spPr>
+      <a:ln w="9525" cap="rnd">
+        <a:solidFill>
+          <a:schemeClr val="phClr"/>
+        </a:solidFill>
+        <a:round/>
+      </a:ln>
+    </cs:spPr>
+  </cs:dataPointWireframe>
+  <cs:dataTable>
+    <cs:lnRef idx="0"/>
+    <cs:fillRef idx="0"/>
+    <cs:effectRef idx="0"/>
+    <cs:fontRef idx="minor">
+      <a:schemeClr val="tx1">
+        <a:lumMod val="65000"/>
+        <a:lumOff val="35000"/>
+      </a:schemeClr>
+    </cs:fontRef>
+    <cs:spPr>
+      <a:noFill/>
+      <a:ln w="9525" cap="flat" cmpd="sng" algn="ctr">
+        <a:solidFill>
+          <a:schemeClr val="tx1">
+            <a:lumMod val="15000"/>
+            <a:lumOff val="85000"/>
+          </a:schemeClr>
+        </a:solidFill>
+        <a:round/>
+      </a:ln>
+    </cs:spPr>
+    <cs:defRPr sz="1197" kern="1200"/>
+  </cs:dataTable>
+  <cs:downBar>
+    <cs:lnRef idx="0"/>
+    <cs:fillRef idx="0"/>
+    <cs:effectRef idx="0"/>
+    <cs:fontRef idx="minor">
+      <a:schemeClr val="dk1"/>
+    </cs:fontRef>
+    <cs:spPr>
+      <a:solidFill>
+        <a:schemeClr val="dk1">
+          <a:lumMod val="65000"/>
+          <a:lumOff val="35000"/>
+        </a:schemeClr>
+      </a:solidFill>
+      <a:ln w="9525">
+        <a:solidFill>
+          <a:schemeClr val="tx1">
+            <a:lumMod val="65000"/>
+            <a:lumOff val="35000"/>
+          </a:schemeClr>
+        </a:solidFill>
+      </a:ln>
+    </cs:spPr>
+  </cs:downBar>
+  <cs:dropLine>
+    <cs:lnRef idx="0"/>
+    <cs:fillRef idx="0"/>
+    <cs:effectRef idx="0"/>
+    <cs:fontRef idx="minor">
+      <a:schemeClr val="tx1"/>
+    </cs:fontRef>
+    <cs:spPr>
+      <a:ln w="9525" cap="flat" cmpd="sng" algn="ctr">
+        <a:solidFill>
+          <a:schemeClr val="tx1">
+            <a:lumMod val="35000"/>
+            <a:lumOff val="65000"/>
+          </a:schemeClr>
+        </a:solidFill>
+        <a:round/>
+      </a:ln>
+    </cs:spPr>
+  </cs:dropLine>
+  <cs:errorBar>
+    <cs:lnRef idx="0"/>
+    <cs:fillRef idx="0"/>
+    <cs:effectRef idx="0"/>
+    <cs:fontRef idx="minor">
+      <a:schemeClr val="tx1"/>
+    </cs:fontRef>
+    <cs:spPr>
+      <a:ln w="9525" cap="flat" cmpd="sng" algn="ctr">
+        <a:solidFill>
+          <a:schemeClr val="tx1">
+            <a:lumMod val="65000"/>
+            <a:lumOff val="35000"/>
+          </a:schemeClr>
+        </a:solidFill>
+        <a:round/>
+      </a:ln>
+    </cs:spPr>
+  </cs:errorBar>
+  <cs:floor>
+    <cs:lnRef idx="0"/>
+    <cs:fillRef idx="0"/>
+    <cs:effectRef idx="0"/>
+    <cs:fontRef idx="minor">
+      <a:schemeClr val="tx1"/>
+    </cs:fontRef>
+    <cs:spPr>
+      <a:noFill/>
+      <a:ln>
+        <a:noFill/>
+      </a:ln>
+    </cs:spPr>
+  </cs:floor>
+  <cs:gridlineMajor>
+    <cs:lnRef idx="0"/>
+    <cs:fillRef idx="0"/>
+    <cs:effectRef idx="0"/>
+    <cs:fontRef idx="minor">
+      <a:schemeClr val="tx1"/>
+    </cs:fontRef>
+    <cs:spPr>
+      <a:ln w="9525" cap="flat" cmpd="sng" algn="ctr">
+        <a:solidFill>
+          <a:schemeClr val="tx1">
+            <a:lumMod val="15000"/>
+            <a:lumOff val="85000"/>
+          </a:schemeClr>
+        </a:solidFill>
+        <a:round/>
+      </a:ln>
+    </cs:spPr>
+  </cs:gridlineMajor>
+  <cs:gridlineMinor>
+    <cs:lnRef idx="0"/>
+    <cs:fillRef idx="0"/>
+    <cs:effectRef idx="0"/>
+    <cs:fontRef idx="minor">
+      <a:schemeClr val="tx1"/>
+    </cs:fontRef>
+    <cs:spPr>
+      <a:ln w="9525" cap="flat" cmpd="sng" algn="ctr">
+        <a:solidFill>
+          <a:schemeClr val="tx1">
+            <a:lumMod val="5000"/>
+            <a:lumOff val="95000"/>
+          </a:schemeClr>
+        </a:solidFill>
+        <a:round/>
+      </a:ln>
+    </cs:spPr>
+  </cs:gridlineMinor>
+  <cs:hiLoLine>
+    <cs:lnRef idx="0"/>
+    <cs:fillRef idx="0"/>
+    <cs:effectRef idx="0"/>
+    <cs:fontRef idx="minor">
+      <a:schemeClr val="tx1"/>
+    </cs:fontRef>
+    <cs:spPr>
+      <a:ln w="9525" cap="flat" cmpd="sng" algn="ctr">
+        <a:solidFill>
+          <a:schemeClr val="tx1">
+            <a:lumMod val="75000"/>
+            <a:lumOff val="25000"/>
+          </a:schemeClr>
+        </a:solidFill>
+        <a:round/>
+      </a:ln>
+    </cs:spPr>
+  </cs:hiLoLine>
+  <cs:leaderLine>
+    <cs:lnRef idx="0"/>
+    <cs:fillRef idx="0"/>
+    <cs:effectRef idx="0"/>
+    <cs:fontRef idx="minor">
+      <a:schemeClr val="tx1"/>
+    </cs:fontRef>
+    <cs:spPr>
+      <a:ln w="9525" cap="flat" cmpd="sng" algn="ctr">
+        <a:solidFill>
+          <a:schemeClr val="tx1">
+            <a:lumMod val="35000"/>
+            <a:lumOff val="65000"/>
+          </a:schemeClr>
+        </a:solidFill>
+        <a:round/>
+      </a:ln>
+    </cs:spPr>
+  </cs:leaderLine>
+  <cs:legend>
+    <cs:lnRef idx="0"/>
+    <cs:fillRef idx="0"/>
+    <cs:effectRef idx="0"/>
+    <cs:fontRef idx="minor">
+      <a:schemeClr val="tx1">
+        <a:lumMod val="65000"/>
+        <a:lumOff val="35000"/>
+      </a:schemeClr>
+    </cs:fontRef>
+    <cs:defRPr sz="1197" kern="1200"/>
+  </cs:legend>
+  <cs:plotArea mods="allowNoFillOverride allowNoLineOverride">
+    <cs:lnRef idx="0"/>
+    <cs:fillRef idx="0"/>
+    <cs:effectRef idx="0"/>
+    <cs:fontRef idx="minor">
+      <a:schemeClr val="tx1"/>
+    </cs:fontRef>
+  </cs:plotArea>
+  <cs:plotArea3D mods="allowNoFillOverride allowNoLineOverride">
+    <cs:lnRef idx="0"/>
+    <cs:fillRef idx="0"/>
+    <cs:effectRef idx="0"/>
+    <cs:fontRef idx="minor">
+      <a:schemeClr val="tx1"/>
+    </cs:fontRef>
+  </cs:plotArea3D>
+  <cs:seriesAxis>
+    <cs:lnRef idx="0"/>
+    <cs:fillRef idx="0"/>
+    <cs:effectRef idx="0"/>
+    <cs:fontRef idx="minor">
+      <a:schemeClr val="tx1">
+        <a:lumMod val="65000"/>
+        <a:lumOff val="35000"/>
+      </a:schemeClr>
+    </cs:fontRef>
+    <cs:defRPr sz="1197" kern="1200"/>
+  </cs:seriesAxis>
+  <cs:seriesLine>
+    <cs:lnRef idx="0"/>
+    <cs:fillRef idx="0"/>
+    <cs:effectRef idx="0"/>
+    <cs:fontRef idx="minor">
+      <a:schemeClr val="tx1"/>
+    </cs:fontRef>
+    <cs:spPr>
+      <a:ln w="9525" cap="flat" cmpd="sng" algn="ctr">
+        <a:solidFill>
+          <a:schemeClr val="tx1">
+            <a:lumMod val="35000"/>
+            <a:lumOff val="65000"/>
+          </a:schemeClr>
+        </a:solidFill>
+        <a:round/>
+      </a:ln>
+    </cs:spPr>
+  </cs:seriesLine>
+  <cs:title>
+    <cs:lnRef idx="0"/>
+    <cs:fillRef idx="0"/>
+    <cs:effectRef idx="0"/>
+    <cs:fontRef idx="minor">
+      <a:schemeClr val="tx1">
+        <a:lumMod val="65000"/>
+        <a:lumOff val="35000"/>
+      </a:schemeClr>
+    </cs:fontRef>
+    <cs:defRPr sz="1862" b="0" kern="1200" spc="0" baseline="0"/>
+  </cs:title>
+  <cs:trendline>
+    <cs:lnRef idx="0">
+      <cs:styleClr val="auto"/>
+    </cs:lnRef>
+    <cs:fillRef idx="0"/>
+    <cs:effectRef idx="0"/>
+    <cs:fontRef idx="minor">
+      <a:schemeClr val="tx1"/>
+    </cs:fontRef>
+    <cs:spPr>
+      <a:ln w="19050" cap="rnd">
+        <a:solidFill>
+          <a:schemeClr val="phClr"/>
+        </a:solidFill>
+        <a:prstDash val="sysDot"/>
+      </a:ln>
+    </cs:spPr>
+  </cs:trendline>
+  <cs:trendlineLabel>
+    <cs:lnRef idx="0"/>
+    <cs:fillRef idx="0"/>
+    <cs:effectRef idx="0"/>
+    <cs:fontRef idx="minor">
+      <a:schemeClr val="tx1">
+        <a:lumMod val="65000"/>
+        <a:lumOff val="35000"/>
+      </a:schemeClr>
+    </cs:fontRef>
+    <cs:defRPr sz="1197" kern="1200"/>
+  </cs:trendlineLabel>
+  <cs:upBar>
+    <cs:lnRef idx="0"/>
+    <cs:fillRef idx="0"/>
+    <cs:effectRef idx="0"/>
+    <cs:fontRef idx="minor">
+      <a:schemeClr val="dk1"/>
+    </cs:fontRef>
+    <cs:spPr>
+      <a:solidFill>
+        <a:schemeClr val="lt1"/>
+      </a:solidFill>
+      <a:ln w="9525">
+        <a:solidFill>
+          <a:schemeClr val="tx1">
+            <a:lumMod val="15000"/>
+            <a:lumOff val="85000"/>
+          </a:schemeClr>
+        </a:solidFill>
+      </a:ln>
+    </cs:spPr>
+  </cs:upBar>
+  <cs:valueAxis>
+    <cs:lnRef idx="0"/>
+    <cs:fillRef idx="0"/>
+    <cs:effectRef idx="0"/>
+    <cs:fontRef idx="minor">
+      <a:schemeClr val="tx1">
+        <a:lumMod val="65000"/>
+        <a:lumOff val="35000"/>
+      </a:schemeClr>
+    </cs:fontRef>
+    <cs:defRPr sz="1197" kern="1200"/>
+  </cs:valueAxis>
+  <cs:wall>
+    <cs:lnRef idx="0"/>
+    <cs:fillRef idx="0"/>
+    <cs:effectRef idx="0"/>
+    <cs:fontRef idx="minor">
+      <a:schemeClr val="tx1"/>
+    </cs:fontRef>
+    <cs:spPr>
+      <a:noFill/>
+      <a:ln>
+        <a:noFill/>
+      </a:ln>
+    </cs:spPr>
+  </cs:wall>
+</cs:chartStyle>
+</file>
+
+<file path=ppt/charts/style6.xml><?xml version="1.0" encoding="utf-8"?>
+<cs:chartStyle xmlns:cs="http://schemas.microsoft.com/office/drawing/2012/chartStyle" xmlns:a="http://schemas.openxmlformats.org/drawingml/2006/main" id="332">
+  <cs:axisTitle>
+    <cs:lnRef idx="0"/>
+    <cs:fillRef idx="0"/>
+    <cs:effectRef idx="0"/>
+    <cs:fontRef idx="minor">
+      <a:schemeClr val="tx1">
+        <a:lumMod val="65000"/>
+        <a:lumOff val="35000"/>
+      </a:schemeClr>
+    </cs:fontRef>
+    <cs:defRPr sz="1330" kern="1200"/>
+  </cs:axisTitle>
+  <cs:categoryAxis>
+    <cs:lnRef idx="0"/>
+    <cs:fillRef idx="0"/>
+    <cs:effectRef idx="0"/>
+    <cs:fontRef idx="minor">
+      <a:schemeClr val="tx1">
+        <a:lumMod val="65000"/>
+        <a:lumOff val="35000"/>
+      </a:schemeClr>
+    </cs:fontRef>
+    <cs:spPr>
+      <a:ln w="9525" cap="flat" cmpd="sng" algn="ctr">
+        <a:solidFill>
+          <a:schemeClr val="tx1">
+            <a:lumMod val="15000"/>
+            <a:lumOff val="85000"/>
+          </a:schemeClr>
+        </a:solidFill>
+        <a:round/>
+      </a:ln>
+    </cs:spPr>
+    <cs:defRPr sz="1197" kern="1200"/>
+  </cs:categoryAxis>
+  <cs:chartArea mods="allowNoFillOverride allowNoLineOverride">
+    <cs:lnRef idx="0"/>
+    <cs:fillRef idx="0"/>
+    <cs:effectRef idx="0"/>
+    <cs:fontRef idx="minor">
+      <a:schemeClr val="tx1"/>
+    </cs:fontRef>
+    <cs:spPr>
+      <a:solidFill>
+        <a:schemeClr val="bg1"/>
+      </a:solidFill>
+      <a:ln w="9525" cap="flat" cmpd="sng" algn="ctr">
+        <a:solidFill>
+          <a:schemeClr val="tx1">
+            <a:lumMod val="15000"/>
+            <a:lumOff val="85000"/>
+          </a:schemeClr>
+        </a:solidFill>
+        <a:round/>
+      </a:ln>
+    </cs:spPr>
+    <cs:defRPr sz="1330" kern="1200"/>
+  </cs:chartArea>
+  <cs:dataLabel>
+    <cs:lnRef idx="0"/>
+    <cs:fillRef idx="0"/>
+    <cs:effectRef idx="0"/>
+    <cs:fontRef idx="minor">
+      <a:schemeClr val="tx1">
+        <a:lumMod val="75000"/>
+        <a:lumOff val="25000"/>
+      </a:schemeClr>
+    </cs:fontRef>
+    <cs:defRPr sz="1197" kern="1200"/>
+  </cs:dataLabel>
+  <cs:dataLabelCallout>
+    <cs:lnRef idx="0"/>
+    <cs:fillRef idx="0"/>
+    <cs:effectRef idx="0"/>
+    <cs:fontRef idx="minor">
+      <a:schemeClr val="dk1">
+        <a:lumMod val="65000"/>
+        <a:lumOff val="35000"/>
+      </a:schemeClr>
+    </cs:fontRef>
+    <cs:spPr>
+      <a:solidFill>
+        <a:schemeClr val="lt1"/>
+      </a:solidFill>
+      <a:ln>
+        <a:solidFill>
+          <a:schemeClr val="dk1">
+            <a:lumMod val="25000"/>
+            <a:lumOff val="75000"/>
+          </a:schemeClr>
+        </a:solidFill>
+      </a:ln>
+    </cs:spPr>
+    <cs:defRPr sz="1197" kern="1200"/>
+    <cs:bodyPr rot="0" spcFirstLastPara="1" vertOverflow="clip" horzOverflow="clip" vert="horz" wrap="square" lIns="36576" tIns="18288" rIns="36576" bIns="18288" anchor="ctr" anchorCtr="1">
+      <a:spAutoFit/>
+    </cs:bodyPr>
+  </cs:dataLabelCallout>
+  <cs:dataPoint>
+    <cs:lnRef idx="0"/>
+    <cs:fillRef idx="1">
+      <cs:styleClr val="auto"/>
+    </cs:fillRef>
+    <cs:effectRef idx="0"/>
+    <cs:fontRef idx="minor">
+      <a:schemeClr val="tx1"/>
+    </cs:fontRef>
+  </cs:dataPoint>
+  <cs:dataPoint3D>
+    <cs:lnRef idx="0"/>
+    <cs:fillRef idx="1">
+      <cs:styleClr val="auto"/>
+    </cs:fillRef>
+    <cs:effectRef idx="0"/>
+    <cs:fontRef idx="minor">
+      <a:schemeClr val="tx1"/>
+    </cs:fontRef>
+  </cs:dataPoint3D>
+  <cs:dataPointLine>
+    <cs:lnRef idx="0">
+      <cs:styleClr val="auto"/>
+    </cs:lnRef>
+    <cs:fillRef idx="1"/>
+    <cs:effectRef idx="0"/>
+    <cs:fontRef idx="minor">
+      <a:schemeClr val="tx1"/>
+    </cs:fontRef>
+    <cs:spPr>
+      <a:ln w="28575" cap="rnd">
+        <a:solidFill>
+          <a:schemeClr val="phClr"/>
+        </a:solidFill>
+        <a:round/>
+      </a:ln>
+    </cs:spPr>
+  </cs:dataPointLine>
+  <cs:dataPointMarker>
+    <cs:lnRef idx="0">
+      <cs:styleClr val="auto"/>
+    </cs:lnRef>
+    <cs:fillRef idx="1">
+      <cs:styleClr val="auto"/>
+    </cs:fillRef>
+    <cs:effectRef idx="0"/>
+    <cs:fontRef idx="minor">
+      <a:schemeClr val="tx1"/>
+    </cs:fontRef>
+    <cs:spPr>
+      <a:ln w="9525">
+        <a:solidFill>
+          <a:schemeClr val="phClr"/>
+        </a:solidFill>
+      </a:ln>
+    </cs:spPr>
+  </cs:dataPointMarker>
+  <cs:dataPointMarkerLayout symbol="circle" size="5"/>
+  <cs:dataPointWireframe>
+    <cs:lnRef idx="0">
+      <cs:styleClr val="auto"/>
+    </cs:lnRef>
+    <cs:fillRef idx="1"/>
+    <cs:effectRef idx="0"/>
+    <cs:fontRef idx="minor">
+      <a:schemeClr val="tx1"/>
+    </cs:fontRef>
+    <cs:spPr>
+      <a:ln w="9525" cap="rnd">
+        <a:solidFill>
+          <a:schemeClr val="phClr"/>
+        </a:solidFill>
+        <a:round/>
+      </a:ln>
+    </cs:spPr>
+  </cs:dataPointWireframe>
+  <cs:dataTable>
+    <cs:lnRef idx="0"/>
+    <cs:fillRef idx="0"/>
+    <cs:effectRef idx="0"/>
+    <cs:fontRef idx="minor">
+      <a:schemeClr val="tx1">
+        <a:lumMod val="65000"/>
+        <a:lumOff val="35000"/>
+      </a:schemeClr>
+    </cs:fontRef>
+    <cs:spPr>
+      <a:noFill/>
+      <a:ln w="9525" cap="flat" cmpd="sng" algn="ctr">
+        <a:solidFill>
+          <a:schemeClr val="tx1">
+            <a:lumMod val="15000"/>
+            <a:lumOff val="85000"/>
+          </a:schemeClr>
+        </a:solidFill>
+        <a:round/>
+      </a:ln>
+    </cs:spPr>
+    <cs:defRPr sz="1197" kern="1200"/>
+  </cs:dataTable>
+  <cs:downBar>
+    <cs:lnRef idx="0"/>
+    <cs:fillRef idx="0"/>
+    <cs:effectRef idx="0"/>
+    <cs:fontRef idx="minor">
+      <a:schemeClr val="dk1"/>
+    </cs:fontRef>
+    <cs:spPr>
+      <a:solidFill>
+        <a:schemeClr val="dk1">
+          <a:lumMod val="65000"/>
+          <a:lumOff val="35000"/>
+        </a:schemeClr>
+      </a:solidFill>
+      <a:ln w="9525">
+        <a:solidFill>
+          <a:schemeClr val="tx1">
+            <a:lumMod val="65000"/>
+            <a:lumOff val="35000"/>
+          </a:schemeClr>
+        </a:solidFill>
+      </a:ln>
+    </cs:spPr>
+  </cs:downBar>
+  <cs:dropLine>
+    <cs:lnRef idx="0"/>
+    <cs:fillRef idx="0"/>
+    <cs:effectRef idx="0"/>
+    <cs:fontRef idx="minor">
+      <a:schemeClr val="tx1"/>
+    </cs:fontRef>
+    <cs:spPr>
+      <a:ln w="9525" cap="flat" cmpd="sng" algn="ctr">
+        <a:solidFill>
+          <a:schemeClr val="tx1">
+            <a:lumMod val="35000"/>
+            <a:lumOff val="65000"/>
+          </a:schemeClr>
+        </a:solidFill>
+        <a:round/>
+      </a:ln>
+    </cs:spPr>
+  </cs:dropLine>
+  <cs:errorBar>
+    <cs:lnRef idx="0"/>
+    <cs:fillRef idx="0"/>
+    <cs:effectRef idx="0"/>
+    <cs:fontRef idx="minor">
+      <a:schemeClr val="tx1"/>
+    </cs:fontRef>
+    <cs:spPr>
+      <a:ln w="9525" cap="flat" cmpd="sng" algn="ctr">
+        <a:solidFill>
+          <a:schemeClr val="tx1">
+            <a:lumMod val="65000"/>
+            <a:lumOff val="35000"/>
+          </a:schemeClr>
+        </a:solidFill>
+        <a:round/>
+      </a:ln>
+    </cs:spPr>
+  </cs:errorBar>
+  <cs:floor>
+    <cs:lnRef idx="0"/>
+    <cs:fillRef idx="0"/>
+    <cs:effectRef idx="0"/>
+    <cs:fontRef idx="minor">
+      <a:schemeClr val="tx1"/>
+    </cs:fontRef>
+    <cs:spPr>
+      <a:noFill/>
+      <a:ln>
+        <a:noFill/>
+      </a:ln>
+    </cs:spPr>
+  </cs:floor>
+  <cs:gridlineMajor>
+    <cs:lnRef idx="0"/>
+    <cs:fillRef idx="0"/>
+    <cs:effectRef idx="0"/>
+    <cs:fontRef idx="minor">
+      <a:schemeClr val="tx1"/>
+    </cs:fontRef>
+    <cs:spPr>
+      <a:ln w="9525" cap="flat" cmpd="sng" algn="ctr">
+        <a:solidFill>
+          <a:schemeClr val="tx1">
+            <a:lumMod val="15000"/>
+            <a:lumOff val="85000"/>
+          </a:schemeClr>
+        </a:solidFill>
+        <a:round/>
+      </a:ln>
+    </cs:spPr>
+  </cs:gridlineMajor>
+  <cs:gridlineMinor>
+    <cs:lnRef idx="0"/>
+    <cs:fillRef idx="0"/>
+    <cs:effectRef idx="0"/>
+    <cs:fontRef idx="minor">
+      <a:schemeClr val="tx1"/>
+    </cs:fontRef>
+    <cs:spPr>
+      <a:ln w="9525" cap="flat" cmpd="sng" algn="ctr">
+        <a:solidFill>
+          <a:schemeClr val="tx1">
+            <a:lumMod val="5000"/>
+            <a:lumOff val="95000"/>
+          </a:schemeClr>
+        </a:solidFill>
+        <a:round/>
+      </a:ln>
+    </cs:spPr>
+  </cs:gridlineMinor>
+  <cs:hiLoLine>
+    <cs:lnRef idx="0"/>
+    <cs:fillRef idx="0"/>
+    <cs:effectRef idx="0"/>
+    <cs:fontRef idx="minor">
+      <a:schemeClr val="tx1"/>
+    </cs:fontRef>
+    <cs:spPr>
+      <a:ln w="9525" cap="flat" cmpd="sng" algn="ctr">
+        <a:solidFill>
+          <a:schemeClr val="tx1">
+            <a:lumMod val="75000"/>
+            <a:lumOff val="25000"/>
+          </a:schemeClr>
+        </a:solidFill>
+        <a:round/>
+      </a:ln>
+    </cs:spPr>
+  </cs:hiLoLine>
+  <cs:leaderLine>
+    <cs:lnRef idx="0"/>
+    <cs:fillRef idx="0"/>
+    <cs:effectRef idx="0"/>
+    <cs:fontRef idx="minor">
+      <a:schemeClr val="tx1"/>
+    </cs:fontRef>
+    <cs:spPr>
+      <a:ln w="9525" cap="flat" cmpd="sng" algn="ctr">
+        <a:solidFill>
+          <a:schemeClr val="tx1">
+            <a:lumMod val="35000"/>
+            <a:lumOff val="65000"/>
+          </a:schemeClr>
+        </a:solidFill>
+        <a:round/>
+      </a:ln>
+    </cs:spPr>
+  </cs:leaderLine>
+  <cs:legend>
+    <cs:lnRef idx="0"/>
+    <cs:fillRef idx="0"/>
+    <cs:effectRef idx="0"/>
+    <cs:fontRef idx="minor">
+      <a:schemeClr val="tx1">
+        <a:lumMod val="65000"/>
+        <a:lumOff val="35000"/>
+      </a:schemeClr>
+    </cs:fontRef>
+    <cs:defRPr sz="1197" kern="1200"/>
+  </cs:legend>
+  <cs:plotArea mods="allowNoFillOverride allowNoLineOverride">
+    <cs:lnRef idx="0"/>
+    <cs:fillRef idx="0"/>
+    <cs:effectRef idx="0"/>
+    <cs:fontRef idx="minor">
+      <a:schemeClr val="tx1"/>
+    </cs:fontRef>
+  </cs:plotArea>
+  <cs:plotArea3D mods="allowNoFillOverride allowNoLineOverride">
+    <cs:lnRef idx="0"/>
+    <cs:fillRef idx="0"/>
+    <cs:effectRef idx="0"/>
+    <cs:fontRef idx="minor">
+      <a:schemeClr val="tx1"/>
+    </cs:fontRef>
+  </cs:plotArea3D>
+  <cs:seriesAxis>
+    <cs:lnRef idx="0"/>
+    <cs:fillRef idx="0"/>
+    <cs:effectRef idx="0"/>
+    <cs:fontRef idx="minor">
+      <a:schemeClr val="tx1">
+        <a:lumMod val="65000"/>
+        <a:lumOff val="35000"/>
+      </a:schemeClr>
+    </cs:fontRef>
+    <cs:defRPr sz="1197" kern="1200"/>
+  </cs:seriesAxis>
+  <cs:seriesLine>
+    <cs:lnRef idx="0"/>
+    <cs:fillRef idx="0"/>
+    <cs:effectRef idx="0"/>
+    <cs:fontRef idx="minor">
+      <a:schemeClr val="tx1"/>
+    </cs:fontRef>
+    <cs:spPr>
+      <a:ln w="9525" cap="flat" cmpd="sng" algn="ctr">
+        <a:solidFill>
+          <a:schemeClr val="tx1">
+            <a:lumMod val="35000"/>
+            <a:lumOff val="65000"/>
+          </a:schemeClr>
+        </a:solidFill>
+        <a:round/>
+      </a:ln>
+    </cs:spPr>
+  </cs:seriesLine>
+  <cs:title>
+    <cs:lnRef idx="0"/>
+    <cs:fillRef idx="0"/>
+    <cs:effectRef idx="0"/>
+    <cs:fontRef idx="minor">
+      <a:schemeClr val="tx1">
+        <a:lumMod val="65000"/>
+        <a:lumOff val="35000"/>
+      </a:schemeClr>
+    </cs:fontRef>
+    <cs:defRPr sz="1862" b="0" kern="1200" spc="0" baseline="0"/>
+  </cs:title>
+  <cs:trendline>
+    <cs:lnRef idx="0">
+      <cs:styleClr val="auto"/>
+    </cs:lnRef>
+    <cs:fillRef idx="0"/>
+    <cs:effectRef idx="0"/>
+    <cs:fontRef idx="minor">
+      <a:schemeClr val="tx1"/>
+    </cs:fontRef>
+    <cs:spPr>
+      <a:ln w="19050" cap="rnd">
+        <a:solidFill>
+          <a:schemeClr val="phClr"/>
+        </a:solidFill>
+        <a:prstDash val="sysDot"/>
+      </a:ln>
+    </cs:spPr>
+  </cs:trendline>
+  <cs:trendlineLabel>
+    <cs:lnRef idx="0"/>
+    <cs:fillRef idx="0"/>
+    <cs:effectRef idx="0"/>
+    <cs:fontRef idx="minor">
+      <a:schemeClr val="tx1">
+        <a:lumMod val="65000"/>
+        <a:lumOff val="35000"/>
+      </a:schemeClr>
+    </cs:fontRef>
+    <cs:defRPr sz="1197" kern="1200"/>
+  </cs:trendlineLabel>
+  <cs:upBar>
+    <cs:lnRef idx="0"/>
+    <cs:fillRef idx="0"/>
+    <cs:effectRef idx="0"/>
+    <cs:fontRef idx="minor">
+      <a:schemeClr val="dk1"/>
+    </cs:fontRef>
+    <cs:spPr>
+      <a:solidFill>
+        <a:schemeClr val="lt1"/>
+      </a:solidFill>
+      <a:ln w="9525">
+        <a:solidFill>
+          <a:schemeClr val="tx1">
+            <a:lumMod val="15000"/>
+            <a:lumOff val="85000"/>
+          </a:schemeClr>
+        </a:solidFill>
+      </a:ln>
+    </cs:spPr>
+  </cs:upBar>
+  <cs:valueAxis>
+    <cs:lnRef idx="0"/>
+    <cs:fillRef idx="0"/>
+    <cs:effectRef idx="0"/>
+    <cs:fontRef idx="minor">
+      <a:schemeClr val="tx1">
+        <a:lumMod val="65000"/>
+        <a:lumOff val="35000"/>
+      </a:schemeClr>
+    </cs:fontRef>
+    <cs:defRPr sz="1197" kern="1200"/>
+  </cs:valueAxis>
+  <cs:wall>
+    <cs:lnRef idx="0"/>
+    <cs:fillRef idx="0"/>
+    <cs:effectRef idx="0"/>
+    <cs:fontRef idx="minor">
+      <a:schemeClr val="tx1"/>
+    </cs:fontRef>
+    <cs:spPr>
+      <a:noFill/>
+      <a:ln>
+        <a:noFill/>
+      </a:ln>
+    </cs:spPr>
+  </cs:wall>
+</cs:chartStyle>
+</file>
+
+<file path=ppt/charts/style7.xml><?xml version="1.0" encoding="utf-8"?>
 <cs:chartStyle xmlns:cs="http://schemas.microsoft.com/office/drawing/2012/chartStyle" xmlns:a="http://schemas.openxmlformats.org/drawingml/2006/main" id="332">
   <cs:axisTitle>
     <cs:lnRef idx="0"/>
@@ -10105,8 +15305,8 @@
           </a:p>
         </p:txBody>
       </p:sp>
-      <mc:AlternateContent xmlns:mc="http://schemas.openxmlformats.org/markup-compatibility/2006" xmlns:a14="http://schemas.microsoft.com/office/drawing/2010/main">
-        <mc:Choice Requires="a14">
+      <mc:AlternateContent xmlns:mc="http://schemas.openxmlformats.org/markup-compatibility/2006">
+        <mc:Choice xmlns:a14="http://schemas.microsoft.com/office/drawing/2010/main" Requires="a14">
           <p:sp>
             <p:nvSpPr>
               <p:cNvPr id="8" name="Segnaposto contenuto 7">
@@ -10146,7 +15346,7 @@
               <a:p>
                 <a:pPr lvl="1"/>
                 <a:r>
-                  <a:rPr lang="it-IT" sz="2300" b="1" dirty="0" err="1"/>
+                  <a:rPr lang="en-US" sz="2300" b="1" noProof="0" dirty="0"/>
                   <a:t>Speedup</a:t>
                 </a:r>
                 <a:r>
@@ -10403,7 +15603,7 @@
             </p:txBody>
           </p:sp>
         </mc:Choice>
-        <mc:Fallback xmlns="">
+        <mc:Fallback>
           <p:sp>
             <p:nvSpPr>
               <p:cNvPr id="8" name="Segnaposto contenuto 7">
@@ -10594,8 +15794,8 @@
           </a:p>
         </p:txBody>
       </p:sp>
-      <mc:AlternateContent xmlns:mc="http://schemas.openxmlformats.org/markup-compatibility/2006">
-        <mc:Choice xmlns:a14="http://schemas.microsoft.com/office/drawing/2010/main" Requires="a14">
+      <mc:AlternateContent xmlns:mc="http://schemas.openxmlformats.org/markup-compatibility/2006" xmlns:a14="http://schemas.microsoft.com/office/drawing/2010/main">
+        <mc:Choice Requires="a14">
           <p:sp>
             <p:nvSpPr>
               <p:cNvPr id="3" name="Segnaposto contenuto 2">
@@ -10803,7 +16003,7 @@
             </p:txBody>
           </p:sp>
         </mc:Choice>
-        <mc:Fallback>
+        <mc:Fallback xmlns="">
           <p:sp>
             <p:nvSpPr>
               <p:cNvPr id="3" name="Segnaposto contenuto 2">
@@ -11381,7 +16581,7 @@
           <a:p>
             <a:r>
               <a:rPr lang="it-IT" dirty="0"/>
-              <a:t>Analisi – Strong Scaling – MPI </a:t>
+              <a:t>Analisi – Tempo MPI </a:t>
             </a:r>
           </a:p>
         </p:txBody>
@@ -11402,7 +16602,7 @@
             <p:ph idx="1"/>
             <p:extLst>
               <p:ext uri="{D42A27DB-BD31-4B8C-83A1-F6EECF244321}">
-                <p14:modId xmlns:p14="http://schemas.microsoft.com/office/powerpoint/2010/main" val="2041528192"/>
+                <p14:modId xmlns:p14="http://schemas.microsoft.com/office/powerpoint/2010/main" val="331428235"/>
               </p:ext>
             </p:extLst>
           </p:nvPr>
@@ -11491,14 +16691,131 @@
             <p:ph idx="1"/>
             <p:extLst>
               <p:ext uri="{D42A27DB-BD31-4B8C-83A1-F6EECF244321}">
-                <p14:modId xmlns:p14="http://schemas.microsoft.com/office/powerpoint/2010/main" val="555854292"/>
+                <p14:modId xmlns:p14="http://schemas.microsoft.com/office/powerpoint/2010/main" val="884624043"/>
               </p:ext>
             </p:extLst>
           </p:nvPr>
         </p:nvGraphicFramePr>
         <p:xfrm>
           <a:off x="639763" y="2633663"/>
-          <a:ext cx="5999162" cy="3565525"/>
+          <a:ext cx="4538819" cy="3622282"/>
+        </p:xfrm>
+        <a:graphic>
+          <a:graphicData uri="http://schemas.openxmlformats.org/drawingml/2006/chart">
+            <c:chart xmlns:c="http://schemas.openxmlformats.org/drawingml/2006/chart" xmlns:r="http://schemas.openxmlformats.org/officeDocument/2006/relationships" r:id="rId2"/>
+          </a:graphicData>
+        </a:graphic>
+      </p:graphicFrame>
+      <p:graphicFrame>
+        <p:nvGraphicFramePr>
+          <p:cNvPr id="5" name="Grafico 4">
+            <a:extLst>
+              <a:ext uri="{FF2B5EF4-FFF2-40B4-BE49-F238E27FC236}">
+                <a16:creationId xmlns:a16="http://schemas.microsoft.com/office/drawing/2014/main" id="{3F16AD40-9051-5400-1525-BC8988DB6288}"/>
+              </a:ext>
+            </a:extLst>
+          </p:cNvPr>
+          <p:cNvGraphicFramePr/>
+          <p:nvPr>
+            <p:extLst>
+              <p:ext uri="{D42A27DB-BD31-4B8C-83A1-F6EECF244321}">
+                <p14:modId xmlns:p14="http://schemas.microsoft.com/office/powerpoint/2010/main" val="1897246930"/>
+              </p:ext>
+            </p:extLst>
+          </p:nvPr>
+        </p:nvGraphicFramePr>
+        <p:xfrm>
+          <a:off x="6252910" y="2633663"/>
+          <a:ext cx="4538819" cy="3622282"/>
+        </p:xfrm>
+        <a:graphic>
+          <a:graphicData uri="http://schemas.openxmlformats.org/drawingml/2006/chart">
+            <c:chart xmlns:c="http://schemas.openxmlformats.org/drawingml/2006/chart" xmlns:r="http://schemas.openxmlformats.org/officeDocument/2006/relationships" r:id="rId3"/>
+          </a:graphicData>
+        </a:graphic>
+      </p:graphicFrame>
+    </p:spTree>
+    <p:extLst>
+      <p:ext uri="{BB962C8B-B14F-4D97-AF65-F5344CB8AC3E}">
+        <p14:creationId xmlns:p14="http://schemas.microsoft.com/office/powerpoint/2010/main" val="2777621118"/>
+      </p:ext>
+    </p:extLst>
+  </p:cSld>
+  <p:clrMapOvr>
+    <a:masterClrMapping/>
+  </p:clrMapOvr>
+</p:sld>
+</file>
+
+<file path=ppt/slides/slide22.xml><?xml version="1.0" encoding="utf-8"?>
+<p:sld xmlns:a="http://schemas.openxmlformats.org/drawingml/2006/main" xmlns:r="http://schemas.openxmlformats.org/officeDocument/2006/relationships" xmlns:p="http://schemas.openxmlformats.org/presentationml/2006/main">
+  <p:cSld>
+    <p:spTree>
+      <p:nvGrpSpPr>
+        <p:cNvPr id="1" name=""/>
+        <p:cNvGrpSpPr/>
+        <p:nvPr/>
+      </p:nvGrpSpPr>
+      <p:grpSpPr>
+        <a:xfrm>
+          <a:off x="0" y="0"/>
+          <a:ext cx="0" cy="0"/>
+          <a:chOff x="0" y="0"/>
+          <a:chExt cx="0" cy="0"/>
+        </a:xfrm>
+      </p:grpSpPr>
+      <p:sp>
+        <p:nvSpPr>
+          <p:cNvPr id="2" name="Titolo 1">
+            <a:extLst>
+              <a:ext uri="{FF2B5EF4-FFF2-40B4-BE49-F238E27FC236}">
+                <a16:creationId xmlns:a16="http://schemas.microsoft.com/office/drawing/2014/main" id="{6A26640F-8D0E-644A-BB0D-A967EC74155A}"/>
+              </a:ext>
+            </a:extLst>
+          </p:cNvPr>
+          <p:cNvSpPr>
+            <a:spLocks noGrp="1"/>
+          </p:cNvSpPr>
+          <p:nvPr>
+            <p:ph type="title"/>
+          </p:nvPr>
+        </p:nvSpPr>
+        <p:spPr/>
+        <p:txBody>
+          <a:bodyPr/>
+          <a:lstStyle/>
+          <a:p>
+            <a:r>
+              <a:rPr lang="it-IT" dirty="0"/>
+              <a:t>Analisi – Tempo Ibrido</a:t>
+            </a:r>
+          </a:p>
+        </p:txBody>
+      </p:sp>
+      <p:graphicFrame>
+        <p:nvGraphicFramePr>
+          <p:cNvPr id="6" name="Segnaposto contenuto 5">
+            <a:extLst>
+              <a:ext uri="{FF2B5EF4-FFF2-40B4-BE49-F238E27FC236}">
+                <a16:creationId xmlns:a16="http://schemas.microsoft.com/office/drawing/2014/main" id="{E1C4C71E-76CE-4E3F-6E1D-D9B7D837F47E}"/>
+              </a:ext>
+            </a:extLst>
+          </p:cNvPr>
+          <p:cNvGraphicFramePr>
+            <a:graphicFrameLocks noGrp="1"/>
+          </p:cNvGraphicFramePr>
+          <p:nvPr>
+            <p:ph idx="1"/>
+            <p:extLst>
+              <p:ext uri="{D42A27DB-BD31-4B8C-83A1-F6EECF244321}">
+                <p14:modId xmlns:p14="http://schemas.microsoft.com/office/powerpoint/2010/main" val="3523123222"/>
+              </p:ext>
+            </p:extLst>
+          </p:nvPr>
+        </p:nvGraphicFramePr>
+        <p:xfrm>
+          <a:off x="639763" y="2633663"/>
+          <a:ext cx="10891837" cy="3565525"/>
         </p:xfrm>
         <a:graphic>
           <a:graphicData uri="http://schemas.openxmlformats.org/drawingml/2006/chart">
@@ -11509,7 +16826,203 @@
     </p:spTree>
     <p:extLst>
       <p:ext uri="{BB962C8B-B14F-4D97-AF65-F5344CB8AC3E}">
-        <p14:creationId xmlns:p14="http://schemas.microsoft.com/office/powerpoint/2010/main" val="2777621118"/>
+        <p14:creationId xmlns:p14="http://schemas.microsoft.com/office/powerpoint/2010/main" val="2513905353"/>
+      </p:ext>
+    </p:extLst>
+  </p:cSld>
+  <p:clrMapOvr>
+    <a:masterClrMapping/>
+  </p:clrMapOvr>
+</p:sld>
+</file>
+
+<file path=ppt/slides/slide23.xml><?xml version="1.0" encoding="utf-8"?>
+<p:sld xmlns:a="http://schemas.openxmlformats.org/drawingml/2006/main" xmlns:r="http://schemas.openxmlformats.org/officeDocument/2006/relationships" xmlns:p="http://schemas.openxmlformats.org/presentationml/2006/main">
+  <p:cSld>
+    <p:spTree>
+      <p:nvGrpSpPr>
+        <p:cNvPr id="1" name=""/>
+        <p:cNvGrpSpPr/>
+        <p:nvPr/>
+      </p:nvGrpSpPr>
+      <p:grpSpPr>
+        <a:xfrm>
+          <a:off x="0" y="0"/>
+          <a:ext cx="0" cy="0"/>
+          <a:chOff x="0" y="0"/>
+          <a:chExt cx="0" cy="0"/>
+        </a:xfrm>
+      </p:grpSpPr>
+      <p:sp>
+        <p:nvSpPr>
+          <p:cNvPr id="2" name="Titolo 1">
+            <a:extLst>
+              <a:ext uri="{FF2B5EF4-FFF2-40B4-BE49-F238E27FC236}">
+                <a16:creationId xmlns:a16="http://schemas.microsoft.com/office/drawing/2014/main" id="{0A453487-373E-170F-EE64-C39FA4EA6CB1}"/>
+              </a:ext>
+            </a:extLst>
+          </p:cNvPr>
+          <p:cNvSpPr>
+            <a:spLocks noGrp="1"/>
+          </p:cNvSpPr>
+          <p:nvPr>
+            <p:ph type="title"/>
+          </p:nvPr>
+        </p:nvSpPr>
+        <p:spPr/>
+        <p:txBody>
+          <a:bodyPr/>
+          <a:lstStyle/>
+          <a:p>
+            <a:r>
+              <a:rPr lang="it-IT" dirty="0"/>
+              <a:t>Analisi – Strong Scaling - Ibrido</a:t>
+            </a:r>
+          </a:p>
+        </p:txBody>
+      </p:sp>
+      <p:graphicFrame>
+        <p:nvGraphicFramePr>
+          <p:cNvPr id="4" name="Segnaposto contenuto 5">
+            <a:extLst>
+              <a:ext uri="{FF2B5EF4-FFF2-40B4-BE49-F238E27FC236}">
+                <a16:creationId xmlns:a16="http://schemas.microsoft.com/office/drawing/2014/main" id="{385B09B4-13B8-EDE7-059B-FA50E441B012}"/>
+              </a:ext>
+            </a:extLst>
+          </p:cNvPr>
+          <p:cNvGraphicFramePr>
+            <a:graphicFrameLocks/>
+          </p:cNvGraphicFramePr>
+          <p:nvPr>
+            <p:extLst>
+              <p:ext uri="{D42A27DB-BD31-4B8C-83A1-F6EECF244321}">
+                <p14:modId xmlns:p14="http://schemas.microsoft.com/office/powerpoint/2010/main" val="3474167843"/>
+              </p:ext>
+            </p:extLst>
+          </p:nvPr>
+        </p:nvGraphicFramePr>
+        <p:xfrm>
+          <a:off x="639763" y="2633663"/>
+          <a:ext cx="4538819" cy="3622282"/>
+        </p:xfrm>
+        <a:graphic>
+          <a:graphicData uri="http://schemas.openxmlformats.org/drawingml/2006/chart">
+            <c:chart xmlns:c="http://schemas.openxmlformats.org/drawingml/2006/chart" xmlns:r="http://schemas.openxmlformats.org/officeDocument/2006/relationships" r:id="rId2"/>
+          </a:graphicData>
+        </a:graphic>
+      </p:graphicFrame>
+      <p:graphicFrame>
+        <p:nvGraphicFramePr>
+          <p:cNvPr id="6" name="Grafico 5">
+            <a:extLst>
+              <a:ext uri="{FF2B5EF4-FFF2-40B4-BE49-F238E27FC236}">
+                <a16:creationId xmlns:a16="http://schemas.microsoft.com/office/drawing/2014/main" id="{9E181B14-5F21-5B24-7D05-5CDDDA1BE4DF}"/>
+              </a:ext>
+            </a:extLst>
+          </p:cNvPr>
+          <p:cNvGraphicFramePr/>
+          <p:nvPr>
+            <p:extLst>
+              <p:ext uri="{D42A27DB-BD31-4B8C-83A1-F6EECF244321}">
+                <p14:modId xmlns:p14="http://schemas.microsoft.com/office/powerpoint/2010/main" val="240983735"/>
+              </p:ext>
+            </p:extLst>
+          </p:nvPr>
+        </p:nvGraphicFramePr>
+        <p:xfrm>
+          <a:off x="6458184" y="2633663"/>
+          <a:ext cx="4538819" cy="3622282"/>
+        </p:xfrm>
+        <a:graphic>
+          <a:graphicData uri="http://schemas.openxmlformats.org/drawingml/2006/chart">
+            <c:chart xmlns:c="http://schemas.openxmlformats.org/drawingml/2006/chart" xmlns:r="http://schemas.openxmlformats.org/officeDocument/2006/relationships" r:id="rId3"/>
+          </a:graphicData>
+        </a:graphic>
+      </p:graphicFrame>
+    </p:spTree>
+    <p:extLst>
+      <p:ext uri="{BB962C8B-B14F-4D97-AF65-F5344CB8AC3E}">
+        <p14:creationId xmlns:p14="http://schemas.microsoft.com/office/powerpoint/2010/main" val="3239206603"/>
+      </p:ext>
+    </p:extLst>
+  </p:cSld>
+  <p:clrMapOvr>
+    <a:masterClrMapping/>
+  </p:clrMapOvr>
+</p:sld>
+</file>
+
+<file path=ppt/slides/slide24.xml><?xml version="1.0" encoding="utf-8"?>
+<p:sld xmlns:a="http://schemas.openxmlformats.org/drawingml/2006/main" xmlns:r="http://schemas.openxmlformats.org/officeDocument/2006/relationships" xmlns:p="http://schemas.openxmlformats.org/presentationml/2006/main">
+  <p:cSld>
+    <p:spTree>
+      <p:nvGrpSpPr>
+        <p:cNvPr id="1" name=""/>
+        <p:cNvGrpSpPr/>
+        <p:nvPr/>
+      </p:nvGrpSpPr>
+      <p:grpSpPr>
+        <a:xfrm>
+          <a:off x="0" y="0"/>
+          <a:ext cx="0" cy="0"/>
+          <a:chOff x="0" y="0"/>
+          <a:chExt cx="0" cy="0"/>
+        </a:xfrm>
+      </p:grpSpPr>
+      <p:sp>
+        <p:nvSpPr>
+          <p:cNvPr id="2" name="Titolo 1">
+            <a:extLst>
+              <a:ext uri="{FF2B5EF4-FFF2-40B4-BE49-F238E27FC236}">
+                <a16:creationId xmlns:a16="http://schemas.microsoft.com/office/drawing/2014/main" id="{B7034AD0-5801-DD07-C38E-75A121A8C5D9}"/>
+              </a:ext>
+            </a:extLst>
+          </p:cNvPr>
+          <p:cNvSpPr>
+            <a:spLocks noGrp="1"/>
+          </p:cNvSpPr>
+          <p:nvPr>
+            <p:ph type="title"/>
+          </p:nvPr>
+        </p:nvSpPr>
+        <p:spPr/>
+        <p:txBody>
+          <a:bodyPr/>
+          <a:lstStyle/>
+          <a:p>
+            <a:endParaRPr lang="it-IT"/>
+          </a:p>
+        </p:txBody>
+      </p:sp>
+      <p:sp>
+        <p:nvSpPr>
+          <p:cNvPr id="3" name="Segnaposto contenuto 2">
+            <a:extLst>
+              <a:ext uri="{FF2B5EF4-FFF2-40B4-BE49-F238E27FC236}">
+                <a16:creationId xmlns:a16="http://schemas.microsoft.com/office/drawing/2014/main" id="{62CA8202-FD24-8AEB-A1D2-9FDDB335BB1A}"/>
+              </a:ext>
+            </a:extLst>
+          </p:cNvPr>
+          <p:cNvSpPr>
+            <a:spLocks noGrp="1"/>
+          </p:cNvSpPr>
+          <p:nvPr>
+            <p:ph idx="1"/>
+          </p:nvPr>
+        </p:nvSpPr>
+        <p:spPr/>
+        <p:txBody>
+          <a:bodyPr/>
+          <a:lstStyle/>
+          <a:p>
+            <a:endParaRPr lang="it-IT"/>
+          </a:p>
+        </p:txBody>
+      </p:sp>
+    </p:spTree>
+    <p:extLst>
+      <p:ext uri="{BB962C8B-B14F-4D97-AF65-F5344CB8AC3E}">
+        <p14:creationId xmlns:p14="http://schemas.microsoft.com/office/powerpoint/2010/main" val="646342104"/>
       </p:ext>
     </p:extLst>
   </p:cSld>

--- a/Secondo Semestre/principi_prog_parallela/Codici/Progetto/Simulazione della Diffusione del Calore 2D.pptx
+++ b/Secondo Semestre/principi_prog_parallela/Codici/Progetto/Simulazione della Diffusione del Calore 2D.pptx
@@ -4885,6 +4885,491 @@
           </a:p>
         </c:txPr>
         <c:crossAx val="18111376"/>
+        <c:crosses val="autoZero"/>
+        <c:crossBetween val="between"/>
+      </c:valAx>
+      <c:spPr>
+        <a:noFill/>
+        <a:ln>
+          <a:noFill/>
+        </a:ln>
+        <a:effectLst/>
+      </c:spPr>
+    </c:plotArea>
+    <c:legend>
+      <c:legendPos val="b"/>
+      <c:overlay val="0"/>
+      <c:spPr>
+        <a:noFill/>
+        <a:ln>
+          <a:noFill/>
+        </a:ln>
+        <a:effectLst/>
+      </c:spPr>
+      <c:txPr>
+        <a:bodyPr rot="0" spcFirstLastPara="1" vertOverflow="ellipsis" vert="horz" wrap="square" anchor="ctr" anchorCtr="1"/>
+        <a:lstStyle/>
+        <a:p>
+          <a:pPr>
+            <a:defRPr sz="1197" b="0" i="0" u="none" strike="noStrike" kern="1200" baseline="0">
+              <a:solidFill>
+                <a:schemeClr val="tx1">
+                  <a:lumMod val="65000"/>
+                  <a:lumOff val="35000"/>
+                </a:schemeClr>
+              </a:solidFill>
+              <a:latin typeface="+mn-lt"/>
+              <a:ea typeface="+mn-ea"/>
+              <a:cs typeface="+mn-cs"/>
+            </a:defRPr>
+          </a:pPr>
+          <a:endParaRPr lang="it-IT"/>
+        </a:p>
+      </c:txPr>
+    </c:legend>
+    <c:plotVisOnly val="1"/>
+    <c:dispBlanksAs val="gap"/>
+    <c:showDLblsOverMax val="0"/>
+    <c:extLst>
+      <c:ext xmlns:c16r3="http://schemas.microsoft.com/office/drawing/2017/03/chart" uri="{56B9EC1D-385E-4148-901F-78D8002777C0}">
+        <c16r3:dataDisplayOptions16>
+          <c16r3:dispNaAsBlank val="1"/>
+        </c16r3:dataDisplayOptions16>
+      </c:ext>
+    </c:extLst>
+  </c:chart>
+  <c:spPr>
+    <a:noFill/>
+    <a:ln>
+      <a:noFill/>
+    </a:ln>
+    <a:effectLst/>
+  </c:spPr>
+  <c:txPr>
+    <a:bodyPr/>
+    <a:lstStyle/>
+    <a:p>
+      <a:pPr>
+        <a:defRPr/>
+      </a:pPr>
+      <a:endParaRPr lang="it-IT"/>
+    </a:p>
+  </c:txPr>
+  <c:externalData r:id="rId3">
+    <c:autoUpdate val="0"/>
+  </c:externalData>
+</c:chartSpace>
+</file>
+
+<file path=ppt/charts/chart8.xml><?xml version="1.0" encoding="utf-8"?>
+<c:chartSpace xmlns:c="http://schemas.openxmlformats.org/drawingml/2006/chart" xmlns:a="http://schemas.openxmlformats.org/drawingml/2006/main" xmlns:r="http://schemas.openxmlformats.org/officeDocument/2006/relationships" xmlns:c16r2="http://schemas.microsoft.com/office/drawing/2015/06/chart">
+  <c:date1904 val="0"/>
+  <c:lang val="it-IT"/>
+  <c:roundedCorners val="0"/>
+  <mc:AlternateContent xmlns:mc="http://schemas.openxmlformats.org/markup-compatibility/2006">
+    <mc:Choice xmlns:c14="http://schemas.microsoft.com/office/drawing/2007/8/2/chart" Requires="c14">
+      <c14:style val="102"/>
+    </mc:Choice>
+    <mc:Fallback>
+      <c:style val="2"/>
+    </mc:Fallback>
+  </mc:AlternateContent>
+  <c:chart>
+    <c:autoTitleDeleted val="1"/>
+    <c:plotArea>
+      <c:layout/>
+      <c:barChart>
+        <c:barDir val="col"/>
+        <c:grouping val="clustered"/>
+        <c:varyColors val="0"/>
+        <c:ser>
+          <c:idx val="0"/>
+          <c:order val="0"/>
+          <c:tx>
+            <c:strRef>
+              <c:f>Foglio1!$B$1</c:f>
+              <c:strCache>
+                <c:ptCount val="1"/>
+                <c:pt idx="0">
+                  <c:v>512</c:v>
+                </c:pt>
+              </c:strCache>
+            </c:strRef>
+          </c:tx>
+          <c:spPr>
+            <a:solidFill>
+              <a:schemeClr val="accent1"/>
+            </a:solidFill>
+            <a:ln>
+              <a:noFill/>
+            </a:ln>
+            <a:effectLst/>
+          </c:spPr>
+          <c:invertIfNegative val="0"/>
+          <c:dLbls>
+            <c:spPr>
+              <a:noFill/>
+              <a:ln>
+                <a:noFill/>
+              </a:ln>
+              <a:effectLst/>
+            </c:spPr>
+            <c:txPr>
+              <a:bodyPr rot="0" spcFirstLastPara="1" vertOverflow="ellipsis" vert="horz" wrap="square" lIns="38100" tIns="19050" rIns="38100" bIns="19050" anchor="ctr" anchorCtr="1">
+                <a:spAutoFit/>
+              </a:bodyPr>
+              <a:lstStyle/>
+              <a:p>
+                <a:pPr>
+                  <a:defRPr sz="1197" b="0" i="0" u="none" strike="noStrike" kern="1200" baseline="0">
+                    <a:solidFill>
+                      <a:schemeClr val="tx1">
+                        <a:lumMod val="75000"/>
+                        <a:lumOff val="25000"/>
+                      </a:schemeClr>
+                    </a:solidFill>
+                    <a:latin typeface="+mn-lt"/>
+                    <a:ea typeface="+mn-ea"/>
+                    <a:cs typeface="+mn-cs"/>
+                  </a:defRPr>
+                </a:pPr>
+                <a:endParaRPr lang="it-IT"/>
+              </a:p>
+            </c:txPr>
+            <c:dLblPos val="outEnd"/>
+            <c:showLegendKey val="0"/>
+            <c:showVal val="1"/>
+            <c:showCatName val="0"/>
+            <c:showSerName val="0"/>
+            <c:showPercent val="0"/>
+            <c:showBubbleSize val="0"/>
+            <c:showLeaderLines val="0"/>
+            <c:extLst>
+              <c:ext xmlns:c15="http://schemas.microsoft.com/office/drawing/2012/chart" uri="{CE6537A1-D6FC-4f65-9D91-7224C49458BB}">
+                <c15:showLeaderLines val="1"/>
+                <c15:leaderLines>
+                  <c:spPr>
+                    <a:ln w="9525" cap="flat" cmpd="sng" algn="ctr">
+                      <a:solidFill>
+                        <a:schemeClr val="tx1">
+                          <a:lumMod val="35000"/>
+                          <a:lumOff val="65000"/>
+                        </a:schemeClr>
+                      </a:solidFill>
+                      <a:round/>
+                    </a:ln>
+                    <a:effectLst/>
+                  </c:spPr>
+                </c15:leaderLines>
+              </c:ext>
+            </c:extLst>
+          </c:dLbls>
+          <c:cat>
+            <c:strRef>
+              <c:f>Foglio1!$A$2:$A$6</c:f>
+              <c:strCache>
+                <c:ptCount val="5"/>
+                <c:pt idx="0">
+                  <c:v>6P MPI puro</c:v>
+                </c:pt>
+                <c:pt idx="1">
+                  <c:v>6P x 1T</c:v>
+                </c:pt>
+                <c:pt idx="2">
+                  <c:v>3P x 2T</c:v>
+                </c:pt>
+                <c:pt idx="3">
+                  <c:v>2P x 3T</c:v>
+                </c:pt>
+                <c:pt idx="4">
+                  <c:v>1P x 6T</c:v>
+                </c:pt>
+              </c:strCache>
+            </c:strRef>
+          </c:cat>
+          <c:val>
+            <c:numRef>
+              <c:f>Foglio1!$B$2:$B$6</c:f>
+              <c:numCache>
+                <c:formatCode>General</c:formatCode>
+                <c:ptCount val="5"/>
+                <c:pt idx="0">
+                  <c:v>30.383600000000001</c:v>
+                </c:pt>
+                <c:pt idx="1">
+                  <c:v>33.0548</c:v>
+                </c:pt>
+                <c:pt idx="2">
+                  <c:v>32.059199999999997</c:v>
+                </c:pt>
+                <c:pt idx="3">
+                  <c:v>84.501400000000004</c:v>
+                </c:pt>
+                <c:pt idx="4">
+                  <c:v>135.08580000000001</c:v>
+                </c:pt>
+              </c:numCache>
+            </c:numRef>
+          </c:val>
+          <c:extLst>
+            <c:ext xmlns:c16="http://schemas.microsoft.com/office/drawing/2014/chart" uri="{C3380CC4-5D6E-409C-BE32-E72D297353CC}">
+              <c16:uniqueId val="{00000000-7C5C-4F59-8F9D-B7EBE93834AE}"/>
+            </c:ext>
+          </c:extLst>
+        </c:ser>
+        <c:ser>
+          <c:idx val="1"/>
+          <c:order val="1"/>
+          <c:tx>
+            <c:strRef>
+              <c:f>Foglio1!$C$1</c:f>
+              <c:strCache>
+                <c:ptCount val="1"/>
+                <c:pt idx="0">
+                  <c:v>1024</c:v>
+                </c:pt>
+              </c:strCache>
+            </c:strRef>
+          </c:tx>
+          <c:spPr>
+            <a:solidFill>
+              <a:schemeClr val="accent2"/>
+            </a:solidFill>
+            <a:ln>
+              <a:noFill/>
+            </a:ln>
+            <a:effectLst/>
+          </c:spPr>
+          <c:invertIfNegative val="0"/>
+          <c:dLbls>
+            <c:spPr>
+              <a:noFill/>
+              <a:ln>
+                <a:noFill/>
+              </a:ln>
+              <a:effectLst/>
+            </c:spPr>
+            <c:txPr>
+              <a:bodyPr rot="0" spcFirstLastPara="1" vertOverflow="ellipsis" vert="horz" wrap="square" lIns="38100" tIns="19050" rIns="38100" bIns="19050" anchor="ctr" anchorCtr="1">
+                <a:spAutoFit/>
+              </a:bodyPr>
+              <a:lstStyle/>
+              <a:p>
+                <a:pPr>
+                  <a:defRPr sz="1197" b="0" i="0" u="none" strike="noStrike" kern="1200" baseline="0">
+                    <a:solidFill>
+                      <a:schemeClr val="tx1">
+                        <a:lumMod val="75000"/>
+                        <a:lumOff val="25000"/>
+                      </a:schemeClr>
+                    </a:solidFill>
+                    <a:latin typeface="+mn-lt"/>
+                    <a:ea typeface="+mn-ea"/>
+                    <a:cs typeface="+mn-cs"/>
+                  </a:defRPr>
+                </a:pPr>
+                <a:endParaRPr lang="it-IT"/>
+              </a:p>
+            </c:txPr>
+            <c:dLblPos val="outEnd"/>
+            <c:showLegendKey val="0"/>
+            <c:showVal val="1"/>
+            <c:showCatName val="0"/>
+            <c:showSerName val="0"/>
+            <c:showPercent val="0"/>
+            <c:showBubbleSize val="0"/>
+            <c:showLeaderLines val="0"/>
+            <c:extLst>
+              <c:ext xmlns:c15="http://schemas.microsoft.com/office/drawing/2012/chart" uri="{CE6537A1-D6FC-4f65-9D91-7224C49458BB}">
+                <c15:showLeaderLines val="1"/>
+                <c15:leaderLines>
+                  <c:spPr>
+                    <a:ln w="9525" cap="flat" cmpd="sng" algn="ctr">
+                      <a:solidFill>
+                        <a:schemeClr val="tx1">
+                          <a:lumMod val="35000"/>
+                          <a:lumOff val="65000"/>
+                        </a:schemeClr>
+                      </a:solidFill>
+                      <a:round/>
+                    </a:ln>
+                    <a:effectLst/>
+                  </c:spPr>
+                </c15:leaderLines>
+              </c:ext>
+            </c:extLst>
+          </c:dLbls>
+          <c:cat>
+            <c:strRef>
+              <c:f>Foglio1!$A$2:$A$6</c:f>
+              <c:strCache>
+                <c:ptCount val="5"/>
+                <c:pt idx="0">
+                  <c:v>6P MPI puro</c:v>
+                </c:pt>
+                <c:pt idx="1">
+                  <c:v>6P x 1T</c:v>
+                </c:pt>
+                <c:pt idx="2">
+                  <c:v>3P x 2T</c:v>
+                </c:pt>
+                <c:pt idx="3">
+                  <c:v>2P x 3T</c:v>
+                </c:pt>
+                <c:pt idx="4">
+                  <c:v>1P x 6T</c:v>
+                </c:pt>
+              </c:strCache>
+            </c:strRef>
+          </c:cat>
+          <c:val>
+            <c:numRef>
+              <c:f>Foglio1!$C$2:$C$6</c:f>
+              <c:numCache>
+                <c:formatCode>General</c:formatCode>
+                <c:ptCount val="5"/>
+                <c:pt idx="0">
+                  <c:v>1889.0450000000001</c:v>
+                </c:pt>
+                <c:pt idx="1">
+                  <c:v>1809.7681</c:v>
+                </c:pt>
+                <c:pt idx="2">
+                  <c:v>1826.2143000000001</c:v>
+                </c:pt>
+                <c:pt idx="3">
+                  <c:v>2052.5263</c:v>
+                </c:pt>
+                <c:pt idx="4">
+                  <c:v>2210.7053999999998</c:v>
+                </c:pt>
+              </c:numCache>
+            </c:numRef>
+          </c:val>
+          <c:extLst>
+            <c:ext xmlns:c16="http://schemas.microsoft.com/office/drawing/2014/chart" uri="{C3380CC4-5D6E-409C-BE32-E72D297353CC}">
+              <c16:uniqueId val="{00000001-7C5C-4F59-8F9D-B7EBE93834AE}"/>
+            </c:ext>
+          </c:extLst>
+        </c:ser>
+        <c:dLbls>
+          <c:dLblPos val="outEnd"/>
+          <c:showLegendKey val="0"/>
+          <c:showVal val="1"/>
+          <c:showCatName val="0"/>
+          <c:showSerName val="0"/>
+          <c:showPercent val="0"/>
+          <c:showBubbleSize val="0"/>
+        </c:dLbls>
+        <c:gapWidth val="219"/>
+        <c:overlap val="-27"/>
+        <c:axId val="819733263"/>
+        <c:axId val="881292863"/>
+      </c:barChart>
+      <c:catAx>
+        <c:axId val="819733263"/>
+        <c:scaling>
+          <c:orientation val="minMax"/>
+        </c:scaling>
+        <c:delete val="0"/>
+        <c:axPos val="b"/>
+        <c:numFmt formatCode="General" sourceLinked="1"/>
+        <c:majorTickMark val="none"/>
+        <c:minorTickMark val="none"/>
+        <c:tickLblPos val="nextTo"/>
+        <c:spPr>
+          <a:noFill/>
+          <a:ln w="9525" cap="flat" cmpd="sng" algn="ctr">
+            <a:solidFill>
+              <a:schemeClr val="tx1">
+                <a:lumMod val="15000"/>
+                <a:lumOff val="85000"/>
+              </a:schemeClr>
+            </a:solidFill>
+            <a:round/>
+          </a:ln>
+          <a:effectLst/>
+        </c:spPr>
+        <c:txPr>
+          <a:bodyPr rot="-60000000" spcFirstLastPara="1" vertOverflow="ellipsis" vert="horz" wrap="square" anchor="ctr" anchorCtr="1"/>
+          <a:lstStyle/>
+          <a:p>
+            <a:pPr>
+              <a:defRPr sz="1197" b="0" i="0" u="none" strike="noStrike" kern="1200" baseline="0">
+                <a:solidFill>
+                  <a:schemeClr val="tx1">
+                    <a:lumMod val="65000"/>
+                    <a:lumOff val="35000"/>
+                  </a:schemeClr>
+                </a:solidFill>
+                <a:latin typeface="+mn-lt"/>
+                <a:ea typeface="+mn-ea"/>
+                <a:cs typeface="+mn-cs"/>
+              </a:defRPr>
+            </a:pPr>
+            <a:endParaRPr lang="it-IT"/>
+          </a:p>
+        </c:txPr>
+        <c:crossAx val="881292863"/>
+        <c:crosses val="autoZero"/>
+        <c:auto val="1"/>
+        <c:lblAlgn val="ctr"/>
+        <c:lblOffset val="100"/>
+        <c:noMultiLvlLbl val="0"/>
+      </c:catAx>
+      <c:valAx>
+        <c:axId val="881292863"/>
+        <c:scaling>
+          <c:orientation val="minMax"/>
+        </c:scaling>
+        <c:delete val="0"/>
+        <c:axPos val="l"/>
+        <c:majorGridlines>
+          <c:spPr>
+            <a:ln w="9525" cap="flat" cmpd="sng" algn="ctr">
+              <a:solidFill>
+                <a:schemeClr val="tx1">
+                  <a:lumMod val="15000"/>
+                  <a:lumOff val="85000"/>
+                </a:schemeClr>
+              </a:solidFill>
+              <a:round/>
+            </a:ln>
+            <a:effectLst/>
+          </c:spPr>
+        </c:majorGridlines>
+        <c:numFmt formatCode="General" sourceLinked="1"/>
+        <c:majorTickMark val="none"/>
+        <c:minorTickMark val="none"/>
+        <c:tickLblPos val="nextTo"/>
+        <c:spPr>
+          <a:noFill/>
+          <a:ln>
+            <a:noFill/>
+          </a:ln>
+          <a:effectLst/>
+        </c:spPr>
+        <c:txPr>
+          <a:bodyPr rot="-60000000" spcFirstLastPara="1" vertOverflow="ellipsis" vert="horz" wrap="square" anchor="ctr" anchorCtr="1"/>
+          <a:lstStyle/>
+          <a:p>
+            <a:pPr>
+              <a:defRPr sz="1197" b="0" i="0" u="none" strike="noStrike" kern="1200" baseline="0">
+                <a:solidFill>
+                  <a:schemeClr val="tx1">
+                    <a:lumMod val="65000"/>
+                    <a:lumOff val="35000"/>
+                  </a:schemeClr>
+                </a:solidFill>
+                <a:latin typeface="+mn-lt"/>
+                <a:ea typeface="+mn-ea"/>
+                <a:cs typeface="+mn-cs"/>
+              </a:defRPr>
+            </a:pPr>
+            <a:endParaRPr lang="it-IT"/>
+          </a:p>
+        </c:txPr>
+        <c:crossAx val="819733263"/>
         <c:crosses val="autoZero"/>
         <c:crossBetween val="between"/>
       </c:valAx>
@@ -5241,6 +5726,46 @@
 </cs:colorStyle>
 </file>
 
+<file path=ppt/charts/colors8.xml><?xml version="1.0" encoding="utf-8"?>
+<cs:colorStyle xmlns:cs="http://schemas.microsoft.com/office/drawing/2012/chartStyle" xmlns:a="http://schemas.openxmlformats.org/drawingml/2006/main" meth="cycle" id="10">
+  <a:schemeClr val="accent1"/>
+  <a:schemeClr val="accent2"/>
+  <a:schemeClr val="accent3"/>
+  <a:schemeClr val="accent4"/>
+  <a:schemeClr val="accent5"/>
+  <a:schemeClr val="accent6"/>
+  <cs:variation/>
+  <cs:variation>
+    <a:lumMod val="60000"/>
+  </cs:variation>
+  <cs:variation>
+    <a:lumMod val="80000"/>
+    <a:lumOff val="20000"/>
+  </cs:variation>
+  <cs:variation>
+    <a:lumMod val="80000"/>
+  </cs:variation>
+  <cs:variation>
+    <a:lumMod val="60000"/>
+    <a:lumOff val="40000"/>
+  </cs:variation>
+  <cs:variation>
+    <a:lumMod val="50000"/>
+  </cs:variation>
+  <cs:variation>
+    <a:lumMod val="70000"/>
+    <a:lumOff val="30000"/>
+  </cs:variation>
+  <cs:variation>
+    <a:lumMod val="70000"/>
+  </cs:variation>
+  <cs:variation>
+    <a:lumMod val="50000"/>
+    <a:lumOff val="50000"/>
+  </cs:variation>
+</cs:colorStyle>
+</file>
+
 <file path=ppt/charts/style1.xml><?xml version="1.0" encoding="utf-8"?>
 <cs:chartStyle xmlns:cs="http://schemas.microsoft.com/office/drawing/2012/chartStyle" xmlns:a="http://schemas.openxmlformats.org/drawingml/2006/main" id="239">
   <cs:axisTitle>
@@ -8292,6 +8817,509 @@
 
 <file path=ppt/charts/style7.xml><?xml version="1.0" encoding="utf-8"?>
 <cs:chartStyle xmlns:cs="http://schemas.microsoft.com/office/drawing/2012/chartStyle" xmlns:a="http://schemas.openxmlformats.org/drawingml/2006/main" id="332">
+  <cs:axisTitle>
+    <cs:lnRef idx="0"/>
+    <cs:fillRef idx="0"/>
+    <cs:effectRef idx="0"/>
+    <cs:fontRef idx="minor">
+      <a:schemeClr val="tx1">
+        <a:lumMod val="65000"/>
+        <a:lumOff val="35000"/>
+      </a:schemeClr>
+    </cs:fontRef>
+    <cs:defRPr sz="1330" kern="1200"/>
+  </cs:axisTitle>
+  <cs:categoryAxis>
+    <cs:lnRef idx="0"/>
+    <cs:fillRef idx="0"/>
+    <cs:effectRef idx="0"/>
+    <cs:fontRef idx="minor">
+      <a:schemeClr val="tx1">
+        <a:lumMod val="65000"/>
+        <a:lumOff val="35000"/>
+      </a:schemeClr>
+    </cs:fontRef>
+    <cs:spPr>
+      <a:ln w="9525" cap="flat" cmpd="sng" algn="ctr">
+        <a:solidFill>
+          <a:schemeClr val="tx1">
+            <a:lumMod val="15000"/>
+            <a:lumOff val="85000"/>
+          </a:schemeClr>
+        </a:solidFill>
+        <a:round/>
+      </a:ln>
+    </cs:spPr>
+    <cs:defRPr sz="1197" kern="1200"/>
+  </cs:categoryAxis>
+  <cs:chartArea mods="allowNoFillOverride allowNoLineOverride">
+    <cs:lnRef idx="0"/>
+    <cs:fillRef idx="0"/>
+    <cs:effectRef idx="0"/>
+    <cs:fontRef idx="minor">
+      <a:schemeClr val="tx1"/>
+    </cs:fontRef>
+    <cs:spPr>
+      <a:solidFill>
+        <a:schemeClr val="bg1"/>
+      </a:solidFill>
+      <a:ln w="9525" cap="flat" cmpd="sng" algn="ctr">
+        <a:solidFill>
+          <a:schemeClr val="tx1">
+            <a:lumMod val="15000"/>
+            <a:lumOff val="85000"/>
+          </a:schemeClr>
+        </a:solidFill>
+        <a:round/>
+      </a:ln>
+    </cs:spPr>
+    <cs:defRPr sz="1330" kern="1200"/>
+  </cs:chartArea>
+  <cs:dataLabel>
+    <cs:lnRef idx="0"/>
+    <cs:fillRef idx="0"/>
+    <cs:effectRef idx="0"/>
+    <cs:fontRef idx="minor">
+      <a:schemeClr val="tx1">
+        <a:lumMod val="75000"/>
+        <a:lumOff val="25000"/>
+      </a:schemeClr>
+    </cs:fontRef>
+    <cs:defRPr sz="1197" kern="1200"/>
+  </cs:dataLabel>
+  <cs:dataLabelCallout>
+    <cs:lnRef idx="0"/>
+    <cs:fillRef idx="0"/>
+    <cs:effectRef idx="0"/>
+    <cs:fontRef idx="minor">
+      <a:schemeClr val="dk1">
+        <a:lumMod val="65000"/>
+        <a:lumOff val="35000"/>
+      </a:schemeClr>
+    </cs:fontRef>
+    <cs:spPr>
+      <a:solidFill>
+        <a:schemeClr val="lt1"/>
+      </a:solidFill>
+      <a:ln>
+        <a:solidFill>
+          <a:schemeClr val="dk1">
+            <a:lumMod val="25000"/>
+            <a:lumOff val="75000"/>
+          </a:schemeClr>
+        </a:solidFill>
+      </a:ln>
+    </cs:spPr>
+    <cs:defRPr sz="1197" kern="1200"/>
+    <cs:bodyPr rot="0" spcFirstLastPara="1" vertOverflow="clip" horzOverflow="clip" vert="horz" wrap="square" lIns="36576" tIns="18288" rIns="36576" bIns="18288" anchor="ctr" anchorCtr="1">
+      <a:spAutoFit/>
+    </cs:bodyPr>
+  </cs:dataLabelCallout>
+  <cs:dataPoint>
+    <cs:lnRef idx="0"/>
+    <cs:fillRef idx="1">
+      <cs:styleClr val="auto"/>
+    </cs:fillRef>
+    <cs:effectRef idx="0"/>
+    <cs:fontRef idx="minor">
+      <a:schemeClr val="tx1"/>
+    </cs:fontRef>
+  </cs:dataPoint>
+  <cs:dataPoint3D>
+    <cs:lnRef idx="0"/>
+    <cs:fillRef idx="1">
+      <cs:styleClr val="auto"/>
+    </cs:fillRef>
+    <cs:effectRef idx="0"/>
+    <cs:fontRef idx="minor">
+      <a:schemeClr val="tx1"/>
+    </cs:fontRef>
+  </cs:dataPoint3D>
+  <cs:dataPointLine>
+    <cs:lnRef idx="0">
+      <cs:styleClr val="auto"/>
+    </cs:lnRef>
+    <cs:fillRef idx="1"/>
+    <cs:effectRef idx="0"/>
+    <cs:fontRef idx="minor">
+      <a:schemeClr val="tx1"/>
+    </cs:fontRef>
+    <cs:spPr>
+      <a:ln w="28575" cap="rnd">
+        <a:solidFill>
+          <a:schemeClr val="phClr"/>
+        </a:solidFill>
+        <a:round/>
+      </a:ln>
+    </cs:spPr>
+  </cs:dataPointLine>
+  <cs:dataPointMarker>
+    <cs:lnRef idx="0">
+      <cs:styleClr val="auto"/>
+    </cs:lnRef>
+    <cs:fillRef idx="1">
+      <cs:styleClr val="auto"/>
+    </cs:fillRef>
+    <cs:effectRef idx="0"/>
+    <cs:fontRef idx="minor">
+      <a:schemeClr val="tx1"/>
+    </cs:fontRef>
+    <cs:spPr>
+      <a:ln w="9525">
+        <a:solidFill>
+          <a:schemeClr val="phClr"/>
+        </a:solidFill>
+      </a:ln>
+    </cs:spPr>
+  </cs:dataPointMarker>
+  <cs:dataPointMarkerLayout symbol="circle" size="5"/>
+  <cs:dataPointWireframe>
+    <cs:lnRef idx="0">
+      <cs:styleClr val="auto"/>
+    </cs:lnRef>
+    <cs:fillRef idx="1"/>
+    <cs:effectRef idx="0"/>
+    <cs:fontRef idx="minor">
+      <a:schemeClr val="tx1"/>
+    </cs:fontRef>
+    <cs:spPr>
+      <a:ln w="9525" cap="rnd">
+        <a:solidFill>
+          <a:schemeClr val="phClr"/>
+        </a:solidFill>
+        <a:round/>
+      </a:ln>
+    </cs:spPr>
+  </cs:dataPointWireframe>
+  <cs:dataTable>
+    <cs:lnRef idx="0"/>
+    <cs:fillRef idx="0"/>
+    <cs:effectRef idx="0"/>
+    <cs:fontRef idx="minor">
+      <a:schemeClr val="tx1">
+        <a:lumMod val="65000"/>
+        <a:lumOff val="35000"/>
+      </a:schemeClr>
+    </cs:fontRef>
+    <cs:spPr>
+      <a:noFill/>
+      <a:ln w="9525" cap="flat" cmpd="sng" algn="ctr">
+        <a:solidFill>
+          <a:schemeClr val="tx1">
+            <a:lumMod val="15000"/>
+            <a:lumOff val="85000"/>
+          </a:schemeClr>
+        </a:solidFill>
+        <a:round/>
+      </a:ln>
+    </cs:spPr>
+    <cs:defRPr sz="1197" kern="1200"/>
+  </cs:dataTable>
+  <cs:downBar>
+    <cs:lnRef idx="0"/>
+    <cs:fillRef idx="0"/>
+    <cs:effectRef idx="0"/>
+    <cs:fontRef idx="minor">
+      <a:schemeClr val="dk1"/>
+    </cs:fontRef>
+    <cs:spPr>
+      <a:solidFill>
+        <a:schemeClr val="dk1">
+          <a:lumMod val="65000"/>
+          <a:lumOff val="35000"/>
+        </a:schemeClr>
+      </a:solidFill>
+      <a:ln w="9525">
+        <a:solidFill>
+          <a:schemeClr val="tx1">
+            <a:lumMod val="65000"/>
+            <a:lumOff val="35000"/>
+          </a:schemeClr>
+        </a:solidFill>
+      </a:ln>
+    </cs:spPr>
+  </cs:downBar>
+  <cs:dropLine>
+    <cs:lnRef idx="0"/>
+    <cs:fillRef idx="0"/>
+    <cs:effectRef idx="0"/>
+    <cs:fontRef idx="minor">
+      <a:schemeClr val="tx1"/>
+    </cs:fontRef>
+    <cs:spPr>
+      <a:ln w="9525" cap="flat" cmpd="sng" algn="ctr">
+        <a:solidFill>
+          <a:schemeClr val="tx1">
+            <a:lumMod val="35000"/>
+            <a:lumOff val="65000"/>
+          </a:schemeClr>
+        </a:solidFill>
+        <a:round/>
+      </a:ln>
+    </cs:spPr>
+  </cs:dropLine>
+  <cs:errorBar>
+    <cs:lnRef idx="0"/>
+    <cs:fillRef idx="0"/>
+    <cs:effectRef idx="0"/>
+    <cs:fontRef idx="minor">
+      <a:schemeClr val="tx1"/>
+    </cs:fontRef>
+    <cs:spPr>
+      <a:ln w="9525" cap="flat" cmpd="sng" algn="ctr">
+        <a:solidFill>
+          <a:schemeClr val="tx1">
+            <a:lumMod val="65000"/>
+            <a:lumOff val="35000"/>
+          </a:schemeClr>
+        </a:solidFill>
+        <a:round/>
+      </a:ln>
+    </cs:spPr>
+  </cs:errorBar>
+  <cs:floor>
+    <cs:lnRef idx="0"/>
+    <cs:fillRef idx="0"/>
+    <cs:effectRef idx="0"/>
+    <cs:fontRef idx="minor">
+      <a:schemeClr val="tx1"/>
+    </cs:fontRef>
+    <cs:spPr>
+      <a:noFill/>
+      <a:ln>
+        <a:noFill/>
+      </a:ln>
+    </cs:spPr>
+  </cs:floor>
+  <cs:gridlineMajor>
+    <cs:lnRef idx="0"/>
+    <cs:fillRef idx="0"/>
+    <cs:effectRef idx="0"/>
+    <cs:fontRef idx="minor">
+      <a:schemeClr val="tx1"/>
+    </cs:fontRef>
+    <cs:spPr>
+      <a:ln w="9525" cap="flat" cmpd="sng" algn="ctr">
+        <a:solidFill>
+          <a:schemeClr val="tx1">
+            <a:lumMod val="15000"/>
+            <a:lumOff val="85000"/>
+          </a:schemeClr>
+        </a:solidFill>
+        <a:round/>
+      </a:ln>
+    </cs:spPr>
+  </cs:gridlineMajor>
+  <cs:gridlineMinor>
+    <cs:lnRef idx="0"/>
+    <cs:fillRef idx="0"/>
+    <cs:effectRef idx="0"/>
+    <cs:fontRef idx="minor">
+      <a:schemeClr val="tx1"/>
+    </cs:fontRef>
+    <cs:spPr>
+      <a:ln w="9525" cap="flat" cmpd="sng" algn="ctr">
+        <a:solidFill>
+          <a:schemeClr val="tx1">
+            <a:lumMod val="5000"/>
+            <a:lumOff val="95000"/>
+          </a:schemeClr>
+        </a:solidFill>
+        <a:round/>
+      </a:ln>
+    </cs:spPr>
+  </cs:gridlineMinor>
+  <cs:hiLoLine>
+    <cs:lnRef idx="0"/>
+    <cs:fillRef idx="0"/>
+    <cs:effectRef idx="0"/>
+    <cs:fontRef idx="minor">
+      <a:schemeClr val="tx1"/>
+    </cs:fontRef>
+    <cs:spPr>
+      <a:ln w="9525" cap="flat" cmpd="sng" algn="ctr">
+        <a:solidFill>
+          <a:schemeClr val="tx1">
+            <a:lumMod val="75000"/>
+            <a:lumOff val="25000"/>
+          </a:schemeClr>
+        </a:solidFill>
+        <a:round/>
+      </a:ln>
+    </cs:spPr>
+  </cs:hiLoLine>
+  <cs:leaderLine>
+    <cs:lnRef idx="0"/>
+    <cs:fillRef idx="0"/>
+    <cs:effectRef idx="0"/>
+    <cs:fontRef idx="minor">
+      <a:schemeClr val="tx1"/>
+    </cs:fontRef>
+    <cs:spPr>
+      <a:ln w="9525" cap="flat" cmpd="sng" algn="ctr">
+        <a:solidFill>
+          <a:schemeClr val="tx1">
+            <a:lumMod val="35000"/>
+            <a:lumOff val="65000"/>
+          </a:schemeClr>
+        </a:solidFill>
+        <a:round/>
+      </a:ln>
+    </cs:spPr>
+  </cs:leaderLine>
+  <cs:legend>
+    <cs:lnRef idx="0"/>
+    <cs:fillRef idx="0"/>
+    <cs:effectRef idx="0"/>
+    <cs:fontRef idx="minor">
+      <a:schemeClr val="tx1">
+        <a:lumMod val="65000"/>
+        <a:lumOff val="35000"/>
+      </a:schemeClr>
+    </cs:fontRef>
+    <cs:defRPr sz="1197" kern="1200"/>
+  </cs:legend>
+  <cs:plotArea mods="allowNoFillOverride allowNoLineOverride">
+    <cs:lnRef idx="0"/>
+    <cs:fillRef idx="0"/>
+    <cs:effectRef idx="0"/>
+    <cs:fontRef idx="minor">
+      <a:schemeClr val="tx1"/>
+    </cs:fontRef>
+  </cs:plotArea>
+  <cs:plotArea3D mods="allowNoFillOverride allowNoLineOverride">
+    <cs:lnRef idx="0"/>
+    <cs:fillRef idx="0"/>
+    <cs:effectRef idx="0"/>
+    <cs:fontRef idx="minor">
+      <a:schemeClr val="tx1"/>
+    </cs:fontRef>
+  </cs:plotArea3D>
+  <cs:seriesAxis>
+    <cs:lnRef idx="0"/>
+    <cs:fillRef idx="0"/>
+    <cs:effectRef idx="0"/>
+    <cs:fontRef idx="minor">
+      <a:schemeClr val="tx1">
+        <a:lumMod val="65000"/>
+        <a:lumOff val="35000"/>
+      </a:schemeClr>
+    </cs:fontRef>
+    <cs:defRPr sz="1197" kern="1200"/>
+  </cs:seriesAxis>
+  <cs:seriesLine>
+    <cs:lnRef idx="0"/>
+    <cs:fillRef idx="0"/>
+    <cs:effectRef idx="0"/>
+    <cs:fontRef idx="minor">
+      <a:schemeClr val="tx1"/>
+    </cs:fontRef>
+    <cs:spPr>
+      <a:ln w="9525" cap="flat" cmpd="sng" algn="ctr">
+        <a:solidFill>
+          <a:schemeClr val="tx1">
+            <a:lumMod val="35000"/>
+            <a:lumOff val="65000"/>
+          </a:schemeClr>
+        </a:solidFill>
+        <a:round/>
+      </a:ln>
+    </cs:spPr>
+  </cs:seriesLine>
+  <cs:title>
+    <cs:lnRef idx="0"/>
+    <cs:fillRef idx="0"/>
+    <cs:effectRef idx="0"/>
+    <cs:fontRef idx="minor">
+      <a:schemeClr val="tx1">
+        <a:lumMod val="65000"/>
+        <a:lumOff val="35000"/>
+      </a:schemeClr>
+    </cs:fontRef>
+    <cs:defRPr sz="1862" b="0" kern="1200" spc="0" baseline="0"/>
+  </cs:title>
+  <cs:trendline>
+    <cs:lnRef idx="0">
+      <cs:styleClr val="auto"/>
+    </cs:lnRef>
+    <cs:fillRef idx="0"/>
+    <cs:effectRef idx="0"/>
+    <cs:fontRef idx="minor">
+      <a:schemeClr val="tx1"/>
+    </cs:fontRef>
+    <cs:spPr>
+      <a:ln w="19050" cap="rnd">
+        <a:solidFill>
+          <a:schemeClr val="phClr"/>
+        </a:solidFill>
+        <a:prstDash val="sysDot"/>
+      </a:ln>
+    </cs:spPr>
+  </cs:trendline>
+  <cs:trendlineLabel>
+    <cs:lnRef idx="0"/>
+    <cs:fillRef idx="0"/>
+    <cs:effectRef idx="0"/>
+    <cs:fontRef idx="minor">
+      <a:schemeClr val="tx1">
+        <a:lumMod val="65000"/>
+        <a:lumOff val="35000"/>
+      </a:schemeClr>
+    </cs:fontRef>
+    <cs:defRPr sz="1197" kern="1200"/>
+  </cs:trendlineLabel>
+  <cs:upBar>
+    <cs:lnRef idx="0"/>
+    <cs:fillRef idx="0"/>
+    <cs:effectRef idx="0"/>
+    <cs:fontRef idx="minor">
+      <a:schemeClr val="dk1"/>
+    </cs:fontRef>
+    <cs:spPr>
+      <a:solidFill>
+        <a:schemeClr val="lt1"/>
+      </a:solidFill>
+      <a:ln w="9525">
+        <a:solidFill>
+          <a:schemeClr val="tx1">
+            <a:lumMod val="15000"/>
+            <a:lumOff val="85000"/>
+          </a:schemeClr>
+        </a:solidFill>
+      </a:ln>
+    </cs:spPr>
+  </cs:upBar>
+  <cs:valueAxis>
+    <cs:lnRef idx="0"/>
+    <cs:fillRef idx="0"/>
+    <cs:effectRef idx="0"/>
+    <cs:fontRef idx="minor">
+      <a:schemeClr val="tx1">
+        <a:lumMod val="65000"/>
+        <a:lumOff val="35000"/>
+      </a:schemeClr>
+    </cs:fontRef>
+    <cs:defRPr sz="1197" kern="1200"/>
+  </cs:valueAxis>
+  <cs:wall>
+    <cs:lnRef idx="0"/>
+    <cs:fillRef idx="0"/>
+    <cs:effectRef idx="0"/>
+    <cs:fontRef idx="minor">
+      <a:schemeClr val="tx1"/>
+    </cs:fontRef>
+    <cs:spPr>
+      <a:noFill/>
+      <a:ln>
+        <a:noFill/>
+      </a:ln>
+    </cs:spPr>
+  </cs:wall>
+</cs:chartStyle>
+</file>
+
+<file path=ppt/charts/style8.xml><?xml version="1.0" encoding="utf-8"?>
+<cs:chartStyle xmlns:cs="http://schemas.microsoft.com/office/drawing/2012/chartStyle" xmlns:a="http://schemas.openxmlformats.org/drawingml/2006/main" id="201">
   <cs:axisTitle>
     <cs:lnRef idx="0"/>
     <cs:fillRef idx="0"/>
@@ -15305,8 +16333,8 @@
           </a:p>
         </p:txBody>
       </p:sp>
-      <mc:AlternateContent xmlns:mc="http://schemas.openxmlformats.org/markup-compatibility/2006">
-        <mc:Choice xmlns:a14="http://schemas.microsoft.com/office/drawing/2010/main" Requires="a14">
+      <mc:AlternateContent xmlns:mc="http://schemas.openxmlformats.org/markup-compatibility/2006" xmlns:a14="http://schemas.microsoft.com/office/drawing/2010/main">
+        <mc:Choice Requires="a14">
           <p:sp>
             <p:nvSpPr>
               <p:cNvPr id="8" name="Segnaposto contenuto 7">
@@ -15603,7 +16631,7 @@
             </p:txBody>
           </p:sp>
         </mc:Choice>
-        <mc:Fallback>
+        <mc:Fallback xmlns="">
           <p:sp>
             <p:nvSpPr>
               <p:cNvPr id="8" name="Segnaposto contenuto 7">
@@ -16987,38 +18015,49 @@
         </p:nvSpPr>
         <p:spPr/>
         <p:txBody>
-          <a:bodyPr/>
+          <a:bodyPr>
+            <a:normAutofit/>
+          </a:bodyPr>
           <a:lstStyle/>
           <a:p>
-            <a:endParaRPr lang="it-IT"/>
+            <a:r>
+              <a:rPr lang="it-IT" dirty="0"/>
+              <a:t>Analisi – Paragone tra MPI e Ibrido</a:t>
+            </a:r>
           </a:p>
         </p:txBody>
       </p:sp>
-      <p:sp>
-        <p:nvSpPr>
-          <p:cNvPr id="3" name="Segnaposto contenuto 2">
+      <p:graphicFrame>
+        <p:nvGraphicFramePr>
+          <p:cNvPr id="6" name="Segnaposto contenuto 5">
             <a:extLst>
               <a:ext uri="{FF2B5EF4-FFF2-40B4-BE49-F238E27FC236}">
-                <a16:creationId xmlns:a16="http://schemas.microsoft.com/office/drawing/2014/main" id="{62CA8202-FD24-8AEB-A1D2-9FDDB335BB1A}"/>
+                <a16:creationId xmlns:a16="http://schemas.microsoft.com/office/drawing/2014/main" id="{587EA6D0-6DC4-0393-D19C-F0E25D15A47F}"/>
               </a:ext>
             </a:extLst>
           </p:cNvPr>
-          <p:cNvSpPr>
-            <a:spLocks noGrp="1"/>
-          </p:cNvSpPr>
+          <p:cNvGraphicFramePr>
+            <a:graphicFrameLocks noGrp="1"/>
+          </p:cNvGraphicFramePr>
           <p:nvPr>
             <p:ph idx="1"/>
+            <p:extLst>
+              <p:ext uri="{D42A27DB-BD31-4B8C-83A1-F6EECF244321}">
+                <p14:modId xmlns:p14="http://schemas.microsoft.com/office/powerpoint/2010/main" val="3456988899"/>
+              </p:ext>
+            </p:extLst>
           </p:nvPr>
-        </p:nvSpPr>
-        <p:spPr/>
-        <p:txBody>
-          <a:bodyPr/>
-          <a:lstStyle/>
-          <a:p>
-            <a:endParaRPr lang="it-IT"/>
-          </a:p>
-        </p:txBody>
-      </p:sp>
+        </p:nvGraphicFramePr>
+        <p:xfrm>
+          <a:off x="639763" y="2633663"/>
+          <a:ext cx="10891837" cy="3565525"/>
+        </p:xfrm>
+        <a:graphic>
+          <a:graphicData uri="http://schemas.openxmlformats.org/drawingml/2006/chart">
+            <c:chart xmlns:c="http://schemas.openxmlformats.org/drawingml/2006/chart" xmlns:r="http://schemas.openxmlformats.org/officeDocument/2006/relationships" r:id="rId2"/>
+          </a:graphicData>
+        </a:graphic>
+      </p:graphicFrame>
     </p:spTree>
     <p:extLst>
       <p:ext uri="{BB962C8B-B14F-4D97-AF65-F5344CB8AC3E}">

--- a/Secondo Semestre/principi_prog_parallela/Codici/Progetto/Simulazione della Diffusione del Calore 2D.pptx
+++ b/Secondo Semestre/principi_prog_parallela/Codici/Progetto/Simulazione della Diffusione del Calore 2D.pptx
@@ -1684,7 +1684,7 @@
                   <c:v>2210.7053999999998</c:v>
                 </c:pt>
                 <c:pt idx="5">
-                  <c:v>1880</c:v>
+                  <c:v>1812.14552</c:v>
                 </c:pt>
               </c:numCache>
             </c:numRef>
@@ -2455,7 +2455,7 @@
                   <c:v>1.1399999999999999</c:v>
                 </c:pt>
                 <c:pt idx="5">
-                  <c:v>1.2</c:v>
+                  <c:v>1.4</c:v>
                 </c:pt>
               </c:numCache>
             </c:numRef>
@@ -3213,7 +3213,7 @@
                   <c:v>0.19</c:v>
                 </c:pt>
                 <c:pt idx="5">
-                  <c:v>0</c:v>
+                  <c:v>0.23</c:v>
                 </c:pt>
               </c:numCache>
             </c:numRef>
@@ -25008,7 +25008,7 @@
             <p:ph idx="1"/>
             <p:extLst>
               <p:ext uri="{D42A27DB-BD31-4B8C-83A1-F6EECF244321}">
-                <p14:modId xmlns:p14="http://schemas.microsoft.com/office/powerpoint/2010/main" val="1959028862"/>
+                <p14:modId xmlns:p14="http://schemas.microsoft.com/office/powerpoint/2010/main" val="2913061046"/>
               </p:ext>
             </p:extLst>
           </p:nvPr>
@@ -25106,7 +25106,7 @@
           <p:nvPr>
             <p:extLst>
               <p:ext uri="{D42A27DB-BD31-4B8C-83A1-F6EECF244321}">
-                <p14:modId xmlns:p14="http://schemas.microsoft.com/office/powerpoint/2010/main" val="1868933687"/>
+                <p14:modId xmlns:p14="http://schemas.microsoft.com/office/powerpoint/2010/main" val="1331085129"/>
               </p:ext>
             </p:extLst>
           </p:nvPr>
@@ -25134,7 +25134,7 @@
           <p:nvPr>
             <p:extLst>
               <p:ext uri="{D42A27DB-BD31-4B8C-83A1-F6EECF244321}">
-                <p14:modId xmlns:p14="http://schemas.microsoft.com/office/powerpoint/2010/main" val="1161537842"/>
+                <p14:modId xmlns:p14="http://schemas.microsoft.com/office/powerpoint/2010/main" val="2100703800"/>
               </p:ext>
             </p:extLst>
           </p:nvPr>

--- a/Secondo Semestre/principi_prog_parallela/Codici/Progetto/Simulazione della Diffusione del Calore 2D.pptx
+++ b/Secondo Semestre/principi_prog_parallela/Codici/Progetto/Simulazione della Diffusione del Calore 2D.pptx
@@ -25235,14 +25235,14 @@
             <p:ph idx="1"/>
             <p:extLst>
               <p:ext uri="{D42A27DB-BD31-4B8C-83A1-F6EECF244321}">
-                <p14:modId xmlns:p14="http://schemas.microsoft.com/office/powerpoint/2010/main" val="2344748112"/>
+                <p14:modId xmlns:p14="http://schemas.microsoft.com/office/powerpoint/2010/main" val="3919857779"/>
               </p:ext>
             </p:extLst>
           </p:nvPr>
         </p:nvGraphicFramePr>
         <p:xfrm>
-          <a:off x="812609" y="3831336"/>
-          <a:ext cx="10544045" cy="2743391"/>
+          <a:off x="1452689" y="3831336"/>
+          <a:ext cx="8676113" cy="2743391"/>
         </p:xfrm>
         <a:graphic>
           <a:graphicData uri="http://schemas.openxmlformats.org/drawingml/2006/table">
@@ -25274,13 +25274,6 @@
                   <a:extLst>
                     <a:ext uri="{9D8B030D-6E8A-4147-A177-3AD203B41FA5}">
                       <a16:colId xmlns:a16="http://schemas.microsoft.com/office/drawing/2014/main" val="2268862395"/>
-                    </a:ext>
-                  </a:extLst>
-                </a:gridCol>
-                <a:gridCol w="1867932">
-                  <a:extLst>
-                    <a:ext uri="{9D8B030D-6E8A-4147-A177-3AD203B41FA5}">
-                      <a16:colId xmlns:a16="http://schemas.microsoft.com/office/drawing/2014/main" val="2500154743"/>
                     </a:ext>
                   </a:extLst>
                 </a:gridCol>
@@ -25515,60 +25508,6 @@
                           <a:effectLst/>
                           <a:latin typeface="Aptos Narrow" panose="020B0004020202020204" pitchFamily="34" charset="0"/>
                         </a:rPr>
-                        <a:t>Cache Miss %</a:t>
-                      </a:r>
-                    </a:p>
-                  </a:txBody>
-                  <a:tcPr marL="9525" marR="9525" marT="9525" marB="0" anchor="b">
-                    <a:lnL>
-                      <a:noFill/>
-                    </a:lnL>
-                    <a:lnR w="6350" cap="flat" cmpd="sng" algn="ctr">
-                      <a:noFill/>
-                      <a:prstDash val="solid"/>
-                      <a:round/>
-                      <a:headEnd type="none" w="med" len="med"/>
-                      <a:tailEnd type="none" w="med" len="med"/>
-                    </a:lnR>
-                    <a:lnT w="6350" cap="flat" cmpd="sng" algn="ctr">
-                      <a:solidFill>
-                        <a:srgbClr val="156082"/>
-                      </a:solidFill>
-                      <a:prstDash val="solid"/>
-                      <a:round/>
-                      <a:headEnd type="none" w="med" len="med"/>
-                      <a:tailEnd type="none" w="med" len="med"/>
-                    </a:lnT>
-                    <a:lnB w="6350" cap="flat" cmpd="sng" algn="ctr">
-                      <a:solidFill>
-                        <a:srgbClr val="156082"/>
-                      </a:solidFill>
-                      <a:prstDash val="solid"/>
-                      <a:round/>
-                      <a:headEnd type="none" w="med" len="med"/>
-                      <a:tailEnd type="none" w="med" len="med"/>
-                    </a:lnB>
-                    <a:solidFill>
-                      <a:srgbClr val="156082"/>
-                    </a:solidFill>
-                  </a:tcPr>
-                </a:tc>
-                <a:tc>
-                  <a:txBody>
-                    <a:bodyPr/>
-                    <a:lstStyle/>
-                    <a:p>
-                      <a:pPr algn="ctr" fontAlgn="b">
-                        <a:buNone/>
-                      </a:pPr>
-                      <a:r>
-                        <a:rPr lang="it-IT" sz="2400" b="1" i="0" u="none" strike="noStrike" dirty="0">
-                          <a:solidFill>
-                            <a:srgbClr val="FFFFFF"/>
-                          </a:solidFill>
-                          <a:effectLst/>
-                          <a:latin typeface="Aptos Narrow" panose="020B0004020202020204" pitchFamily="34" charset="0"/>
-                        </a:rPr>
                         <a:t>Iterazioni</a:t>
                       </a:r>
                     </a:p>
@@ -25577,8 +25516,10 @@
                     <a:lnL>
                       <a:noFill/>
                     </a:lnL>
-                    <a:lnR w="6350" cap="flat" cmpd="sng" algn="ctr">
-                      <a:noFill/>
+                    <a:lnR w="12700" cap="flat" cmpd="sng" algn="ctr">
+                      <a:solidFill>
+                        <a:schemeClr val="tx1"/>
+                      </a:solidFill>
                       <a:prstDash val="solid"/>
                       <a:round/>
                       <a:headEnd type="none" w="med" len="med"/>
@@ -25828,58 +25769,6 @@
                           <a:effectLst/>
                           <a:latin typeface="Aptos Narrow" panose="020B0004020202020204" pitchFamily="34" charset="0"/>
                         </a:rPr>
-                        <a:t>15,46 %</a:t>
-                      </a:r>
-                    </a:p>
-                  </a:txBody>
-                  <a:tcPr marL="9525" marR="9525" marT="9525" marB="0" anchor="b">
-                    <a:lnL>
-                      <a:noFill/>
-                    </a:lnL>
-                    <a:lnR w="6350" cap="flat" cmpd="sng" algn="ctr">
-                      <a:noFill/>
-                      <a:prstDash val="solid"/>
-                      <a:round/>
-                      <a:headEnd type="none" w="med" len="med"/>
-                      <a:tailEnd type="none" w="med" len="med"/>
-                    </a:lnR>
-                    <a:lnT w="6350" cap="flat" cmpd="sng" algn="ctr">
-                      <a:solidFill>
-                        <a:srgbClr val="156082"/>
-                      </a:solidFill>
-                      <a:prstDash val="solid"/>
-                      <a:round/>
-                      <a:headEnd type="none" w="med" len="med"/>
-                      <a:tailEnd type="none" w="med" len="med"/>
-                    </a:lnT>
-                    <a:lnB w="6350" cap="flat" cmpd="sng" algn="ctr">
-                      <a:solidFill>
-                        <a:srgbClr val="156082"/>
-                      </a:solidFill>
-                      <a:prstDash val="solid"/>
-                      <a:round/>
-                      <a:headEnd type="none" w="med" len="med"/>
-                      <a:tailEnd type="none" w="med" len="med"/>
-                    </a:lnB>
-                    <a:noFill/>
-                  </a:tcPr>
-                </a:tc>
-                <a:tc>
-                  <a:txBody>
-                    <a:bodyPr/>
-                    <a:lstStyle/>
-                    <a:p>
-                      <a:pPr algn="ctr" fontAlgn="b">
-                        <a:buNone/>
-                      </a:pPr>
-                      <a:r>
-                        <a:rPr lang="it-IT" sz="2400" b="0" i="0" u="none" strike="noStrike" dirty="0">
-                          <a:solidFill>
-                            <a:srgbClr val="000000"/>
-                          </a:solidFill>
-                          <a:effectLst/>
-                          <a:latin typeface="Aptos Narrow" panose="020B0004020202020204" pitchFamily="34" charset="0"/>
-                        </a:rPr>
                         <a:t>8334</a:t>
                       </a:r>
                     </a:p>
@@ -25888,8 +25777,10 @@
                     <a:lnL>
                       <a:noFill/>
                     </a:lnL>
-                    <a:lnR w="6350" cap="flat" cmpd="sng" algn="ctr">
-                      <a:noFill/>
+                    <a:lnR w="12700" cap="flat" cmpd="sng" algn="ctr">
+                      <a:solidFill>
+                        <a:schemeClr val="tx1"/>
+                      </a:solidFill>
                       <a:prstDash val="solid"/>
                       <a:round/>
                       <a:headEnd type="none" w="med" len="med"/>
@@ -26137,58 +26028,6 @@
                           <a:effectLst/>
                           <a:latin typeface="Aptos Narrow" panose="020B0004020202020204" pitchFamily="34" charset="0"/>
                         </a:rPr>
-                        <a:t>10,65 %</a:t>
-                      </a:r>
-                    </a:p>
-                  </a:txBody>
-                  <a:tcPr marL="9525" marR="9525" marT="9525" marB="0" anchor="b">
-                    <a:lnL>
-                      <a:noFill/>
-                    </a:lnL>
-                    <a:lnR w="6350" cap="flat" cmpd="sng" algn="ctr">
-                      <a:noFill/>
-                      <a:prstDash val="solid"/>
-                      <a:round/>
-                      <a:headEnd type="none" w="med" len="med"/>
-                      <a:tailEnd type="none" w="med" len="med"/>
-                    </a:lnR>
-                    <a:lnT w="6350" cap="flat" cmpd="sng" algn="ctr">
-                      <a:solidFill>
-                        <a:srgbClr val="156082"/>
-                      </a:solidFill>
-                      <a:prstDash val="solid"/>
-                      <a:round/>
-                      <a:headEnd type="none" w="med" len="med"/>
-                      <a:tailEnd type="none" w="med" len="med"/>
-                    </a:lnT>
-                    <a:lnB w="6350" cap="flat" cmpd="sng" algn="ctr">
-                      <a:solidFill>
-                        <a:srgbClr val="156082"/>
-                      </a:solidFill>
-                      <a:prstDash val="solid"/>
-                      <a:round/>
-                      <a:headEnd type="none" w="med" len="med"/>
-                      <a:tailEnd type="none" w="med" len="med"/>
-                    </a:lnB>
-                    <a:noFill/>
-                  </a:tcPr>
-                </a:tc>
-                <a:tc>
-                  <a:txBody>
-                    <a:bodyPr/>
-                    <a:lstStyle/>
-                    <a:p>
-                      <a:pPr algn="ctr" fontAlgn="b">
-                        <a:buNone/>
-                      </a:pPr>
-                      <a:r>
-                        <a:rPr lang="it-IT" sz="2400" b="0" i="0" u="none" strike="noStrike" dirty="0">
-                          <a:solidFill>
-                            <a:srgbClr val="000000"/>
-                          </a:solidFill>
-                          <a:effectLst/>
-                          <a:latin typeface="Aptos Narrow" panose="020B0004020202020204" pitchFamily="34" charset="0"/>
-                        </a:rPr>
                         <a:t>31585</a:t>
                       </a:r>
                     </a:p>
@@ -26197,8 +26036,10 @@
                     <a:lnL>
                       <a:noFill/>
                     </a:lnL>
-                    <a:lnR w="6350" cap="flat" cmpd="sng" algn="ctr">
-                      <a:noFill/>
+                    <a:lnR w="12700" cap="flat" cmpd="sng" algn="ctr">
+                      <a:solidFill>
+                        <a:schemeClr val="tx1"/>
+                      </a:solidFill>
                       <a:prstDash val="solid"/>
                       <a:round/>
                       <a:headEnd type="none" w="med" len="med"/>
@@ -26447,58 +26288,6 @@
                           <a:effectLst/>
                           <a:latin typeface="Aptos Narrow" panose="020B0004020202020204" pitchFamily="34" charset="0"/>
                         </a:rPr>
-                        <a:t>6,14 %</a:t>
-                      </a:r>
-                    </a:p>
-                  </a:txBody>
-                  <a:tcPr marL="9525" marR="9525" marT="9525" marB="0" anchor="b">
-                    <a:lnL>
-                      <a:noFill/>
-                    </a:lnL>
-                    <a:lnR w="6350" cap="flat" cmpd="sng" algn="ctr">
-                      <a:noFill/>
-                      <a:prstDash val="solid"/>
-                      <a:round/>
-                      <a:headEnd type="none" w="med" len="med"/>
-                      <a:tailEnd type="none" w="med" len="med"/>
-                    </a:lnR>
-                    <a:lnT w="6350" cap="flat" cmpd="sng" algn="ctr">
-                      <a:solidFill>
-                        <a:srgbClr val="156082"/>
-                      </a:solidFill>
-                      <a:prstDash val="solid"/>
-                      <a:round/>
-                      <a:headEnd type="none" w="med" len="med"/>
-                      <a:tailEnd type="none" w="med" len="med"/>
-                    </a:lnT>
-                    <a:lnB w="6350" cap="flat" cmpd="sng" algn="ctr">
-                      <a:solidFill>
-                        <a:srgbClr val="156082"/>
-                      </a:solidFill>
-                      <a:prstDash val="solid"/>
-                      <a:round/>
-                      <a:headEnd type="none" w="med" len="med"/>
-                      <a:tailEnd type="none" w="med" len="med"/>
-                    </a:lnB>
-                    <a:noFill/>
-                  </a:tcPr>
-                </a:tc>
-                <a:tc>
-                  <a:txBody>
-                    <a:bodyPr/>
-                    <a:lstStyle/>
-                    <a:p>
-                      <a:pPr algn="ctr" fontAlgn="b">
-                        <a:buNone/>
-                      </a:pPr>
-                      <a:r>
-                        <a:rPr lang="it-IT" sz="2400" b="0" i="0" u="none" strike="noStrike" dirty="0">
-                          <a:solidFill>
-                            <a:srgbClr val="000000"/>
-                          </a:solidFill>
-                          <a:effectLst/>
-                          <a:latin typeface="Aptos Narrow" panose="020B0004020202020204" pitchFamily="34" charset="0"/>
-                        </a:rPr>
                         <a:t>118160</a:t>
                       </a:r>
                     </a:p>
@@ -26507,8 +26296,10 @@
                     <a:lnL>
                       <a:noFill/>
                     </a:lnL>
-                    <a:lnR w="6350" cap="flat" cmpd="sng" algn="ctr">
-                      <a:noFill/>
+                    <a:lnR w="12700" cap="flat" cmpd="sng" algn="ctr">
+                      <a:solidFill>
+                        <a:schemeClr val="tx1"/>
+                      </a:solidFill>
                       <a:prstDash val="solid"/>
                       <a:round/>
                       <a:headEnd type="none" w="med" len="med"/>
@@ -26756,58 +26547,6 @@
                           <a:effectLst/>
                           <a:latin typeface="Aptos Narrow" panose="020B0004020202020204" pitchFamily="34" charset="0"/>
                         </a:rPr>
-                        <a:t>6,16 %</a:t>
-                      </a:r>
-                    </a:p>
-                  </a:txBody>
-                  <a:tcPr marL="9525" marR="9525" marT="9525" marB="0" anchor="b">
-                    <a:lnL>
-                      <a:noFill/>
-                    </a:lnL>
-                    <a:lnR w="6350" cap="flat" cmpd="sng" algn="ctr">
-                      <a:noFill/>
-                      <a:prstDash val="solid"/>
-                      <a:round/>
-                      <a:headEnd type="none" w="med" len="med"/>
-                      <a:tailEnd type="none" w="med" len="med"/>
-                    </a:lnR>
-                    <a:lnT w="6350" cap="flat" cmpd="sng" algn="ctr">
-                      <a:solidFill>
-                        <a:srgbClr val="156082"/>
-                      </a:solidFill>
-                      <a:prstDash val="solid"/>
-                      <a:round/>
-                      <a:headEnd type="none" w="med" len="med"/>
-                      <a:tailEnd type="none" w="med" len="med"/>
-                    </a:lnT>
-                    <a:lnB w="6350" cap="flat" cmpd="sng" algn="ctr">
-                      <a:solidFill>
-                        <a:srgbClr val="156082"/>
-                      </a:solidFill>
-                      <a:prstDash val="solid"/>
-                      <a:round/>
-                      <a:headEnd type="none" w="med" len="med"/>
-                      <a:tailEnd type="none" w="med" len="med"/>
-                    </a:lnB>
-                    <a:noFill/>
-                  </a:tcPr>
-                </a:tc>
-                <a:tc>
-                  <a:txBody>
-                    <a:bodyPr/>
-                    <a:lstStyle/>
-                    <a:p>
-                      <a:pPr algn="ctr" fontAlgn="b">
-                        <a:buNone/>
-                      </a:pPr>
-                      <a:r>
-                        <a:rPr lang="it-IT" sz="2400" b="0" i="0" u="none" strike="noStrike">
-                          <a:solidFill>
-                            <a:srgbClr val="000000"/>
-                          </a:solidFill>
-                          <a:effectLst/>
-                          <a:latin typeface="Aptos Narrow" panose="020B0004020202020204" pitchFamily="34" charset="0"/>
-                        </a:rPr>
                         <a:t>437720</a:t>
                       </a:r>
                     </a:p>
@@ -26816,8 +26555,10 @@
                     <a:lnL>
                       <a:noFill/>
                     </a:lnL>
-                    <a:lnR w="6350" cap="flat" cmpd="sng" algn="ctr">
-                      <a:noFill/>
+                    <a:lnR w="12700" cap="flat" cmpd="sng" algn="ctr">
+                      <a:solidFill>
+                        <a:schemeClr val="tx1"/>
+                      </a:solidFill>
                       <a:prstDash val="solid"/>
                       <a:round/>
                       <a:headEnd type="none" w="med" len="med"/>
@@ -27066,58 +26807,6 @@
                           <a:effectLst/>
                           <a:latin typeface="Aptos Narrow" panose="020B0004020202020204" pitchFamily="34" charset="0"/>
                         </a:rPr>
-                        <a:t>4,13 %</a:t>
-                      </a:r>
-                    </a:p>
-                  </a:txBody>
-                  <a:tcPr marL="9525" marR="9525" marT="9525" marB="0" anchor="b">
-                    <a:lnL>
-                      <a:noFill/>
-                    </a:lnL>
-                    <a:lnR w="6350" cap="flat" cmpd="sng" algn="ctr">
-                      <a:noFill/>
-                      <a:prstDash val="solid"/>
-                      <a:round/>
-                      <a:headEnd type="none" w="med" len="med"/>
-                      <a:tailEnd type="none" w="med" len="med"/>
-                    </a:lnR>
-                    <a:lnT w="6350" cap="flat" cmpd="sng" algn="ctr">
-                      <a:solidFill>
-                        <a:srgbClr val="156082"/>
-                      </a:solidFill>
-                      <a:prstDash val="solid"/>
-                      <a:round/>
-                      <a:headEnd type="none" w="med" len="med"/>
-                      <a:tailEnd type="none" w="med" len="med"/>
-                    </a:lnT>
-                    <a:lnB w="6350" cap="flat" cmpd="sng" algn="ctr">
-                      <a:solidFill>
-                        <a:srgbClr val="156082"/>
-                      </a:solidFill>
-                      <a:prstDash val="solid"/>
-                      <a:round/>
-                      <a:headEnd type="none" w="med" len="med"/>
-                      <a:tailEnd type="none" w="med" len="med"/>
-                    </a:lnB>
-                    <a:noFill/>
-                  </a:tcPr>
-                </a:tc>
-                <a:tc>
-                  <a:txBody>
-                    <a:bodyPr/>
-                    <a:lstStyle/>
-                    <a:p>
-                      <a:pPr algn="ctr" fontAlgn="b">
-                        <a:buNone/>
-                      </a:pPr>
-                      <a:r>
-                        <a:rPr lang="it-IT" sz="2400" b="0" i="0" u="none" strike="noStrike" dirty="0">
-                          <a:solidFill>
-                            <a:srgbClr val="000000"/>
-                          </a:solidFill>
-                          <a:effectLst/>
-                          <a:latin typeface="Aptos Narrow" panose="020B0004020202020204" pitchFamily="34" charset="0"/>
-                        </a:rPr>
                         <a:t>1607108</a:t>
                       </a:r>
                     </a:p>
@@ -27126,8 +26815,10 @@
                     <a:lnL>
                       <a:noFill/>
                     </a:lnL>
-                    <a:lnR w="6350" cap="flat" cmpd="sng" algn="ctr">
-                      <a:noFill/>
+                    <a:lnR w="12700" cap="flat" cmpd="sng" algn="ctr">
+                      <a:solidFill>
+                        <a:schemeClr val="tx1"/>
+                      </a:solidFill>
                       <a:prstDash val="solid"/>
                       <a:round/>
                       <a:headEnd type="none" w="med" len="med"/>
@@ -27420,7 +27111,7 @@
             </a:r>
             <a:r>
               <a:rPr lang="it-IT" dirty="0"/>
-              <a:t> a causa del superamento degli 8MB di Cache L3. Con oltre </a:t>
+              <a:t> a causa del superamento degli 8MB di Cache L3 con oltre </a:t>
             </a:r>
             <a:r>
               <a:rPr lang="it-IT" b="1" dirty="0"/>
@@ -27428,7 +27119,7 @@
             </a:r>
             <a:r>
               <a:rPr lang="it-IT" dirty="0"/>
-              <a:t>, la CPU passa il 70% del tempo ferma ad aspettare i dati.</a:t>
+              <a:t>.</a:t>
             </a:r>
           </a:p>
           <a:p>
